--- a/docs/pptx/carbo/jx-carbo-linsubhr-ratio-hosp1.pptx
+++ b/docs/pptx/carbo/jx-carbo-linsubhr-ratio-hosp1.pptx
@@ -2271,7 +2271,7 @@
           </p:nvSpPr>
           <p:spPr>
             <a:xfrm>
-              <a:off x="817517" y="5114368"/>
+              <a:off x="817517" y="5142518"/>
               <a:ext cx="7799693" cy="0"/>
             </a:xfrm>
             <a:custGeom>
@@ -2314,7 +2314,7 @@
           </p:nvSpPr>
           <p:spPr>
             <a:xfrm>
-              <a:off x="817517" y="4244691"/>
+              <a:off x="817517" y="4313054"/>
               <a:ext cx="7799693" cy="0"/>
             </a:xfrm>
             <a:custGeom>
@@ -2357,7 +2357,7 @@
           </p:nvSpPr>
           <p:spPr>
             <a:xfrm>
-              <a:off x="817517" y="3375014"/>
+              <a:off x="817517" y="3483591"/>
               <a:ext cx="7799693" cy="0"/>
             </a:xfrm>
             <a:custGeom>
@@ -2400,7 +2400,7 @@
           </p:nvSpPr>
           <p:spPr>
             <a:xfrm>
-              <a:off x="817517" y="2505337"/>
+              <a:off x="817517" y="2654127"/>
               <a:ext cx="7799693" cy="0"/>
             </a:xfrm>
             <a:custGeom>
@@ -2443,15 +2443,15 @@
           </p:nvSpPr>
           <p:spPr>
             <a:xfrm>
-              <a:off x="1615213" y="1896563"/>
-              <a:ext cx="0" cy="3826579"/>
+              <a:off x="1615213" y="2073503"/>
+              <a:ext cx="0" cy="3649639"/>
             </a:xfrm>
             <a:custGeom>
               <a:avLst/>
               <a:pathLst>
-                <a:path w="0" h="3826579">
+                <a:path w="0" h="3649639">
                   <a:moveTo>
-                    <a:pt x="0" y="3826579"/>
+                    <a:pt x="0" y="3649639"/>
                   </a:moveTo>
                   <a:lnTo>
                     <a:pt x="0" y="0"/>
@@ -2486,15 +2486,15 @@
           </p:nvSpPr>
           <p:spPr>
             <a:xfrm>
-              <a:off x="3387871" y="1896563"/>
-              <a:ext cx="0" cy="3826579"/>
+              <a:off x="3387871" y="2073503"/>
+              <a:ext cx="0" cy="3649639"/>
             </a:xfrm>
             <a:custGeom>
               <a:avLst/>
               <a:pathLst>
-                <a:path w="0" h="3826579">
+                <a:path w="0" h="3649639">
                   <a:moveTo>
-                    <a:pt x="0" y="3826579"/>
+                    <a:pt x="0" y="3649639"/>
                   </a:moveTo>
                   <a:lnTo>
                     <a:pt x="0" y="0"/>
@@ -2529,15 +2529,15 @@
           </p:nvSpPr>
           <p:spPr>
             <a:xfrm>
-              <a:off x="5160528" y="1896563"/>
-              <a:ext cx="0" cy="3826579"/>
+              <a:off x="5160528" y="2073503"/>
+              <a:ext cx="0" cy="3649639"/>
             </a:xfrm>
             <a:custGeom>
               <a:avLst/>
               <a:pathLst>
-                <a:path w="0" h="3826579">
+                <a:path w="0" h="3649639">
                   <a:moveTo>
-                    <a:pt x="0" y="3826579"/>
+                    <a:pt x="0" y="3649639"/>
                   </a:moveTo>
                   <a:lnTo>
                     <a:pt x="0" y="0"/>
@@ -2572,15 +2572,15 @@
           </p:nvSpPr>
           <p:spPr>
             <a:xfrm>
-              <a:off x="6933186" y="1896563"/>
-              <a:ext cx="0" cy="3826579"/>
+              <a:off x="6933186" y="2073503"/>
+              <a:ext cx="0" cy="3649639"/>
             </a:xfrm>
             <a:custGeom>
               <a:avLst/>
               <a:pathLst>
-                <a:path w="0" h="3826579">
+                <a:path w="0" h="3649639">
                   <a:moveTo>
-                    <a:pt x="0" y="3826579"/>
+                    <a:pt x="0" y="3649639"/>
                   </a:moveTo>
                   <a:lnTo>
                     <a:pt x="0" y="0"/>
@@ -2615,7 +2615,7 @@
           </p:nvSpPr>
           <p:spPr>
             <a:xfrm>
-              <a:off x="817517" y="5549207"/>
+              <a:off x="817517" y="5557249"/>
               <a:ext cx="7799693" cy="0"/>
             </a:xfrm>
             <a:custGeom>
@@ -2658,7 +2658,7 @@
           </p:nvSpPr>
           <p:spPr>
             <a:xfrm>
-              <a:off x="817517" y="4679530"/>
+              <a:off x="817517" y="4727786"/>
               <a:ext cx="7799693" cy="0"/>
             </a:xfrm>
             <a:custGeom>
@@ -2701,7 +2701,7 @@
           </p:nvSpPr>
           <p:spPr>
             <a:xfrm>
-              <a:off x="817517" y="3809853"/>
+              <a:off x="817517" y="3898322"/>
               <a:ext cx="7799693" cy="0"/>
             </a:xfrm>
             <a:custGeom>
@@ -2744,7 +2744,7 @@
           </p:nvSpPr>
           <p:spPr>
             <a:xfrm>
-              <a:off x="817517" y="2940175"/>
+              <a:off x="817517" y="3068859"/>
               <a:ext cx="7799693" cy="0"/>
             </a:xfrm>
             <a:custGeom>
@@ -2787,7 +2787,7 @@
           </p:nvSpPr>
           <p:spPr>
             <a:xfrm>
-              <a:off x="817517" y="2070498"/>
+              <a:off x="817517" y="2239395"/>
               <a:ext cx="7799693" cy="0"/>
             </a:xfrm>
             <a:custGeom>
@@ -2830,15 +2830,15 @@
           </p:nvSpPr>
           <p:spPr>
             <a:xfrm>
-              <a:off x="2501542" y="1896563"/>
-              <a:ext cx="0" cy="3826579"/>
+              <a:off x="2501542" y="2073503"/>
+              <a:ext cx="0" cy="3649639"/>
             </a:xfrm>
             <a:custGeom>
               <a:avLst/>
               <a:pathLst>
-                <a:path w="0" h="3826579">
+                <a:path w="0" h="3649639">
                   <a:moveTo>
-                    <a:pt x="0" y="3826579"/>
+                    <a:pt x="0" y="3649639"/>
                   </a:moveTo>
                   <a:lnTo>
                     <a:pt x="0" y="0"/>
@@ -2873,15 +2873,15 @@
           </p:nvSpPr>
           <p:spPr>
             <a:xfrm>
-              <a:off x="4274200" y="1896563"/>
-              <a:ext cx="0" cy="3826579"/>
+              <a:off x="4274200" y="2073503"/>
+              <a:ext cx="0" cy="3649639"/>
             </a:xfrm>
             <a:custGeom>
               <a:avLst/>
               <a:pathLst>
-                <a:path w="0" h="3826579">
+                <a:path w="0" h="3649639">
                   <a:moveTo>
-                    <a:pt x="0" y="3826579"/>
+                    <a:pt x="0" y="3649639"/>
                   </a:moveTo>
                   <a:lnTo>
                     <a:pt x="0" y="0"/>
@@ -2916,15 +2916,15 @@
           </p:nvSpPr>
           <p:spPr>
             <a:xfrm>
-              <a:off x="6046857" y="1896563"/>
-              <a:ext cx="0" cy="3826579"/>
+              <a:off x="6046857" y="2073503"/>
+              <a:ext cx="0" cy="3649639"/>
             </a:xfrm>
             <a:custGeom>
               <a:avLst/>
               <a:pathLst>
-                <a:path w="0" h="3826579">
+                <a:path w="0" h="3649639">
                   <a:moveTo>
-                    <a:pt x="0" y="3826579"/>
+                    <a:pt x="0" y="3649639"/>
                   </a:moveTo>
                   <a:lnTo>
                     <a:pt x="0" y="0"/>
@@ -2959,15 +2959,15 @@
           </p:nvSpPr>
           <p:spPr>
             <a:xfrm>
-              <a:off x="7819515" y="1896563"/>
-              <a:ext cx="0" cy="3826579"/>
+              <a:off x="7819515" y="2073503"/>
+              <a:ext cx="0" cy="3649639"/>
             </a:xfrm>
             <a:custGeom>
               <a:avLst/>
               <a:pathLst>
-                <a:path w="0" h="3826579">
+                <a:path w="0" h="3649639">
                   <a:moveTo>
-                    <a:pt x="0" y="3826579"/>
+                    <a:pt x="0" y="3649639"/>
                   </a:moveTo>
                   <a:lnTo>
                     <a:pt x="0" y="0"/>
@@ -3002,531 +3002,531 @@
           </p:nvSpPr>
           <p:spPr>
             <a:xfrm>
-              <a:off x="817517" y="1896563"/>
-              <a:ext cx="7403783" cy="3626440"/>
+              <a:off x="817517" y="2073503"/>
+              <a:ext cx="7403783" cy="3458755"/>
             </a:xfrm>
             <a:custGeom>
               <a:avLst/>
               <a:pathLst>
-                <a:path w="7403783" h="3626440">
+                <a:path w="7403783" h="3458755">
                   <a:moveTo>
                     <a:pt x="1769554" y="0"/>
                   </a:moveTo>
                   <a:lnTo>
-                    <a:pt x="1809607" y="127944"/>
-                  </a:lnTo>
-                  <a:lnTo>
-                    <a:pt x="1886239" y="356844"/>
-                  </a:lnTo>
-                  <a:lnTo>
-                    <a:pt x="1962872" y="570878"/>
-                  </a:lnTo>
-                  <a:lnTo>
-                    <a:pt x="2039504" y="771013"/>
-                  </a:lnTo>
-                  <a:lnTo>
-                    <a:pt x="2116137" y="958150"/>
-                  </a:lnTo>
-                  <a:lnTo>
-                    <a:pt x="2192769" y="1133135"/>
-                  </a:lnTo>
-                  <a:lnTo>
-                    <a:pt x="2269402" y="1296756"/>
-                  </a:lnTo>
-                  <a:lnTo>
-                    <a:pt x="2346034" y="1449751"/>
-                  </a:lnTo>
-                  <a:lnTo>
-                    <a:pt x="2422667" y="1592810"/>
-                  </a:lnTo>
-                  <a:lnTo>
-                    <a:pt x="2499300" y="1726579"/>
-                  </a:lnTo>
-                  <a:lnTo>
-                    <a:pt x="2575932" y="1851661"/>
-                  </a:lnTo>
-                  <a:lnTo>
-                    <a:pt x="2652565" y="1968619"/>
-                  </a:lnTo>
-                  <a:lnTo>
-                    <a:pt x="2729197" y="2077982"/>
-                  </a:lnTo>
-                  <a:lnTo>
-                    <a:pt x="2805830" y="2180243"/>
-                  </a:lnTo>
-                  <a:lnTo>
-                    <a:pt x="2882462" y="2275863"/>
-                  </a:lnTo>
-                  <a:lnTo>
-                    <a:pt x="2959095" y="2365274"/>
-                  </a:lnTo>
-                  <a:lnTo>
-                    <a:pt x="3035727" y="2448877"/>
-                  </a:lnTo>
-                  <a:lnTo>
-                    <a:pt x="3112360" y="2527052"/>
-                  </a:lnTo>
-                  <a:lnTo>
-                    <a:pt x="3188993" y="2600149"/>
-                  </a:lnTo>
-                  <a:lnTo>
-                    <a:pt x="3265625" y="2668500"/>
-                  </a:lnTo>
-                  <a:lnTo>
-                    <a:pt x="3342258" y="2732412"/>
-                  </a:lnTo>
-                  <a:lnTo>
-                    <a:pt x="3418890" y="2784321"/>
-                  </a:lnTo>
-                  <a:lnTo>
-                    <a:pt x="3495523" y="2792819"/>
-                  </a:lnTo>
-                  <a:lnTo>
-                    <a:pt x="3572155" y="2801233"/>
-                  </a:lnTo>
-                  <a:lnTo>
-                    <a:pt x="3648788" y="2809565"/>
-                  </a:lnTo>
-                  <a:lnTo>
-                    <a:pt x="3725420" y="2817816"/>
-                  </a:lnTo>
-                  <a:lnTo>
-                    <a:pt x="3802053" y="2825986"/>
-                  </a:lnTo>
-                  <a:lnTo>
-                    <a:pt x="3878685" y="2834076"/>
-                  </a:lnTo>
-                  <a:lnTo>
-                    <a:pt x="3955318" y="2842087"/>
-                  </a:lnTo>
-                  <a:lnTo>
-                    <a:pt x="4031951" y="2850019"/>
-                  </a:lnTo>
-                  <a:lnTo>
-                    <a:pt x="4108583" y="2857874"/>
-                  </a:lnTo>
-                  <a:lnTo>
-                    <a:pt x="4185216" y="2865652"/>
-                  </a:lnTo>
-                  <a:lnTo>
-                    <a:pt x="4261848" y="2873354"/>
-                  </a:lnTo>
-                  <a:lnTo>
-                    <a:pt x="4338481" y="2880980"/>
-                  </a:lnTo>
-                  <a:lnTo>
-                    <a:pt x="4415113" y="2888532"/>
-                  </a:lnTo>
-                  <a:lnTo>
-                    <a:pt x="4491746" y="2896010"/>
-                  </a:lnTo>
-                  <a:lnTo>
-                    <a:pt x="4568378" y="2903415"/>
-                  </a:lnTo>
-                  <a:lnTo>
-                    <a:pt x="4645011" y="2910747"/>
-                  </a:lnTo>
-                  <a:lnTo>
-                    <a:pt x="4721644" y="2918008"/>
-                  </a:lnTo>
-                  <a:lnTo>
-                    <a:pt x="4798276" y="2925197"/>
-                  </a:lnTo>
-                  <a:lnTo>
-                    <a:pt x="4874909" y="2932316"/>
-                  </a:lnTo>
-                  <a:lnTo>
-                    <a:pt x="4951541" y="2939365"/>
-                  </a:lnTo>
-                  <a:lnTo>
-                    <a:pt x="5028174" y="2946346"/>
-                  </a:lnTo>
-                  <a:lnTo>
-                    <a:pt x="5104806" y="2953258"/>
-                  </a:lnTo>
-                  <a:lnTo>
-                    <a:pt x="5181439" y="2960102"/>
-                  </a:lnTo>
-                  <a:lnTo>
-                    <a:pt x="5258071" y="2966880"/>
-                  </a:lnTo>
-                  <a:lnTo>
-                    <a:pt x="5334704" y="2973591"/>
-                  </a:lnTo>
-                  <a:lnTo>
-                    <a:pt x="5411336" y="2980237"/>
-                  </a:lnTo>
-                  <a:lnTo>
-                    <a:pt x="5487969" y="2986817"/>
-                  </a:lnTo>
-                  <a:lnTo>
-                    <a:pt x="5564602" y="2993333"/>
-                  </a:lnTo>
-                  <a:lnTo>
-                    <a:pt x="5641234" y="2999785"/>
-                  </a:lnTo>
-                  <a:lnTo>
-                    <a:pt x="5717867" y="3006175"/>
-                  </a:lnTo>
-                  <a:lnTo>
-                    <a:pt x="5794499" y="3012501"/>
-                  </a:lnTo>
-                  <a:lnTo>
-                    <a:pt x="5871132" y="3018766"/>
-                  </a:lnTo>
-                  <a:lnTo>
-                    <a:pt x="5947764" y="3024969"/>
-                  </a:lnTo>
-                  <a:lnTo>
-                    <a:pt x="6024397" y="3031112"/>
-                  </a:lnTo>
-                  <a:lnTo>
-                    <a:pt x="6101029" y="3037194"/>
-                  </a:lnTo>
-                  <a:lnTo>
-                    <a:pt x="6177662" y="3043217"/>
-                  </a:lnTo>
-                  <a:lnTo>
-                    <a:pt x="6254294" y="3049182"/>
-                  </a:lnTo>
-                  <a:lnTo>
-                    <a:pt x="6330927" y="3055087"/>
-                  </a:lnTo>
-                  <a:lnTo>
-                    <a:pt x="6407560" y="3060935"/>
-                  </a:lnTo>
-                  <a:lnTo>
-                    <a:pt x="6484192" y="3066726"/>
-                  </a:lnTo>
-                  <a:lnTo>
-                    <a:pt x="6560825" y="3072460"/>
-                  </a:lnTo>
-                  <a:lnTo>
-                    <a:pt x="6637457" y="3078138"/>
-                  </a:lnTo>
-                  <a:lnTo>
-                    <a:pt x="6714090" y="3083760"/>
-                  </a:lnTo>
-                  <a:lnTo>
-                    <a:pt x="6790722" y="3089328"/>
-                  </a:lnTo>
-                  <a:lnTo>
-                    <a:pt x="6867355" y="3094840"/>
-                  </a:lnTo>
-                  <a:lnTo>
-                    <a:pt x="6943987" y="3100299"/>
-                  </a:lnTo>
-                  <a:lnTo>
-                    <a:pt x="7020620" y="3105705"/>
-                  </a:lnTo>
-                  <a:lnTo>
-                    <a:pt x="7097253" y="3111057"/>
-                  </a:lnTo>
-                  <a:lnTo>
-                    <a:pt x="7173885" y="3116357"/>
-                  </a:lnTo>
-                  <a:lnTo>
-                    <a:pt x="7250518" y="3121606"/>
-                  </a:lnTo>
-                  <a:lnTo>
-                    <a:pt x="7327150" y="3126803"/>
-                  </a:lnTo>
-                  <a:lnTo>
-                    <a:pt x="7403783" y="3131949"/>
-                  </a:lnTo>
-                  <a:lnTo>
-                    <a:pt x="7403783" y="3626440"/>
-                  </a:lnTo>
-                  <a:lnTo>
-                    <a:pt x="7327150" y="3624620"/>
-                  </a:lnTo>
-                  <a:lnTo>
-                    <a:pt x="7250518" y="3622674"/>
-                  </a:lnTo>
-                  <a:lnTo>
-                    <a:pt x="7173885" y="3620593"/>
-                  </a:lnTo>
-                  <a:lnTo>
-                    <a:pt x="7097253" y="3618367"/>
-                  </a:lnTo>
-                  <a:lnTo>
-                    <a:pt x="7020620" y="3615986"/>
-                  </a:lnTo>
-                  <a:lnTo>
-                    <a:pt x="6943987" y="3613440"/>
-                  </a:lnTo>
-                  <a:lnTo>
-                    <a:pt x="6867355" y="3610718"/>
-                  </a:lnTo>
-                  <a:lnTo>
-                    <a:pt x="6790722" y="3607806"/>
-                  </a:lnTo>
-                  <a:lnTo>
-                    <a:pt x="6714090" y="3604692"/>
-                  </a:lnTo>
-                  <a:lnTo>
-                    <a:pt x="6637457" y="3601361"/>
-                  </a:lnTo>
-                  <a:lnTo>
-                    <a:pt x="6560825" y="3597800"/>
-                  </a:lnTo>
-                  <a:lnTo>
-                    <a:pt x="6484192" y="3593991"/>
-                  </a:lnTo>
-                  <a:lnTo>
-                    <a:pt x="6407560" y="3589917"/>
-                  </a:lnTo>
-                  <a:lnTo>
-                    <a:pt x="6330927" y="3585561"/>
-                  </a:lnTo>
-                  <a:lnTo>
-                    <a:pt x="6254294" y="3580902"/>
-                  </a:lnTo>
-                  <a:lnTo>
-                    <a:pt x="6177662" y="3575919"/>
-                  </a:lnTo>
-                  <a:lnTo>
-                    <a:pt x="6101029" y="3570591"/>
-                  </a:lnTo>
-                  <a:lnTo>
-                    <a:pt x="6024397" y="3564892"/>
-                  </a:lnTo>
-                  <a:lnTo>
-                    <a:pt x="5947764" y="3558798"/>
-                  </a:lnTo>
-                  <a:lnTo>
-                    <a:pt x="5871132" y="3552280"/>
-                  </a:lnTo>
-                  <a:lnTo>
-                    <a:pt x="5794499" y="3545309"/>
-                  </a:lnTo>
-                  <a:lnTo>
-                    <a:pt x="5717867" y="3537855"/>
-                  </a:lnTo>
-                  <a:lnTo>
-                    <a:pt x="5641234" y="3529883"/>
-                  </a:lnTo>
-                  <a:lnTo>
-                    <a:pt x="5564602" y="3521357"/>
-                  </a:lnTo>
-                  <a:lnTo>
-                    <a:pt x="5487969" y="3512238"/>
-                  </a:lnTo>
-                  <a:lnTo>
-                    <a:pt x="5411336" y="3502487"/>
-                  </a:lnTo>
-                  <a:lnTo>
-                    <a:pt x="5334704" y="3492058"/>
-                  </a:lnTo>
-                  <a:lnTo>
-                    <a:pt x="5258071" y="3480906"/>
-                  </a:lnTo>
-                  <a:lnTo>
-                    <a:pt x="5181439" y="3468978"/>
-                  </a:lnTo>
-                  <a:lnTo>
-                    <a:pt x="5104806" y="3456222"/>
-                  </a:lnTo>
-                  <a:lnTo>
-                    <a:pt x="5028174" y="3442580"/>
-                  </a:lnTo>
-                  <a:lnTo>
-                    <a:pt x="4951541" y="3427991"/>
-                  </a:lnTo>
-                  <a:lnTo>
-                    <a:pt x="4874909" y="3412389"/>
-                  </a:lnTo>
-                  <a:lnTo>
-                    <a:pt x="4798276" y="3395702"/>
-                  </a:lnTo>
-                  <a:lnTo>
-                    <a:pt x="4721644" y="3377857"/>
-                  </a:lnTo>
-                  <a:lnTo>
-                    <a:pt x="4645011" y="3358773"/>
-                  </a:lnTo>
-                  <a:lnTo>
-                    <a:pt x="4568378" y="3338363"/>
-                  </a:lnTo>
-                  <a:lnTo>
-                    <a:pt x="4491746" y="3316536"/>
-                  </a:lnTo>
-                  <a:lnTo>
-                    <a:pt x="4415113" y="3293192"/>
-                  </a:lnTo>
-                  <a:lnTo>
-                    <a:pt x="4338481" y="3268228"/>
-                  </a:lnTo>
-                  <a:lnTo>
-                    <a:pt x="4261848" y="3241530"/>
-                  </a:lnTo>
-                  <a:lnTo>
-                    <a:pt x="4185216" y="3212977"/>
-                  </a:lnTo>
-                  <a:lnTo>
-                    <a:pt x="4108583" y="3182441"/>
-                  </a:lnTo>
-                  <a:lnTo>
-                    <a:pt x="4031951" y="3149785"/>
-                  </a:lnTo>
-                  <a:lnTo>
-                    <a:pt x="3955318" y="3114860"/>
-                  </a:lnTo>
-                  <a:lnTo>
-                    <a:pt x="3878685" y="3077510"/>
-                  </a:lnTo>
-                  <a:lnTo>
-                    <a:pt x="3802053" y="3037566"/>
-                  </a:lnTo>
-                  <a:lnTo>
-                    <a:pt x="3725420" y="2994848"/>
-                  </a:lnTo>
-                  <a:lnTo>
-                    <a:pt x="3648788" y="2949163"/>
-                  </a:lnTo>
-                  <a:lnTo>
-                    <a:pt x="3572155" y="2900305"/>
-                  </a:lnTo>
-                  <a:lnTo>
-                    <a:pt x="3495523" y="2848053"/>
-                  </a:lnTo>
-                  <a:lnTo>
-                    <a:pt x="3418890" y="2792173"/>
-                  </a:lnTo>
-                  <a:lnTo>
-                    <a:pt x="3342258" y="2775739"/>
-                  </a:lnTo>
-                  <a:lnTo>
-                    <a:pt x="3265625" y="2767073"/>
-                  </a:lnTo>
-                  <a:lnTo>
-                    <a:pt x="3188993" y="2758320"/>
-                  </a:lnTo>
-                  <a:lnTo>
-                    <a:pt x="3112360" y="2749482"/>
-                  </a:lnTo>
-                  <a:lnTo>
-                    <a:pt x="3035727" y="2740556"/>
-                  </a:lnTo>
-                  <a:lnTo>
-                    <a:pt x="2959095" y="2731541"/>
-                  </a:lnTo>
-                  <a:lnTo>
-                    <a:pt x="2882462" y="2722438"/>
-                  </a:lnTo>
-                  <a:lnTo>
-                    <a:pt x="2805830" y="2713245"/>
-                  </a:lnTo>
-                  <a:lnTo>
-                    <a:pt x="2729197" y="2703960"/>
-                  </a:lnTo>
-                  <a:lnTo>
-                    <a:pt x="2652565" y="2694584"/>
-                  </a:lnTo>
-                  <a:lnTo>
-                    <a:pt x="2575932" y="2685116"/>
-                  </a:lnTo>
-                  <a:lnTo>
-                    <a:pt x="2499300" y="2675554"/>
-                  </a:lnTo>
-                  <a:lnTo>
-                    <a:pt x="2422667" y="2665897"/>
-                  </a:lnTo>
-                  <a:lnTo>
-                    <a:pt x="2346034" y="2656145"/>
-                  </a:lnTo>
-                  <a:lnTo>
-                    <a:pt x="2269402" y="2646296"/>
-                  </a:lnTo>
-                  <a:lnTo>
-                    <a:pt x="2192769" y="2636350"/>
-                  </a:lnTo>
-                  <a:lnTo>
-                    <a:pt x="2116137" y="2626306"/>
-                  </a:lnTo>
-                  <a:lnTo>
-                    <a:pt x="2039504" y="2616163"/>
-                  </a:lnTo>
-                  <a:lnTo>
-                    <a:pt x="1962872" y="2605919"/>
-                  </a:lnTo>
-                  <a:lnTo>
-                    <a:pt x="1886239" y="2595574"/>
-                  </a:lnTo>
-                  <a:lnTo>
-                    <a:pt x="1809607" y="2585127"/>
-                  </a:lnTo>
-                  <a:lnTo>
-                    <a:pt x="1732974" y="2574577"/>
-                  </a:lnTo>
-                  <a:lnTo>
-                    <a:pt x="1656342" y="2563922"/>
-                  </a:lnTo>
-                  <a:lnTo>
-                    <a:pt x="1579709" y="2553162"/>
-                  </a:lnTo>
-                  <a:lnTo>
-                    <a:pt x="1503076" y="2542296"/>
-                  </a:lnTo>
-                  <a:lnTo>
-                    <a:pt x="1426444" y="2531322"/>
-                  </a:lnTo>
-                  <a:lnTo>
-                    <a:pt x="1349811" y="2520240"/>
-                  </a:lnTo>
-                  <a:lnTo>
-                    <a:pt x="1273179" y="2509048"/>
-                  </a:lnTo>
-                  <a:lnTo>
-                    <a:pt x="1196546" y="2497746"/>
-                  </a:lnTo>
-                  <a:lnTo>
-                    <a:pt x="1119914" y="2486332"/>
-                  </a:lnTo>
-                  <a:lnTo>
-                    <a:pt x="1043281" y="2474805"/>
-                  </a:lnTo>
-                  <a:lnTo>
-                    <a:pt x="966649" y="2463164"/>
-                  </a:lnTo>
-                  <a:lnTo>
-                    <a:pt x="890016" y="2451409"/>
-                  </a:lnTo>
-                  <a:lnTo>
-                    <a:pt x="813384" y="2439537"/>
-                  </a:lnTo>
-                  <a:lnTo>
-                    <a:pt x="736751" y="2427547"/>
-                  </a:lnTo>
-                  <a:lnTo>
-                    <a:pt x="660118" y="2415440"/>
-                  </a:lnTo>
-                  <a:lnTo>
-                    <a:pt x="583486" y="2403212"/>
-                  </a:lnTo>
-                  <a:lnTo>
-                    <a:pt x="506853" y="2390864"/>
-                  </a:lnTo>
-                  <a:lnTo>
-                    <a:pt x="430221" y="2378394"/>
-                  </a:lnTo>
-                  <a:lnTo>
-                    <a:pt x="353588" y="2365800"/>
-                  </a:lnTo>
-                  <a:lnTo>
-                    <a:pt x="276956" y="2353082"/>
-                  </a:lnTo>
-                  <a:lnTo>
-                    <a:pt x="200323" y="2340238"/>
-                  </a:lnTo>
-                  <a:lnTo>
-                    <a:pt x="123691" y="2327268"/>
-                  </a:lnTo>
-                  <a:lnTo>
-                    <a:pt x="47058" y="2314169"/>
-                  </a:lnTo>
-                  <a:lnTo>
-                    <a:pt x="0" y="2306045"/>
+                    <a:pt x="1809607" y="122028"/>
+                  </a:lnTo>
+                  <a:lnTo>
+                    <a:pt x="1886239" y="340343"/>
+                  </a:lnTo>
+                  <a:lnTo>
+                    <a:pt x="1962872" y="544481"/>
+                  </a:lnTo>
+                  <a:lnTo>
+                    <a:pt x="2039504" y="735361"/>
+                  </a:lnTo>
+                  <a:lnTo>
+                    <a:pt x="2116137" y="913846"/>
+                  </a:lnTo>
+                  <a:lnTo>
+                    <a:pt x="2192769" y="1080739"/>
+                  </a:lnTo>
+                  <a:lnTo>
+                    <a:pt x="2269402" y="1236794"/>
+                  </a:lnTo>
+                  <a:lnTo>
+                    <a:pt x="2346034" y="1382715"/>
+                  </a:lnTo>
+                  <a:lnTo>
+                    <a:pt x="2422667" y="1519159"/>
+                  </a:lnTo>
+                  <a:lnTo>
+                    <a:pt x="2499300" y="1646742"/>
+                  </a:lnTo>
+                  <a:lnTo>
+                    <a:pt x="2575932" y="1766040"/>
+                  </a:lnTo>
+                  <a:lnTo>
+                    <a:pt x="2652565" y="1877591"/>
+                  </a:lnTo>
+                  <a:lnTo>
+                    <a:pt x="2729197" y="1981897"/>
+                  </a:lnTo>
+                  <a:lnTo>
+                    <a:pt x="2805830" y="2079430"/>
+                  </a:lnTo>
+                  <a:lnTo>
+                    <a:pt x="2882462" y="2170628"/>
+                  </a:lnTo>
+                  <a:lnTo>
+                    <a:pt x="2959095" y="2255904"/>
+                  </a:lnTo>
+                  <a:lnTo>
+                    <a:pt x="3035727" y="2335642"/>
+                  </a:lnTo>
+                  <a:lnTo>
+                    <a:pt x="3112360" y="2410202"/>
+                  </a:lnTo>
+                  <a:lnTo>
+                    <a:pt x="3188993" y="2479920"/>
+                  </a:lnTo>
+                  <a:lnTo>
+                    <a:pt x="3265625" y="2545110"/>
+                  </a:lnTo>
+                  <a:lnTo>
+                    <a:pt x="3342258" y="2606066"/>
+                  </a:lnTo>
+                  <a:lnTo>
+                    <a:pt x="3418890" y="2655575"/>
+                  </a:lnTo>
+                  <a:lnTo>
+                    <a:pt x="3495523" y="2663680"/>
+                  </a:lnTo>
+                  <a:lnTo>
+                    <a:pt x="3572155" y="2671705"/>
+                  </a:lnTo>
+                  <a:lnTo>
+                    <a:pt x="3648788" y="2679652"/>
+                  </a:lnTo>
+                  <a:lnTo>
+                    <a:pt x="3725420" y="2687521"/>
+                  </a:lnTo>
+                  <a:lnTo>
+                    <a:pt x="3802053" y="2695314"/>
+                  </a:lnTo>
+                  <a:lnTo>
+                    <a:pt x="3878685" y="2703029"/>
+                  </a:lnTo>
+                  <a:lnTo>
+                    <a:pt x="3955318" y="2710670"/>
+                  </a:lnTo>
+                  <a:lnTo>
+                    <a:pt x="4031951" y="2718236"/>
+                  </a:lnTo>
+                  <a:lnTo>
+                    <a:pt x="4108583" y="2725727"/>
+                  </a:lnTo>
+                  <a:lnTo>
+                    <a:pt x="4185216" y="2733145"/>
+                  </a:lnTo>
+                  <a:lnTo>
+                    <a:pt x="4261848" y="2740491"/>
+                  </a:lnTo>
+                  <a:lnTo>
+                    <a:pt x="4338481" y="2747765"/>
+                  </a:lnTo>
+                  <a:lnTo>
+                    <a:pt x="4415113" y="2754967"/>
+                  </a:lnTo>
+                  <a:lnTo>
+                    <a:pt x="4491746" y="2762100"/>
+                  </a:lnTo>
+                  <a:lnTo>
+                    <a:pt x="4568378" y="2769162"/>
+                  </a:lnTo>
+                  <a:lnTo>
+                    <a:pt x="4645011" y="2776155"/>
+                  </a:lnTo>
+                  <a:lnTo>
+                    <a:pt x="4721644" y="2783080"/>
+                  </a:lnTo>
+                  <a:lnTo>
+                    <a:pt x="4798276" y="2789937"/>
+                  </a:lnTo>
+                  <a:lnTo>
+                    <a:pt x="4874909" y="2796727"/>
+                  </a:lnTo>
+                  <a:lnTo>
+                    <a:pt x="4951541" y="2803450"/>
+                  </a:lnTo>
+                  <a:lnTo>
+                    <a:pt x="5028174" y="2810108"/>
+                  </a:lnTo>
+                  <a:lnTo>
+                    <a:pt x="5104806" y="2816700"/>
+                  </a:lnTo>
+                  <a:lnTo>
+                    <a:pt x="5181439" y="2823228"/>
+                  </a:lnTo>
+                  <a:lnTo>
+                    <a:pt x="5258071" y="2829693"/>
+                  </a:lnTo>
+                  <a:lnTo>
+                    <a:pt x="5334704" y="2836093"/>
+                  </a:lnTo>
+                  <a:lnTo>
+                    <a:pt x="5411336" y="2842432"/>
+                  </a:lnTo>
+                  <a:lnTo>
+                    <a:pt x="5487969" y="2848708"/>
+                  </a:lnTo>
+                  <a:lnTo>
+                    <a:pt x="5564602" y="2854922"/>
+                  </a:lnTo>
+                  <a:lnTo>
+                    <a:pt x="5641234" y="2861076"/>
+                  </a:lnTo>
+                  <a:lnTo>
+                    <a:pt x="5717867" y="2867170"/>
+                  </a:lnTo>
+                  <a:lnTo>
+                    <a:pt x="5794499" y="2873204"/>
+                  </a:lnTo>
+                  <a:lnTo>
+                    <a:pt x="5871132" y="2879179"/>
+                  </a:lnTo>
+                  <a:lnTo>
+                    <a:pt x="5947764" y="2885096"/>
+                  </a:lnTo>
+                  <a:lnTo>
+                    <a:pt x="6024397" y="2890954"/>
+                  </a:lnTo>
+                  <a:lnTo>
+                    <a:pt x="6101029" y="2896756"/>
+                  </a:lnTo>
+                  <a:lnTo>
+                    <a:pt x="6177662" y="2902500"/>
+                  </a:lnTo>
+                  <a:lnTo>
+                    <a:pt x="6254294" y="2908189"/>
+                  </a:lnTo>
+                  <a:lnTo>
+                    <a:pt x="6330927" y="2913821"/>
+                  </a:lnTo>
+                  <a:lnTo>
+                    <a:pt x="6407560" y="2919399"/>
+                  </a:lnTo>
+                  <a:lnTo>
+                    <a:pt x="6484192" y="2924922"/>
+                  </a:lnTo>
+                  <a:lnTo>
+                    <a:pt x="6560825" y="2930391"/>
+                  </a:lnTo>
+                  <a:lnTo>
+                    <a:pt x="6637457" y="2935806"/>
+                  </a:lnTo>
+                  <a:lnTo>
+                    <a:pt x="6714090" y="2941168"/>
+                  </a:lnTo>
+                  <a:lnTo>
+                    <a:pt x="6790722" y="2946478"/>
+                  </a:lnTo>
+                  <a:lnTo>
+                    <a:pt x="6867355" y="2951736"/>
+                  </a:lnTo>
+                  <a:lnTo>
+                    <a:pt x="6943987" y="2956943"/>
+                  </a:lnTo>
+                  <a:lnTo>
+                    <a:pt x="7020620" y="2962098"/>
+                  </a:lnTo>
+                  <a:lnTo>
+                    <a:pt x="7097253" y="2967203"/>
+                  </a:lnTo>
+                  <a:lnTo>
+                    <a:pt x="7173885" y="2972258"/>
+                  </a:lnTo>
+                  <a:lnTo>
+                    <a:pt x="7250518" y="2977264"/>
+                  </a:lnTo>
+                  <a:lnTo>
+                    <a:pt x="7327150" y="2982220"/>
+                  </a:lnTo>
+                  <a:lnTo>
+                    <a:pt x="7403783" y="2987129"/>
+                  </a:lnTo>
+                  <a:lnTo>
+                    <a:pt x="7403783" y="3458755"/>
+                  </a:lnTo>
+                  <a:lnTo>
+                    <a:pt x="7327150" y="3457019"/>
+                  </a:lnTo>
+                  <a:lnTo>
+                    <a:pt x="7250518" y="3455163"/>
+                  </a:lnTo>
+                  <a:lnTo>
+                    <a:pt x="7173885" y="3453178"/>
+                  </a:lnTo>
+                  <a:lnTo>
+                    <a:pt x="7097253" y="3451055"/>
+                  </a:lnTo>
+                  <a:lnTo>
+                    <a:pt x="7020620" y="3448784"/>
+                  </a:lnTo>
+                  <a:lnTo>
+                    <a:pt x="6943987" y="3446356"/>
+                  </a:lnTo>
+                  <a:lnTo>
+                    <a:pt x="6867355" y="3443759"/>
+                  </a:lnTo>
+                  <a:lnTo>
+                    <a:pt x="6790722" y="3440982"/>
+                  </a:lnTo>
+                  <a:lnTo>
+                    <a:pt x="6714090" y="3438012"/>
+                  </a:lnTo>
+                  <a:lnTo>
+                    <a:pt x="6637457" y="3434836"/>
+                  </a:lnTo>
+                  <a:lnTo>
+                    <a:pt x="6560825" y="3431439"/>
+                  </a:lnTo>
+                  <a:lnTo>
+                    <a:pt x="6484192" y="3427806"/>
+                  </a:lnTo>
+                  <a:lnTo>
+                    <a:pt x="6407560" y="3423921"/>
+                  </a:lnTo>
+                  <a:lnTo>
+                    <a:pt x="6330927" y="3419766"/>
+                  </a:lnTo>
+                  <a:lnTo>
+                    <a:pt x="6254294" y="3415322"/>
+                  </a:lnTo>
+                  <a:lnTo>
+                    <a:pt x="6177662" y="3410570"/>
+                  </a:lnTo>
+                  <a:lnTo>
+                    <a:pt x="6101029" y="3405488"/>
+                  </a:lnTo>
+                  <a:lnTo>
+                    <a:pt x="6024397" y="3400053"/>
+                  </a:lnTo>
+                  <a:lnTo>
+                    <a:pt x="5947764" y="3394240"/>
+                  </a:lnTo>
+                  <a:lnTo>
+                    <a:pt x="5871132" y="3388024"/>
+                  </a:lnTo>
+                  <a:lnTo>
+                    <a:pt x="5794499" y="3381376"/>
+                  </a:lnTo>
+                  <a:lnTo>
+                    <a:pt x="5717867" y="3374266"/>
+                  </a:lnTo>
+                  <a:lnTo>
+                    <a:pt x="5641234" y="3366662"/>
+                  </a:lnTo>
+                  <a:lnTo>
+                    <a:pt x="5564602" y="3358530"/>
+                  </a:lnTo>
+                  <a:lnTo>
+                    <a:pt x="5487969" y="3349834"/>
+                  </a:lnTo>
+                  <a:lnTo>
+                    <a:pt x="5411336" y="3340533"/>
+                  </a:lnTo>
+                  <a:lnTo>
+                    <a:pt x="5334704" y="3330587"/>
+                  </a:lnTo>
+                  <a:lnTo>
+                    <a:pt x="5258071" y="3319950"/>
+                  </a:lnTo>
+                  <a:lnTo>
+                    <a:pt x="5181439" y="3308574"/>
+                  </a:lnTo>
+                  <a:lnTo>
+                    <a:pt x="5104806" y="3296408"/>
+                  </a:lnTo>
+                  <a:lnTo>
+                    <a:pt x="5028174" y="3283397"/>
+                  </a:lnTo>
+                  <a:lnTo>
+                    <a:pt x="4951541" y="3269482"/>
+                  </a:lnTo>
+                  <a:lnTo>
+                    <a:pt x="4874909" y="3254601"/>
+                  </a:lnTo>
+                  <a:lnTo>
+                    <a:pt x="4798276" y="3238686"/>
+                  </a:lnTo>
+                  <a:lnTo>
+                    <a:pt x="4721644" y="3221666"/>
+                  </a:lnTo>
+                  <a:lnTo>
+                    <a:pt x="4645011" y="3203464"/>
+                  </a:lnTo>
+                  <a:lnTo>
+                    <a:pt x="4568378" y="3183998"/>
+                  </a:lnTo>
+                  <a:lnTo>
+                    <a:pt x="4491746" y="3163180"/>
+                  </a:lnTo>
+                  <a:lnTo>
+                    <a:pt x="4415113" y="3140916"/>
+                  </a:lnTo>
+                  <a:lnTo>
+                    <a:pt x="4338481" y="3117106"/>
+                  </a:lnTo>
+                  <a:lnTo>
+                    <a:pt x="4261848" y="3091642"/>
+                  </a:lnTo>
+                  <a:lnTo>
+                    <a:pt x="4185216" y="3064410"/>
+                  </a:lnTo>
+                  <a:lnTo>
+                    <a:pt x="4108583" y="3035286"/>
+                  </a:lnTo>
+                  <a:lnTo>
+                    <a:pt x="4031951" y="3004140"/>
+                  </a:lnTo>
+                  <a:lnTo>
+                    <a:pt x="3955318" y="2970830"/>
+                  </a:lnTo>
+                  <a:lnTo>
+                    <a:pt x="3878685" y="2935207"/>
+                  </a:lnTo>
+                  <a:lnTo>
+                    <a:pt x="3802053" y="2897110"/>
+                  </a:lnTo>
+                  <a:lnTo>
+                    <a:pt x="3725420" y="2856367"/>
+                  </a:lnTo>
+                  <a:lnTo>
+                    <a:pt x="3648788" y="2812795"/>
+                  </a:lnTo>
+                  <a:lnTo>
+                    <a:pt x="3572155" y="2766196"/>
+                  </a:lnTo>
+                  <a:lnTo>
+                    <a:pt x="3495523" y="2716360"/>
+                  </a:lnTo>
+                  <a:lnTo>
+                    <a:pt x="3418890" y="2663064"/>
+                  </a:lnTo>
+                  <a:lnTo>
+                    <a:pt x="3342258" y="2647390"/>
+                  </a:lnTo>
+                  <a:lnTo>
+                    <a:pt x="3265625" y="2639124"/>
+                  </a:lnTo>
+                  <a:lnTo>
+                    <a:pt x="3188993" y="2630777"/>
+                  </a:lnTo>
+                  <a:lnTo>
+                    <a:pt x="3112360" y="2622347"/>
+                  </a:lnTo>
+                  <a:lnTo>
+                    <a:pt x="3035727" y="2613833"/>
+                  </a:lnTo>
+                  <a:lnTo>
+                    <a:pt x="2959095" y="2605236"/>
+                  </a:lnTo>
+                  <a:lnTo>
+                    <a:pt x="2882462" y="2596553"/>
+                  </a:lnTo>
+                  <a:lnTo>
+                    <a:pt x="2805830" y="2587785"/>
+                  </a:lnTo>
+                  <a:lnTo>
+                    <a:pt x="2729197" y="2578930"/>
+                  </a:lnTo>
+                  <a:lnTo>
+                    <a:pt x="2652565" y="2569988"/>
+                  </a:lnTo>
+                  <a:lnTo>
+                    <a:pt x="2575932" y="2560957"/>
+                  </a:lnTo>
+                  <a:lnTo>
+                    <a:pt x="2499300" y="2551837"/>
+                  </a:lnTo>
+                  <a:lnTo>
+                    <a:pt x="2422667" y="2542627"/>
+                  </a:lnTo>
+                  <a:lnTo>
+                    <a:pt x="2346034" y="2533326"/>
+                  </a:lnTo>
+                  <a:lnTo>
+                    <a:pt x="2269402" y="2523932"/>
+                  </a:lnTo>
+                  <a:lnTo>
+                    <a:pt x="2192769" y="2514447"/>
+                  </a:lnTo>
+                  <a:lnTo>
+                    <a:pt x="2116137" y="2504867"/>
+                  </a:lnTo>
+                  <a:lnTo>
+                    <a:pt x="2039504" y="2495192"/>
+                  </a:lnTo>
+                  <a:lnTo>
+                    <a:pt x="1962872" y="2485422"/>
+                  </a:lnTo>
+                  <a:lnTo>
+                    <a:pt x="1886239" y="2475556"/>
+                  </a:lnTo>
+                  <a:lnTo>
+                    <a:pt x="1809607" y="2465592"/>
+                  </a:lnTo>
+                  <a:lnTo>
+                    <a:pt x="1732974" y="2455529"/>
+                  </a:lnTo>
+                  <a:lnTo>
+                    <a:pt x="1656342" y="2445367"/>
+                  </a:lnTo>
+                  <a:lnTo>
+                    <a:pt x="1579709" y="2435105"/>
+                  </a:lnTo>
+                  <a:lnTo>
+                    <a:pt x="1503076" y="2424741"/>
+                  </a:lnTo>
+                  <a:lnTo>
+                    <a:pt x="1426444" y="2414275"/>
+                  </a:lnTo>
+                  <a:lnTo>
+                    <a:pt x="1349811" y="2403705"/>
+                  </a:lnTo>
+                  <a:lnTo>
+                    <a:pt x="1273179" y="2393031"/>
+                  </a:lnTo>
+                  <a:lnTo>
+                    <a:pt x="1196546" y="2382251"/>
+                  </a:lnTo>
+                  <a:lnTo>
+                    <a:pt x="1119914" y="2371365"/>
+                  </a:lnTo>
+                  <a:lnTo>
+                    <a:pt x="1043281" y="2360371"/>
+                  </a:lnTo>
+                  <a:lnTo>
+                    <a:pt x="966649" y="2349269"/>
+                  </a:lnTo>
+                  <a:lnTo>
+                    <a:pt x="890016" y="2338056"/>
+                  </a:lnTo>
+                  <a:lnTo>
+                    <a:pt x="813384" y="2326733"/>
+                  </a:lnTo>
+                  <a:lnTo>
+                    <a:pt x="736751" y="2315298"/>
+                  </a:lnTo>
+                  <a:lnTo>
+                    <a:pt x="660118" y="2303751"/>
+                  </a:lnTo>
+                  <a:lnTo>
+                    <a:pt x="583486" y="2292088"/>
+                  </a:lnTo>
+                  <a:lnTo>
+                    <a:pt x="506853" y="2280311"/>
+                  </a:lnTo>
+                  <a:lnTo>
+                    <a:pt x="430221" y="2268417"/>
+                  </a:lnTo>
+                  <a:lnTo>
+                    <a:pt x="353588" y="2256406"/>
+                  </a:lnTo>
+                  <a:lnTo>
+                    <a:pt x="276956" y="2244276"/>
+                  </a:lnTo>
+                  <a:lnTo>
+                    <a:pt x="200323" y="2232026"/>
+                  </a:lnTo>
+                  <a:lnTo>
+                    <a:pt x="123691" y="2219656"/>
+                  </a:lnTo>
+                  <a:lnTo>
+                    <a:pt x="47058" y="2207162"/>
+                  </a:lnTo>
+                  <a:lnTo>
+                    <a:pt x="0" y="2199415"/>
                   </a:lnTo>
                   <a:close/>
                 </a:path>
@@ -3552,237 +3552,237 @@
           </p:nvSpPr>
           <p:spPr>
             <a:xfrm>
-              <a:off x="2587072" y="1896563"/>
-              <a:ext cx="5634228" cy="3131949"/>
+              <a:off x="2587072" y="2073503"/>
+              <a:ext cx="5634228" cy="2987129"/>
             </a:xfrm>
             <a:custGeom>
               <a:avLst/>
               <a:pathLst>
-                <a:path w="5634228" h="3131949">
+                <a:path w="5634228" h="2987129">
                   <a:moveTo>
                     <a:pt x="0" y="0"/>
                   </a:moveTo>
                   <a:lnTo>
-                    <a:pt x="40052" y="127944"/>
-                  </a:lnTo>
-                  <a:lnTo>
-                    <a:pt x="116684" y="356844"/>
-                  </a:lnTo>
-                  <a:lnTo>
-                    <a:pt x="193317" y="570878"/>
-                  </a:lnTo>
-                  <a:lnTo>
-                    <a:pt x="269950" y="771013"/>
-                  </a:lnTo>
-                  <a:lnTo>
-                    <a:pt x="346582" y="958150"/>
-                  </a:lnTo>
-                  <a:lnTo>
-                    <a:pt x="423215" y="1133135"/>
-                  </a:lnTo>
-                  <a:lnTo>
-                    <a:pt x="499847" y="1296756"/>
-                  </a:lnTo>
-                  <a:lnTo>
-                    <a:pt x="576480" y="1449751"/>
-                  </a:lnTo>
-                  <a:lnTo>
-                    <a:pt x="653112" y="1592810"/>
-                  </a:lnTo>
-                  <a:lnTo>
-                    <a:pt x="729745" y="1726579"/>
-                  </a:lnTo>
-                  <a:lnTo>
-                    <a:pt x="806377" y="1851661"/>
-                  </a:lnTo>
-                  <a:lnTo>
-                    <a:pt x="883010" y="1968619"/>
-                  </a:lnTo>
-                  <a:lnTo>
-                    <a:pt x="959643" y="2077982"/>
-                  </a:lnTo>
-                  <a:lnTo>
-                    <a:pt x="1036275" y="2180243"/>
-                  </a:lnTo>
-                  <a:lnTo>
-                    <a:pt x="1112908" y="2275863"/>
-                  </a:lnTo>
-                  <a:lnTo>
-                    <a:pt x="1189540" y="2365274"/>
-                  </a:lnTo>
-                  <a:lnTo>
-                    <a:pt x="1266173" y="2448877"/>
-                  </a:lnTo>
-                  <a:lnTo>
-                    <a:pt x="1342805" y="2527052"/>
-                  </a:lnTo>
-                  <a:lnTo>
-                    <a:pt x="1419438" y="2600149"/>
-                  </a:lnTo>
-                  <a:lnTo>
-                    <a:pt x="1496070" y="2668500"/>
-                  </a:lnTo>
-                  <a:lnTo>
-                    <a:pt x="1572703" y="2732412"/>
-                  </a:lnTo>
-                  <a:lnTo>
-                    <a:pt x="1649335" y="2784321"/>
-                  </a:lnTo>
-                  <a:lnTo>
-                    <a:pt x="1725968" y="2792819"/>
-                  </a:lnTo>
-                  <a:lnTo>
-                    <a:pt x="1802601" y="2801233"/>
-                  </a:lnTo>
-                  <a:lnTo>
-                    <a:pt x="1879233" y="2809565"/>
-                  </a:lnTo>
-                  <a:lnTo>
-                    <a:pt x="1955866" y="2817816"/>
-                  </a:lnTo>
-                  <a:lnTo>
-                    <a:pt x="2032498" y="2825986"/>
-                  </a:lnTo>
-                  <a:lnTo>
-                    <a:pt x="2109131" y="2834076"/>
-                  </a:lnTo>
-                  <a:lnTo>
-                    <a:pt x="2185763" y="2842087"/>
-                  </a:lnTo>
-                  <a:lnTo>
-                    <a:pt x="2262396" y="2850019"/>
-                  </a:lnTo>
-                  <a:lnTo>
-                    <a:pt x="2339028" y="2857874"/>
-                  </a:lnTo>
-                  <a:lnTo>
-                    <a:pt x="2415661" y="2865652"/>
-                  </a:lnTo>
-                  <a:lnTo>
-                    <a:pt x="2492294" y="2873354"/>
-                  </a:lnTo>
-                  <a:lnTo>
-                    <a:pt x="2568926" y="2880980"/>
-                  </a:lnTo>
-                  <a:lnTo>
-                    <a:pt x="2645559" y="2888532"/>
-                  </a:lnTo>
-                  <a:lnTo>
-                    <a:pt x="2722191" y="2896010"/>
-                  </a:lnTo>
-                  <a:lnTo>
-                    <a:pt x="2798824" y="2903415"/>
-                  </a:lnTo>
-                  <a:lnTo>
-                    <a:pt x="2875456" y="2910747"/>
-                  </a:lnTo>
-                  <a:lnTo>
-                    <a:pt x="2952089" y="2918008"/>
-                  </a:lnTo>
-                  <a:lnTo>
-                    <a:pt x="3028721" y="2925197"/>
-                  </a:lnTo>
-                  <a:lnTo>
-                    <a:pt x="3105354" y="2932316"/>
-                  </a:lnTo>
-                  <a:lnTo>
-                    <a:pt x="3181986" y="2939365"/>
-                  </a:lnTo>
-                  <a:lnTo>
-                    <a:pt x="3258619" y="2946346"/>
-                  </a:lnTo>
-                  <a:lnTo>
-                    <a:pt x="3335252" y="2953258"/>
-                  </a:lnTo>
-                  <a:lnTo>
-                    <a:pt x="3411884" y="2960102"/>
-                  </a:lnTo>
-                  <a:lnTo>
-                    <a:pt x="3488517" y="2966880"/>
-                  </a:lnTo>
-                  <a:lnTo>
-                    <a:pt x="3565149" y="2973591"/>
-                  </a:lnTo>
-                  <a:lnTo>
-                    <a:pt x="3641782" y="2980237"/>
-                  </a:lnTo>
-                  <a:lnTo>
-                    <a:pt x="3718414" y="2986817"/>
-                  </a:lnTo>
-                  <a:lnTo>
-                    <a:pt x="3795047" y="2993333"/>
-                  </a:lnTo>
-                  <a:lnTo>
-                    <a:pt x="3871679" y="2999785"/>
-                  </a:lnTo>
-                  <a:lnTo>
-                    <a:pt x="3948312" y="3006175"/>
-                  </a:lnTo>
-                  <a:lnTo>
-                    <a:pt x="4024944" y="3012501"/>
-                  </a:lnTo>
-                  <a:lnTo>
-                    <a:pt x="4101577" y="3018766"/>
-                  </a:lnTo>
-                  <a:lnTo>
-                    <a:pt x="4178210" y="3024969"/>
-                  </a:lnTo>
-                  <a:lnTo>
-                    <a:pt x="4254842" y="3031112"/>
-                  </a:lnTo>
-                  <a:lnTo>
-                    <a:pt x="4331475" y="3037194"/>
-                  </a:lnTo>
-                  <a:lnTo>
-                    <a:pt x="4408107" y="3043217"/>
-                  </a:lnTo>
-                  <a:lnTo>
-                    <a:pt x="4484740" y="3049182"/>
-                  </a:lnTo>
-                  <a:lnTo>
-                    <a:pt x="4561372" y="3055087"/>
-                  </a:lnTo>
-                  <a:lnTo>
-                    <a:pt x="4638005" y="3060935"/>
-                  </a:lnTo>
-                  <a:lnTo>
-                    <a:pt x="4714637" y="3066726"/>
-                  </a:lnTo>
-                  <a:lnTo>
-                    <a:pt x="4791270" y="3072460"/>
-                  </a:lnTo>
-                  <a:lnTo>
-                    <a:pt x="4867903" y="3078138"/>
-                  </a:lnTo>
-                  <a:lnTo>
-                    <a:pt x="4944535" y="3083760"/>
-                  </a:lnTo>
-                  <a:lnTo>
-                    <a:pt x="5021168" y="3089328"/>
-                  </a:lnTo>
-                  <a:lnTo>
-                    <a:pt x="5097800" y="3094840"/>
-                  </a:lnTo>
-                  <a:lnTo>
-                    <a:pt x="5174433" y="3100299"/>
-                  </a:lnTo>
-                  <a:lnTo>
-                    <a:pt x="5251065" y="3105705"/>
-                  </a:lnTo>
-                  <a:lnTo>
-                    <a:pt x="5327698" y="3111057"/>
-                  </a:lnTo>
-                  <a:lnTo>
-                    <a:pt x="5404330" y="3116357"/>
-                  </a:lnTo>
-                  <a:lnTo>
-                    <a:pt x="5480963" y="3121606"/>
-                  </a:lnTo>
-                  <a:lnTo>
-                    <a:pt x="5557595" y="3126803"/>
-                  </a:lnTo>
-                  <a:lnTo>
-                    <a:pt x="5634228" y="3131949"/>
+                    <a:pt x="40052" y="122028"/>
+                  </a:lnTo>
+                  <a:lnTo>
+                    <a:pt x="116684" y="340343"/>
+                  </a:lnTo>
+                  <a:lnTo>
+                    <a:pt x="193317" y="544481"/>
+                  </a:lnTo>
+                  <a:lnTo>
+                    <a:pt x="269950" y="735361"/>
+                  </a:lnTo>
+                  <a:lnTo>
+                    <a:pt x="346582" y="913846"/>
+                  </a:lnTo>
+                  <a:lnTo>
+                    <a:pt x="423215" y="1080739"/>
+                  </a:lnTo>
+                  <a:lnTo>
+                    <a:pt x="499847" y="1236794"/>
+                  </a:lnTo>
+                  <a:lnTo>
+                    <a:pt x="576480" y="1382715"/>
+                  </a:lnTo>
+                  <a:lnTo>
+                    <a:pt x="653112" y="1519159"/>
+                  </a:lnTo>
+                  <a:lnTo>
+                    <a:pt x="729745" y="1646742"/>
+                  </a:lnTo>
+                  <a:lnTo>
+                    <a:pt x="806377" y="1766040"/>
+                  </a:lnTo>
+                  <a:lnTo>
+                    <a:pt x="883010" y="1877591"/>
+                  </a:lnTo>
+                  <a:lnTo>
+                    <a:pt x="959643" y="1981897"/>
+                  </a:lnTo>
+                  <a:lnTo>
+                    <a:pt x="1036275" y="2079430"/>
+                  </a:lnTo>
+                  <a:lnTo>
+                    <a:pt x="1112908" y="2170628"/>
+                  </a:lnTo>
+                  <a:lnTo>
+                    <a:pt x="1189540" y="2255904"/>
+                  </a:lnTo>
+                  <a:lnTo>
+                    <a:pt x="1266173" y="2335642"/>
+                  </a:lnTo>
+                  <a:lnTo>
+                    <a:pt x="1342805" y="2410202"/>
+                  </a:lnTo>
+                  <a:lnTo>
+                    <a:pt x="1419438" y="2479920"/>
+                  </a:lnTo>
+                  <a:lnTo>
+                    <a:pt x="1496070" y="2545110"/>
+                  </a:lnTo>
+                  <a:lnTo>
+                    <a:pt x="1572703" y="2606066"/>
+                  </a:lnTo>
+                  <a:lnTo>
+                    <a:pt x="1649335" y="2655575"/>
+                  </a:lnTo>
+                  <a:lnTo>
+                    <a:pt x="1725968" y="2663680"/>
+                  </a:lnTo>
+                  <a:lnTo>
+                    <a:pt x="1802601" y="2671705"/>
+                  </a:lnTo>
+                  <a:lnTo>
+                    <a:pt x="1879233" y="2679652"/>
+                  </a:lnTo>
+                  <a:lnTo>
+                    <a:pt x="1955866" y="2687521"/>
+                  </a:lnTo>
+                  <a:lnTo>
+                    <a:pt x="2032498" y="2695314"/>
+                  </a:lnTo>
+                  <a:lnTo>
+                    <a:pt x="2109131" y="2703029"/>
+                  </a:lnTo>
+                  <a:lnTo>
+                    <a:pt x="2185763" y="2710670"/>
+                  </a:lnTo>
+                  <a:lnTo>
+                    <a:pt x="2262396" y="2718236"/>
+                  </a:lnTo>
+                  <a:lnTo>
+                    <a:pt x="2339028" y="2725727"/>
+                  </a:lnTo>
+                  <a:lnTo>
+                    <a:pt x="2415661" y="2733145"/>
+                  </a:lnTo>
+                  <a:lnTo>
+                    <a:pt x="2492294" y="2740491"/>
+                  </a:lnTo>
+                  <a:lnTo>
+                    <a:pt x="2568926" y="2747765"/>
+                  </a:lnTo>
+                  <a:lnTo>
+                    <a:pt x="2645559" y="2754967"/>
+                  </a:lnTo>
+                  <a:lnTo>
+                    <a:pt x="2722191" y="2762100"/>
+                  </a:lnTo>
+                  <a:lnTo>
+                    <a:pt x="2798824" y="2769162"/>
+                  </a:lnTo>
+                  <a:lnTo>
+                    <a:pt x="2875456" y="2776155"/>
+                  </a:lnTo>
+                  <a:lnTo>
+                    <a:pt x="2952089" y="2783080"/>
+                  </a:lnTo>
+                  <a:lnTo>
+                    <a:pt x="3028721" y="2789937"/>
+                  </a:lnTo>
+                  <a:lnTo>
+                    <a:pt x="3105354" y="2796727"/>
+                  </a:lnTo>
+                  <a:lnTo>
+                    <a:pt x="3181986" y="2803450"/>
+                  </a:lnTo>
+                  <a:lnTo>
+                    <a:pt x="3258619" y="2810108"/>
+                  </a:lnTo>
+                  <a:lnTo>
+                    <a:pt x="3335252" y="2816700"/>
+                  </a:lnTo>
+                  <a:lnTo>
+                    <a:pt x="3411884" y="2823228"/>
+                  </a:lnTo>
+                  <a:lnTo>
+                    <a:pt x="3488517" y="2829693"/>
+                  </a:lnTo>
+                  <a:lnTo>
+                    <a:pt x="3565149" y="2836093"/>
+                  </a:lnTo>
+                  <a:lnTo>
+                    <a:pt x="3641782" y="2842432"/>
+                  </a:lnTo>
+                  <a:lnTo>
+                    <a:pt x="3718414" y="2848708"/>
+                  </a:lnTo>
+                  <a:lnTo>
+                    <a:pt x="3795047" y="2854922"/>
+                  </a:lnTo>
+                  <a:lnTo>
+                    <a:pt x="3871679" y="2861076"/>
+                  </a:lnTo>
+                  <a:lnTo>
+                    <a:pt x="3948312" y="2867170"/>
+                  </a:lnTo>
+                  <a:lnTo>
+                    <a:pt x="4024944" y="2873204"/>
+                  </a:lnTo>
+                  <a:lnTo>
+                    <a:pt x="4101577" y="2879179"/>
+                  </a:lnTo>
+                  <a:lnTo>
+                    <a:pt x="4178210" y="2885096"/>
+                  </a:lnTo>
+                  <a:lnTo>
+                    <a:pt x="4254842" y="2890954"/>
+                  </a:lnTo>
+                  <a:lnTo>
+                    <a:pt x="4331475" y="2896756"/>
+                  </a:lnTo>
+                  <a:lnTo>
+                    <a:pt x="4408107" y="2902500"/>
+                  </a:lnTo>
+                  <a:lnTo>
+                    <a:pt x="4484740" y="2908189"/>
+                  </a:lnTo>
+                  <a:lnTo>
+                    <a:pt x="4561372" y="2913821"/>
+                  </a:lnTo>
+                  <a:lnTo>
+                    <a:pt x="4638005" y="2919399"/>
+                  </a:lnTo>
+                  <a:lnTo>
+                    <a:pt x="4714637" y="2924922"/>
+                  </a:lnTo>
+                  <a:lnTo>
+                    <a:pt x="4791270" y="2930391"/>
+                  </a:lnTo>
+                  <a:lnTo>
+                    <a:pt x="4867903" y="2935806"/>
+                  </a:lnTo>
+                  <a:lnTo>
+                    <a:pt x="4944535" y="2941168"/>
+                  </a:lnTo>
+                  <a:lnTo>
+                    <a:pt x="5021168" y="2946478"/>
+                  </a:lnTo>
+                  <a:lnTo>
+                    <a:pt x="5097800" y="2951736"/>
+                  </a:lnTo>
+                  <a:lnTo>
+                    <a:pt x="5174433" y="2956943"/>
+                  </a:lnTo>
+                  <a:lnTo>
+                    <a:pt x="5251065" y="2962098"/>
+                  </a:lnTo>
+                  <a:lnTo>
+                    <a:pt x="5327698" y="2967203"/>
+                  </a:lnTo>
+                  <a:lnTo>
+                    <a:pt x="5404330" y="2972258"/>
+                  </a:lnTo>
+                  <a:lnTo>
+                    <a:pt x="5480963" y="2977264"/>
+                  </a:lnTo>
+                  <a:lnTo>
+                    <a:pt x="5557595" y="2982220"/>
+                  </a:lnTo>
+                  <a:lnTo>
+                    <a:pt x="5634228" y="2987129"/>
                   </a:lnTo>
                 </a:path>
               </a:pathLst>
@@ -3802,303 +3802,303 @@
           </p:nvSpPr>
           <p:spPr>
             <a:xfrm>
-              <a:off x="817517" y="4202609"/>
-              <a:ext cx="7403783" cy="1320394"/>
+              <a:off x="817517" y="4272918"/>
+              <a:ext cx="7403783" cy="1259340"/>
             </a:xfrm>
             <a:custGeom>
               <a:avLst/>
               <a:pathLst>
-                <a:path w="7403783" h="1320394">
+                <a:path w="7403783" h="1259340">
                   <a:moveTo>
-                    <a:pt x="7403783" y="1320394"/>
+                    <a:pt x="7403783" y="1259340"/>
                   </a:moveTo>
                   <a:lnTo>
-                    <a:pt x="7327150" y="1318575"/>
-                  </a:lnTo>
-                  <a:lnTo>
-                    <a:pt x="7250518" y="1316628"/>
-                  </a:lnTo>
-                  <a:lnTo>
-                    <a:pt x="7173885" y="1314547"/>
-                  </a:lnTo>
-                  <a:lnTo>
-                    <a:pt x="7097253" y="1312321"/>
-                  </a:lnTo>
-                  <a:lnTo>
-                    <a:pt x="7020620" y="1309940"/>
-                  </a:lnTo>
-                  <a:lnTo>
-                    <a:pt x="6943987" y="1307394"/>
-                  </a:lnTo>
-                  <a:lnTo>
-                    <a:pt x="6867355" y="1304672"/>
-                  </a:lnTo>
-                  <a:lnTo>
-                    <a:pt x="6790722" y="1301760"/>
-                  </a:lnTo>
-                  <a:lnTo>
-                    <a:pt x="6714090" y="1298646"/>
-                  </a:lnTo>
-                  <a:lnTo>
-                    <a:pt x="6637457" y="1295316"/>
-                  </a:lnTo>
-                  <a:lnTo>
-                    <a:pt x="6560825" y="1291754"/>
-                  </a:lnTo>
-                  <a:lnTo>
-                    <a:pt x="6484192" y="1287945"/>
-                  </a:lnTo>
-                  <a:lnTo>
-                    <a:pt x="6407560" y="1283871"/>
-                  </a:lnTo>
-                  <a:lnTo>
-                    <a:pt x="6330927" y="1279515"/>
-                  </a:lnTo>
-                  <a:lnTo>
-                    <a:pt x="6254294" y="1274856"/>
-                  </a:lnTo>
-                  <a:lnTo>
-                    <a:pt x="6177662" y="1269873"/>
-                  </a:lnTo>
-                  <a:lnTo>
-                    <a:pt x="6101029" y="1264545"/>
-                  </a:lnTo>
-                  <a:lnTo>
-                    <a:pt x="6024397" y="1258846"/>
-                  </a:lnTo>
-                  <a:lnTo>
-                    <a:pt x="5947764" y="1252752"/>
-                  </a:lnTo>
-                  <a:lnTo>
-                    <a:pt x="5871132" y="1246234"/>
-                  </a:lnTo>
-                  <a:lnTo>
-                    <a:pt x="5794499" y="1239263"/>
-                  </a:lnTo>
-                  <a:lnTo>
-                    <a:pt x="5717867" y="1231809"/>
-                  </a:lnTo>
-                  <a:lnTo>
-                    <a:pt x="5641234" y="1223837"/>
-                  </a:lnTo>
-                  <a:lnTo>
-                    <a:pt x="5564602" y="1215311"/>
-                  </a:lnTo>
-                  <a:lnTo>
-                    <a:pt x="5487969" y="1206193"/>
-                  </a:lnTo>
-                  <a:lnTo>
-                    <a:pt x="5411336" y="1196441"/>
-                  </a:lnTo>
-                  <a:lnTo>
-                    <a:pt x="5334704" y="1186013"/>
-                  </a:lnTo>
-                  <a:lnTo>
-                    <a:pt x="5258071" y="1174860"/>
-                  </a:lnTo>
-                  <a:lnTo>
-                    <a:pt x="5181439" y="1162932"/>
-                  </a:lnTo>
-                  <a:lnTo>
-                    <a:pt x="5104806" y="1150176"/>
-                  </a:lnTo>
-                  <a:lnTo>
-                    <a:pt x="5028174" y="1136534"/>
-                  </a:lnTo>
-                  <a:lnTo>
-                    <a:pt x="4951541" y="1121945"/>
-                  </a:lnTo>
-                  <a:lnTo>
-                    <a:pt x="4874909" y="1106343"/>
-                  </a:lnTo>
-                  <a:lnTo>
-                    <a:pt x="4798276" y="1089656"/>
-                  </a:lnTo>
-                  <a:lnTo>
-                    <a:pt x="4721644" y="1071811"/>
-                  </a:lnTo>
-                  <a:lnTo>
-                    <a:pt x="4645011" y="1052727"/>
-                  </a:lnTo>
-                  <a:lnTo>
-                    <a:pt x="4568378" y="1032317"/>
-                  </a:lnTo>
-                  <a:lnTo>
-                    <a:pt x="4491746" y="1010490"/>
-                  </a:lnTo>
-                  <a:lnTo>
-                    <a:pt x="4415113" y="987146"/>
-                  </a:lnTo>
-                  <a:lnTo>
-                    <a:pt x="4338481" y="962182"/>
-                  </a:lnTo>
-                  <a:lnTo>
-                    <a:pt x="4261848" y="935484"/>
-                  </a:lnTo>
-                  <a:lnTo>
-                    <a:pt x="4185216" y="906931"/>
-                  </a:lnTo>
-                  <a:lnTo>
-                    <a:pt x="4108583" y="876395"/>
-                  </a:lnTo>
-                  <a:lnTo>
-                    <a:pt x="4031951" y="843739"/>
-                  </a:lnTo>
-                  <a:lnTo>
-                    <a:pt x="3955318" y="808814"/>
-                  </a:lnTo>
-                  <a:lnTo>
-                    <a:pt x="3878685" y="771464"/>
-                  </a:lnTo>
-                  <a:lnTo>
-                    <a:pt x="3802053" y="731520"/>
-                  </a:lnTo>
-                  <a:lnTo>
-                    <a:pt x="3725420" y="688802"/>
-                  </a:lnTo>
-                  <a:lnTo>
-                    <a:pt x="3648788" y="643117"/>
-                  </a:lnTo>
-                  <a:lnTo>
-                    <a:pt x="3572155" y="594259"/>
-                  </a:lnTo>
-                  <a:lnTo>
-                    <a:pt x="3495523" y="542008"/>
-                  </a:lnTo>
-                  <a:lnTo>
-                    <a:pt x="3418890" y="486127"/>
-                  </a:lnTo>
-                  <a:lnTo>
-                    <a:pt x="3342258" y="469693"/>
-                  </a:lnTo>
-                  <a:lnTo>
-                    <a:pt x="3265625" y="461027"/>
-                  </a:lnTo>
-                  <a:lnTo>
-                    <a:pt x="3188993" y="452274"/>
-                  </a:lnTo>
-                  <a:lnTo>
-                    <a:pt x="3112360" y="443436"/>
-                  </a:lnTo>
-                  <a:lnTo>
-                    <a:pt x="3035727" y="434510"/>
-                  </a:lnTo>
-                  <a:lnTo>
-                    <a:pt x="2959095" y="425495"/>
-                  </a:lnTo>
-                  <a:lnTo>
-                    <a:pt x="2882462" y="416392"/>
-                  </a:lnTo>
-                  <a:lnTo>
-                    <a:pt x="2805830" y="407199"/>
-                  </a:lnTo>
-                  <a:lnTo>
-                    <a:pt x="2729197" y="397914"/>
-                  </a:lnTo>
-                  <a:lnTo>
-                    <a:pt x="2652565" y="388538"/>
-                  </a:lnTo>
-                  <a:lnTo>
-                    <a:pt x="2575932" y="379070"/>
-                  </a:lnTo>
-                  <a:lnTo>
-                    <a:pt x="2499300" y="369508"/>
-                  </a:lnTo>
-                  <a:lnTo>
-                    <a:pt x="2422667" y="359851"/>
-                  </a:lnTo>
-                  <a:lnTo>
-                    <a:pt x="2346034" y="350099"/>
-                  </a:lnTo>
-                  <a:lnTo>
-                    <a:pt x="2269402" y="340250"/>
-                  </a:lnTo>
-                  <a:lnTo>
-                    <a:pt x="2192769" y="330304"/>
-                  </a:lnTo>
-                  <a:lnTo>
-                    <a:pt x="2116137" y="320260"/>
-                  </a:lnTo>
-                  <a:lnTo>
-                    <a:pt x="2039504" y="310117"/>
-                  </a:lnTo>
-                  <a:lnTo>
-                    <a:pt x="1962872" y="299873"/>
-                  </a:lnTo>
-                  <a:lnTo>
-                    <a:pt x="1886239" y="289528"/>
-                  </a:lnTo>
-                  <a:lnTo>
-                    <a:pt x="1809607" y="279081"/>
-                  </a:lnTo>
-                  <a:lnTo>
-                    <a:pt x="1732974" y="268531"/>
-                  </a:lnTo>
-                  <a:lnTo>
-                    <a:pt x="1656342" y="257876"/>
-                  </a:lnTo>
-                  <a:lnTo>
-                    <a:pt x="1579709" y="247116"/>
-                  </a:lnTo>
-                  <a:lnTo>
-                    <a:pt x="1503076" y="236250"/>
-                  </a:lnTo>
-                  <a:lnTo>
-                    <a:pt x="1426444" y="225276"/>
-                  </a:lnTo>
-                  <a:lnTo>
-                    <a:pt x="1349811" y="214194"/>
-                  </a:lnTo>
-                  <a:lnTo>
-                    <a:pt x="1273179" y="203002"/>
-                  </a:lnTo>
-                  <a:lnTo>
-                    <a:pt x="1196546" y="191700"/>
-                  </a:lnTo>
-                  <a:lnTo>
-                    <a:pt x="1119914" y="180286"/>
-                  </a:lnTo>
-                  <a:lnTo>
-                    <a:pt x="1043281" y="168759"/>
-                  </a:lnTo>
-                  <a:lnTo>
-                    <a:pt x="966649" y="157118"/>
-                  </a:lnTo>
-                  <a:lnTo>
-                    <a:pt x="890016" y="145363"/>
-                  </a:lnTo>
-                  <a:lnTo>
-                    <a:pt x="813384" y="133491"/>
-                  </a:lnTo>
-                  <a:lnTo>
-                    <a:pt x="736751" y="121501"/>
-                  </a:lnTo>
-                  <a:lnTo>
-                    <a:pt x="660118" y="109394"/>
-                  </a:lnTo>
-                  <a:lnTo>
-                    <a:pt x="583486" y="97166"/>
-                  </a:lnTo>
-                  <a:lnTo>
-                    <a:pt x="506853" y="84818"/>
-                  </a:lnTo>
-                  <a:lnTo>
-                    <a:pt x="430221" y="72348"/>
-                  </a:lnTo>
-                  <a:lnTo>
-                    <a:pt x="353588" y="59754"/>
-                  </a:lnTo>
-                  <a:lnTo>
-                    <a:pt x="276956" y="47036"/>
-                  </a:lnTo>
-                  <a:lnTo>
-                    <a:pt x="200323" y="34192"/>
-                  </a:lnTo>
-                  <a:lnTo>
-                    <a:pt x="123691" y="21222"/>
-                  </a:lnTo>
-                  <a:lnTo>
-                    <a:pt x="47058" y="8123"/>
+                    <a:pt x="7327150" y="1257604"/>
+                  </a:lnTo>
+                  <a:lnTo>
+                    <a:pt x="7250518" y="1255748"/>
+                  </a:lnTo>
+                  <a:lnTo>
+                    <a:pt x="7173885" y="1253763"/>
+                  </a:lnTo>
+                  <a:lnTo>
+                    <a:pt x="7097253" y="1251640"/>
+                  </a:lnTo>
+                  <a:lnTo>
+                    <a:pt x="7020620" y="1249369"/>
+                  </a:lnTo>
+                  <a:lnTo>
+                    <a:pt x="6943987" y="1246941"/>
+                  </a:lnTo>
+                  <a:lnTo>
+                    <a:pt x="6867355" y="1244344"/>
+                  </a:lnTo>
+                  <a:lnTo>
+                    <a:pt x="6790722" y="1241567"/>
+                  </a:lnTo>
+                  <a:lnTo>
+                    <a:pt x="6714090" y="1238597"/>
+                  </a:lnTo>
+                  <a:lnTo>
+                    <a:pt x="6637457" y="1235421"/>
+                  </a:lnTo>
+                  <a:lnTo>
+                    <a:pt x="6560825" y="1232024"/>
+                  </a:lnTo>
+                  <a:lnTo>
+                    <a:pt x="6484192" y="1228391"/>
+                  </a:lnTo>
+                  <a:lnTo>
+                    <a:pt x="6407560" y="1224506"/>
+                  </a:lnTo>
+                  <a:lnTo>
+                    <a:pt x="6330927" y="1220351"/>
+                  </a:lnTo>
+                  <a:lnTo>
+                    <a:pt x="6254294" y="1215907"/>
+                  </a:lnTo>
+                  <a:lnTo>
+                    <a:pt x="6177662" y="1211155"/>
+                  </a:lnTo>
+                  <a:lnTo>
+                    <a:pt x="6101029" y="1206073"/>
+                  </a:lnTo>
+                  <a:lnTo>
+                    <a:pt x="6024397" y="1200638"/>
+                  </a:lnTo>
+                  <a:lnTo>
+                    <a:pt x="5947764" y="1194825"/>
+                  </a:lnTo>
+                  <a:lnTo>
+                    <a:pt x="5871132" y="1188608"/>
+                  </a:lnTo>
+                  <a:lnTo>
+                    <a:pt x="5794499" y="1181960"/>
+                  </a:lnTo>
+                  <a:lnTo>
+                    <a:pt x="5717867" y="1174850"/>
+                  </a:lnTo>
+                  <a:lnTo>
+                    <a:pt x="5641234" y="1167247"/>
+                  </a:lnTo>
+                  <a:lnTo>
+                    <a:pt x="5564602" y="1159115"/>
+                  </a:lnTo>
+                  <a:lnTo>
+                    <a:pt x="5487969" y="1150419"/>
+                  </a:lnTo>
+                  <a:lnTo>
+                    <a:pt x="5411336" y="1141118"/>
+                  </a:lnTo>
+                  <a:lnTo>
+                    <a:pt x="5334704" y="1131172"/>
+                  </a:lnTo>
+                  <a:lnTo>
+                    <a:pt x="5258071" y="1120535"/>
+                  </a:lnTo>
+                  <a:lnTo>
+                    <a:pt x="5181439" y="1109159"/>
+                  </a:lnTo>
+                  <a:lnTo>
+                    <a:pt x="5104806" y="1096992"/>
+                  </a:lnTo>
+                  <a:lnTo>
+                    <a:pt x="5028174" y="1083981"/>
+                  </a:lnTo>
+                  <a:lnTo>
+                    <a:pt x="4951541" y="1070067"/>
+                  </a:lnTo>
+                  <a:lnTo>
+                    <a:pt x="4874909" y="1055186"/>
+                  </a:lnTo>
+                  <a:lnTo>
+                    <a:pt x="4798276" y="1039271"/>
+                  </a:lnTo>
+                  <a:lnTo>
+                    <a:pt x="4721644" y="1022251"/>
+                  </a:lnTo>
+                  <a:lnTo>
+                    <a:pt x="4645011" y="1004049"/>
+                  </a:lnTo>
+                  <a:lnTo>
+                    <a:pt x="4568378" y="984583"/>
+                  </a:lnTo>
+                  <a:lnTo>
+                    <a:pt x="4491746" y="963765"/>
+                  </a:lnTo>
+                  <a:lnTo>
+                    <a:pt x="4415113" y="941501"/>
+                  </a:lnTo>
+                  <a:lnTo>
+                    <a:pt x="4338481" y="917691"/>
+                  </a:lnTo>
+                  <a:lnTo>
+                    <a:pt x="4261848" y="892227"/>
+                  </a:lnTo>
+                  <a:lnTo>
+                    <a:pt x="4185216" y="864995"/>
+                  </a:lnTo>
+                  <a:lnTo>
+                    <a:pt x="4108583" y="835871"/>
+                  </a:lnTo>
+                  <a:lnTo>
+                    <a:pt x="4031951" y="804725"/>
+                  </a:lnTo>
+                  <a:lnTo>
+                    <a:pt x="3955318" y="771415"/>
+                  </a:lnTo>
+                  <a:lnTo>
+                    <a:pt x="3878685" y="735792"/>
+                  </a:lnTo>
+                  <a:lnTo>
+                    <a:pt x="3802053" y="697695"/>
+                  </a:lnTo>
+                  <a:lnTo>
+                    <a:pt x="3725420" y="656952"/>
+                  </a:lnTo>
+                  <a:lnTo>
+                    <a:pt x="3648788" y="613379"/>
+                  </a:lnTo>
+                  <a:lnTo>
+                    <a:pt x="3572155" y="566781"/>
+                  </a:lnTo>
+                  <a:lnTo>
+                    <a:pt x="3495523" y="516945"/>
+                  </a:lnTo>
+                  <a:lnTo>
+                    <a:pt x="3418890" y="463649"/>
+                  </a:lnTo>
+                  <a:lnTo>
+                    <a:pt x="3342258" y="447975"/>
+                  </a:lnTo>
+                  <a:lnTo>
+                    <a:pt x="3265625" y="439709"/>
+                  </a:lnTo>
+                  <a:lnTo>
+                    <a:pt x="3188993" y="431361"/>
+                  </a:lnTo>
+                  <a:lnTo>
+                    <a:pt x="3112360" y="422931"/>
+                  </a:lnTo>
+                  <a:lnTo>
+                    <a:pt x="3035727" y="414418"/>
+                  </a:lnTo>
+                  <a:lnTo>
+                    <a:pt x="2959095" y="405821"/>
+                  </a:lnTo>
+                  <a:lnTo>
+                    <a:pt x="2882462" y="397138"/>
+                  </a:lnTo>
+                  <a:lnTo>
+                    <a:pt x="2805830" y="388370"/>
+                  </a:lnTo>
+                  <a:lnTo>
+                    <a:pt x="2729197" y="379515"/>
+                  </a:lnTo>
+                  <a:lnTo>
+                    <a:pt x="2652565" y="370573"/>
+                  </a:lnTo>
+                  <a:lnTo>
+                    <a:pt x="2575932" y="361542"/>
+                  </a:lnTo>
+                  <a:lnTo>
+                    <a:pt x="2499300" y="352422"/>
+                  </a:lnTo>
+                  <a:lnTo>
+                    <a:pt x="2422667" y="343212"/>
+                  </a:lnTo>
+                  <a:lnTo>
+                    <a:pt x="2346034" y="333910"/>
+                  </a:lnTo>
+                  <a:lnTo>
+                    <a:pt x="2269402" y="324517"/>
+                  </a:lnTo>
+                  <a:lnTo>
+                    <a:pt x="2192769" y="315031"/>
+                  </a:lnTo>
+                  <a:lnTo>
+                    <a:pt x="2116137" y="305452"/>
+                  </a:lnTo>
+                  <a:lnTo>
+                    <a:pt x="2039504" y="295777"/>
+                  </a:lnTo>
+                  <a:lnTo>
+                    <a:pt x="1962872" y="286007"/>
+                  </a:lnTo>
+                  <a:lnTo>
+                    <a:pt x="1886239" y="276141"/>
+                  </a:lnTo>
+                  <a:lnTo>
+                    <a:pt x="1809607" y="266177"/>
+                  </a:lnTo>
+                  <a:lnTo>
+                    <a:pt x="1732974" y="256114"/>
+                  </a:lnTo>
+                  <a:lnTo>
+                    <a:pt x="1656342" y="245952"/>
+                  </a:lnTo>
+                  <a:lnTo>
+                    <a:pt x="1579709" y="235690"/>
+                  </a:lnTo>
+                  <a:lnTo>
+                    <a:pt x="1503076" y="225326"/>
+                  </a:lnTo>
+                  <a:lnTo>
+                    <a:pt x="1426444" y="214859"/>
+                  </a:lnTo>
+                  <a:lnTo>
+                    <a:pt x="1349811" y="204290"/>
+                  </a:lnTo>
+                  <a:lnTo>
+                    <a:pt x="1273179" y="193615"/>
+                  </a:lnTo>
+                  <a:lnTo>
+                    <a:pt x="1196546" y="182836"/>
+                  </a:lnTo>
+                  <a:lnTo>
+                    <a:pt x="1119914" y="171950"/>
+                  </a:lnTo>
+                  <a:lnTo>
+                    <a:pt x="1043281" y="160956"/>
+                  </a:lnTo>
+                  <a:lnTo>
+                    <a:pt x="966649" y="149853"/>
+                  </a:lnTo>
+                  <a:lnTo>
+                    <a:pt x="890016" y="138641"/>
+                  </a:lnTo>
+                  <a:lnTo>
+                    <a:pt x="813384" y="127318"/>
+                  </a:lnTo>
+                  <a:lnTo>
+                    <a:pt x="736751" y="115883"/>
+                  </a:lnTo>
+                  <a:lnTo>
+                    <a:pt x="660118" y="104335"/>
+                  </a:lnTo>
+                  <a:lnTo>
+                    <a:pt x="583486" y="92673"/>
+                  </a:lnTo>
+                  <a:lnTo>
+                    <a:pt x="506853" y="80896"/>
+                  </a:lnTo>
+                  <a:lnTo>
+                    <a:pt x="430221" y="69002"/>
+                  </a:lnTo>
+                  <a:lnTo>
+                    <a:pt x="353588" y="56991"/>
+                  </a:lnTo>
+                  <a:lnTo>
+                    <a:pt x="276956" y="44861"/>
+                  </a:lnTo>
+                  <a:lnTo>
+                    <a:pt x="200323" y="32611"/>
+                  </a:lnTo>
+                  <a:lnTo>
+                    <a:pt x="123691" y="20240"/>
+                  </a:lnTo>
+                  <a:lnTo>
+                    <a:pt x="47058" y="7747"/>
                   </a:lnTo>
                   <a:lnTo>
                     <a:pt x="0" y="0"/>
@@ -4121,285 +4121,285 @@
           </p:nvSpPr>
           <p:spPr>
             <a:xfrm>
-              <a:off x="1367443" y="1896563"/>
-              <a:ext cx="6853857" cy="3535837"/>
+              <a:off x="1367443" y="2073503"/>
+              <a:ext cx="6853857" cy="3372341"/>
             </a:xfrm>
             <a:custGeom>
               <a:avLst/>
               <a:pathLst>
-                <a:path w="6853857" h="3535837">
+                <a:path w="6853857" h="3372341">
                   <a:moveTo>
                     <a:pt x="0" y="0"/>
                   </a:moveTo>
                   <a:lnTo>
-                    <a:pt x="33561" y="61711"/>
-                  </a:lnTo>
-                  <a:lnTo>
-                    <a:pt x="110193" y="197301"/>
-                  </a:lnTo>
-                  <a:lnTo>
-                    <a:pt x="186826" y="327772"/>
-                  </a:lnTo>
-                  <a:lnTo>
-                    <a:pt x="263458" y="453316"/>
-                  </a:lnTo>
-                  <a:lnTo>
-                    <a:pt x="340091" y="574120"/>
-                  </a:lnTo>
-                  <a:lnTo>
-                    <a:pt x="416723" y="690362"/>
-                  </a:lnTo>
-                  <a:lnTo>
-                    <a:pt x="493356" y="802215"/>
-                  </a:lnTo>
-                  <a:lnTo>
-                    <a:pt x="569988" y="909845"/>
-                  </a:lnTo>
-                  <a:lnTo>
-                    <a:pt x="646621" y="1013410"/>
-                  </a:lnTo>
-                  <a:lnTo>
-                    <a:pt x="723253" y="1113065"/>
-                  </a:lnTo>
-                  <a:lnTo>
-                    <a:pt x="799886" y="1208957"/>
-                  </a:lnTo>
-                  <a:lnTo>
-                    <a:pt x="876519" y="1301229"/>
-                  </a:lnTo>
-                  <a:lnTo>
-                    <a:pt x="953151" y="1390016"/>
-                  </a:lnTo>
-                  <a:lnTo>
-                    <a:pt x="1029784" y="1475451"/>
-                  </a:lnTo>
-                  <a:lnTo>
-                    <a:pt x="1106416" y="1557660"/>
-                  </a:lnTo>
-                  <a:lnTo>
-                    <a:pt x="1183049" y="1636764"/>
-                  </a:lnTo>
-                  <a:lnTo>
-                    <a:pt x="1259681" y="1712882"/>
-                  </a:lnTo>
-                  <a:lnTo>
-                    <a:pt x="1336314" y="1786126"/>
-                  </a:lnTo>
-                  <a:lnTo>
-                    <a:pt x="1412946" y="1856604"/>
-                  </a:lnTo>
-                  <a:lnTo>
-                    <a:pt x="1489579" y="1924421"/>
-                  </a:lnTo>
-                  <a:lnTo>
-                    <a:pt x="1566212" y="1989677"/>
-                  </a:lnTo>
-                  <a:lnTo>
-                    <a:pt x="1642844" y="2052469"/>
-                  </a:lnTo>
-                  <a:lnTo>
-                    <a:pt x="1719477" y="2112890"/>
-                  </a:lnTo>
-                  <a:lnTo>
-                    <a:pt x="1796109" y="2171030"/>
-                  </a:lnTo>
-                  <a:lnTo>
-                    <a:pt x="1872742" y="2226974"/>
-                  </a:lnTo>
-                  <a:lnTo>
-                    <a:pt x="1949374" y="2280806"/>
-                  </a:lnTo>
-                  <a:lnTo>
-                    <a:pt x="2026007" y="2332605"/>
-                  </a:lnTo>
-                  <a:lnTo>
-                    <a:pt x="2102639" y="2382449"/>
-                  </a:lnTo>
-                  <a:lnTo>
-                    <a:pt x="2179272" y="2430410"/>
-                  </a:lnTo>
-                  <a:lnTo>
-                    <a:pt x="2255904" y="2476561"/>
-                  </a:lnTo>
-                  <a:lnTo>
-                    <a:pt x="2332537" y="2520968"/>
-                  </a:lnTo>
-                  <a:lnTo>
-                    <a:pt x="2409170" y="2563699"/>
-                  </a:lnTo>
-                  <a:lnTo>
-                    <a:pt x="2485802" y="2604817"/>
-                  </a:lnTo>
-                  <a:lnTo>
-                    <a:pt x="2562435" y="2644382"/>
-                  </a:lnTo>
-                  <a:lnTo>
-                    <a:pt x="2639067" y="2682453"/>
-                  </a:lnTo>
-                  <a:lnTo>
-                    <a:pt x="2715700" y="2719086"/>
-                  </a:lnTo>
-                  <a:lnTo>
-                    <a:pt x="2792332" y="2754337"/>
-                  </a:lnTo>
-                  <a:lnTo>
-                    <a:pt x="2868965" y="2788256"/>
-                  </a:lnTo>
-                  <a:lnTo>
-                    <a:pt x="2945597" y="2820894"/>
-                  </a:lnTo>
-                  <a:lnTo>
-                    <a:pt x="3022230" y="2852300"/>
-                  </a:lnTo>
-                  <a:lnTo>
-                    <a:pt x="3098862" y="2882521"/>
-                  </a:lnTo>
-                  <a:lnTo>
-                    <a:pt x="3175495" y="2911600"/>
-                  </a:lnTo>
-                  <a:lnTo>
-                    <a:pt x="3252128" y="2939581"/>
-                  </a:lnTo>
-                  <a:lnTo>
-                    <a:pt x="3328760" y="2966506"/>
-                  </a:lnTo>
-                  <a:lnTo>
-                    <a:pt x="3405393" y="2992413"/>
-                  </a:lnTo>
-                  <a:lnTo>
-                    <a:pt x="3482025" y="3017343"/>
-                  </a:lnTo>
-                  <a:lnTo>
-                    <a:pt x="3558658" y="3041332"/>
-                  </a:lnTo>
-                  <a:lnTo>
-                    <a:pt x="3635290" y="3064414"/>
-                  </a:lnTo>
-                  <a:lnTo>
-                    <a:pt x="3711923" y="3086625"/>
-                  </a:lnTo>
-                  <a:lnTo>
-                    <a:pt x="3788555" y="3107997"/>
-                  </a:lnTo>
-                  <a:lnTo>
-                    <a:pt x="3865188" y="3128563"/>
-                  </a:lnTo>
-                  <a:lnTo>
-                    <a:pt x="3941821" y="3148352"/>
-                  </a:lnTo>
-                  <a:lnTo>
-                    <a:pt x="4018453" y="3167393"/>
-                  </a:lnTo>
-                  <a:lnTo>
-                    <a:pt x="4095086" y="3185716"/>
-                  </a:lnTo>
-                  <a:lnTo>
-                    <a:pt x="4171718" y="3203347"/>
-                  </a:lnTo>
-                  <a:lnTo>
-                    <a:pt x="4248351" y="3220312"/>
-                  </a:lnTo>
-                  <a:lnTo>
-                    <a:pt x="4324983" y="3236636"/>
-                  </a:lnTo>
-                  <a:lnTo>
-                    <a:pt x="4401616" y="3252344"/>
-                  </a:lnTo>
-                  <a:lnTo>
-                    <a:pt x="4478248" y="3267459"/>
-                  </a:lnTo>
-                  <a:lnTo>
-                    <a:pt x="4554881" y="3282003"/>
-                  </a:lnTo>
-                  <a:lnTo>
-                    <a:pt x="4631513" y="3295998"/>
-                  </a:lnTo>
-                  <a:lnTo>
-                    <a:pt x="4708146" y="3309465"/>
-                  </a:lnTo>
-                  <a:lnTo>
-                    <a:pt x="4784779" y="3322423"/>
-                  </a:lnTo>
-                  <a:lnTo>
-                    <a:pt x="4861411" y="3334892"/>
-                  </a:lnTo>
-                  <a:lnTo>
-                    <a:pt x="4938044" y="3346890"/>
-                  </a:lnTo>
-                  <a:lnTo>
-                    <a:pt x="5014676" y="3358435"/>
-                  </a:lnTo>
-                  <a:lnTo>
-                    <a:pt x="5091309" y="3369544"/>
-                  </a:lnTo>
-                  <a:lnTo>
-                    <a:pt x="5167941" y="3380233"/>
-                  </a:lnTo>
-                  <a:lnTo>
-                    <a:pt x="5244574" y="3390519"/>
-                  </a:lnTo>
-                  <a:lnTo>
-                    <a:pt x="5321206" y="3400417"/>
-                  </a:lnTo>
-                  <a:lnTo>
-                    <a:pt x="5397839" y="3409941"/>
-                  </a:lnTo>
-                  <a:lnTo>
-                    <a:pt x="5474472" y="3419105"/>
-                  </a:lnTo>
-                  <a:lnTo>
-                    <a:pt x="5551104" y="3427923"/>
-                  </a:lnTo>
-                  <a:lnTo>
-                    <a:pt x="5627737" y="3436408"/>
-                  </a:lnTo>
-                  <a:lnTo>
-                    <a:pt x="5704369" y="3444573"/>
-                  </a:lnTo>
-                  <a:lnTo>
-                    <a:pt x="5781002" y="3452430"/>
-                  </a:lnTo>
-                  <a:lnTo>
-                    <a:pt x="5857634" y="3459990"/>
-                  </a:lnTo>
-                  <a:lnTo>
-                    <a:pt x="5934267" y="3467264"/>
-                  </a:lnTo>
-                  <a:lnTo>
-                    <a:pt x="6010899" y="3474264"/>
-                  </a:lnTo>
-                  <a:lnTo>
-                    <a:pt x="6087532" y="3480999"/>
-                  </a:lnTo>
-                  <a:lnTo>
-                    <a:pt x="6164164" y="3487480"/>
-                  </a:lnTo>
-                  <a:lnTo>
-                    <a:pt x="6240797" y="3493717"/>
-                  </a:lnTo>
-                  <a:lnTo>
-                    <a:pt x="6317430" y="3499718"/>
-                  </a:lnTo>
-                  <a:lnTo>
-                    <a:pt x="6394062" y="3505492"/>
-                  </a:lnTo>
-                  <a:lnTo>
-                    <a:pt x="6470695" y="3511048"/>
-                  </a:lnTo>
-                  <a:lnTo>
-                    <a:pt x="6547327" y="3516395"/>
-                  </a:lnTo>
-                  <a:lnTo>
-                    <a:pt x="6623960" y="3521539"/>
-                  </a:lnTo>
-                  <a:lnTo>
-                    <a:pt x="6700592" y="3526490"/>
-                  </a:lnTo>
-                  <a:lnTo>
-                    <a:pt x="6777225" y="3531253"/>
-                  </a:lnTo>
-                  <a:lnTo>
-                    <a:pt x="6853857" y="3535837"/>
+                    <a:pt x="33561" y="58858"/>
+                  </a:lnTo>
+                  <a:lnTo>
+                    <a:pt x="110193" y="188178"/>
+                  </a:lnTo>
+                  <a:lnTo>
+                    <a:pt x="186826" y="312616"/>
+                  </a:lnTo>
+                  <a:lnTo>
+                    <a:pt x="263458" y="432355"/>
+                  </a:lnTo>
+                  <a:lnTo>
+                    <a:pt x="340091" y="547573"/>
+                  </a:lnTo>
+                  <a:lnTo>
+                    <a:pt x="416723" y="658440"/>
+                  </a:lnTo>
+                  <a:lnTo>
+                    <a:pt x="493356" y="765121"/>
+                  </a:lnTo>
+                  <a:lnTo>
+                    <a:pt x="569988" y="867774"/>
+                  </a:lnTo>
+                  <a:lnTo>
+                    <a:pt x="646621" y="966551"/>
+                  </a:lnTo>
+                  <a:lnTo>
+                    <a:pt x="723253" y="1061598"/>
+                  </a:lnTo>
+                  <a:lnTo>
+                    <a:pt x="799886" y="1153056"/>
+                  </a:lnTo>
+                  <a:lnTo>
+                    <a:pt x="876519" y="1241060"/>
+                  </a:lnTo>
+                  <a:lnTo>
+                    <a:pt x="953151" y="1325742"/>
+                  </a:lnTo>
+                  <a:lnTo>
+                    <a:pt x="1029784" y="1407227"/>
+                  </a:lnTo>
+                  <a:lnTo>
+                    <a:pt x="1106416" y="1485634"/>
+                  </a:lnTo>
+                  <a:lnTo>
+                    <a:pt x="1183049" y="1561081"/>
+                  </a:lnTo>
+                  <a:lnTo>
+                    <a:pt x="1259681" y="1633679"/>
+                  </a:lnTo>
+                  <a:lnTo>
+                    <a:pt x="1336314" y="1703536"/>
+                  </a:lnTo>
+                  <a:lnTo>
+                    <a:pt x="1412946" y="1770755"/>
+                  </a:lnTo>
+                  <a:lnTo>
+                    <a:pt x="1489579" y="1835436"/>
+                  </a:lnTo>
+                  <a:lnTo>
+                    <a:pt x="1566212" y="1897675"/>
+                  </a:lnTo>
+                  <a:lnTo>
+                    <a:pt x="1642844" y="1957563"/>
+                  </a:lnTo>
+                  <a:lnTo>
+                    <a:pt x="1719477" y="2015191"/>
+                  </a:lnTo>
+                  <a:lnTo>
+                    <a:pt x="1796109" y="2070642"/>
+                  </a:lnTo>
+                  <a:lnTo>
+                    <a:pt x="1872742" y="2124000"/>
+                  </a:lnTo>
+                  <a:lnTo>
+                    <a:pt x="1949374" y="2175342"/>
+                  </a:lnTo>
+                  <a:lnTo>
+                    <a:pt x="2026007" y="2224746"/>
+                  </a:lnTo>
+                  <a:lnTo>
+                    <a:pt x="2102639" y="2272285"/>
+                  </a:lnTo>
+                  <a:lnTo>
+                    <a:pt x="2179272" y="2318029"/>
+                  </a:lnTo>
+                  <a:lnTo>
+                    <a:pt x="2255904" y="2362045"/>
+                  </a:lnTo>
+                  <a:lnTo>
+                    <a:pt x="2332537" y="2404400"/>
+                  </a:lnTo>
+                  <a:lnTo>
+                    <a:pt x="2409170" y="2445155"/>
+                  </a:lnTo>
+                  <a:lnTo>
+                    <a:pt x="2485802" y="2484371"/>
+                  </a:lnTo>
+                  <a:lnTo>
+                    <a:pt x="2562435" y="2522107"/>
+                  </a:lnTo>
+                  <a:lnTo>
+                    <a:pt x="2639067" y="2558417"/>
+                  </a:lnTo>
+                  <a:lnTo>
+                    <a:pt x="2715700" y="2593357"/>
+                  </a:lnTo>
+                  <a:lnTo>
+                    <a:pt x="2792332" y="2626977"/>
+                  </a:lnTo>
+                  <a:lnTo>
+                    <a:pt x="2868965" y="2659328"/>
+                  </a:lnTo>
+                  <a:lnTo>
+                    <a:pt x="2945597" y="2690457"/>
+                  </a:lnTo>
+                  <a:lnTo>
+                    <a:pt x="3022230" y="2720411"/>
+                  </a:lnTo>
+                  <a:lnTo>
+                    <a:pt x="3098862" y="2749234"/>
+                  </a:lnTo>
+                  <a:lnTo>
+                    <a:pt x="3175495" y="2776969"/>
+                  </a:lnTo>
+                  <a:lnTo>
+                    <a:pt x="3252128" y="2803656"/>
+                  </a:lnTo>
+                  <a:lnTo>
+                    <a:pt x="3328760" y="2829335"/>
+                  </a:lnTo>
+                  <a:lnTo>
+                    <a:pt x="3405393" y="2854045"/>
+                  </a:lnTo>
+                  <a:lnTo>
+                    <a:pt x="3482025" y="2877822"/>
+                  </a:lnTo>
+                  <a:lnTo>
+                    <a:pt x="3558658" y="2900701"/>
+                  </a:lnTo>
+                  <a:lnTo>
+                    <a:pt x="3635290" y="2922717"/>
+                  </a:lnTo>
+                  <a:lnTo>
+                    <a:pt x="3711923" y="2943901"/>
+                  </a:lnTo>
+                  <a:lnTo>
+                    <a:pt x="3788555" y="2964285"/>
+                  </a:lnTo>
+                  <a:lnTo>
+                    <a:pt x="3865188" y="2983899"/>
+                  </a:lnTo>
+                  <a:lnTo>
+                    <a:pt x="3941821" y="3002773"/>
+                  </a:lnTo>
+                  <a:lnTo>
+                    <a:pt x="4018453" y="3020934"/>
+                  </a:lnTo>
+                  <a:lnTo>
+                    <a:pt x="4095086" y="3038409"/>
+                  </a:lnTo>
+                  <a:lnTo>
+                    <a:pt x="4171718" y="3055225"/>
+                  </a:lnTo>
+                  <a:lnTo>
+                    <a:pt x="4248351" y="3071406"/>
+                  </a:lnTo>
+                  <a:lnTo>
+                    <a:pt x="4324983" y="3086975"/>
+                  </a:lnTo>
+                  <a:lnTo>
+                    <a:pt x="4401616" y="3101957"/>
+                  </a:lnTo>
+                  <a:lnTo>
+                    <a:pt x="4478248" y="3116373"/>
+                  </a:lnTo>
+                  <a:lnTo>
+                    <a:pt x="4554881" y="3130245"/>
+                  </a:lnTo>
+                  <a:lnTo>
+                    <a:pt x="4631513" y="3143592"/>
+                  </a:lnTo>
+                  <a:lnTo>
+                    <a:pt x="4708146" y="3156436"/>
+                  </a:lnTo>
+                  <a:lnTo>
+                    <a:pt x="4784779" y="3168795"/>
+                  </a:lnTo>
+                  <a:lnTo>
+                    <a:pt x="4861411" y="3180688"/>
+                  </a:lnTo>
+                  <a:lnTo>
+                    <a:pt x="4938044" y="3192131"/>
+                  </a:lnTo>
+                  <a:lnTo>
+                    <a:pt x="5014676" y="3203142"/>
+                  </a:lnTo>
+                  <a:lnTo>
+                    <a:pt x="5091309" y="3213737"/>
+                  </a:lnTo>
+                  <a:lnTo>
+                    <a:pt x="5167941" y="3223933"/>
+                  </a:lnTo>
+                  <a:lnTo>
+                    <a:pt x="5244574" y="3233743"/>
+                  </a:lnTo>
+                  <a:lnTo>
+                    <a:pt x="5321206" y="3243183"/>
+                  </a:lnTo>
+                  <a:lnTo>
+                    <a:pt x="5397839" y="3252266"/>
+                  </a:lnTo>
+                  <a:lnTo>
+                    <a:pt x="5474472" y="3261007"/>
+                  </a:lnTo>
+                  <a:lnTo>
+                    <a:pt x="5551104" y="3269417"/>
+                  </a:lnTo>
+                  <a:lnTo>
+                    <a:pt x="5627737" y="3277510"/>
+                  </a:lnTo>
+                  <a:lnTo>
+                    <a:pt x="5704369" y="3285297"/>
+                  </a:lnTo>
+                  <a:lnTo>
+                    <a:pt x="5781002" y="3292791"/>
+                  </a:lnTo>
+                  <a:lnTo>
+                    <a:pt x="5857634" y="3300001"/>
+                  </a:lnTo>
+                  <a:lnTo>
+                    <a:pt x="5934267" y="3306939"/>
+                  </a:lnTo>
+                  <a:lnTo>
+                    <a:pt x="6010899" y="3313615"/>
+                  </a:lnTo>
+                  <a:lnTo>
+                    <a:pt x="6087532" y="3320039"/>
+                  </a:lnTo>
+                  <a:lnTo>
+                    <a:pt x="6164164" y="3326221"/>
+                  </a:lnTo>
+                  <a:lnTo>
+                    <a:pt x="6240797" y="3332169"/>
+                  </a:lnTo>
+                  <a:lnTo>
+                    <a:pt x="6317430" y="3337892"/>
+                  </a:lnTo>
+                  <a:lnTo>
+                    <a:pt x="6394062" y="3343399"/>
+                  </a:lnTo>
+                  <a:lnTo>
+                    <a:pt x="6470695" y="3348699"/>
+                  </a:lnTo>
+                  <a:lnTo>
+                    <a:pt x="6547327" y="3353798"/>
+                  </a:lnTo>
+                  <a:lnTo>
+                    <a:pt x="6623960" y="3358705"/>
+                  </a:lnTo>
+                  <a:lnTo>
+                    <a:pt x="6700592" y="3363426"/>
+                  </a:lnTo>
+                  <a:lnTo>
+                    <a:pt x="6777225" y="3367969"/>
+                  </a:lnTo>
+                  <a:lnTo>
+                    <a:pt x="6853857" y="3372341"/>
                   </a:lnTo>
                 </a:path>
               </a:pathLst>
@@ -4428,7 +4428,7 @@
           </p:nvSpPr>
           <p:spPr>
             <a:xfrm>
-              <a:off x="817517" y="4679530"/>
+              <a:off x="817517" y="4727786"/>
               <a:ext cx="7799693" cy="0"/>
             </a:xfrm>
             <a:custGeom>
@@ -4471,15 +4471,15 @@
           </p:nvSpPr>
           <p:spPr>
             <a:xfrm>
-              <a:off x="4224261" y="1896563"/>
-              <a:ext cx="0" cy="3826579"/>
+              <a:off x="4224261" y="2073503"/>
+              <a:ext cx="0" cy="3649639"/>
             </a:xfrm>
             <a:custGeom>
               <a:avLst/>
               <a:pathLst>
-                <a:path w="0" h="3826579">
+                <a:path w="0" h="3649639">
                   <a:moveTo>
-                    <a:pt x="0" y="3826579"/>
+                    <a:pt x="0" y="3649639"/>
                   </a:moveTo>
                   <a:lnTo>
                     <a:pt x="0" y="0"/>
@@ -4514,7 +4514,7 @@
           </p:nvSpPr>
           <p:spPr>
             <a:xfrm>
-              <a:off x="692708" y="5509156"/>
+              <a:off x="692708" y="5517199"/>
               <a:ext cx="62179" cy="80101"/>
             </a:xfrm>
             <a:prstGeom prst="rect">
@@ -4560,7 +4560,7 @@
           </p:nvSpPr>
           <p:spPr>
             <a:xfrm>
-              <a:off x="692708" y="4639479"/>
+              <a:off x="692708" y="4687735"/>
               <a:ext cx="62179" cy="80101"/>
             </a:xfrm>
             <a:prstGeom prst="rect">
@@ -4606,7 +4606,7 @@
           </p:nvSpPr>
           <p:spPr>
             <a:xfrm>
-              <a:off x="692708" y="3769802"/>
+              <a:off x="692708" y="3858272"/>
               <a:ext cx="62179" cy="80101"/>
             </a:xfrm>
             <a:prstGeom prst="rect">
@@ -4652,7 +4652,7 @@
           </p:nvSpPr>
           <p:spPr>
             <a:xfrm>
-              <a:off x="692708" y="2900125"/>
+              <a:off x="692708" y="3028808"/>
               <a:ext cx="62179" cy="80101"/>
             </a:xfrm>
             <a:prstGeom prst="rect">
@@ -4698,7 +4698,7 @@
           </p:nvSpPr>
           <p:spPr>
             <a:xfrm>
-              <a:off x="692708" y="2030448"/>
+              <a:off x="692708" y="2199345"/>
               <a:ext cx="62179" cy="80101"/>
             </a:xfrm>
             <a:prstGeom prst="rect">
@@ -4974,7 +4974,7 @@
           </p:nvSpPr>
           <p:spPr>
             <a:xfrm rot="-5400000">
-              <a:off x="68446" y="3759743"/>
+              <a:off x="68446" y="3848213"/>
               <a:ext cx="1016904" cy="100218"/>
             </a:xfrm>
             <a:prstGeom prst="rect">
@@ -5015,6 +5015,52 @@
         <p:sp>
           <p:nvSpPr>
             <p:cNvPr id="38" name="tx38"/>
+            <p:cNvSpPr/>
+            <p:nvPr/>
+          </p:nvSpPr>
+          <p:spPr>
+            <a:xfrm>
+              <a:off x="817517" y="1896563"/>
+              <a:ext cx="5689762" cy="82021"/>
+            </a:xfrm>
+            <a:prstGeom prst="rect">
+              <a:avLst/>
+            </a:prstGeom>
+            <a:noFill/>
+          </p:spPr>
+          <p:txBody>
+            <a:bodyPr lIns="0" rIns="0" tIns="0" bIns="0" anchorCtr="1" anchor="ctr" wrap="none"/>
+            <a:lstStyle/>
+            <a:p>
+              <a:pPr algn="l" marL="0" marR="0" indent="0">
+                <a:lnSpc>
+                  <a:spcPts val="900"/>
+                </a:lnSpc>
+                <a:spcBef>
+                  <a:spcPts val="0"/>
+                </a:spcBef>
+                <a:spcAft>
+                  <a:spcPts val="0"/>
+                </a:spcAft>
+              </a:pPr>
+              <a:r>
+                <a:rPr sz="900">
+                  <a:solidFill>
+                    <a:srgbClr val="404040">
+                      <a:alpha val="100000"/>
+                    </a:srgbClr>
+                  </a:solidFill>
+                  <a:latin typeface="Helvetica"/>
+                  <a:cs typeface="Helvetica"/>
+                </a:rPr>
+                <a:t>subHR per 0.1 ratio decline: 1.56 (1.12-2.17)  |  per IQR decline (Δ = 0.30): 3.79 (1.41-10.21)  |  IQR: [0.85, 1.15]</a:t>
+              </a:r>
+            </a:p>
+          </p:txBody>
+        </p:sp>
+        <p:sp>
+          <p:nvSpPr>
+            <p:cNvPr id="39" name="tx39"/>
             <p:cNvSpPr/>
             <p:nvPr/>
           </p:nvSpPr>

--- a/docs/pptx/carbo/jx-carbo-linsubhr-ratio-hosp1.pptx
+++ b/docs/pptx/carbo/jx-carbo-linsubhr-ratio-hosp1.pptx
@@ -5021,7 +5021,7 @@
           <p:spPr>
             <a:xfrm>
               <a:off x="817517" y="1896563"/>
-              <a:ext cx="5689762" cy="82021"/>
+              <a:ext cx="6232916" cy="82021"/>
             </a:xfrm>
             <a:prstGeom prst="rect">
               <a:avLst/>
@@ -5053,7 +5053,7 @@
                   <a:latin typeface="Helvetica"/>
                   <a:cs typeface="Helvetica"/>
                 </a:rPr>
-                <a:t>subHR per 0.1 ratio decline: 1.56 (1.12-2.17)  |  per IQR decline (Δ = 0.30): 3.79 (1.41-10.21)  |  IQR: [0.85, 1.15]</a:t>
+                <a:t>subHR per 0.1 ratio decline: 1.56 (1.12-2.17), p = 0.008  |  per IQR decline (Δ = 0.30): 3.79 (1.41-10.21)  |  IQR: [0.85, 1.15]</a:t>
               </a:r>
             </a:p>
           </p:txBody>

--- a/docs/pptx/carbo/jx-carbo-linsubhr-ratio-hosp1.pptx
+++ b/docs/pptx/carbo/jx-carbo-linsubhr-ratio-hosp1.pptx
@@ -2443,7 +2443,7 @@
           </p:nvSpPr>
           <p:spPr>
             <a:xfrm>
-              <a:off x="1615213" y="2073503"/>
+              <a:off x="1467192" y="2073503"/>
               <a:ext cx="0" cy="3649639"/>
             </a:xfrm>
             <a:custGeom>
@@ -2486,7 +2486,7 @@
           </p:nvSpPr>
           <p:spPr>
             <a:xfrm>
-              <a:off x="3387871" y="2073503"/>
+              <a:off x="3538150" y="2073503"/>
               <a:ext cx="0" cy="3649639"/>
             </a:xfrm>
             <a:custGeom>
@@ -2529,7 +2529,7 @@
           </p:nvSpPr>
           <p:spPr>
             <a:xfrm>
-              <a:off x="5160528" y="2073503"/>
+              <a:off x="5609107" y="2073503"/>
               <a:ext cx="0" cy="3649639"/>
             </a:xfrm>
             <a:custGeom>
@@ -2572,7 +2572,7 @@
           </p:nvSpPr>
           <p:spPr>
             <a:xfrm>
-              <a:off x="6933186" y="2073503"/>
+              <a:off x="7680065" y="2073503"/>
               <a:ext cx="0" cy="3649639"/>
             </a:xfrm>
             <a:custGeom>
@@ -2830,7 +2830,7 @@
           </p:nvSpPr>
           <p:spPr>
             <a:xfrm>
-              <a:off x="2501542" y="2073503"/>
+              <a:off x="2502671" y="2073503"/>
               <a:ext cx="0" cy="3649639"/>
             </a:xfrm>
             <a:custGeom>
@@ -2873,7 +2873,7 @@
           </p:nvSpPr>
           <p:spPr>
             <a:xfrm>
-              <a:off x="4274200" y="2073503"/>
+              <a:off x="4573628" y="2073503"/>
               <a:ext cx="0" cy="3649639"/>
             </a:xfrm>
             <a:custGeom>
@@ -2916,7 +2916,7 @@
           </p:nvSpPr>
           <p:spPr>
             <a:xfrm>
-              <a:off x="6046857" y="2073503"/>
+              <a:off x="6644586" y="2073503"/>
               <a:ext cx="0" cy="3649639"/>
             </a:xfrm>
             <a:custGeom>
@@ -2953,580 +2953,543 @@
         </p:sp>
         <p:sp>
           <p:nvSpPr>
-            <p:cNvPr id="20" name="pl20"/>
+            <p:cNvPr id="20" name="pg20"/>
             <p:cNvSpPr/>
             <p:nvPr/>
           </p:nvSpPr>
           <p:spPr>
             <a:xfrm>
-              <a:off x="7819515" y="2073503"/>
-              <a:ext cx="0" cy="3649639"/>
+              <a:off x="1172049" y="2073503"/>
+              <a:ext cx="7090630" cy="3458755"/>
             </a:xfrm>
             <a:custGeom>
               <a:avLst/>
               <a:pathLst>
-                <a:path w="0" h="3649639">
+                <a:path w="7090630" h="3458755">
                   <a:moveTo>
-                    <a:pt x="0" y="3649639"/>
+                    <a:pt x="1824751" y="0"/>
                   </a:moveTo>
                   <a:lnTo>
-                    <a:pt x="0" y="0"/>
-                  </a:lnTo>
-                  <a:lnTo>
-                    <a:pt x="0" y="0"/>
-                  </a:lnTo>
-                </a:path>
-              </a:pathLst>
-            </a:custGeom>
-            <a:ln w="13550" cap="flat">
-              <a:solidFill>
-                <a:srgbClr val="EBEBEB">
-                  <a:alpha val="100000"/>
-                </a:srgbClr>
-              </a:solidFill>
-              <a:prstDash val="solid"/>
-              <a:round/>
-            </a:ln>
-          </p:spPr>
-          <p:txBody>
-            <a:bodyPr/>
-            <a:lstStyle/>
-            <a:p/>
-          </p:txBody>
-        </p:sp>
-        <p:sp>
-          <p:nvSpPr>
-            <p:cNvPr id="21" name="pg21"/>
-            <p:cNvSpPr/>
-            <p:nvPr/>
-          </p:nvSpPr>
-          <p:spPr>
-            <a:xfrm>
-              <a:off x="817517" y="2073503"/>
-              <a:ext cx="7403783" cy="3458755"/>
-            </a:xfrm>
-            <a:custGeom>
-              <a:avLst/>
-              <a:pathLst>
-                <a:path w="7403783" h="3458755">
-                  <a:moveTo>
-                    <a:pt x="1769554" y="0"/>
-                  </a:moveTo>
-                  <a:lnTo>
-                    <a:pt x="1809607" y="122028"/>
-                  </a:lnTo>
-                  <a:lnTo>
-                    <a:pt x="1886239" y="340343"/>
-                  </a:lnTo>
-                  <a:lnTo>
-                    <a:pt x="1962872" y="544481"/>
-                  </a:lnTo>
-                  <a:lnTo>
-                    <a:pt x="2039504" y="735361"/>
-                  </a:lnTo>
-                  <a:lnTo>
-                    <a:pt x="2116137" y="913846"/>
-                  </a:lnTo>
-                  <a:lnTo>
-                    <a:pt x="2192769" y="1080739"/>
-                  </a:lnTo>
-                  <a:lnTo>
-                    <a:pt x="2269402" y="1236794"/>
-                  </a:lnTo>
-                  <a:lnTo>
-                    <a:pt x="2346034" y="1382715"/>
-                  </a:lnTo>
-                  <a:lnTo>
-                    <a:pt x="2422667" y="1519159"/>
-                  </a:lnTo>
-                  <a:lnTo>
-                    <a:pt x="2499300" y="1646742"/>
-                  </a:lnTo>
-                  <a:lnTo>
-                    <a:pt x="2575932" y="1766040"/>
-                  </a:lnTo>
-                  <a:lnTo>
-                    <a:pt x="2652565" y="1877591"/>
-                  </a:lnTo>
-                  <a:lnTo>
-                    <a:pt x="2729197" y="1981897"/>
-                  </a:lnTo>
-                  <a:lnTo>
-                    <a:pt x="2805830" y="2079430"/>
-                  </a:lnTo>
-                  <a:lnTo>
-                    <a:pt x="2882462" y="2170628"/>
-                  </a:lnTo>
-                  <a:lnTo>
-                    <a:pt x="2959095" y="2255904"/>
-                  </a:lnTo>
-                  <a:lnTo>
-                    <a:pt x="3035727" y="2335642"/>
-                  </a:lnTo>
-                  <a:lnTo>
-                    <a:pt x="3112360" y="2410202"/>
-                  </a:lnTo>
-                  <a:lnTo>
-                    <a:pt x="3188993" y="2479920"/>
-                  </a:lnTo>
-                  <a:lnTo>
-                    <a:pt x="3265625" y="2545110"/>
-                  </a:lnTo>
-                  <a:lnTo>
-                    <a:pt x="3342258" y="2606066"/>
-                  </a:lnTo>
-                  <a:lnTo>
-                    <a:pt x="3418890" y="2655575"/>
-                  </a:lnTo>
-                  <a:lnTo>
-                    <a:pt x="3495523" y="2663680"/>
-                  </a:lnTo>
-                  <a:lnTo>
-                    <a:pt x="3572155" y="2671705"/>
-                  </a:lnTo>
-                  <a:lnTo>
-                    <a:pt x="3648788" y="2679652"/>
-                  </a:lnTo>
-                  <a:lnTo>
-                    <a:pt x="3725420" y="2687521"/>
-                  </a:lnTo>
-                  <a:lnTo>
-                    <a:pt x="3802053" y="2695314"/>
-                  </a:lnTo>
-                  <a:lnTo>
-                    <a:pt x="3878685" y="2703029"/>
-                  </a:lnTo>
-                  <a:lnTo>
-                    <a:pt x="3955318" y="2710670"/>
-                  </a:lnTo>
-                  <a:lnTo>
-                    <a:pt x="4031951" y="2718236"/>
-                  </a:lnTo>
-                  <a:lnTo>
-                    <a:pt x="4108583" y="2725727"/>
-                  </a:lnTo>
-                  <a:lnTo>
-                    <a:pt x="4185216" y="2733145"/>
-                  </a:lnTo>
-                  <a:lnTo>
-                    <a:pt x="4261848" y="2740491"/>
-                  </a:lnTo>
-                  <a:lnTo>
-                    <a:pt x="4338481" y="2747765"/>
-                  </a:lnTo>
-                  <a:lnTo>
-                    <a:pt x="4415113" y="2754967"/>
-                  </a:lnTo>
-                  <a:lnTo>
-                    <a:pt x="4491746" y="2762100"/>
-                  </a:lnTo>
-                  <a:lnTo>
-                    <a:pt x="4568378" y="2769162"/>
-                  </a:lnTo>
-                  <a:lnTo>
-                    <a:pt x="4645011" y="2776155"/>
-                  </a:lnTo>
-                  <a:lnTo>
-                    <a:pt x="4721644" y="2783080"/>
-                  </a:lnTo>
-                  <a:lnTo>
-                    <a:pt x="4798276" y="2789937"/>
-                  </a:lnTo>
-                  <a:lnTo>
-                    <a:pt x="4874909" y="2796727"/>
-                  </a:lnTo>
-                  <a:lnTo>
-                    <a:pt x="4951541" y="2803450"/>
-                  </a:lnTo>
-                  <a:lnTo>
-                    <a:pt x="5028174" y="2810108"/>
-                  </a:lnTo>
-                  <a:lnTo>
-                    <a:pt x="5104806" y="2816700"/>
-                  </a:lnTo>
-                  <a:lnTo>
-                    <a:pt x="5181439" y="2823228"/>
-                  </a:lnTo>
-                  <a:lnTo>
-                    <a:pt x="5258071" y="2829693"/>
-                  </a:lnTo>
-                  <a:lnTo>
-                    <a:pt x="5334704" y="2836093"/>
-                  </a:lnTo>
-                  <a:lnTo>
-                    <a:pt x="5411336" y="2842432"/>
-                  </a:lnTo>
-                  <a:lnTo>
-                    <a:pt x="5487969" y="2848708"/>
-                  </a:lnTo>
-                  <a:lnTo>
-                    <a:pt x="5564602" y="2854922"/>
-                  </a:lnTo>
-                  <a:lnTo>
-                    <a:pt x="5641234" y="2861076"/>
-                  </a:lnTo>
-                  <a:lnTo>
-                    <a:pt x="5717867" y="2867170"/>
-                  </a:lnTo>
-                  <a:lnTo>
-                    <a:pt x="5794499" y="2873204"/>
-                  </a:lnTo>
-                  <a:lnTo>
-                    <a:pt x="5871132" y="2879179"/>
-                  </a:lnTo>
-                  <a:lnTo>
-                    <a:pt x="5947764" y="2885096"/>
-                  </a:lnTo>
-                  <a:lnTo>
-                    <a:pt x="6024397" y="2890954"/>
-                  </a:lnTo>
-                  <a:lnTo>
-                    <a:pt x="6101029" y="2896756"/>
-                  </a:lnTo>
-                  <a:lnTo>
-                    <a:pt x="6177662" y="2902500"/>
-                  </a:lnTo>
-                  <a:lnTo>
-                    <a:pt x="6254294" y="2908189"/>
-                  </a:lnTo>
-                  <a:lnTo>
-                    <a:pt x="6330927" y="2913821"/>
-                  </a:lnTo>
-                  <a:lnTo>
-                    <a:pt x="6407560" y="2919399"/>
-                  </a:lnTo>
-                  <a:lnTo>
-                    <a:pt x="6484192" y="2924922"/>
-                  </a:lnTo>
-                  <a:lnTo>
-                    <a:pt x="6560825" y="2930391"/>
-                  </a:lnTo>
-                  <a:lnTo>
-                    <a:pt x="6637457" y="2935806"/>
-                  </a:lnTo>
-                  <a:lnTo>
-                    <a:pt x="6714090" y="2941168"/>
-                  </a:lnTo>
-                  <a:lnTo>
-                    <a:pt x="6790722" y="2946478"/>
-                  </a:lnTo>
-                  <a:lnTo>
-                    <a:pt x="6867355" y="2951736"/>
-                  </a:lnTo>
-                  <a:lnTo>
-                    <a:pt x="6943987" y="2956943"/>
-                  </a:lnTo>
-                  <a:lnTo>
-                    <a:pt x="7020620" y="2962098"/>
-                  </a:lnTo>
-                  <a:lnTo>
-                    <a:pt x="7097253" y="2967203"/>
-                  </a:lnTo>
-                  <a:lnTo>
-                    <a:pt x="7173885" y="2972258"/>
-                  </a:lnTo>
-                  <a:lnTo>
-                    <a:pt x="7250518" y="2977264"/>
-                  </a:lnTo>
-                  <a:lnTo>
-                    <a:pt x="7327150" y="2982220"/>
-                  </a:lnTo>
-                  <a:lnTo>
-                    <a:pt x="7403783" y="2987129"/>
-                  </a:lnTo>
-                  <a:lnTo>
-                    <a:pt x="7403783" y="3458755"/>
-                  </a:lnTo>
-                  <a:lnTo>
-                    <a:pt x="7327150" y="3457019"/>
-                  </a:lnTo>
-                  <a:lnTo>
-                    <a:pt x="7250518" y="3455163"/>
-                  </a:lnTo>
-                  <a:lnTo>
-                    <a:pt x="7173885" y="3453178"/>
-                  </a:lnTo>
-                  <a:lnTo>
-                    <a:pt x="7097253" y="3451055"/>
-                  </a:lnTo>
-                  <a:lnTo>
-                    <a:pt x="7020620" y="3448784"/>
-                  </a:lnTo>
-                  <a:lnTo>
-                    <a:pt x="6943987" y="3446356"/>
-                  </a:lnTo>
-                  <a:lnTo>
-                    <a:pt x="6867355" y="3443759"/>
-                  </a:lnTo>
-                  <a:lnTo>
-                    <a:pt x="6790722" y="3440982"/>
-                  </a:lnTo>
-                  <a:lnTo>
-                    <a:pt x="6714090" y="3438012"/>
-                  </a:lnTo>
-                  <a:lnTo>
-                    <a:pt x="6637457" y="3434836"/>
-                  </a:lnTo>
-                  <a:lnTo>
-                    <a:pt x="6560825" y="3431439"/>
-                  </a:lnTo>
-                  <a:lnTo>
-                    <a:pt x="6484192" y="3427806"/>
-                  </a:lnTo>
-                  <a:lnTo>
-                    <a:pt x="6407560" y="3423921"/>
-                  </a:lnTo>
-                  <a:lnTo>
-                    <a:pt x="6330927" y="3419766"/>
-                  </a:lnTo>
-                  <a:lnTo>
-                    <a:pt x="6254294" y="3415322"/>
-                  </a:lnTo>
-                  <a:lnTo>
-                    <a:pt x="6177662" y="3410570"/>
-                  </a:lnTo>
-                  <a:lnTo>
-                    <a:pt x="6101029" y="3405488"/>
-                  </a:lnTo>
-                  <a:lnTo>
-                    <a:pt x="6024397" y="3400053"/>
-                  </a:lnTo>
-                  <a:lnTo>
-                    <a:pt x="5947764" y="3394240"/>
-                  </a:lnTo>
-                  <a:lnTo>
-                    <a:pt x="5871132" y="3388024"/>
-                  </a:lnTo>
-                  <a:lnTo>
-                    <a:pt x="5794499" y="3381376"/>
-                  </a:lnTo>
-                  <a:lnTo>
-                    <a:pt x="5717867" y="3374266"/>
-                  </a:lnTo>
-                  <a:lnTo>
-                    <a:pt x="5641234" y="3366662"/>
-                  </a:lnTo>
-                  <a:lnTo>
-                    <a:pt x="5564602" y="3358530"/>
-                  </a:lnTo>
-                  <a:lnTo>
-                    <a:pt x="5487969" y="3349834"/>
-                  </a:lnTo>
-                  <a:lnTo>
-                    <a:pt x="5411336" y="3340533"/>
-                  </a:lnTo>
-                  <a:lnTo>
-                    <a:pt x="5334704" y="3330587"/>
-                  </a:lnTo>
-                  <a:lnTo>
-                    <a:pt x="5258071" y="3319950"/>
-                  </a:lnTo>
-                  <a:lnTo>
-                    <a:pt x="5181439" y="3308574"/>
-                  </a:lnTo>
-                  <a:lnTo>
-                    <a:pt x="5104806" y="3296408"/>
-                  </a:lnTo>
-                  <a:lnTo>
-                    <a:pt x="5028174" y="3283397"/>
-                  </a:lnTo>
-                  <a:lnTo>
-                    <a:pt x="4951541" y="3269482"/>
-                  </a:lnTo>
-                  <a:lnTo>
-                    <a:pt x="4874909" y="3254601"/>
-                  </a:lnTo>
-                  <a:lnTo>
-                    <a:pt x="4798276" y="3238686"/>
-                  </a:lnTo>
-                  <a:lnTo>
-                    <a:pt x="4721644" y="3221666"/>
-                  </a:lnTo>
-                  <a:lnTo>
-                    <a:pt x="4645011" y="3203464"/>
-                  </a:lnTo>
-                  <a:lnTo>
-                    <a:pt x="4568378" y="3183998"/>
-                  </a:lnTo>
-                  <a:lnTo>
-                    <a:pt x="4491746" y="3163180"/>
-                  </a:lnTo>
-                  <a:lnTo>
-                    <a:pt x="4415113" y="3140916"/>
-                  </a:lnTo>
-                  <a:lnTo>
-                    <a:pt x="4338481" y="3117106"/>
-                  </a:lnTo>
-                  <a:lnTo>
-                    <a:pt x="4261848" y="3091642"/>
-                  </a:lnTo>
-                  <a:lnTo>
-                    <a:pt x="4185216" y="3064410"/>
-                  </a:lnTo>
-                  <a:lnTo>
-                    <a:pt x="4108583" y="3035286"/>
-                  </a:lnTo>
-                  <a:lnTo>
-                    <a:pt x="4031951" y="3004140"/>
-                  </a:lnTo>
-                  <a:lnTo>
-                    <a:pt x="3955318" y="2970830"/>
-                  </a:lnTo>
-                  <a:lnTo>
-                    <a:pt x="3878685" y="2935207"/>
-                  </a:lnTo>
-                  <a:lnTo>
-                    <a:pt x="3802053" y="2897110"/>
-                  </a:lnTo>
-                  <a:lnTo>
-                    <a:pt x="3725420" y="2856367"/>
-                  </a:lnTo>
-                  <a:lnTo>
-                    <a:pt x="3648788" y="2812795"/>
-                  </a:lnTo>
-                  <a:lnTo>
-                    <a:pt x="3572155" y="2766196"/>
-                  </a:lnTo>
-                  <a:lnTo>
-                    <a:pt x="3495523" y="2716360"/>
-                  </a:lnTo>
-                  <a:lnTo>
-                    <a:pt x="3418890" y="2663064"/>
-                  </a:lnTo>
-                  <a:lnTo>
-                    <a:pt x="3342258" y="2647390"/>
-                  </a:lnTo>
-                  <a:lnTo>
-                    <a:pt x="3265625" y="2639124"/>
-                  </a:lnTo>
-                  <a:lnTo>
-                    <a:pt x="3188993" y="2630777"/>
-                  </a:lnTo>
-                  <a:lnTo>
-                    <a:pt x="3112360" y="2622347"/>
-                  </a:lnTo>
-                  <a:lnTo>
-                    <a:pt x="3035727" y="2613833"/>
-                  </a:lnTo>
-                  <a:lnTo>
-                    <a:pt x="2959095" y="2605236"/>
-                  </a:lnTo>
-                  <a:lnTo>
-                    <a:pt x="2882462" y="2596553"/>
-                  </a:lnTo>
-                  <a:lnTo>
-                    <a:pt x="2805830" y="2587785"/>
-                  </a:lnTo>
-                  <a:lnTo>
-                    <a:pt x="2729197" y="2578930"/>
-                  </a:lnTo>
-                  <a:lnTo>
-                    <a:pt x="2652565" y="2569988"/>
-                  </a:lnTo>
-                  <a:lnTo>
-                    <a:pt x="2575932" y="2560957"/>
-                  </a:lnTo>
-                  <a:lnTo>
-                    <a:pt x="2499300" y="2551837"/>
-                  </a:lnTo>
-                  <a:lnTo>
-                    <a:pt x="2422667" y="2542627"/>
-                  </a:lnTo>
-                  <a:lnTo>
-                    <a:pt x="2346034" y="2533326"/>
-                  </a:lnTo>
-                  <a:lnTo>
-                    <a:pt x="2269402" y="2523932"/>
-                  </a:lnTo>
-                  <a:lnTo>
-                    <a:pt x="2192769" y="2514447"/>
-                  </a:lnTo>
-                  <a:lnTo>
-                    <a:pt x="2116137" y="2504867"/>
-                  </a:lnTo>
-                  <a:lnTo>
-                    <a:pt x="2039504" y="2495192"/>
-                  </a:lnTo>
-                  <a:lnTo>
-                    <a:pt x="1962872" y="2485422"/>
-                  </a:lnTo>
-                  <a:lnTo>
-                    <a:pt x="1886239" y="2475556"/>
-                  </a:lnTo>
-                  <a:lnTo>
-                    <a:pt x="1809607" y="2465592"/>
-                  </a:lnTo>
-                  <a:lnTo>
-                    <a:pt x="1732974" y="2455529"/>
-                  </a:lnTo>
-                  <a:lnTo>
-                    <a:pt x="1656342" y="2445367"/>
-                  </a:lnTo>
-                  <a:lnTo>
-                    <a:pt x="1579709" y="2435105"/>
-                  </a:lnTo>
-                  <a:lnTo>
-                    <a:pt x="1503076" y="2424741"/>
-                  </a:lnTo>
-                  <a:lnTo>
-                    <a:pt x="1426444" y="2414275"/>
-                  </a:lnTo>
-                  <a:lnTo>
-                    <a:pt x="1349811" y="2403705"/>
-                  </a:lnTo>
-                  <a:lnTo>
-                    <a:pt x="1273179" y="2393031"/>
-                  </a:lnTo>
-                  <a:lnTo>
-                    <a:pt x="1196546" y="2382251"/>
-                  </a:lnTo>
-                  <a:lnTo>
-                    <a:pt x="1119914" y="2371365"/>
-                  </a:lnTo>
-                  <a:lnTo>
-                    <a:pt x="1043281" y="2360371"/>
-                  </a:lnTo>
-                  <a:lnTo>
-                    <a:pt x="966649" y="2349269"/>
-                  </a:lnTo>
-                  <a:lnTo>
-                    <a:pt x="890016" y="2338056"/>
-                  </a:lnTo>
-                  <a:lnTo>
-                    <a:pt x="813384" y="2326733"/>
-                  </a:lnTo>
-                  <a:lnTo>
-                    <a:pt x="736751" y="2315298"/>
-                  </a:lnTo>
-                  <a:lnTo>
-                    <a:pt x="660118" y="2303751"/>
-                  </a:lnTo>
-                  <a:lnTo>
-                    <a:pt x="583486" y="2292088"/>
-                  </a:lnTo>
-                  <a:lnTo>
-                    <a:pt x="506853" y="2280311"/>
-                  </a:lnTo>
-                  <a:lnTo>
-                    <a:pt x="430221" y="2268417"/>
-                  </a:lnTo>
-                  <a:lnTo>
-                    <a:pt x="353588" y="2256406"/>
-                  </a:lnTo>
-                  <a:lnTo>
-                    <a:pt x="276956" y="2244276"/>
-                  </a:lnTo>
-                  <a:lnTo>
-                    <a:pt x="200323" y="2232026"/>
-                  </a:lnTo>
-                  <a:lnTo>
-                    <a:pt x="123691" y="2219656"/>
-                  </a:lnTo>
-                  <a:lnTo>
-                    <a:pt x="47058" y="2207162"/>
-                  </a:lnTo>
-                  <a:lnTo>
-                    <a:pt x="0" y="2199415"/>
+                    <a:pt x="1862185" y="122028"/>
+                  </a:lnTo>
+                  <a:lnTo>
+                    <a:pt x="1933808" y="340343"/>
+                  </a:lnTo>
+                  <a:lnTo>
+                    <a:pt x="2005430" y="544481"/>
+                  </a:lnTo>
+                  <a:lnTo>
+                    <a:pt x="2077053" y="735361"/>
+                  </a:lnTo>
+                  <a:lnTo>
+                    <a:pt x="2148675" y="913846"/>
+                  </a:lnTo>
+                  <a:lnTo>
+                    <a:pt x="2220298" y="1080739"/>
+                  </a:lnTo>
+                  <a:lnTo>
+                    <a:pt x="2291920" y="1236794"/>
+                  </a:lnTo>
+                  <a:lnTo>
+                    <a:pt x="2363543" y="1382715"/>
+                  </a:lnTo>
+                  <a:lnTo>
+                    <a:pt x="2435165" y="1519159"/>
+                  </a:lnTo>
+                  <a:lnTo>
+                    <a:pt x="2506788" y="1646742"/>
+                  </a:lnTo>
+                  <a:lnTo>
+                    <a:pt x="2578410" y="1766040"/>
+                  </a:lnTo>
+                  <a:lnTo>
+                    <a:pt x="2650033" y="1877591"/>
+                  </a:lnTo>
+                  <a:lnTo>
+                    <a:pt x="2721655" y="1981897"/>
+                  </a:lnTo>
+                  <a:lnTo>
+                    <a:pt x="2793278" y="2079430"/>
+                  </a:lnTo>
+                  <a:lnTo>
+                    <a:pt x="2864901" y="2170628"/>
+                  </a:lnTo>
+                  <a:lnTo>
+                    <a:pt x="2936523" y="2255904"/>
+                  </a:lnTo>
+                  <a:lnTo>
+                    <a:pt x="3008146" y="2335642"/>
+                  </a:lnTo>
+                  <a:lnTo>
+                    <a:pt x="3079768" y="2410202"/>
+                  </a:lnTo>
+                  <a:lnTo>
+                    <a:pt x="3151391" y="2479920"/>
+                  </a:lnTo>
+                  <a:lnTo>
+                    <a:pt x="3223013" y="2545110"/>
+                  </a:lnTo>
+                  <a:lnTo>
+                    <a:pt x="3294636" y="2606066"/>
+                  </a:lnTo>
+                  <a:lnTo>
+                    <a:pt x="3366258" y="2655575"/>
+                  </a:lnTo>
+                  <a:lnTo>
+                    <a:pt x="3437881" y="2663680"/>
+                  </a:lnTo>
+                  <a:lnTo>
+                    <a:pt x="3509503" y="2671705"/>
+                  </a:lnTo>
+                  <a:lnTo>
+                    <a:pt x="3581126" y="2679652"/>
+                  </a:lnTo>
+                  <a:lnTo>
+                    <a:pt x="3652748" y="2687521"/>
+                  </a:lnTo>
+                  <a:lnTo>
+                    <a:pt x="3724371" y="2695314"/>
+                  </a:lnTo>
+                  <a:lnTo>
+                    <a:pt x="3795993" y="2703029"/>
+                  </a:lnTo>
+                  <a:lnTo>
+                    <a:pt x="3867616" y="2710670"/>
+                  </a:lnTo>
+                  <a:lnTo>
+                    <a:pt x="3939238" y="2718236"/>
+                  </a:lnTo>
+                  <a:lnTo>
+                    <a:pt x="4010861" y="2725727"/>
+                  </a:lnTo>
+                  <a:lnTo>
+                    <a:pt x="4082483" y="2733145"/>
+                  </a:lnTo>
+                  <a:lnTo>
+                    <a:pt x="4154106" y="2740491"/>
+                  </a:lnTo>
+                  <a:lnTo>
+                    <a:pt x="4225729" y="2747765"/>
+                  </a:lnTo>
+                  <a:lnTo>
+                    <a:pt x="4297351" y="2754967"/>
+                  </a:lnTo>
+                  <a:lnTo>
+                    <a:pt x="4368974" y="2762100"/>
+                  </a:lnTo>
+                  <a:lnTo>
+                    <a:pt x="4440596" y="2769162"/>
+                  </a:lnTo>
+                  <a:lnTo>
+                    <a:pt x="4512219" y="2776155"/>
+                  </a:lnTo>
+                  <a:lnTo>
+                    <a:pt x="4583841" y="2783080"/>
+                  </a:lnTo>
+                  <a:lnTo>
+                    <a:pt x="4655464" y="2789937"/>
+                  </a:lnTo>
+                  <a:lnTo>
+                    <a:pt x="4727086" y="2796727"/>
+                  </a:lnTo>
+                  <a:lnTo>
+                    <a:pt x="4798709" y="2803450"/>
+                  </a:lnTo>
+                  <a:lnTo>
+                    <a:pt x="4870331" y="2810108"/>
+                  </a:lnTo>
+                  <a:lnTo>
+                    <a:pt x="4941954" y="2816700"/>
+                  </a:lnTo>
+                  <a:lnTo>
+                    <a:pt x="5013576" y="2823228"/>
+                  </a:lnTo>
+                  <a:lnTo>
+                    <a:pt x="5085199" y="2829693"/>
+                  </a:lnTo>
+                  <a:lnTo>
+                    <a:pt x="5156821" y="2836093"/>
+                  </a:lnTo>
+                  <a:lnTo>
+                    <a:pt x="5228444" y="2842432"/>
+                  </a:lnTo>
+                  <a:lnTo>
+                    <a:pt x="5300066" y="2848708"/>
+                  </a:lnTo>
+                  <a:lnTo>
+                    <a:pt x="5371689" y="2854922"/>
+                  </a:lnTo>
+                  <a:lnTo>
+                    <a:pt x="5443311" y="2861076"/>
+                  </a:lnTo>
+                  <a:lnTo>
+                    <a:pt x="5514934" y="2867170"/>
+                  </a:lnTo>
+                  <a:lnTo>
+                    <a:pt x="5586557" y="2873204"/>
+                  </a:lnTo>
+                  <a:lnTo>
+                    <a:pt x="5658179" y="2879179"/>
+                  </a:lnTo>
+                  <a:lnTo>
+                    <a:pt x="5729802" y="2885096"/>
+                  </a:lnTo>
+                  <a:lnTo>
+                    <a:pt x="5801424" y="2890954"/>
+                  </a:lnTo>
+                  <a:lnTo>
+                    <a:pt x="5873047" y="2896756"/>
+                  </a:lnTo>
+                  <a:lnTo>
+                    <a:pt x="5944669" y="2902500"/>
+                  </a:lnTo>
+                  <a:lnTo>
+                    <a:pt x="6016292" y="2908189"/>
+                  </a:lnTo>
+                  <a:lnTo>
+                    <a:pt x="6087914" y="2913821"/>
+                  </a:lnTo>
+                  <a:lnTo>
+                    <a:pt x="6159537" y="2919399"/>
+                  </a:lnTo>
+                  <a:lnTo>
+                    <a:pt x="6231159" y="2924922"/>
+                  </a:lnTo>
+                  <a:lnTo>
+                    <a:pt x="6302782" y="2930391"/>
+                  </a:lnTo>
+                  <a:lnTo>
+                    <a:pt x="6374404" y="2935806"/>
+                  </a:lnTo>
+                  <a:lnTo>
+                    <a:pt x="6446027" y="2941168"/>
+                  </a:lnTo>
+                  <a:lnTo>
+                    <a:pt x="6517649" y="2946478"/>
+                  </a:lnTo>
+                  <a:lnTo>
+                    <a:pt x="6589272" y="2951736"/>
+                  </a:lnTo>
+                  <a:lnTo>
+                    <a:pt x="6660894" y="2956943"/>
+                  </a:lnTo>
+                  <a:lnTo>
+                    <a:pt x="6732517" y="2962098"/>
+                  </a:lnTo>
+                  <a:lnTo>
+                    <a:pt x="6804139" y="2967203"/>
+                  </a:lnTo>
+                  <a:lnTo>
+                    <a:pt x="6875762" y="2972258"/>
+                  </a:lnTo>
+                  <a:lnTo>
+                    <a:pt x="6947385" y="2977264"/>
+                  </a:lnTo>
+                  <a:lnTo>
+                    <a:pt x="7019007" y="2982220"/>
+                  </a:lnTo>
+                  <a:lnTo>
+                    <a:pt x="7090630" y="2987129"/>
+                  </a:lnTo>
+                  <a:lnTo>
+                    <a:pt x="7090630" y="3458755"/>
+                  </a:lnTo>
+                  <a:lnTo>
+                    <a:pt x="7019007" y="3457019"/>
+                  </a:lnTo>
+                  <a:lnTo>
+                    <a:pt x="6947385" y="3455163"/>
+                  </a:lnTo>
+                  <a:lnTo>
+                    <a:pt x="6875762" y="3453178"/>
+                  </a:lnTo>
+                  <a:lnTo>
+                    <a:pt x="6804139" y="3451055"/>
+                  </a:lnTo>
+                  <a:lnTo>
+                    <a:pt x="6732517" y="3448784"/>
+                  </a:lnTo>
+                  <a:lnTo>
+                    <a:pt x="6660894" y="3446356"/>
+                  </a:lnTo>
+                  <a:lnTo>
+                    <a:pt x="6589272" y="3443759"/>
+                  </a:lnTo>
+                  <a:lnTo>
+                    <a:pt x="6517649" y="3440982"/>
+                  </a:lnTo>
+                  <a:lnTo>
+                    <a:pt x="6446027" y="3438012"/>
+                  </a:lnTo>
+                  <a:lnTo>
+                    <a:pt x="6374404" y="3434836"/>
+                  </a:lnTo>
+                  <a:lnTo>
+                    <a:pt x="6302782" y="3431439"/>
+                  </a:lnTo>
+                  <a:lnTo>
+                    <a:pt x="6231159" y="3427806"/>
+                  </a:lnTo>
+                  <a:lnTo>
+                    <a:pt x="6159537" y="3423921"/>
+                  </a:lnTo>
+                  <a:lnTo>
+                    <a:pt x="6087914" y="3419766"/>
+                  </a:lnTo>
+                  <a:lnTo>
+                    <a:pt x="6016292" y="3415322"/>
+                  </a:lnTo>
+                  <a:lnTo>
+                    <a:pt x="5944669" y="3410570"/>
+                  </a:lnTo>
+                  <a:lnTo>
+                    <a:pt x="5873047" y="3405488"/>
+                  </a:lnTo>
+                  <a:lnTo>
+                    <a:pt x="5801424" y="3400053"/>
+                  </a:lnTo>
+                  <a:lnTo>
+                    <a:pt x="5729802" y="3394240"/>
+                  </a:lnTo>
+                  <a:lnTo>
+                    <a:pt x="5658179" y="3388024"/>
+                  </a:lnTo>
+                  <a:lnTo>
+                    <a:pt x="5586557" y="3381376"/>
+                  </a:lnTo>
+                  <a:lnTo>
+                    <a:pt x="5514934" y="3374266"/>
+                  </a:lnTo>
+                  <a:lnTo>
+                    <a:pt x="5443311" y="3366662"/>
+                  </a:lnTo>
+                  <a:lnTo>
+                    <a:pt x="5371689" y="3358530"/>
+                  </a:lnTo>
+                  <a:lnTo>
+                    <a:pt x="5300066" y="3349834"/>
+                  </a:lnTo>
+                  <a:lnTo>
+                    <a:pt x="5228444" y="3340533"/>
+                  </a:lnTo>
+                  <a:lnTo>
+                    <a:pt x="5156821" y="3330587"/>
+                  </a:lnTo>
+                  <a:lnTo>
+                    <a:pt x="5085199" y="3319950"/>
+                  </a:lnTo>
+                  <a:lnTo>
+                    <a:pt x="5013576" y="3308574"/>
+                  </a:lnTo>
+                  <a:lnTo>
+                    <a:pt x="4941954" y="3296408"/>
+                  </a:lnTo>
+                  <a:lnTo>
+                    <a:pt x="4870331" y="3283397"/>
+                  </a:lnTo>
+                  <a:lnTo>
+                    <a:pt x="4798709" y="3269482"/>
+                  </a:lnTo>
+                  <a:lnTo>
+                    <a:pt x="4727086" y="3254601"/>
+                  </a:lnTo>
+                  <a:lnTo>
+                    <a:pt x="4655464" y="3238686"/>
+                  </a:lnTo>
+                  <a:lnTo>
+                    <a:pt x="4583841" y="3221666"/>
+                  </a:lnTo>
+                  <a:lnTo>
+                    <a:pt x="4512219" y="3203464"/>
+                  </a:lnTo>
+                  <a:lnTo>
+                    <a:pt x="4440596" y="3183998"/>
+                  </a:lnTo>
+                  <a:lnTo>
+                    <a:pt x="4368974" y="3163180"/>
+                  </a:lnTo>
+                  <a:lnTo>
+                    <a:pt x="4297351" y="3140916"/>
+                  </a:lnTo>
+                  <a:lnTo>
+                    <a:pt x="4225729" y="3117106"/>
+                  </a:lnTo>
+                  <a:lnTo>
+                    <a:pt x="4154106" y="3091642"/>
+                  </a:lnTo>
+                  <a:lnTo>
+                    <a:pt x="4082483" y="3064410"/>
+                  </a:lnTo>
+                  <a:lnTo>
+                    <a:pt x="4010861" y="3035286"/>
+                  </a:lnTo>
+                  <a:lnTo>
+                    <a:pt x="3939238" y="3004140"/>
+                  </a:lnTo>
+                  <a:lnTo>
+                    <a:pt x="3867616" y="2970830"/>
+                  </a:lnTo>
+                  <a:lnTo>
+                    <a:pt x="3795993" y="2935207"/>
+                  </a:lnTo>
+                  <a:lnTo>
+                    <a:pt x="3724371" y="2897110"/>
+                  </a:lnTo>
+                  <a:lnTo>
+                    <a:pt x="3652748" y="2856367"/>
+                  </a:lnTo>
+                  <a:lnTo>
+                    <a:pt x="3581126" y="2812795"/>
+                  </a:lnTo>
+                  <a:lnTo>
+                    <a:pt x="3509503" y="2766196"/>
+                  </a:lnTo>
+                  <a:lnTo>
+                    <a:pt x="3437881" y="2716360"/>
+                  </a:lnTo>
+                  <a:lnTo>
+                    <a:pt x="3366258" y="2663064"/>
+                  </a:lnTo>
+                  <a:lnTo>
+                    <a:pt x="3294636" y="2647390"/>
+                  </a:lnTo>
+                  <a:lnTo>
+                    <a:pt x="3223013" y="2639124"/>
+                  </a:lnTo>
+                  <a:lnTo>
+                    <a:pt x="3151391" y="2630777"/>
+                  </a:lnTo>
+                  <a:lnTo>
+                    <a:pt x="3079768" y="2622347"/>
+                  </a:lnTo>
+                  <a:lnTo>
+                    <a:pt x="3008146" y="2613833"/>
+                  </a:lnTo>
+                  <a:lnTo>
+                    <a:pt x="2936523" y="2605236"/>
+                  </a:lnTo>
+                  <a:lnTo>
+                    <a:pt x="2864901" y="2596553"/>
+                  </a:lnTo>
+                  <a:lnTo>
+                    <a:pt x="2793278" y="2587785"/>
+                  </a:lnTo>
+                  <a:lnTo>
+                    <a:pt x="2721655" y="2578930"/>
+                  </a:lnTo>
+                  <a:lnTo>
+                    <a:pt x="2650033" y="2569988"/>
+                  </a:lnTo>
+                  <a:lnTo>
+                    <a:pt x="2578410" y="2560957"/>
+                  </a:lnTo>
+                  <a:lnTo>
+                    <a:pt x="2506788" y="2551837"/>
+                  </a:lnTo>
+                  <a:lnTo>
+                    <a:pt x="2435165" y="2542627"/>
+                  </a:lnTo>
+                  <a:lnTo>
+                    <a:pt x="2363543" y="2533326"/>
+                  </a:lnTo>
+                  <a:lnTo>
+                    <a:pt x="2291920" y="2523932"/>
+                  </a:lnTo>
+                  <a:lnTo>
+                    <a:pt x="2220298" y="2514447"/>
+                  </a:lnTo>
+                  <a:lnTo>
+                    <a:pt x="2148675" y="2504867"/>
+                  </a:lnTo>
+                  <a:lnTo>
+                    <a:pt x="2077053" y="2495192"/>
+                  </a:lnTo>
+                  <a:lnTo>
+                    <a:pt x="2005430" y="2485422"/>
+                  </a:lnTo>
+                  <a:lnTo>
+                    <a:pt x="1933808" y="2475556"/>
+                  </a:lnTo>
+                  <a:lnTo>
+                    <a:pt x="1862185" y="2465592"/>
+                  </a:lnTo>
+                  <a:lnTo>
+                    <a:pt x="1790563" y="2455529"/>
+                  </a:lnTo>
+                  <a:lnTo>
+                    <a:pt x="1718940" y="2445367"/>
+                  </a:lnTo>
+                  <a:lnTo>
+                    <a:pt x="1647318" y="2435105"/>
+                  </a:lnTo>
+                  <a:lnTo>
+                    <a:pt x="1575695" y="2424741"/>
+                  </a:lnTo>
+                  <a:lnTo>
+                    <a:pt x="1504073" y="2414275"/>
+                  </a:lnTo>
+                  <a:lnTo>
+                    <a:pt x="1432450" y="2403705"/>
+                  </a:lnTo>
+                  <a:lnTo>
+                    <a:pt x="1360827" y="2393031"/>
+                  </a:lnTo>
+                  <a:lnTo>
+                    <a:pt x="1289205" y="2382251"/>
+                  </a:lnTo>
+                  <a:lnTo>
+                    <a:pt x="1217582" y="2371365"/>
+                  </a:lnTo>
+                  <a:lnTo>
+                    <a:pt x="1145960" y="2360371"/>
+                  </a:lnTo>
+                  <a:lnTo>
+                    <a:pt x="1074337" y="2349269"/>
+                  </a:lnTo>
+                  <a:lnTo>
+                    <a:pt x="1002715" y="2338056"/>
+                  </a:lnTo>
+                  <a:lnTo>
+                    <a:pt x="931092" y="2326733"/>
+                  </a:lnTo>
+                  <a:lnTo>
+                    <a:pt x="859470" y="2315298"/>
+                  </a:lnTo>
+                  <a:lnTo>
+                    <a:pt x="787847" y="2303751"/>
+                  </a:lnTo>
+                  <a:lnTo>
+                    <a:pt x="716225" y="2292088"/>
+                  </a:lnTo>
+                  <a:lnTo>
+                    <a:pt x="644602" y="2280311"/>
+                  </a:lnTo>
+                  <a:lnTo>
+                    <a:pt x="572980" y="2268417"/>
+                  </a:lnTo>
+                  <a:lnTo>
+                    <a:pt x="501357" y="2256406"/>
+                  </a:lnTo>
+                  <a:lnTo>
+                    <a:pt x="429735" y="2244276"/>
+                  </a:lnTo>
+                  <a:lnTo>
+                    <a:pt x="358112" y="2232026"/>
+                  </a:lnTo>
+                  <a:lnTo>
+                    <a:pt x="286490" y="2219656"/>
+                  </a:lnTo>
+                  <a:lnTo>
+                    <a:pt x="214867" y="2207162"/>
+                  </a:lnTo>
+                  <a:lnTo>
+                    <a:pt x="143245" y="2194546"/>
+                  </a:lnTo>
+                  <a:lnTo>
+                    <a:pt x="71622" y="2181804"/>
+                  </a:lnTo>
+                  <a:lnTo>
+                    <a:pt x="0" y="2168937"/>
                   </a:lnTo>
                   <a:close/>
                 </a:path>
@@ -3546,243 +3509,568 @@
         </p:sp>
         <p:sp>
           <p:nvSpPr>
+            <p:cNvPr id="21" name="pl21"/>
+            <p:cNvSpPr/>
+            <p:nvPr/>
+          </p:nvSpPr>
+          <p:spPr>
+            <a:xfrm>
+              <a:off x="2996801" y="2073503"/>
+              <a:ext cx="5265878" cy="2987129"/>
+            </a:xfrm>
+            <a:custGeom>
+              <a:avLst/>
+              <a:pathLst>
+                <a:path w="5265878" h="2987129">
+                  <a:moveTo>
+                    <a:pt x="0" y="0"/>
+                  </a:moveTo>
+                  <a:lnTo>
+                    <a:pt x="37433" y="122028"/>
+                  </a:lnTo>
+                  <a:lnTo>
+                    <a:pt x="109056" y="340343"/>
+                  </a:lnTo>
+                  <a:lnTo>
+                    <a:pt x="180678" y="544481"/>
+                  </a:lnTo>
+                  <a:lnTo>
+                    <a:pt x="252301" y="735361"/>
+                  </a:lnTo>
+                  <a:lnTo>
+                    <a:pt x="323924" y="913846"/>
+                  </a:lnTo>
+                  <a:lnTo>
+                    <a:pt x="395546" y="1080739"/>
+                  </a:lnTo>
+                  <a:lnTo>
+                    <a:pt x="467169" y="1236794"/>
+                  </a:lnTo>
+                  <a:lnTo>
+                    <a:pt x="538791" y="1382715"/>
+                  </a:lnTo>
+                  <a:lnTo>
+                    <a:pt x="610414" y="1519159"/>
+                  </a:lnTo>
+                  <a:lnTo>
+                    <a:pt x="682036" y="1646742"/>
+                  </a:lnTo>
+                  <a:lnTo>
+                    <a:pt x="753659" y="1766040"/>
+                  </a:lnTo>
+                  <a:lnTo>
+                    <a:pt x="825281" y="1877591"/>
+                  </a:lnTo>
+                  <a:lnTo>
+                    <a:pt x="896904" y="1981897"/>
+                  </a:lnTo>
+                  <a:lnTo>
+                    <a:pt x="968526" y="2079430"/>
+                  </a:lnTo>
+                  <a:lnTo>
+                    <a:pt x="1040149" y="2170628"/>
+                  </a:lnTo>
+                  <a:lnTo>
+                    <a:pt x="1111771" y="2255904"/>
+                  </a:lnTo>
+                  <a:lnTo>
+                    <a:pt x="1183394" y="2335642"/>
+                  </a:lnTo>
+                  <a:lnTo>
+                    <a:pt x="1255016" y="2410202"/>
+                  </a:lnTo>
+                  <a:lnTo>
+                    <a:pt x="1326639" y="2479920"/>
+                  </a:lnTo>
+                  <a:lnTo>
+                    <a:pt x="1398261" y="2545110"/>
+                  </a:lnTo>
+                  <a:lnTo>
+                    <a:pt x="1469884" y="2606066"/>
+                  </a:lnTo>
+                  <a:lnTo>
+                    <a:pt x="1541506" y="2655575"/>
+                  </a:lnTo>
+                  <a:lnTo>
+                    <a:pt x="1613129" y="2663680"/>
+                  </a:lnTo>
+                  <a:lnTo>
+                    <a:pt x="1684752" y="2671705"/>
+                  </a:lnTo>
+                  <a:lnTo>
+                    <a:pt x="1756374" y="2679652"/>
+                  </a:lnTo>
+                  <a:lnTo>
+                    <a:pt x="1827997" y="2687521"/>
+                  </a:lnTo>
+                  <a:lnTo>
+                    <a:pt x="1899619" y="2695314"/>
+                  </a:lnTo>
+                  <a:lnTo>
+                    <a:pt x="1971242" y="2703029"/>
+                  </a:lnTo>
+                  <a:lnTo>
+                    <a:pt x="2042864" y="2710670"/>
+                  </a:lnTo>
+                  <a:lnTo>
+                    <a:pt x="2114487" y="2718236"/>
+                  </a:lnTo>
+                  <a:lnTo>
+                    <a:pt x="2186109" y="2725727"/>
+                  </a:lnTo>
+                  <a:lnTo>
+                    <a:pt x="2257732" y="2733145"/>
+                  </a:lnTo>
+                  <a:lnTo>
+                    <a:pt x="2329354" y="2740491"/>
+                  </a:lnTo>
+                  <a:lnTo>
+                    <a:pt x="2400977" y="2747765"/>
+                  </a:lnTo>
+                  <a:lnTo>
+                    <a:pt x="2472599" y="2754967"/>
+                  </a:lnTo>
+                  <a:lnTo>
+                    <a:pt x="2544222" y="2762100"/>
+                  </a:lnTo>
+                  <a:lnTo>
+                    <a:pt x="2615844" y="2769162"/>
+                  </a:lnTo>
+                  <a:lnTo>
+                    <a:pt x="2687467" y="2776155"/>
+                  </a:lnTo>
+                  <a:lnTo>
+                    <a:pt x="2759089" y="2783080"/>
+                  </a:lnTo>
+                  <a:lnTo>
+                    <a:pt x="2830712" y="2789937"/>
+                  </a:lnTo>
+                  <a:lnTo>
+                    <a:pt x="2902334" y="2796727"/>
+                  </a:lnTo>
+                  <a:lnTo>
+                    <a:pt x="2973957" y="2803450"/>
+                  </a:lnTo>
+                  <a:lnTo>
+                    <a:pt x="3045580" y="2810108"/>
+                  </a:lnTo>
+                  <a:lnTo>
+                    <a:pt x="3117202" y="2816700"/>
+                  </a:lnTo>
+                  <a:lnTo>
+                    <a:pt x="3188825" y="2823228"/>
+                  </a:lnTo>
+                  <a:lnTo>
+                    <a:pt x="3260447" y="2829693"/>
+                  </a:lnTo>
+                  <a:lnTo>
+                    <a:pt x="3332070" y="2836093"/>
+                  </a:lnTo>
+                  <a:lnTo>
+                    <a:pt x="3403692" y="2842432"/>
+                  </a:lnTo>
+                  <a:lnTo>
+                    <a:pt x="3475315" y="2848708"/>
+                  </a:lnTo>
+                  <a:lnTo>
+                    <a:pt x="3546937" y="2854922"/>
+                  </a:lnTo>
+                  <a:lnTo>
+                    <a:pt x="3618560" y="2861076"/>
+                  </a:lnTo>
+                  <a:lnTo>
+                    <a:pt x="3690182" y="2867170"/>
+                  </a:lnTo>
+                  <a:lnTo>
+                    <a:pt x="3761805" y="2873204"/>
+                  </a:lnTo>
+                  <a:lnTo>
+                    <a:pt x="3833427" y="2879179"/>
+                  </a:lnTo>
+                  <a:lnTo>
+                    <a:pt x="3905050" y="2885096"/>
+                  </a:lnTo>
+                  <a:lnTo>
+                    <a:pt x="3976672" y="2890954"/>
+                  </a:lnTo>
+                  <a:lnTo>
+                    <a:pt x="4048295" y="2896756"/>
+                  </a:lnTo>
+                  <a:lnTo>
+                    <a:pt x="4119917" y="2902500"/>
+                  </a:lnTo>
+                  <a:lnTo>
+                    <a:pt x="4191540" y="2908189"/>
+                  </a:lnTo>
+                  <a:lnTo>
+                    <a:pt x="4263162" y="2913821"/>
+                  </a:lnTo>
+                  <a:lnTo>
+                    <a:pt x="4334785" y="2919399"/>
+                  </a:lnTo>
+                  <a:lnTo>
+                    <a:pt x="4406408" y="2924922"/>
+                  </a:lnTo>
+                  <a:lnTo>
+                    <a:pt x="4478030" y="2930391"/>
+                  </a:lnTo>
+                  <a:lnTo>
+                    <a:pt x="4549653" y="2935806"/>
+                  </a:lnTo>
+                  <a:lnTo>
+                    <a:pt x="4621275" y="2941168"/>
+                  </a:lnTo>
+                  <a:lnTo>
+                    <a:pt x="4692898" y="2946478"/>
+                  </a:lnTo>
+                  <a:lnTo>
+                    <a:pt x="4764520" y="2951736"/>
+                  </a:lnTo>
+                  <a:lnTo>
+                    <a:pt x="4836143" y="2956943"/>
+                  </a:lnTo>
+                  <a:lnTo>
+                    <a:pt x="4907765" y="2962098"/>
+                  </a:lnTo>
+                  <a:lnTo>
+                    <a:pt x="4979388" y="2967203"/>
+                  </a:lnTo>
+                  <a:lnTo>
+                    <a:pt x="5051010" y="2972258"/>
+                  </a:lnTo>
+                  <a:lnTo>
+                    <a:pt x="5122633" y="2977264"/>
+                  </a:lnTo>
+                  <a:lnTo>
+                    <a:pt x="5194255" y="2982220"/>
+                  </a:lnTo>
+                  <a:lnTo>
+                    <a:pt x="5265878" y="2987129"/>
+                  </a:lnTo>
+                </a:path>
+              </a:pathLst>
+            </a:custGeom>
+          </p:spPr>
+          <p:txBody>
+            <a:bodyPr/>
+            <a:lstStyle/>
+            <a:p/>
+          </p:txBody>
+        </p:sp>
+        <p:sp>
+          <p:nvSpPr>
             <p:cNvPr id="22" name="pl22"/>
             <p:cNvSpPr/>
             <p:nvPr/>
           </p:nvSpPr>
           <p:spPr>
             <a:xfrm>
-              <a:off x="2587072" y="2073503"/>
-              <a:ext cx="5634228" cy="2987129"/>
+              <a:off x="1172049" y="4242440"/>
+              <a:ext cx="7090630" cy="1289817"/>
             </a:xfrm>
             <a:custGeom>
               <a:avLst/>
               <a:pathLst>
-                <a:path w="5634228" h="2987129">
+                <a:path w="7090630" h="1289817">
                   <a:moveTo>
+                    <a:pt x="7090630" y="1289817"/>
+                  </a:moveTo>
+                  <a:lnTo>
+                    <a:pt x="7019007" y="1288082"/>
+                  </a:lnTo>
+                  <a:lnTo>
+                    <a:pt x="6947385" y="1286225"/>
+                  </a:lnTo>
+                  <a:lnTo>
+                    <a:pt x="6875762" y="1284240"/>
+                  </a:lnTo>
+                  <a:lnTo>
+                    <a:pt x="6804139" y="1282117"/>
+                  </a:lnTo>
+                  <a:lnTo>
+                    <a:pt x="6732517" y="1279847"/>
+                  </a:lnTo>
+                  <a:lnTo>
+                    <a:pt x="6660894" y="1277419"/>
+                  </a:lnTo>
+                  <a:lnTo>
+                    <a:pt x="6589272" y="1274822"/>
+                  </a:lnTo>
+                  <a:lnTo>
+                    <a:pt x="6517649" y="1272045"/>
+                  </a:lnTo>
+                  <a:lnTo>
+                    <a:pt x="6446027" y="1269075"/>
+                  </a:lnTo>
+                  <a:lnTo>
+                    <a:pt x="6374404" y="1265898"/>
+                  </a:lnTo>
+                  <a:lnTo>
+                    <a:pt x="6302782" y="1262501"/>
+                  </a:lnTo>
+                  <a:lnTo>
+                    <a:pt x="6231159" y="1258868"/>
+                  </a:lnTo>
+                  <a:lnTo>
+                    <a:pt x="6159537" y="1254983"/>
+                  </a:lnTo>
+                  <a:lnTo>
+                    <a:pt x="6087914" y="1250828"/>
+                  </a:lnTo>
+                  <a:lnTo>
+                    <a:pt x="6016292" y="1246385"/>
+                  </a:lnTo>
+                  <a:lnTo>
+                    <a:pt x="5944669" y="1241633"/>
+                  </a:lnTo>
+                  <a:lnTo>
+                    <a:pt x="5873047" y="1236550"/>
+                  </a:lnTo>
+                  <a:lnTo>
+                    <a:pt x="5801424" y="1231115"/>
+                  </a:lnTo>
+                  <a:lnTo>
+                    <a:pt x="5729802" y="1225302"/>
+                  </a:lnTo>
+                  <a:lnTo>
+                    <a:pt x="5658179" y="1219086"/>
+                  </a:lnTo>
+                  <a:lnTo>
+                    <a:pt x="5586557" y="1212438"/>
+                  </a:lnTo>
+                  <a:lnTo>
+                    <a:pt x="5514934" y="1205328"/>
+                  </a:lnTo>
+                  <a:lnTo>
+                    <a:pt x="5443311" y="1197724"/>
+                  </a:lnTo>
+                  <a:lnTo>
+                    <a:pt x="5371689" y="1189593"/>
+                  </a:lnTo>
+                  <a:lnTo>
+                    <a:pt x="5300066" y="1180896"/>
+                  </a:lnTo>
+                  <a:lnTo>
+                    <a:pt x="5228444" y="1171596"/>
+                  </a:lnTo>
+                  <a:lnTo>
+                    <a:pt x="5156821" y="1161649"/>
+                  </a:lnTo>
+                  <a:lnTo>
+                    <a:pt x="5085199" y="1151012"/>
+                  </a:lnTo>
+                  <a:lnTo>
+                    <a:pt x="5013576" y="1139636"/>
+                  </a:lnTo>
+                  <a:lnTo>
+                    <a:pt x="4941954" y="1127470"/>
+                  </a:lnTo>
+                  <a:lnTo>
+                    <a:pt x="4870331" y="1114459"/>
+                  </a:lnTo>
+                  <a:lnTo>
+                    <a:pt x="4798709" y="1100544"/>
+                  </a:lnTo>
+                  <a:lnTo>
+                    <a:pt x="4727086" y="1085663"/>
+                  </a:lnTo>
+                  <a:lnTo>
+                    <a:pt x="4655464" y="1069749"/>
+                  </a:lnTo>
+                  <a:lnTo>
+                    <a:pt x="4583841" y="1052729"/>
+                  </a:lnTo>
+                  <a:lnTo>
+                    <a:pt x="4512219" y="1034527"/>
+                  </a:lnTo>
+                  <a:lnTo>
+                    <a:pt x="4440596" y="1015061"/>
+                  </a:lnTo>
+                  <a:lnTo>
+                    <a:pt x="4368974" y="994243"/>
+                  </a:lnTo>
+                  <a:lnTo>
+                    <a:pt x="4297351" y="971979"/>
+                  </a:lnTo>
+                  <a:lnTo>
+                    <a:pt x="4225729" y="948169"/>
+                  </a:lnTo>
+                  <a:lnTo>
+                    <a:pt x="4154106" y="922705"/>
+                  </a:lnTo>
+                  <a:lnTo>
+                    <a:pt x="4082483" y="895472"/>
+                  </a:lnTo>
+                  <a:lnTo>
+                    <a:pt x="4010861" y="866349"/>
+                  </a:lnTo>
+                  <a:lnTo>
+                    <a:pt x="3939238" y="835202"/>
+                  </a:lnTo>
+                  <a:lnTo>
+                    <a:pt x="3867616" y="801893"/>
+                  </a:lnTo>
+                  <a:lnTo>
+                    <a:pt x="3795993" y="766270"/>
+                  </a:lnTo>
+                  <a:lnTo>
+                    <a:pt x="3724371" y="728173"/>
+                  </a:lnTo>
+                  <a:lnTo>
+                    <a:pt x="3652748" y="687430"/>
+                  </a:lnTo>
+                  <a:lnTo>
+                    <a:pt x="3581126" y="643857"/>
+                  </a:lnTo>
+                  <a:lnTo>
+                    <a:pt x="3509503" y="597258"/>
+                  </a:lnTo>
+                  <a:lnTo>
+                    <a:pt x="3437881" y="547423"/>
+                  </a:lnTo>
+                  <a:lnTo>
+                    <a:pt x="3366258" y="494126"/>
+                  </a:lnTo>
+                  <a:lnTo>
+                    <a:pt x="3294636" y="478452"/>
+                  </a:lnTo>
+                  <a:lnTo>
+                    <a:pt x="3223013" y="470186"/>
+                  </a:lnTo>
+                  <a:lnTo>
+                    <a:pt x="3151391" y="461839"/>
+                  </a:lnTo>
+                  <a:lnTo>
+                    <a:pt x="3079768" y="453409"/>
+                  </a:lnTo>
+                  <a:lnTo>
+                    <a:pt x="3008146" y="444896"/>
+                  </a:lnTo>
+                  <a:lnTo>
+                    <a:pt x="2936523" y="436298"/>
+                  </a:lnTo>
+                  <a:lnTo>
+                    <a:pt x="2864901" y="427616"/>
+                  </a:lnTo>
+                  <a:lnTo>
+                    <a:pt x="2793278" y="418848"/>
+                  </a:lnTo>
+                  <a:lnTo>
+                    <a:pt x="2721655" y="409993"/>
+                  </a:lnTo>
+                  <a:lnTo>
+                    <a:pt x="2650033" y="401050"/>
+                  </a:lnTo>
+                  <a:lnTo>
+                    <a:pt x="2578410" y="392019"/>
+                  </a:lnTo>
+                  <a:lnTo>
+                    <a:pt x="2506788" y="382899"/>
+                  </a:lnTo>
+                  <a:lnTo>
+                    <a:pt x="2435165" y="373689"/>
+                  </a:lnTo>
+                  <a:lnTo>
+                    <a:pt x="2363543" y="364388"/>
+                  </a:lnTo>
+                  <a:lnTo>
+                    <a:pt x="2291920" y="354995"/>
+                  </a:lnTo>
+                  <a:lnTo>
+                    <a:pt x="2220298" y="345509"/>
+                  </a:lnTo>
+                  <a:lnTo>
+                    <a:pt x="2148675" y="335929"/>
+                  </a:lnTo>
+                  <a:lnTo>
+                    <a:pt x="2077053" y="326255"/>
+                  </a:lnTo>
+                  <a:lnTo>
+                    <a:pt x="2005430" y="316485"/>
+                  </a:lnTo>
+                  <a:lnTo>
+                    <a:pt x="1933808" y="306618"/>
+                  </a:lnTo>
+                  <a:lnTo>
+                    <a:pt x="1862185" y="296654"/>
+                  </a:lnTo>
+                  <a:lnTo>
+                    <a:pt x="1790563" y="286592"/>
+                  </a:lnTo>
+                  <a:lnTo>
+                    <a:pt x="1718940" y="276430"/>
+                  </a:lnTo>
+                  <a:lnTo>
+                    <a:pt x="1647318" y="266167"/>
+                  </a:lnTo>
+                  <a:lnTo>
+                    <a:pt x="1575695" y="255803"/>
+                  </a:lnTo>
+                  <a:lnTo>
+                    <a:pt x="1504073" y="245337"/>
+                  </a:lnTo>
+                  <a:lnTo>
+                    <a:pt x="1432450" y="234767"/>
+                  </a:lnTo>
+                  <a:lnTo>
+                    <a:pt x="1360827" y="224093"/>
+                  </a:lnTo>
+                  <a:lnTo>
+                    <a:pt x="1289205" y="213313"/>
+                  </a:lnTo>
+                  <a:lnTo>
+                    <a:pt x="1217582" y="202427"/>
+                  </a:lnTo>
+                  <a:lnTo>
+                    <a:pt x="1145960" y="191433"/>
+                  </a:lnTo>
+                  <a:lnTo>
+                    <a:pt x="1074337" y="180331"/>
+                  </a:lnTo>
+                  <a:lnTo>
+                    <a:pt x="1002715" y="169119"/>
+                  </a:lnTo>
+                  <a:lnTo>
+                    <a:pt x="931092" y="157796"/>
+                  </a:lnTo>
+                  <a:lnTo>
+                    <a:pt x="859470" y="146361"/>
+                  </a:lnTo>
+                  <a:lnTo>
+                    <a:pt x="787847" y="134813"/>
+                  </a:lnTo>
+                  <a:lnTo>
+                    <a:pt x="716225" y="123151"/>
+                  </a:lnTo>
+                  <a:lnTo>
+                    <a:pt x="644602" y="111374"/>
+                  </a:lnTo>
+                  <a:lnTo>
+                    <a:pt x="572980" y="99480"/>
+                  </a:lnTo>
+                  <a:lnTo>
+                    <a:pt x="501357" y="87469"/>
+                  </a:lnTo>
+                  <a:lnTo>
+                    <a:pt x="429735" y="75339"/>
+                  </a:lnTo>
+                  <a:lnTo>
+                    <a:pt x="358112" y="63089"/>
+                  </a:lnTo>
+                  <a:lnTo>
+                    <a:pt x="286490" y="50718"/>
+                  </a:lnTo>
+                  <a:lnTo>
+                    <a:pt x="214867" y="38225"/>
+                  </a:lnTo>
+                  <a:lnTo>
+                    <a:pt x="143245" y="25608"/>
+                  </a:lnTo>
+                  <a:lnTo>
+                    <a:pt x="71622" y="12867"/>
+                  </a:lnTo>
+                  <a:lnTo>
                     <a:pt x="0" y="0"/>
-                  </a:moveTo>
-                  <a:lnTo>
-                    <a:pt x="40052" y="122028"/>
-                  </a:lnTo>
-                  <a:lnTo>
-                    <a:pt x="116684" y="340343"/>
-                  </a:lnTo>
-                  <a:lnTo>
-                    <a:pt x="193317" y="544481"/>
-                  </a:lnTo>
-                  <a:lnTo>
-                    <a:pt x="269950" y="735361"/>
-                  </a:lnTo>
-                  <a:lnTo>
-                    <a:pt x="346582" y="913846"/>
-                  </a:lnTo>
-                  <a:lnTo>
-                    <a:pt x="423215" y="1080739"/>
-                  </a:lnTo>
-                  <a:lnTo>
-                    <a:pt x="499847" y="1236794"/>
-                  </a:lnTo>
-                  <a:lnTo>
-                    <a:pt x="576480" y="1382715"/>
-                  </a:lnTo>
-                  <a:lnTo>
-                    <a:pt x="653112" y="1519159"/>
-                  </a:lnTo>
-                  <a:lnTo>
-                    <a:pt x="729745" y="1646742"/>
-                  </a:lnTo>
-                  <a:lnTo>
-                    <a:pt x="806377" y="1766040"/>
-                  </a:lnTo>
-                  <a:lnTo>
-                    <a:pt x="883010" y="1877591"/>
-                  </a:lnTo>
-                  <a:lnTo>
-                    <a:pt x="959643" y="1981897"/>
-                  </a:lnTo>
-                  <a:lnTo>
-                    <a:pt x="1036275" y="2079430"/>
-                  </a:lnTo>
-                  <a:lnTo>
-                    <a:pt x="1112908" y="2170628"/>
-                  </a:lnTo>
-                  <a:lnTo>
-                    <a:pt x="1189540" y="2255904"/>
-                  </a:lnTo>
-                  <a:lnTo>
-                    <a:pt x="1266173" y="2335642"/>
-                  </a:lnTo>
-                  <a:lnTo>
-                    <a:pt x="1342805" y="2410202"/>
-                  </a:lnTo>
-                  <a:lnTo>
-                    <a:pt x="1419438" y="2479920"/>
-                  </a:lnTo>
-                  <a:lnTo>
-                    <a:pt x="1496070" y="2545110"/>
-                  </a:lnTo>
-                  <a:lnTo>
-                    <a:pt x="1572703" y="2606066"/>
-                  </a:lnTo>
-                  <a:lnTo>
-                    <a:pt x="1649335" y="2655575"/>
-                  </a:lnTo>
-                  <a:lnTo>
-                    <a:pt x="1725968" y="2663680"/>
-                  </a:lnTo>
-                  <a:lnTo>
-                    <a:pt x="1802601" y="2671705"/>
-                  </a:lnTo>
-                  <a:lnTo>
-                    <a:pt x="1879233" y="2679652"/>
-                  </a:lnTo>
-                  <a:lnTo>
-                    <a:pt x="1955866" y="2687521"/>
-                  </a:lnTo>
-                  <a:lnTo>
-                    <a:pt x="2032498" y="2695314"/>
-                  </a:lnTo>
-                  <a:lnTo>
-                    <a:pt x="2109131" y="2703029"/>
-                  </a:lnTo>
-                  <a:lnTo>
-                    <a:pt x="2185763" y="2710670"/>
-                  </a:lnTo>
-                  <a:lnTo>
-                    <a:pt x="2262396" y="2718236"/>
-                  </a:lnTo>
-                  <a:lnTo>
-                    <a:pt x="2339028" y="2725727"/>
-                  </a:lnTo>
-                  <a:lnTo>
-                    <a:pt x="2415661" y="2733145"/>
-                  </a:lnTo>
-                  <a:lnTo>
-                    <a:pt x="2492294" y="2740491"/>
-                  </a:lnTo>
-                  <a:lnTo>
-                    <a:pt x="2568926" y="2747765"/>
-                  </a:lnTo>
-                  <a:lnTo>
-                    <a:pt x="2645559" y="2754967"/>
-                  </a:lnTo>
-                  <a:lnTo>
-                    <a:pt x="2722191" y="2762100"/>
-                  </a:lnTo>
-                  <a:lnTo>
-                    <a:pt x="2798824" y="2769162"/>
-                  </a:lnTo>
-                  <a:lnTo>
-                    <a:pt x="2875456" y="2776155"/>
-                  </a:lnTo>
-                  <a:lnTo>
-                    <a:pt x="2952089" y="2783080"/>
-                  </a:lnTo>
-                  <a:lnTo>
-                    <a:pt x="3028721" y="2789937"/>
-                  </a:lnTo>
-                  <a:lnTo>
-                    <a:pt x="3105354" y="2796727"/>
-                  </a:lnTo>
-                  <a:lnTo>
-                    <a:pt x="3181986" y="2803450"/>
-                  </a:lnTo>
-                  <a:lnTo>
-                    <a:pt x="3258619" y="2810108"/>
-                  </a:lnTo>
-                  <a:lnTo>
-                    <a:pt x="3335252" y="2816700"/>
-                  </a:lnTo>
-                  <a:lnTo>
-                    <a:pt x="3411884" y="2823228"/>
-                  </a:lnTo>
-                  <a:lnTo>
-                    <a:pt x="3488517" y="2829693"/>
-                  </a:lnTo>
-                  <a:lnTo>
-                    <a:pt x="3565149" y="2836093"/>
-                  </a:lnTo>
-                  <a:lnTo>
-                    <a:pt x="3641782" y="2842432"/>
-                  </a:lnTo>
-                  <a:lnTo>
-                    <a:pt x="3718414" y="2848708"/>
-                  </a:lnTo>
-                  <a:lnTo>
-                    <a:pt x="3795047" y="2854922"/>
-                  </a:lnTo>
-                  <a:lnTo>
-                    <a:pt x="3871679" y="2861076"/>
-                  </a:lnTo>
-                  <a:lnTo>
-                    <a:pt x="3948312" y="2867170"/>
-                  </a:lnTo>
-                  <a:lnTo>
-                    <a:pt x="4024944" y="2873204"/>
-                  </a:lnTo>
-                  <a:lnTo>
-                    <a:pt x="4101577" y="2879179"/>
-                  </a:lnTo>
-                  <a:lnTo>
-                    <a:pt x="4178210" y="2885096"/>
-                  </a:lnTo>
-                  <a:lnTo>
-                    <a:pt x="4254842" y="2890954"/>
-                  </a:lnTo>
-                  <a:lnTo>
-                    <a:pt x="4331475" y="2896756"/>
-                  </a:lnTo>
-                  <a:lnTo>
-                    <a:pt x="4408107" y="2902500"/>
-                  </a:lnTo>
-                  <a:lnTo>
-                    <a:pt x="4484740" y="2908189"/>
-                  </a:lnTo>
-                  <a:lnTo>
-                    <a:pt x="4561372" y="2913821"/>
-                  </a:lnTo>
-                  <a:lnTo>
-                    <a:pt x="4638005" y="2919399"/>
-                  </a:lnTo>
-                  <a:lnTo>
-                    <a:pt x="4714637" y="2924922"/>
-                  </a:lnTo>
-                  <a:lnTo>
-                    <a:pt x="4791270" y="2930391"/>
-                  </a:lnTo>
-                  <a:lnTo>
-                    <a:pt x="4867903" y="2935806"/>
-                  </a:lnTo>
-                  <a:lnTo>
-                    <a:pt x="4944535" y="2941168"/>
-                  </a:lnTo>
-                  <a:lnTo>
-                    <a:pt x="5021168" y="2946478"/>
-                  </a:lnTo>
-                  <a:lnTo>
-                    <a:pt x="5097800" y="2951736"/>
-                  </a:lnTo>
-                  <a:lnTo>
-                    <a:pt x="5174433" y="2956943"/>
-                  </a:lnTo>
-                  <a:lnTo>
-                    <a:pt x="5251065" y="2962098"/>
-                  </a:lnTo>
-                  <a:lnTo>
-                    <a:pt x="5327698" y="2967203"/>
-                  </a:lnTo>
-                  <a:lnTo>
-                    <a:pt x="5404330" y="2972258"/>
-                  </a:lnTo>
-                  <a:lnTo>
-                    <a:pt x="5480963" y="2977264"/>
-                  </a:lnTo>
-                  <a:lnTo>
-                    <a:pt x="5557595" y="2982220"/>
-                  </a:lnTo>
-                  <a:lnTo>
-                    <a:pt x="5634228" y="2987129"/>
                   </a:lnTo>
                 </a:path>
               </a:pathLst>
@@ -3802,604 +4090,285 @@
           </p:nvSpPr>
           <p:spPr>
             <a:xfrm>
-              <a:off x="817517" y="4272918"/>
-              <a:ext cx="7403783" cy="1259340"/>
+              <a:off x="1856907" y="2073503"/>
+              <a:ext cx="6405771" cy="3372341"/>
             </a:xfrm>
             <a:custGeom>
               <a:avLst/>
               <a:pathLst>
-                <a:path w="7403783" h="1259340">
-                  <a:moveTo>
-                    <a:pt x="7403783" y="1259340"/>
-                  </a:moveTo>
-                  <a:lnTo>
-                    <a:pt x="7327150" y="1257604"/>
-                  </a:lnTo>
-                  <a:lnTo>
-                    <a:pt x="7250518" y="1255748"/>
-                  </a:lnTo>
-                  <a:lnTo>
-                    <a:pt x="7173885" y="1253763"/>
-                  </a:lnTo>
-                  <a:lnTo>
-                    <a:pt x="7097253" y="1251640"/>
-                  </a:lnTo>
-                  <a:lnTo>
-                    <a:pt x="7020620" y="1249369"/>
-                  </a:lnTo>
-                  <a:lnTo>
-                    <a:pt x="6943987" y="1246941"/>
-                  </a:lnTo>
-                  <a:lnTo>
-                    <a:pt x="6867355" y="1244344"/>
-                  </a:lnTo>
-                  <a:lnTo>
-                    <a:pt x="6790722" y="1241567"/>
-                  </a:lnTo>
-                  <a:lnTo>
-                    <a:pt x="6714090" y="1238597"/>
-                  </a:lnTo>
-                  <a:lnTo>
-                    <a:pt x="6637457" y="1235421"/>
-                  </a:lnTo>
-                  <a:lnTo>
-                    <a:pt x="6560825" y="1232024"/>
-                  </a:lnTo>
-                  <a:lnTo>
-                    <a:pt x="6484192" y="1228391"/>
-                  </a:lnTo>
-                  <a:lnTo>
-                    <a:pt x="6407560" y="1224506"/>
-                  </a:lnTo>
-                  <a:lnTo>
-                    <a:pt x="6330927" y="1220351"/>
-                  </a:lnTo>
-                  <a:lnTo>
-                    <a:pt x="6254294" y="1215907"/>
-                  </a:lnTo>
-                  <a:lnTo>
-                    <a:pt x="6177662" y="1211155"/>
-                  </a:lnTo>
-                  <a:lnTo>
-                    <a:pt x="6101029" y="1206073"/>
-                  </a:lnTo>
-                  <a:lnTo>
-                    <a:pt x="6024397" y="1200638"/>
-                  </a:lnTo>
-                  <a:lnTo>
-                    <a:pt x="5947764" y="1194825"/>
-                  </a:lnTo>
-                  <a:lnTo>
-                    <a:pt x="5871132" y="1188608"/>
-                  </a:lnTo>
-                  <a:lnTo>
-                    <a:pt x="5794499" y="1181960"/>
-                  </a:lnTo>
-                  <a:lnTo>
-                    <a:pt x="5717867" y="1174850"/>
-                  </a:lnTo>
-                  <a:lnTo>
-                    <a:pt x="5641234" y="1167247"/>
-                  </a:lnTo>
-                  <a:lnTo>
-                    <a:pt x="5564602" y="1159115"/>
-                  </a:lnTo>
-                  <a:lnTo>
-                    <a:pt x="5487969" y="1150419"/>
-                  </a:lnTo>
-                  <a:lnTo>
-                    <a:pt x="5411336" y="1141118"/>
-                  </a:lnTo>
-                  <a:lnTo>
-                    <a:pt x="5334704" y="1131172"/>
-                  </a:lnTo>
-                  <a:lnTo>
-                    <a:pt x="5258071" y="1120535"/>
-                  </a:lnTo>
-                  <a:lnTo>
-                    <a:pt x="5181439" y="1109159"/>
-                  </a:lnTo>
-                  <a:lnTo>
-                    <a:pt x="5104806" y="1096992"/>
-                  </a:lnTo>
-                  <a:lnTo>
-                    <a:pt x="5028174" y="1083981"/>
-                  </a:lnTo>
-                  <a:lnTo>
-                    <a:pt x="4951541" y="1070067"/>
-                  </a:lnTo>
-                  <a:lnTo>
-                    <a:pt x="4874909" y="1055186"/>
-                  </a:lnTo>
-                  <a:lnTo>
-                    <a:pt x="4798276" y="1039271"/>
-                  </a:lnTo>
-                  <a:lnTo>
-                    <a:pt x="4721644" y="1022251"/>
-                  </a:lnTo>
-                  <a:lnTo>
-                    <a:pt x="4645011" y="1004049"/>
-                  </a:lnTo>
-                  <a:lnTo>
-                    <a:pt x="4568378" y="984583"/>
-                  </a:lnTo>
-                  <a:lnTo>
-                    <a:pt x="4491746" y="963765"/>
-                  </a:lnTo>
-                  <a:lnTo>
-                    <a:pt x="4415113" y="941501"/>
-                  </a:lnTo>
-                  <a:lnTo>
-                    <a:pt x="4338481" y="917691"/>
-                  </a:lnTo>
-                  <a:lnTo>
-                    <a:pt x="4261848" y="892227"/>
-                  </a:lnTo>
-                  <a:lnTo>
-                    <a:pt x="4185216" y="864995"/>
-                  </a:lnTo>
-                  <a:lnTo>
-                    <a:pt x="4108583" y="835871"/>
-                  </a:lnTo>
-                  <a:lnTo>
-                    <a:pt x="4031951" y="804725"/>
-                  </a:lnTo>
-                  <a:lnTo>
-                    <a:pt x="3955318" y="771415"/>
-                  </a:lnTo>
-                  <a:lnTo>
-                    <a:pt x="3878685" y="735792"/>
-                  </a:lnTo>
-                  <a:lnTo>
-                    <a:pt x="3802053" y="697695"/>
-                  </a:lnTo>
-                  <a:lnTo>
-                    <a:pt x="3725420" y="656952"/>
-                  </a:lnTo>
-                  <a:lnTo>
-                    <a:pt x="3648788" y="613379"/>
-                  </a:lnTo>
-                  <a:lnTo>
-                    <a:pt x="3572155" y="566781"/>
-                  </a:lnTo>
-                  <a:lnTo>
-                    <a:pt x="3495523" y="516945"/>
-                  </a:lnTo>
-                  <a:lnTo>
-                    <a:pt x="3418890" y="463649"/>
-                  </a:lnTo>
-                  <a:lnTo>
-                    <a:pt x="3342258" y="447975"/>
-                  </a:lnTo>
-                  <a:lnTo>
-                    <a:pt x="3265625" y="439709"/>
-                  </a:lnTo>
-                  <a:lnTo>
-                    <a:pt x="3188993" y="431361"/>
-                  </a:lnTo>
-                  <a:lnTo>
-                    <a:pt x="3112360" y="422931"/>
-                  </a:lnTo>
-                  <a:lnTo>
-                    <a:pt x="3035727" y="414418"/>
-                  </a:lnTo>
-                  <a:lnTo>
-                    <a:pt x="2959095" y="405821"/>
-                  </a:lnTo>
-                  <a:lnTo>
-                    <a:pt x="2882462" y="397138"/>
-                  </a:lnTo>
-                  <a:lnTo>
-                    <a:pt x="2805830" y="388370"/>
-                  </a:lnTo>
-                  <a:lnTo>
-                    <a:pt x="2729197" y="379515"/>
-                  </a:lnTo>
-                  <a:lnTo>
-                    <a:pt x="2652565" y="370573"/>
-                  </a:lnTo>
-                  <a:lnTo>
-                    <a:pt x="2575932" y="361542"/>
-                  </a:lnTo>
-                  <a:lnTo>
-                    <a:pt x="2499300" y="352422"/>
-                  </a:lnTo>
-                  <a:lnTo>
-                    <a:pt x="2422667" y="343212"/>
-                  </a:lnTo>
-                  <a:lnTo>
-                    <a:pt x="2346034" y="333910"/>
-                  </a:lnTo>
-                  <a:lnTo>
-                    <a:pt x="2269402" y="324517"/>
-                  </a:lnTo>
-                  <a:lnTo>
-                    <a:pt x="2192769" y="315031"/>
-                  </a:lnTo>
-                  <a:lnTo>
-                    <a:pt x="2116137" y="305452"/>
-                  </a:lnTo>
-                  <a:lnTo>
-                    <a:pt x="2039504" y="295777"/>
-                  </a:lnTo>
-                  <a:lnTo>
-                    <a:pt x="1962872" y="286007"/>
-                  </a:lnTo>
-                  <a:lnTo>
-                    <a:pt x="1886239" y="276141"/>
-                  </a:lnTo>
-                  <a:lnTo>
-                    <a:pt x="1809607" y="266177"/>
-                  </a:lnTo>
-                  <a:lnTo>
-                    <a:pt x="1732974" y="256114"/>
-                  </a:lnTo>
-                  <a:lnTo>
-                    <a:pt x="1656342" y="245952"/>
-                  </a:lnTo>
-                  <a:lnTo>
-                    <a:pt x="1579709" y="235690"/>
-                  </a:lnTo>
-                  <a:lnTo>
-                    <a:pt x="1503076" y="225326"/>
-                  </a:lnTo>
-                  <a:lnTo>
-                    <a:pt x="1426444" y="214859"/>
-                  </a:lnTo>
-                  <a:lnTo>
-                    <a:pt x="1349811" y="204290"/>
-                  </a:lnTo>
-                  <a:lnTo>
-                    <a:pt x="1273179" y="193615"/>
-                  </a:lnTo>
-                  <a:lnTo>
-                    <a:pt x="1196546" y="182836"/>
-                  </a:lnTo>
-                  <a:lnTo>
-                    <a:pt x="1119914" y="171950"/>
-                  </a:lnTo>
-                  <a:lnTo>
-                    <a:pt x="1043281" y="160956"/>
-                  </a:lnTo>
-                  <a:lnTo>
-                    <a:pt x="966649" y="149853"/>
-                  </a:lnTo>
-                  <a:lnTo>
-                    <a:pt x="890016" y="138641"/>
-                  </a:lnTo>
-                  <a:lnTo>
-                    <a:pt x="813384" y="127318"/>
-                  </a:lnTo>
-                  <a:lnTo>
-                    <a:pt x="736751" y="115883"/>
-                  </a:lnTo>
-                  <a:lnTo>
-                    <a:pt x="660118" y="104335"/>
-                  </a:lnTo>
-                  <a:lnTo>
-                    <a:pt x="583486" y="92673"/>
-                  </a:lnTo>
-                  <a:lnTo>
-                    <a:pt x="506853" y="80896"/>
-                  </a:lnTo>
-                  <a:lnTo>
-                    <a:pt x="430221" y="69002"/>
-                  </a:lnTo>
-                  <a:lnTo>
-                    <a:pt x="353588" y="56991"/>
-                  </a:lnTo>
-                  <a:lnTo>
-                    <a:pt x="276956" y="44861"/>
-                  </a:lnTo>
-                  <a:lnTo>
-                    <a:pt x="200323" y="32611"/>
-                  </a:lnTo>
-                  <a:lnTo>
-                    <a:pt x="123691" y="20240"/>
-                  </a:lnTo>
-                  <a:lnTo>
-                    <a:pt x="47058" y="7747"/>
-                  </a:lnTo>
-                  <a:lnTo>
-                    <a:pt x="0" y="0"/>
-                  </a:lnTo>
-                </a:path>
-              </a:pathLst>
-            </a:custGeom>
-          </p:spPr>
-          <p:txBody>
-            <a:bodyPr/>
-            <a:lstStyle/>
-            <a:p/>
-          </p:txBody>
-        </p:sp>
-        <p:sp>
-          <p:nvSpPr>
-            <p:cNvPr id="24" name="pl24"/>
-            <p:cNvSpPr/>
-            <p:nvPr/>
-          </p:nvSpPr>
-          <p:spPr>
-            <a:xfrm>
-              <a:off x="1367443" y="2073503"/>
-              <a:ext cx="6853857" cy="3372341"/>
-            </a:xfrm>
-            <a:custGeom>
-              <a:avLst/>
-              <a:pathLst>
-                <a:path w="6853857" h="3372341">
+                <a:path w="6405771" h="3372341">
                   <a:moveTo>
                     <a:pt x="0" y="0"/>
                   </a:moveTo>
                   <a:lnTo>
-                    <a:pt x="33561" y="58858"/>
-                  </a:lnTo>
-                  <a:lnTo>
-                    <a:pt x="110193" y="188178"/>
-                  </a:lnTo>
-                  <a:lnTo>
-                    <a:pt x="186826" y="312616"/>
-                  </a:lnTo>
-                  <a:lnTo>
-                    <a:pt x="263458" y="432355"/>
-                  </a:lnTo>
-                  <a:lnTo>
-                    <a:pt x="340091" y="547573"/>
-                  </a:lnTo>
-                  <a:lnTo>
-                    <a:pt x="416723" y="658440"/>
-                  </a:lnTo>
-                  <a:lnTo>
-                    <a:pt x="493356" y="765121"/>
-                  </a:lnTo>
-                  <a:lnTo>
-                    <a:pt x="569988" y="867774"/>
-                  </a:lnTo>
-                  <a:lnTo>
-                    <a:pt x="646621" y="966551"/>
-                  </a:lnTo>
-                  <a:lnTo>
-                    <a:pt x="723253" y="1061598"/>
-                  </a:lnTo>
-                  <a:lnTo>
-                    <a:pt x="799886" y="1153056"/>
-                  </a:lnTo>
-                  <a:lnTo>
-                    <a:pt x="876519" y="1241060"/>
-                  </a:lnTo>
-                  <a:lnTo>
-                    <a:pt x="953151" y="1325742"/>
-                  </a:lnTo>
-                  <a:lnTo>
-                    <a:pt x="1029784" y="1407227"/>
-                  </a:lnTo>
-                  <a:lnTo>
-                    <a:pt x="1106416" y="1485634"/>
-                  </a:lnTo>
-                  <a:lnTo>
-                    <a:pt x="1183049" y="1561081"/>
-                  </a:lnTo>
-                  <a:lnTo>
-                    <a:pt x="1259681" y="1633679"/>
-                  </a:lnTo>
-                  <a:lnTo>
-                    <a:pt x="1336314" y="1703536"/>
-                  </a:lnTo>
-                  <a:lnTo>
-                    <a:pt x="1412946" y="1770755"/>
-                  </a:lnTo>
-                  <a:lnTo>
-                    <a:pt x="1489579" y="1835436"/>
-                  </a:lnTo>
-                  <a:lnTo>
-                    <a:pt x="1566212" y="1897675"/>
-                  </a:lnTo>
-                  <a:lnTo>
-                    <a:pt x="1642844" y="1957563"/>
-                  </a:lnTo>
-                  <a:lnTo>
-                    <a:pt x="1719477" y="2015191"/>
-                  </a:lnTo>
-                  <a:lnTo>
-                    <a:pt x="1796109" y="2070642"/>
-                  </a:lnTo>
-                  <a:lnTo>
-                    <a:pt x="1872742" y="2124000"/>
-                  </a:lnTo>
-                  <a:lnTo>
-                    <a:pt x="1949374" y="2175342"/>
-                  </a:lnTo>
-                  <a:lnTo>
-                    <a:pt x="2026007" y="2224746"/>
-                  </a:lnTo>
-                  <a:lnTo>
-                    <a:pt x="2102639" y="2272285"/>
-                  </a:lnTo>
-                  <a:lnTo>
-                    <a:pt x="2179272" y="2318029"/>
-                  </a:lnTo>
-                  <a:lnTo>
-                    <a:pt x="2255904" y="2362045"/>
-                  </a:lnTo>
-                  <a:lnTo>
-                    <a:pt x="2332537" y="2404400"/>
-                  </a:lnTo>
-                  <a:lnTo>
-                    <a:pt x="2409170" y="2445155"/>
-                  </a:lnTo>
-                  <a:lnTo>
-                    <a:pt x="2485802" y="2484371"/>
-                  </a:lnTo>
-                  <a:lnTo>
-                    <a:pt x="2562435" y="2522107"/>
-                  </a:lnTo>
-                  <a:lnTo>
-                    <a:pt x="2639067" y="2558417"/>
-                  </a:lnTo>
-                  <a:lnTo>
-                    <a:pt x="2715700" y="2593357"/>
-                  </a:lnTo>
-                  <a:lnTo>
-                    <a:pt x="2792332" y="2626977"/>
-                  </a:lnTo>
-                  <a:lnTo>
-                    <a:pt x="2868965" y="2659328"/>
-                  </a:lnTo>
-                  <a:lnTo>
-                    <a:pt x="2945597" y="2690457"/>
-                  </a:lnTo>
-                  <a:lnTo>
-                    <a:pt x="3022230" y="2720411"/>
-                  </a:lnTo>
-                  <a:lnTo>
-                    <a:pt x="3098862" y="2749234"/>
-                  </a:lnTo>
-                  <a:lnTo>
-                    <a:pt x="3175495" y="2776969"/>
-                  </a:lnTo>
-                  <a:lnTo>
-                    <a:pt x="3252128" y="2803656"/>
-                  </a:lnTo>
-                  <a:lnTo>
-                    <a:pt x="3328760" y="2829335"/>
-                  </a:lnTo>
-                  <a:lnTo>
-                    <a:pt x="3405393" y="2854045"/>
-                  </a:lnTo>
-                  <a:lnTo>
-                    <a:pt x="3482025" y="2877822"/>
-                  </a:lnTo>
-                  <a:lnTo>
-                    <a:pt x="3558658" y="2900701"/>
-                  </a:lnTo>
-                  <a:lnTo>
-                    <a:pt x="3635290" y="2922717"/>
-                  </a:lnTo>
-                  <a:lnTo>
-                    <a:pt x="3711923" y="2943901"/>
-                  </a:lnTo>
-                  <a:lnTo>
-                    <a:pt x="3788555" y="2964285"/>
-                  </a:lnTo>
-                  <a:lnTo>
-                    <a:pt x="3865188" y="2983899"/>
-                  </a:lnTo>
-                  <a:lnTo>
-                    <a:pt x="3941821" y="3002773"/>
-                  </a:lnTo>
-                  <a:lnTo>
-                    <a:pt x="4018453" y="3020934"/>
-                  </a:lnTo>
-                  <a:lnTo>
-                    <a:pt x="4095086" y="3038409"/>
-                  </a:lnTo>
-                  <a:lnTo>
-                    <a:pt x="4171718" y="3055225"/>
-                  </a:lnTo>
-                  <a:lnTo>
-                    <a:pt x="4248351" y="3071406"/>
-                  </a:lnTo>
-                  <a:lnTo>
-                    <a:pt x="4324983" y="3086975"/>
-                  </a:lnTo>
-                  <a:lnTo>
-                    <a:pt x="4401616" y="3101957"/>
-                  </a:lnTo>
-                  <a:lnTo>
-                    <a:pt x="4478248" y="3116373"/>
-                  </a:lnTo>
-                  <a:lnTo>
-                    <a:pt x="4554881" y="3130245"/>
-                  </a:lnTo>
-                  <a:lnTo>
-                    <a:pt x="4631513" y="3143592"/>
-                  </a:lnTo>
-                  <a:lnTo>
-                    <a:pt x="4708146" y="3156436"/>
-                  </a:lnTo>
-                  <a:lnTo>
-                    <a:pt x="4784779" y="3168795"/>
-                  </a:lnTo>
-                  <a:lnTo>
-                    <a:pt x="4861411" y="3180688"/>
-                  </a:lnTo>
-                  <a:lnTo>
-                    <a:pt x="4938044" y="3192131"/>
-                  </a:lnTo>
-                  <a:lnTo>
-                    <a:pt x="5014676" y="3203142"/>
-                  </a:lnTo>
-                  <a:lnTo>
-                    <a:pt x="5091309" y="3213737"/>
-                  </a:lnTo>
-                  <a:lnTo>
-                    <a:pt x="5167941" y="3223933"/>
-                  </a:lnTo>
-                  <a:lnTo>
-                    <a:pt x="5244574" y="3233743"/>
-                  </a:lnTo>
-                  <a:lnTo>
-                    <a:pt x="5321206" y="3243183"/>
-                  </a:lnTo>
-                  <a:lnTo>
-                    <a:pt x="5397839" y="3252266"/>
-                  </a:lnTo>
-                  <a:lnTo>
-                    <a:pt x="5474472" y="3261007"/>
-                  </a:lnTo>
-                  <a:lnTo>
-                    <a:pt x="5551104" y="3269417"/>
-                  </a:lnTo>
-                  <a:lnTo>
-                    <a:pt x="5627737" y="3277510"/>
-                  </a:lnTo>
-                  <a:lnTo>
-                    <a:pt x="5704369" y="3285297"/>
-                  </a:lnTo>
-                  <a:lnTo>
-                    <a:pt x="5781002" y="3292791"/>
-                  </a:lnTo>
-                  <a:lnTo>
-                    <a:pt x="5857634" y="3300001"/>
-                  </a:lnTo>
-                  <a:lnTo>
-                    <a:pt x="5934267" y="3306939"/>
-                  </a:lnTo>
-                  <a:lnTo>
-                    <a:pt x="6010899" y="3313615"/>
-                  </a:lnTo>
-                  <a:lnTo>
-                    <a:pt x="6087532" y="3320039"/>
-                  </a:lnTo>
-                  <a:lnTo>
-                    <a:pt x="6164164" y="3326221"/>
-                  </a:lnTo>
-                  <a:lnTo>
-                    <a:pt x="6240797" y="3332169"/>
-                  </a:lnTo>
-                  <a:lnTo>
-                    <a:pt x="6317430" y="3337892"/>
-                  </a:lnTo>
-                  <a:lnTo>
-                    <a:pt x="6394062" y="3343399"/>
-                  </a:lnTo>
-                  <a:lnTo>
-                    <a:pt x="6470695" y="3348699"/>
-                  </a:lnTo>
-                  <a:lnTo>
-                    <a:pt x="6547327" y="3353798"/>
-                  </a:lnTo>
-                  <a:lnTo>
-                    <a:pt x="6623960" y="3358705"/>
-                  </a:lnTo>
-                  <a:lnTo>
-                    <a:pt x="6700592" y="3363426"/>
-                  </a:lnTo>
-                  <a:lnTo>
-                    <a:pt x="6777225" y="3367969"/>
-                  </a:lnTo>
-                  <a:lnTo>
-                    <a:pt x="6853857" y="3372341"/>
+                    <a:pt x="31366" y="58858"/>
+                  </a:lnTo>
+                  <a:lnTo>
+                    <a:pt x="102989" y="188178"/>
+                  </a:lnTo>
+                  <a:lnTo>
+                    <a:pt x="174611" y="312616"/>
+                  </a:lnTo>
+                  <a:lnTo>
+                    <a:pt x="246234" y="432355"/>
+                  </a:lnTo>
+                  <a:lnTo>
+                    <a:pt x="317857" y="547573"/>
+                  </a:lnTo>
+                  <a:lnTo>
+                    <a:pt x="389479" y="658440"/>
+                  </a:lnTo>
+                  <a:lnTo>
+                    <a:pt x="461102" y="765121"/>
+                  </a:lnTo>
+                  <a:lnTo>
+                    <a:pt x="532724" y="867774"/>
+                  </a:lnTo>
+                  <a:lnTo>
+                    <a:pt x="604347" y="966551"/>
+                  </a:lnTo>
+                  <a:lnTo>
+                    <a:pt x="675969" y="1061598"/>
+                  </a:lnTo>
+                  <a:lnTo>
+                    <a:pt x="747592" y="1153056"/>
+                  </a:lnTo>
+                  <a:lnTo>
+                    <a:pt x="819214" y="1241060"/>
+                  </a:lnTo>
+                  <a:lnTo>
+                    <a:pt x="890837" y="1325742"/>
+                  </a:lnTo>
+                  <a:lnTo>
+                    <a:pt x="962459" y="1407227"/>
+                  </a:lnTo>
+                  <a:lnTo>
+                    <a:pt x="1034082" y="1485634"/>
+                  </a:lnTo>
+                  <a:lnTo>
+                    <a:pt x="1105704" y="1561081"/>
+                  </a:lnTo>
+                  <a:lnTo>
+                    <a:pt x="1177327" y="1633679"/>
+                  </a:lnTo>
+                  <a:lnTo>
+                    <a:pt x="1248949" y="1703536"/>
+                  </a:lnTo>
+                  <a:lnTo>
+                    <a:pt x="1320572" y="1770755"/>
+                  </a:lnTo>
+                  <a:lnTo>
+                    <a:pt x="1392194" y="1835436"/>
+                  </a:lnTo>
+                  <a:lnTo>
+                    <a:pt x="1463817" y="1897675"/>
+                  </a:lnTo>
+                  <a:lnTo>
+                    <a:pt x="1535439" y="1957563"/>
+                  </a:lnTo>
+                  <a:lnTo>
+                    <a:pt x="1607062" y="2015191"/>
+                  </a:lnTo>
+                  <a:lnTo>
+                    <a:pt x="1678685" y="2070642"/>
+                  </a:lnTo>
+                  <a:lnTo>
+                    <a:pt x="1750307" y="2124000"/>
+                  </a:lnTo>
+                  <a:lnTo>
+                    <a:pt x="1821930" y="2175342"/>
+                  </a:lnTo>
+                  <a:lnTo>
+                    <a:pt x="1893552" y="2224746"/>
+                  </a:lnTo>
+                  <a:lnTo>
+                    <a:pt x="1965175" y="2272285"/>
+                  </a:lnTo>
+                  <a:lnTo>
+                    <a:pt x="2036797" y="2318029"/>
+                  </a:lnTo>
+                  <a:lnTo>
+                    <a:pt x="2108420" y="2362045"/>
+                  </a:lnTo>
+                  <a:lnTo>
+                    <a:pt x="2180042" y="2404400"/>
+                  </a:lnTo>
+                  <a:lnTo>
+                    <a:pt x="2251665" y="2445155"/>
+                  </a:lnTo>
+                  <a:lnTo>
+                    <a:pt x="2323287" y="2484371"/>
+                  </a:lnTo>
+                  <a:lnTo>
+                    <a:pt x="2394910" y="2522107"/>
+                  </a:lnTo>
+                  <a:lnTo>
+                    <a:pt x="2466532" y="2558417"/>
+                  </a:lnTo>
+                  <a:lnTo>
+                    <a:pt x="2538155" y="2593357"/>
+                  </a:lnTo>
+                  <a:lnTo>
+                    <a:pt x="2609777" y="2626977"/>
+                  </a:lnTo>
+                  <a:lnTo>
+                    <a:pt x="2681400" y="2659328"/>
+                  </a:lnTo>
+                  <a:lnTo>
+                    <a:pt x="2753022" y="2690457"/>
+                  </a:lnTo>
+                  <a:lnTo>
+                    <a:pt x="2824645" y="2720411"/>
+                  </a:lnTo>
+                  <a:lnTo>
+                    <a:pt x="2896267" y="2749234"/>
+                  </a:lnTo>
+                  <a:lnTo>
+                    <a:pt x="2967890" y="2776969"/>
+                  </a:lnTo>
+                  <a:lnTo>
+                    <a:pt x="3039513" y="2803656"/>
+                  </a:lnTo>
+                  <a:lnTo>
+                    <a:pt x="3111135" y="2829335"/>
+                  </a:lnTo>
+                  <a:lnTo>
+                    <a:pt x="3182758" y="2854045"/>
+                  </a:lnTo>
+                  <a:lnTo>
+                    <a:pt x="3254380" y="2877822"/>
+                  </a:lnTo>
+                  <a:lnTo>
+                    <a:pt x="3326003" y="2900701"/>
+                  </a:lnTo>
+                  <a:lnTo>
+                    <a:pt x="3397625" y="2922717"/>
+                  </a:lnTo>
+                  <a:lnTo>
+                    <a:pt x="3469248" y="2943901"/>
+                  </a:lnTo>
+                  <a:lnTo>
+                    <a:pt x="3540870" y="2964285"/>
+                  </a:lnTo>
+                  <a:lnTo>
+                    <a:pt x="3612493" y="2983899"/>
+                  </a:lnTo>
+                  <a:lnTo>
+                    <a:pt x="3684115" y="3002773"/>
+                  </a:lnTo>
+                  <a:lnTo>
+                    <a:pt x="3755738" y="3020934"/>
+                  </a:lnTo>
+                  <a:lnTo>
+                    <a:pt x="3827360" y="3038409"/>
+                  </a:lnTo>
+                  <a:lnTo>
+                    <a:pt x="3898983" y="3055225"/>
+                  </a:lnTo>
+                  <a:lnTo>
+                    <a:pt x="3970605" y="3071406"/>
+                  </a:lnTo>
+                  <a:lnTo>
+                    <a:pt x="4042228" y="3086975"/>
+                  </a:lnTo>
+                  <a:lnTo>
+                    <a:pt x="4113850" y="3101957"/>
+                  </a:lnTo>
+                  <a:lnTo>
+                    <a:pt x="4185473" y="3116373"/>
+                  </a:lnTo>
+                  <a:lnTo>
+                    <a:pt x="4257095" y="3130245"/>
+                  </a:lnTo>
+                  <a:lnTo>
+                    <a:pt x="4328718" y="3143592"/>
+                  </a:lnTo>
+                  <a:lnTo>
+                    <a:pt x="4400341" y="3156436"/>
+                  </a:lnTo>
+                  <a:lnTo>
+                    <a:pt x="4471963" y="3168795"/>
+                  </a:lnTo>
+                  <a:lnTo>
+                    <a:pt x="4543586" y="3180688"/>
+                  </a:lnTo>
+                  <a:lnTo>
+                    <a:pt x="4615208" y="3192131"/>
+                  </a:lnTo>
+                  <a:lnTo>
+                    <a:pt x="4686831" y="3203142"/>
+                  </a:lnTo>
+                  <a:lnTo>
+                    <a:pt x="4758453" y="3213737"/>
+                  </a:lnTo>
+                  <a:lnTo>
+                    <a:pt x="4830076" y="3223933"/>
+                  </a:lnTo>
+                  <a:lnTo>
+                    <a:pt x="4901698" y="3233743"/>
+                  </a:lnTo>
+                  <a:lnTo>
+                    <a:pt x="4973321" y="3243183"/>
+                  </a:lnTo>
+                  <a:lnTo>
+                    <a:pt x="5044943" y="3252266"/>
+                  </a:lnTo>
+                  <a:lnTo>
+                    <a:pt x="5116566" y="3261007"/>
+                  </a:lnTo>
+                  <a:lnTo>
+                    <a:pt x="5188188" y="3269417"/>
+                  </a:lnTo>
+                  <a:lnTo>
+                    <a:pt x="5259811" y="3277510"/>
+                  </a:lnTo>
+                  <a:lnTo>
+                    <a:pt x="5331433" y="3285297"/>
+                  </a:lnTo>
+                  <a:lnTo>
+                    <a:pt x="5403056" y="3292791"/>
+                  </a:lnTo>
+                  <a:lnTo>
+                    <a:pt x="5474678" y="3300001"/>
+                  </a:lnTo>
+                  <a:lnTo>
+                    <a:pt x="5546301" y="3306939"/>
+                  </a:lnTo>
+                  <a:lnTo>
+                    <a:pt x="5617923" y="3313615"/>
+                  </a:lnTo>
+                  <a:lnTo>
+                    <a:pt x="5689546" y="3320039"/>
+                  </a:lnTo>
+                  <a:lnTo>
+                    <a:pt x="5761168" y="3326221"/>
+                  </a:lnTo>
+                  <a:lnTo>
+                    <a:pt x="5832791" y="3332169"/>
+                  </a:lnTo>
+                  <a:lnTo>
+                    <a:pt x="5904414" y="3337892"/>
+                  </a:lnTo>
+                  <a:lnTo>
+                    <a:pt x="5976036" y="3343399"/>
+                  </a:lnTo>
+                  <a:lnTo>
+                    <a:pt x="6047659" y="3348699"/>
+                  </a:lnTo>
+                  <a:lnTo>
+                    <a:pt x="6119281" y="3353798"/>
+                  </a:lnTo>
+                  <a:lnTo>
+                    <a:pt x="6190904" y="3358705"/>
+                  </a:lnTo>
+                  <a:lnTo>
+                    <a:pt x="6262526" y="3363426"/>
+                  </a:lnTo>
+                  <a:lnTo>
+                    <a:pt x="6334149" y="3367969"/>
+                  </a:lnTo>
+                  <a:lnTo>
+                    <a:pt x="6405771" y="3372341"/>
                   </a:lnTo>
                 </a:path>
               </a:pathLst>
@@ -4422,7 +4391,7 @@
         </p:sp>
         <p:sp>
           <p:nvSpPr>
-            <p:cNvPr id="25" name="pl25"/>
+            <p:cNvPr id="24" name="pl24"/>
             <p:cNvSpPr/>
             <p:nvPr/>
           </p:nvSpPr>
@@ -4465,13 +4434,13 @@
         </p:sp>
         <p:sp>
           <p:nvSpPr>
-            <p:cNvPr id="26" name="pl26"/>
+            <p:cNvPr id="25" name="pl25"/>
             <p:cNvSpPr/>
             <p:nvPr/>
           </p:nvSpPr>
           <p:spPr>
             <a:xfrm>
-              <a:off x="4224261" y="2073503"/>
+              <a:off x="4526955" y="2073503"/>
               <a:ext cx="0" cy="3649639"/>
             </a:xfrm>
             <a:custGeom>
@@ -4508,7 +4477,7 @@
         </p:sp>
         <p:sp>
           <p:nvSpPr>
-            <p:cNvPr id="27" name="tx27"/>
+            <p:cNvPr id="26" name="tx26"/>
             <p:cNvSpPr/>
             <p:nvPr/>
           </p:nvSpPr>
@@ -4554,7 +4523,7 @@
         </p:sp>
         <p:sp>
           <p:nvSpPr>
-            <p:cNvPr id="28" name="tx28"/>
+            <p:cNvPr id="27" name="tx27"/>
             <p:cNvSpPr/>
             <p:nvPr/>
           </p:nvSpPr>
@@ -4600,7 +4569,7 @@
         </p:sp>
         <p:sp>
           <p:nvSpPr>
-            <p:cNvPr id="29" name="tx29"/>
+            <p:cNvPr id="28" name="tx28"/>
             <p:cNvSpPr/>
             <p:nvPr/>
           </p:nvSpPr>
@@ -4646,7 +4615,7 @@
         </p:sp>
         <p:sp>
           <p:nvSpPr>
-            <p:cNvPr id="30" name="tx30"/>
+            <p:cNvPr id="29" name="tx29"/>
             <p:cNvSpPr/>
             <p:nvPr/>
           </p:nvSpPr>
@@ -4692,7 +4661,7 @@
         </p:sp>
         <p:sp>
           <p:nvSpPr>
-            <p:cNvPr id="31" name="tx31"/>
+            <p:cNvPr id="30" name="tx30"/>
             <p:cNvSpPr/>
             <p:nvPr/>
           </p:nvSpPr>
@@ -4738,14 +4707,14 @@
         </p:sp>
         <p:sp>
           <p:nvSpPr>
-            <p:cNvPr id="32" name="tx32"/>
+            <p:cNvPr id="31" name="tx31"/>
             <p:cNvSpPr/>
             <p:nvPr/>
           </p:nvSpPr>
           <p:spPr>
             <a:xfrm>
-              <a:off x="2423864" y="5785772"/>
-              <a:ext cx="155356" cy="80101"/>
+              <a:off x="2421884" y="5785772"/>
+              <a:ext cx="161574" cy="80101"/>
             </a:xfrm>
             <a:prstGeom prst="rect">
               <a:avLst/>
@@ -4777,21 +4746,21 @@
                   <a:latin typeface="Helvetica"/>
                   <a:cs typeface="Helvetica"/>
                 </a:rPr>
-                <a:t>0.8</a:t>
+                <a:t>-25</a:t>
               </a:r>
             </a:p>
           </p:txBody>
         </p:sp>
         <p:sp>
           <p:nvSpPr>
-            <p:cNvPr id="33" name="tx33"/>
+            <p:cNvPr id="32" name="tx32"/>
             <p:cNvSpPr/>
             <p:nvPr/>
           </p:nvSpPr>
           <p:spPr>
             <a:xfrm>
-              <a:off x="4196521" y="5785772"/>
-              <a:ext cx="155356" cy="80101"/>
+              <a:off x="4542539" y="5785772"/>
+              <a:ext cx="62179" cy="80101"/>
             </a:xfrm>
             <a:prstGeom prst="rect">
               <a:avLst/>
@@ -4823,21 +4792,21 @@
                   <a:latin typeface="Helvetica"/>
                   <a:cs typeface="Helvetica"/>
                 </a:rPr>
-                <a:t>1.0</a:t>
+                <a:t>0</a:t>
               </a:r>
             </a:p>
           </p:txBody>
         </p:sp>
         <p:sp>
           <p:nvSpPr>
-            <p:cNvPr id="34" name="tx34"/>
+            <p:cNvPr id="33" name="tx33"/>
             <p:cNvSpPr/>
             <p:nvPr/>
           </p:nvSpPr>
           <p:spPr>
             <a:xfrm>
-              <a:off x="5969179" y="5785772"/>
-              <a:ext cx="155356" cy="80101"/>
+              <a:off x="6582407" y="5785772"/>
+              <a:ext cx="124358" cy="80101"/>
             </a:xfrm>
             <a:prstGeom prst="rect">
               <a:avLst/>
@@ -4869,67 +4838,21 @@
                   <a:latin typeface="Helvetica"/>
                   <a:cs typeface="Helvetica"/>
                 </a:rPr>
-                <a:t>1.2</a:t>
+                <a:t>25</a:t>
               </a:r>
             </a:p>
           </p:txBody>
         </p:sp>
         <p:sp>
           <p:nvSpPr>
-            <p:cNvPr id="35" name="tx35"/>
+            <p:cNvPr id="34" name="tx34"/>
             <p:cNvSpPr/>
             <p:nvPr/>
           </p:nvSpPr>
           <p:spPr>
             <a:xfrm>
-              <a:off x="7741836" y="5785772"/>
-              <a:ext cx="155356" cy="80101"/>
-            </a:xfrm>
-            <a:prstGeom prst="rect">
-              <a:avLst/>
-            </a:prstGeom>
-            <a:noFill/>
-          </p:spPr>
-          <p:txBody>
-            <a:bodyPr lIns="0" rIns="0" tIns="0" bIns="0" anchorCtr="1" anchor="ctr" wrap="none"/>
-            <a:lstStyle/>
-            <a:p>
-              <a:pPr algn="l" marL="0" marR="0" indent="0">
-                <a:lnSpc>
-                  <a:spcPts val="880"/>
-                </a:lnSpc>
-                <a:spcBef>
-                  <a:spcPts val="0"/>
-                </a:spcBef>
-                <a:spcAft>
-                  <a:spcPts val="0"/>
-                </a:spcAft>
-              </a:pPr>
-              <a:r>
-                <a:rPr sz="880">
-                  <a:solidFill>
-                    <a:srgbClr val="4D4D4D">
-                      <a:alpha val="100000"/>
-                    </a:srgbClr>
-                  </a:solidFill>
-                  <a:latin typeface="Helvetica"/>
-                  <a:cs typeface="Helvetica"/>
-                </a:rPr>
-                <a:t>1.4</a:t>
-              </a:r>
-            </a:p>
-          </p:txBody>
-        </p:sp>
-        <p:sp>
-          <p:nvSpPr>
-            <p:cNvPr id="36" name="tx36"/>
-            <p:cNvSpPr/>
-            <p:nvPr/>
-          </p:nvSpPr>
-          <p:spPr>
-            <a:xfrm>
-              <a:off x="3879271" y="5925448"/>
-              <a:ext cx="1676186" cy="100218"/>
+              <a:off x="2928340" y="5925448"/>
+              <a:ext cx="3578047" cy="100218"/>
             </a:xfrm>
             <a:prstGeom prst="rect">
               <a:avLst/>
@@ -4961,14 +4884,14 @@
                   <a:latin typeface="Helvetica"/>
                   <a:cs typeface="Helvetica"/>
                 </a:rPr>
-                <a:t>CKD-EPI Cr-Cys / CG ratio</a:t>
+                <a:t>eGFR difference (%): 100 × (CKD-EPI Cr-Cys − CG) / CG</a:t>
               </a:r>
             </a:p>
           </p:txBody>
         </p:sp>
         <p:sp>
           <p:nvSpPr>
-            <p:cNvPr id="37" name="tx37"/>
+            <p:cNvPr id="35" name="tx35"/>
             <p:cNvSpPr/>
             <p:nvPr/>
           </p:nvSpPr>
@@ -5014,14 +4937,14 @@
         </p:sp>
         <p:sp>
           <p:nvSpPr>
-            <p:cNvPr id="38" name="tx38"/>
+            <p:cNvPr id="36" name="tx36"/>
             <p:cNvSpPr/>
             <p:nvPr/>
           </p:nvSpPr>
           <p:spPr>
             <a:xfrm>
               <a:off x="817517" y="1896563"/>
-              <a:ext cx="6232916" cy="82021"/>
+              <a:ext cx="6385163" cy="82021"/>
             </a:xfrm>
             <a:prstGeom prst="rect">
               <a:avLst/>
@@ -5053,14 +4976,14 @@
                   <a:latin typeface="Helvetica"/>
                   <a:cs typeface="Helvetica"/>
                 </a:rPr>
-                <a:t>subHR per 0.1 ratio decline: 1.56 (1.12-2.17), p = 0.008  |  per IQR decline (Δ = 0.30): 3.79 (1.41-10.21)  |  IQR: [0.85, 1.15]</a:t>
+                <a:t>subHR per 10 % decline: 1.56 (1.12-2.17), p = 0.008  |  per IQR decline (Δ = 29.9 %): 3.79 (1.41-10.21)  |  IQR: [-15.0, 14.9] %</a:t>
               </a:r>
             </a:p>
           </p:txBody>
         </p:sp>
         <p:sp>
           <p:nvSpPr>
-            <p:cNvPr id="39" name="tx39"/>
+            <p:cNvPr id="37" name="tx37"/>
             <p:cNvSpPr/>
             <p:nvPr/>
           </p:nvSpPr>

--- a/docs/pptx/carbo/jx-carbo-linsubhr-ratio-hosp1.pptx
+++ b/docs/pptx/carbo/jx-carbo-linsubhr-ratio-hosp1.pptx
@@ -2265,34 +2265,26 @@
         </p:sp>
         <p:sp>
           <p:nvSpPr>
-            <p:cNvPr id="4" name="pl4"/>
+            <p:cNvPr id="4" name="rc4"/>
             <p:cNvSpPr/>
             <p:nvPr/>
           </p:nvSpPr>
           <p:spPr>
             <a:xfrm>
-              <a:off x="817517" y="5142518"/>
-              <a:ext cx="7799693" cy="0"/>
+              <a:off x="457200" y="1600200"/>
+              <a:ext cx="8229600" cy="4525962"/>
             </a:xfrm>
-            <a:custGeom>
+            <a:prstGeom prst="rect">
               <a:avLst/>
-              <a:pathLst>
-                <a:path w="7799693" h="0">
-                  <a:moveTo>
-                    <a:pt x="0" y="0"/>
-                  </a:moveTo>
-                  <a:lnTo>
-                    <a:pt x="7799693" y="0"/>
-                  </a:lnTo>
-                  <a:lnTo>
-                    <a:pt x="7799693" y="0"/>
-                  </a:lnTo>
-                </a:path>
-              </a:pathLst>
-            </a:custGeom>
-            <a:ln w="6775" cap="flat">
+            </a:prstGeom>
+            <a:solidFill>
+              <a:srgbClr val="FFFFFF">
+                <a:alpha val="100000"/>
+              </a:srgbClr>
+            </a:solidFill>
+            <a:ln w="13550" cap="rnd">
               <a:solidFill>
-                <a:srgbClr val="EBEBEB">
+                <a:srgbClr val="FFFFFF">
                   <a:alpha val="100000"/>
                 </a:srgbClr>
               </a:solidFill>
@@ -2314,21 +2306,21 @@
           </p:nvSpPr>
           <p:spPr>
             <a:xfrm>
-              <a:off x="817517" y="4313054"/>
-              <a:ext cx="7799693" cy="0"/>
+              <a:off x="887106" y="3250627"/>
+              <a:ext cx="7660515" cy="0"/>
             </a:xfrm>
             <a:custGeom>
               <a:avLst/>
               <a:pathLst>
-                <a:path w="7799693" h="0">
+                <a:path w="7660515" h="0">
                   <a:moveTo>
                     <a:pt x="0" y="0"/>
                   </a:moveTo>
                   <a:lnTo>
-                    <a:pt x="7799693" y="0"/>
-                  </a:lnTo>
-                  <a:lnTo>
-                    <a:pt x="7799693" y="0"/>
+                    <a:pt x="7660515" y="0"/>
+                  </a:lnTo>
+                  <a:lnTo>
+                    <a:pt x="7660515" y="0"/>
                   </a:lnTo>
                 </a:path>
               </a:pathLst>
@@ -2357,21 +2349,21 @@
           </p:nvSpPr>
           <p:spPr>
             <a:xfrm>
-              <a:off x="817517" y="3483591"/>
-              <a:ext cx="7799693" cy="0"/>
+              <a:off x="887106" y="2951293"/>
+              <a:ext cx="7660515" cy="0"/>
             </a:xfrm>
             <a:custGeom>
               <a:avLst/>
               <a:pathLst>
-                <a:path w="7799693" h="0">
+                <a:path w="7660515" h="0">
                   <a:moveTo>
                     <a:pt x="0" y="0"/>
                   </a:moveTo>
                   <a:lnTo>
-                    <a:pt x="7799693" y="0"/>
-                  </a:lnTo>
-                  <a:lnTo>
-                    <a:pt x="7799693" y="0"/>
+                    <a:pt x="7660515" y="0"/>
+                  </a:lnTo>
+                  <a:lnTo>
+                    <a:pt x="7660515" y="0"/>
                   </a:lnTo>
                 </a:path>
               </a:pathLst>
@@ -2400,21 +2392,21 @@
           </p:nvSpPr>
           <p:spPr>
             <a:xfrm>
-              <a:off x="817517" y="2654127"/>
-              <a:ext cx="7799693" cy="0"/>
+              <a:off x="887106" y="2651959"/>
+              <a:ext cx="7660515" cy="0"/>
             </a:xfrm>
             <a:custGeom>
               <a:avLst/>
               <a:pathLst>
-                <a:path w="7799693" h="0">
+                <a:path w="7660515" h="0">
                   <a:moveTo>
                     <a:pt x="0" y="0"/>
                   </a:moveTo>
                   <a:lnTo>
-                    <a:pt x="7799693" y="0"/>
-                  </a:lnTo>
-                  <a:lnTo>
-                    <a:pt x="7799693" y="0"/>
+                    <a:pt x="7660515" y="0"/>
+                  </a:lnTo>
+                  <a:lnTo>
+                    <a:pt x="7660515" y="0"/>
                   </a:lnTo>
                 </a:path>
               </a:pathLst>
@@ -2443,21 +2435,21 @@
           </p:nvSpPr>
           <p:spPr>
             <a:xfrm>
-              <a:off x="1467192" y="2073503"/>
-              <a:ext cx="0" cy="3649639"/>
+              <a:off x="887106" y="2352625"/>
+              <a:ext cx="7660515" cy="0"/>
             </a:xfrm>
             <a:custGeom>
               <a:avLst/>
               <a:pathLst>
-                <a:path w="0" h="3649639">
+                <a:path w="7660515" h="0">
                   <a:moveTo>
-                    <a:pt x="0" y="3649639"/>
+                    <a:pt x="0" y="0"/>
                   </a:moveTo>
                   <a:lnTo>
-                    <a:pt x="0" y="0"/>
-                  </a:lnTo>
-                  <a:lnTo>
-                    <a:pt x="0" y="0"/>
+                    <a:pt x="7660515" y="0"/>
+                  </a:lnTo>
+                  <a:lnTo>
+                    <a:pt x="7660515" y="0"/>
                   </a:lnTo>
                 </a:path>
               </a:pathLst>
@@ -2486,15 +2478,15 @@
           </p:nvSpPr>
           <p:spPr>
             <a:xfrm>
-              <a:off x="3538150" y="2073503"/>
-              <a:ext cx="0" cy="3649639"/>
+              <a:off x="1525188" y="2143092"/>
+              <a:ext cx="0" cy="1317069"/>
             </a:xfrm>
             <a:custGeom>
               <a:avLst/>
               <a:pathLst>
-                <a:path w="0" h="3649639">
+                <a:path w="0" h="1317069">
                   <a:moveTo>
-                    <a:pt x="0" y="3649639"/>
+                    <a:pt x="0" y="1317069"/>
                   </a:moveTo>
                   <a:lnTo>
                     <a:pt x="0" y="0"/>
@@ -2529,15 +2521,15 @@
           </p:nvSpPr>
           <p:spPr>
             <a:xfrm>
-              <a:off x="5609107" y="2073503"/>
-              <a:ext cx="0" cy="3649639"/>
+              <a:off x="3559192" y="2143092"/>
+              <a:ext cx="0" cy="1317069"/>
             </a:xfrm>
             <a:custGeom>
               <a:avLst/>
               <a:pathLst>
-                <a:path w="0" h="3649639">
+                <a:path w="0" h="1317069">
                   <a:moveTo>
-                    <a:pt x="0" y="3649639"/>
+                    <a:pt x="0" y="1317069"/>
                   </a:moveTo>
                   <a:lnTo>
                     <a:pt x="0" y="0"/>
@@ -2572,15 +2564,15 @@
           </p:nvSpPr>
           <p:spPr>
             <a:xfrm>
-              <a:off x="7680065" y="2073503"/>
-              <a:ext cx="0" cy="3649639"/>
+              <a:off x="5593195" y="2143092"/>
+              <a:ext cx="0" cy="1317069"/>
             </a:xfrm>
             <a:custGeom>
               <a:avLst/>
               <a:pathLst>
-                <a:path w="0" h="3649639">
+                <a:path w="0" h="1317069">
                   <a:moveTo>
-                    <a:pt x="0" y="3649639"/>
+                    <a:pt x="0" y="1317069"/>
                   </a:moveTo>
                   <a:lnTo>
                     <a:pt x="0" y="0"/>
@@ -2615,26 +2607,26 @@
           </p:nvSpPr>
           <p:spPr>
             <a:xfrm>
-              <a:off x="817517" y="5557249"/>
-              <a:ext cx="7799693" cy="0"/>
+              <a:off x="7627198" y="2143092"/>
+              <a:ext cx="0" cy="1317069"/>
             </a:xfrm>
             <a:custGeom>
               <a:avLst/>
               <a:pathLst>
-                <a:path w="7799693" h="0">
+                <a:path w="0" h="1317069">
                   <a:moveTo>
+                    <a:pt x="0" y="1317069"/>
+                  </a:moveTo>
+                  <a:lnTo>
                     <a:pt x="0" y="0"/>
-                  </a:moveTo>
-                  <a:lnTo>
-                    <a:pt x="7799693" y="0"/>
-                  </a:lnTo>
-                  <a:lnTo>
-                    <a:pt x="7799693" y="0"/>
+                  </a:lnTo>
+                  <a:lnTo>
+                    <a:pt x="0" y="0"/>
                   </a:lnTo>
                 </a:path>
               </a:pathLst>
             </a:custGeom>
-            <a:ln w="13550" cap="flat">
+            <a:ln w="6775" cap="flat">
               <a:solidFill>
                 <a:srgbClr val="EBEBEB">
                   <a:alpha val="100000"/>
@@ -2658,21 +2650,21 @@
           </p:nvSpPr>
           <p:spPr>
             <a:xfrm>
-              <a:off x="817517" y="4727786"/>
-              <a:ext cx="7799693" cy="0"/>
+              <a:off x="887106" y="3400294"/>
+              <a:ext cx="7660515" cy="0"/>
             </a:xfrm>
             <a:custGeom>
               <a:avLst/>
               <a:pathLst>
-                <a:path w="7799693" h="0">
+                <a:path w="7660515" h="0">
                   <a:moveTo>
                     <a:pt x="0" y="0"/>
                   </a:moveTo>
                   <a:lnTo>
-                    <a:pt x="7799693" y="0"/>
-                  </a:lnTo>
-                  <a:lnTo>
-                    <a:pt x="7799693" y="0"/>
+                    <a:pt x="7660515" y="0"/>
+                  </a:lnTo>
+                  <a:lnTo>
+                    <a:pt x="7660515" y="0"/>
                   </a:lnTo>
                 </a:path>
               </a:pathLst>
@@ -2701,21 +2693,21 @@
           </p:nvSpPr>
           <p:spPr>
             <a:xfrm>
-              <a:off x="817517" y="3898322"/>
-              <a:ext cx="7799693" cy="0"/>
+              <a:off x="887106" y="3100960"/>
+              <a:ext cx="7660515" cy="0"/>
             </a:xfrm>
             <a:custGeom>
               <a:avLst/>
               <a:pathLst>
-                <a:path w="7799693" h="0">
+                <a:path w="7660515" h="0">
                   <a:moveTo>
                     <a:pt x="0" y="0"/>
                   </a:moveTo>
                   <a:lnTo>
-                    <a:pt x="7799693" y="0"/>
-                  </a:lnTo>
-                  <a:lnTo>
-                    <a:pt x="7799693" y="0"/>
+                    <a:pt x="7660515" y="0"/>
+                  </a:lnTo>
+                  <a:lnTo>
+                    <a:pt x="7660515" y="0"/>
                   </a:lnTo>
                 </a:path>
               </a:pathLst>
@@ -2744,21 +2736,21 @@
           </p:nvSpPr>
           <p:spPr>
             <a:xfrm>
-              <a:off x="817517" y="3068859"/>
-              <a:ext cx="7799693" cy="0"/>
+              <a:off x="887106" y="2801626"/>
+              <a:ext cx="7660515" cy="0"/>
             </a:xfrm>
             <a:custGeom>
               <a:avLst/>
               <a:pathLst>
-                <a:path w="7799693" h="0">
+                <a:path w="7660515" h="0">
                   <a:moveTo>
                     <a:pt x="0" y="0"/>
                   </a:moveTo>
                   <a:lnTo>
-                    <a:pt x="7799693" y="0"/>
-                  </a:lnTo>
-                  <a:lnTo>
-                    <a:pt x="7799693" y="0"/>
+                    <a:pt x="7660515" y="0"/>
+                  </a:lnTo>
+                  <a:lnTo>
+                    <a:pt x="7660515" y="0"/>
                   </a:lnTo>
                 </a:path>
               </a:pathLst>
@@ -2787,21 +2779,21 @@
           </p:nvSpPr>
           <p:spPr>
             <a:xfrm>
-              <a:off x="817517" y="2239395"/>
-              <a:ext cx="7799693" cy="0"/>
+              <a:off x="887106" y="2502292"/>
+              <a:ext cx="7660515" cy="0"/>
             </a:xfrm>
             <a:custGeom>
               <a:avLst/>
               <a:pathLst>
-                <a:path w="7799693" h="0">
+                <a:path w="7660515" h="0">
                   <a:moveTo>
                     <a:pt x="0" y="0"/>
                   </a:moveTo>
                   <a:lnTo>
-                    <a:pt x="7799693" y="0"/>
-                  </a:lnTo>
-                  <a:lnTo>
-                    <a:pt x="7799693" y="0"/>
+                    <a:pt x="7660515" y="0"/>
+                  </a:lnTo>
+                  <a:lnTo>
+                    <a:pt x="7660515" y="0"/>
                   </a:lnTo>
                 </a:path>
               </a:pathLst>
@@ -2830,21 +2822,21 @@
           </p:nvSpPr>
           <p:spPr>
             <a:xfrm>
-              <a:off x="2502671" y="2073503"/>
-              <a:ext cx="0" cy="3649639"/>
+              <a:off x="887106" y="2202958"/>
+              <a:ext cx="7660515" cy="0"/>
             </a:xfrm>
             <a:custGeom>
               <a:avLst/>
               <a:pathLst>
-                <a:path w="0" h="3649639">
+                <a:path w="7660515" h="0">
                   <a:moveTo>
-                    <a:pt x="0" y="3649639"/>
+                    <a:pt x="0" y="0"/>
                   </a:moveTo>
                   <a:lnTo>
-                    <a:pt x="0" y="0"/>
-                  </a:lnTo>
-                  <a:lnTo>
-                    <a:pt x="0" y="0"/>
+                    <a:pt x="7660515" y="0"/>
+                  </a:lnTo>
+                  <a:lnTo>
+                    <a:pt x="7660515" y="0"/>
                   </a:lnTo>
                 </a:path>
               </a:pathLst>
@@ -2873,15 +2865,15 @@
           </p:nvSpPr>
           <p:spPr>
             <a:xfrm>
-              <a:off x="4573628" y="2073503"/>
-              <a:ext cx="0" cy="3649639"/>
+              <a:off x="2542190" y="2143092"/>
+              <a:ext cx="0" cy="1317069"/>
             </a:xfrm>
             <a:custGeom>
               <a:avLst/>
               <a:pathLst>
-                <a:path w="0" h="3649639">
+                <a:path w="0" h="1317069">
                   <a:moveTo>
-                    <a:pt x="0" y="3649639"/>
+                    <a:pt x="0" y="1317069"/>
                   </a:moveTo>
                   <a:lnTo>
                     <a:pt x="0" y="0"/>
@@ -2916,15 +2908,15 @@
           </p:nvSpPr>
           <p:spPr>
             <a:xfrm>
-              <a:off x="6644586" y="2073503"/>
-              <a:ext cx="0" cy="3649639"/>
+              <a:off x="4576193" y="2143092"/>
+              <a:ext cx="0" cy="1317069"/>
             </a:xfrm>
             <a:custGeom>
               <a:avLst/>
               <a:pathLst>
-                <a:path w="0" h="3649639">
+                <a:path w="0" h="1317069">
                   <a:moveTo>
-                    <a:pt x="0" y="3649639"/>
+                    <a:pt x="0" y="1317069"/>
                   </a:moveTo>
                   <a:lnTo>
                     <a:pt x="0" y="0"/>
@@ -2953,543 +2945,586 @@
         </p:sp>
         <p:sp>
           <p:nvSpPr>
-            <p:cNvPr id="20" name="pg20"/>
+            <p:cNvPr id="20" name="pl20"/>
             <p:cNvSpPr/>
             <p:nvPr/>
           </p:nvSpPr>
           <p:spPr>
             <a:xfrm>
-              <a:off x="1172049" y="2073503"/>
-              <a:ext cx="7090630" cy="3458755"/>
+              <a:off x="6610197" y="2143092"/>
+              <a:ext cx="0" cy="1317069"/>
             </a:xfrm>
             <a:custGeom>
               <a:avLst/>
               <a:pathLst>
-                <a:path w="7090630" h="3458755">
+                <a:path w="0" h="1317069">
                   <a:moveTo>
-                    <a:pt x="1824751" y="0"/>
+                    <a:pt x="0" y="1317069"/>
                   </a:moveTo>
                   <a:lnTo>
-                    <a:pt x="1862185" y="122028"/>
-                  </a:lnTo>
-                  <a:lnTo>
-                    <a:pt x="1933808" y="340343"/>
-                  </a:lnTo>
-                  <a:lnTo>
-                    <a:pt x="2005430" y="544481"/>
-                  </a:lnTo>
-                  <a:lnTo>
-                    <a:pt x="2077053" y="735361"/>
-                  </a:lnTo>
-                  <a:lnTo>
-                    <a:pt x="2148675" y="913846"/>
-                  </a:lnTo>
-                  <a:lnTo>
-                    <a:pt x="2220298" y="1080739"/>
-                  </a:lnTo>
-                  <a:lnTo>
-                    <a:pt x="2291920" y="1236794"/>
-                  </a:lnTo>
-                  <a:lnTo>
-                    <a:pt x="2363543" y="1382715"/>
-                  </a:lnTo>
-                  <a:lnTo>
-                    <a:pt x="2435165" y="1519159"/>
-                  </a:lnTo>
-                  <a:lnTo>
-                    <a:pt x="2506788" y="1646742"/>
-                  </a:lnTo>
-                  <a:lnTo>
-                    <a:pt x="2578410" y="1766040"/>
-                  </a:lnTo>
-                  <a:lnTo>
-                    <a:pt x="2650033" y="1877591"/>
-                  </a:lnTo>
-                  <a:lnTo>
-                    <a:pt x="2721655" y="1981897"/>
-                  </a:lnTo>
-                  <a:lnTo>
-                    <a:pt x="2793278" y="2079430"/>
-                  </a:lnTo>
-                  <a:lnTo>
-                    <a:pt x="2864901" y="2170628"/>
-                  </a:lnTo>
-                  <a:lnTo>
-                    <a:pt x="2936523" y="2255904"/>
-                  </a:lnTo>
-                  <a:lnTo>
-                    <a:pt x="3008146" y="2335642"/>
-                  </a:lnTo>
-                  <a:lnTo>
-                    <a:pt x="3079768" y="2410202"/>
-                  </a:lnTo>
-                  <a:lnTo>
-                    <a:pt x="3151391" y="2479920"/>
-                  </a:lnTo>
-                  <a:lnTo>
-                    <a:pt x="3223013" y="2545110"/>
-                  </a:lnTo>
-                  <a:lnTo>
-                    <a:pt x="3294636" y="2606066"/>
-                  </a:lnTo>
-                  <a:lnTo>
-                    <a:pt x="3366258" y="2655575"/>
-                  </a:lnTo>
-                  <a:lnTo>
-                    <a:pt x="3437881" y="2663680"/>
-                  </a:lnTo>
-                  <a:lnTo>
-                    <a:pt x="3509503" y="2671705"/>
-                  </a:lnTo>
-                  <a:lnTo>
-                    <a:pt x="3581126" y="2679652"/>
-                  </a:lnTo>
-                  <a:lnTo>
-                    <a:pt x="3652748" y="2687521"/>
-                  </a:lnTo>
-                  <a:lnTo>
-                    <a:pt x="3724371" y="2695314"/>
-                  </a:lnTo>
-                  <a:lnTo>
-                    <a:pt x="3795993" y="2703029"/>
-                  </a:lnTo>
-                  <a:lnTo>
-                    <a:pt x="3867616" y="2710670"/>
-                  </a:lnTo>
-                  <a:lnTo>
-                    <a:pt x="3939238" y="2718236"/>
-                  </a:lnTo>
-                  <a:lnTo>
-                    <a:pt x="4010861" y="2725727"/>
-                  </a:lnTo>
-                  <a:lnTo>
-                    <a:pt x="4082483" y="2733145"/>
-                  </a:lnTo>
-                  <a:lnTo>
-                    <a:pt x="4154106" y="2740491"/>
-                  </a:lnTo>
-                  <a:lnTo>
-                    <a:pt x="4225729" y="2747765"/>
-                  </a:lnTo>
-                  <a:lnTo>
-                    <a:pt x="4297351" y="2754967"/>
-                  </a:lnTo>
-                  <a:lnTo>
-                    <a:pt x="4368974" y="2762100"/>
-                  </a:lnTo>
-                  <a:lnTo>
-                    <a:pt x="4440596" y="2769162"/>
-                  </a:lnTo>
-                  <a:lnTo>
-                    <a:pt x="4512219" y="2776155"/>
-                  </a:lnTo>
-                  <a:lnTo>
-                    <a:pt x="4583841" y="2783080"/>
-                  </a:lnTo>
-                  <a:lnTo>
-                    <a:pt x="4655464" y="2789937"/>
-                  </a:lnTo>
-                  <a:lnTo>
-                    <a:pt x="4727086" y="2796727"/>
-                  </a:lnTo>
-                  <a:lnTo>
-                    <a:pt x="4798709" y="2803450"/>
-                  </a:lnTo>
-                  <a:lnTo>
-                    <a:pt x="4870331" y="2810108"/>
-                  </a:lnTo>
-                  <a:lnTo>
-                    <a:pt x="4941954" y="2816700"/>
-                  </a:lnTo>
-                  <a:lnTo>
-                    <a:pt x="5013576" y="2823228"/>
-                  </a:lnTo>
-                  <a:lnTo>
-                    <a:pt x="5085199" y="2829693"/>
-                  </a:lnTo>
-                  <a:lnTo>
-                    <a:pt x="5156821" y="2836093"/>
-                  </a:lnTo>
-                  <a:lnTo>
-                    <a:pt x="5228444" y="2842432"/>
-                  </a:lnTo>
-                  <a:lnTo>
-                    <a:pt x="5300066" y="2848708"/>
-                  </a:lnTo>
-                  <a:lnTo>
-                    <a:pt x="5371689" y="2854922"/>
-                  </a:lnTo>
-                  <a:lnTo>
-                    <a:pt x="5443311" y="2861076"/>
-                  </a:lnTo>
-                  <a:lnTo>
-                    <a:pt x="5514934" y="2867170"/>
-                  </a:lnTo>
-                  <a:lnTo>
-                    <a:pt x="5586557" y="2873204"/>
-                  </a:lnTo>
-                  <a:lnTo>
-                    <a:pt x="5658179" y="2879179"/>
-                  </a:lnTo>
-                  <a:lnTo>
-                    <a:pt x="5729802" y="2885096"/>
-                  </a:lnTo>
-                  <a:lnTo>
-                    <a:pt x="5801424" y="2890954"/>
-                  </a:lnTo>
-                  <a:lnTo>
-                    <a:pt x="5873047" y="2896756"/>
-                  </a:lnTo>
-                  <a:lnTo>
-                    <a:pt x="5944669" y="2902500"/>
-                  </a:lnTo>
-                  <a:lnTo>
-                    <a:pt x="6016292" y="2908189"/>
-                  </a:lnTo>
-                  <a:lnTo>
-                    <a:pt x="6087914" y="2913821"/>
-                  </a:lnTo>
-                  <a:lnTo>
-                    <a:pt x="6159537" y="2919399"/>
-                  </a:lnTo>
-                  <a:lnTo>
-                    <a:pt x="6231159" y="2924922"/>
-                  </a:lnTo>
-                  <a:lnTo>
-                    <a:pt x="6302782" y="2930391"/>
-                  </a:lnTo>
-                  <a:lnTo>
-                    <a:pt x="6374404" y="2935806"/>
-                  </a:lnTo>
-                  <a:lnTo>
-                    <a:pt x="6446027" y="2941168"/>
-                  </a:lnTo>
-                  <a:lnTo>
-                    <a:pt x="6517649" y="2946478"/>
-                  </a:lnTo>
-                  <a:lnTo>
-                    <a:pt x="6589272" y="2951736"/>
-                  </a:lnTo>
-                  <a:lnTo>
-                    <a:pt x="6660894" y="2956943"/>
-                  </a:lnTo>
-                  <a:lnTo>
-                    <a:pt x="6732517" y="2962098"/>
-                  </a:lnTo>
-                  <a:lnTo>
-                    <a:pt x="6804139" y="2967203"/>
-                  </a:lnTo>
-                  <a:lnTo>
-                    <a:pt x="6875762" y="2972258"/>
-                  </a:lnTo>
-                  <a:lnTo>
-                    <a:pt x="6947385" y="2977264"/>
-                  </a:lnTo>
-                  <a:lnTo>
-                    <a:pt x="7019007" y="2982220"/>
-                  </a:lnTo>
-                  <a:lnTo>
-                    <a:pt x="7090630" y="2987129"/>
-                  </a:lnTo>
-                  <a:lnTo>
-                    <a:pt x="7090630" y="3458755"/>
-                  </a:lnTo>
-                  <a:lnTo>
-                    <a:pt x="7019007" y="3457019"/>
-                  </a:lnTo>
-                  <a:lnTo>
-                    <a:pt x="6947385" y="3455163"/>
-                  </a:lnTo>
-                  <a:lnTo>
-                    <a:pt x="6875762" y="3453178"/>
-                  </a:lnTo>
-                  <a:lnTo>
-                    <a:pt x="6804139" y="3451055"/>
-                  </a:lnTo>
-                  <a:lnTo>
-                    <a:pt x="6732517" y="3448784"/>
-                  </a:lnTo>
-                  <a:lnTo>
-                    <a:pt x="6660894" y="3446356"/>
-                  </a:lnTo>
-                  <a:lnTo>
-                    <a:pt x="6589272" y="3443759"/>
-                  </a:lnTo>
-                  <a:lnTo>
-                    <a:pt x="6517649" y="3440982"/>
-                  </a:lnTo>
-                  <a:lnTo>
-                    <a:pt x="6446027" y="3438012"/>
-                  </a:lnTo>
-                  <a:lnTo>
-                    <a:pt x="6374404" y="3434836"/>
-                  </a:lnTo>
-                  <a:lnTo>
-                    <a:pt x="6302782" y="3431439"/>
-                  </a:lnTo>
-                  <a:lnTo>
-                    <a:pt x="6231159" y="3427806"/>
-                  </a:lnTo>
-                  <a:lnTo>
-                    <a:pt x="6159537" y="3423921"/>
-                  </a:lnTo>
-                  <a:lnTo>
-                    <a:pt x="6087914" y="3419766"/>
-                  </a:lnTo>
-                  <a:lnTo>
-                    <a:pt x="6016292" y="3415322"/>
-                  </a:lnTo>
-                  <a:lnTo>
-                    <a:pt x="5944669" y="3410570"/>
-                  </a:lnTo>
-                  <a:lnTo>
-                    <a:pt x="5873047" y="3405488"/>
-                  </a:lnTo>
-                  <a:lnTo>
-                    <a:pt x="5801424" y="3400053"/>
-                  </a:lnTo>
-                  <a:lnTo>
-                    <a:pt x="5729802" y="3394240"/>
-                  </a:lnTo>
-                  <a:lnTo>
-                    <a:pt x="5658179" y="3388024"/>
-                  </a:lnTo>
-                  <a:lnTo>
-                    <a:pt x="5586557" y="3381376"/>
-                  </a:lnTo>
-                  <a:lnTo>
-                    <a:pt x="5514934" y="3374266"/>
-                  </a:lnTo>
-                  <a:lnTo>
-                    <a:pt x="5443311" y="3366662"/>
-                  </a:lnTo>
-                  <a:lnTo>
-                    <a:pt x="5371689" y="3358530"/>
-                  </a:lnTo>
-                  <a:lnTo>
-                    <a:pt x="5300066" y="3349834"/>
-                  </a:lnTo>
-                  <a:lnTo>
-                    <a:pt x="5228444" y="3340533"/>
-                  </a:lnTo>
-                  <a:lnTo>
-                    <a:pt x="5156821" y="3330587"/>
-                  </a:lnTo>
-                  <a:lnTo>
-                    <a:pt x="5085199" y="3319950"/>
-                  </a:lnTo>
-                  <a:lnTo>
-                    <a:pt x="5013576" y="3308574"/>
-                  </a:lnTo>
-                  <a:lnTo>
-                    <a:pt x="4941954" y="3296408"/>
-                  </a:lnTo>
-                  <a:lnTo>
-                    <a:pt x="4870331" y="3283397"/>
-                  </a:lnTo>
-                  <a:lnTo>
-                    <a:pt x="4798709" y="3269482"/>
-                  </a:lnTo>
-                  <a:lnTo>
-                    <a:pt x="4727086" y="3254601"/>
-                  </a:lnTo>
-                  <a:lnTo>
-                    <a:pt x="4655464" y="3238686"/>
-                  </a:lnTo>
-                  <a:lnTo>
-                    <a:pt x="4583841" y="3221666"/>
-                  </a:lnTo>
-                  <a:lnTo>
-                    <a:pt x="4512219" y="3203464"/>
-                  </a:lnTo>
-                  <a:lnTo>
-                    <a:pt x="4440596" y="3183998"/>
-                  </a:lnTo>
-                  <a:lnTo>
-                    <a:pt x="4368974" y="3163180"/>
-                  </a:lnTo>
-                  <a:lnTo>
-                    <a:pt x="4297351" y="3140916"/>
-                  </a:lnTo>
-                  <a:lnTo>
-                    <a:pt x="4225729" y="3117106"/>
-                  </a:lnTo>
-                  <a:lnTo>
-                    <a:pt x="4154106" y="3091642"/>
-                  </a:lnTo>
-                  <a:lnTo>
-                    <a:pt x="4082483" y="3064410"/>
-                  </a:lnTo>
-                  <a:lnTo>
-                    <a:pt x="4010861" y="3035286"/>
-                  </a:lnTo>
-                  <a:lnTo>
-                    <a:pt x="3939238" y="3004140"/>
-                  </a:lnTo>
-                  <a:lnTo>
-                    <a:pt x="3867616" y="2970830"/>
-                  </a:lnTo>
-                  <a:lnTo>
-                    <a:pt x="3795993" y="2935207"/>
-                  </a:lnTo>
-                  <a:lnTo>
-                    <a:pt x="3724371" y="2897110"/>
-                  </a:lnTo>
-                  <a:lnTo>
-                    <a:pt x="3652748" y="2856367"/>
-                  </a:lnTo>
-                  <a:lnTo>
-                    <a:pt x="3581126" y="2812795"/>
-                  </a:lnTo>
-                  <a:lnTo>
-                    <a:pt x="3509503" y="2766196"/>
-                  </a:lnTo>
-                  <a:lnTo>
-                    <a:pt x="3437881" y="2716360"/>
-                  </a:lnTo>
-                  <a:lnTo>
-                    <a:pt x="3366258" y="2663064"/>
-                  </a:lnTo>
-                  <a:lnTo>
-                    <a:pt x="3294636" y="2647390"/>
-                  </a:lnTo>
-                  <a:lnTo>
-                    <a:pt x="3223013" y="2639124"/>
-                  </a:lnTo>
-                  <a:lnTo>
-                    <a:pt x="3151391" y="2630777"/>
-                  </a:lnTo>
-                  <a:lnTo>
-                    <a:pt x="3079768" y="2622347"/>
-                  </a:lnTo>
-                  <a:lnTo>
-                    <a:pt x="3008146" y="2613833"/>
-                  </a:lnTo>
-                  <a:lnTo>
-                    <a:pt x="2936523" y="2605236"/>
-                  </a:lnTo>
-                  <a:lnTo>
-                    <a:pt x="2864901" y="2596553"/>
-                  </a:lnTo>
-                  <a:lnTo>
-                    <a:pt x="2793278" y="2587785"/>
-                  </a:lnTo>
-                  <a:lnTo>
-                    <a:pt x="2721655" y="2578930"/>
-                  </a:lnTo>
-                  <a:lnTo>
-                    <a:pt x="2650033" y="2569988"/>
-                  </a:lnTo>
-                  <a:lnTo>
-                    <a:pt x="2578410" y="2560957"/>
-                  </a:lnTo>
-                  <a:lnTo>
-                    <a:pt x="2506788" y="2551837"/>
-                  </a:lnTo>
-                  <a:lnTo>
-                    <a:pt x="2435165" y="2542627"/>
-                  </a:lnTo>
-                  <a:lnTo>
-                    <a:pt x="2363543" y="2533326"/>
-                  </a:lnTo>
-                  <a:lnTo>
-                    <a:pt x="2291920" y="2523932"/>
-                  </a:lnTo>
-                  <a:lnTo>
-                    <a:pt x="2220298" y="2514447"/>
-                  </a:lnTo>
-                  <a:lnTo>
-                    <a:pt x="2148675" y="2504867"/>
-                  </a:lnTo>
-                  <a:lnTo>
-                    <a:pt x="2077053" y="2495192"/>
-                  </a:lnTo>
-                  <a:lnTo>
-                    <a:pt x="2005430" y="2485422"/>
-                  </a:lnTo>
-                  <a:lnTo>
-                    <a:pt x="1933808" y="2475556"/>
-                  </a:lnTo>
-                  <a:lnTo>
-                    <a:pt x="1862185" y="2465592"/>
-                  </a:lnTo>
-                  <a:lnTo>
-                    <a:pt x="1790563" y="2455529"/>
-                  </a:lnTo>
-                  <a:lnTo>
-                    <a:pt x="1718940" y="2445367"/>
-                  </a:lnTo>
-                  <a:lnTo>
-                    <a:pt x="1647318" y="2435105"/>
-                  </a:lnTo>
-                  <a:lnTo>
-                    <a:pt x="1575695" y="2424741"/>
-                  </a:lnTo>
-                  <a:lnTo>
-                    <a:pt x="1504073" y="2414275"/>
-                  </a:lnTo>
-                  <a:lnTo>
-                    <a:pt x="1432450" y="2403705"/>
-                  </a:lnTo>
-                  <a:lnTo>
-                    <a:pt x="1360827" y="2393031"/>
-                  </a:lnTo>
-                  <a:lnTo>
-                    <a:pt x="1289205" y="2382251"/>
-                  </a:lnTo>
-                  <a:lnTo>
-                    <a:pt x="1217582" y="2371365"/>
-                  </a:lnTo>
-                  <a:lnTo>
-                    <a:pt x="1145960" y="2360371"/>
-                  </a:lnTo>
-                  <a:lnTo>
-                    <a:pt x="1074337" y="2349269"/>
-                  </a:lnTo>
-                  <a:lnTo>
-                    <a:pt x="1002715" y="2338056"/>
-                  </a:lnTo>
-                  <a:lnTo>
-                    <a:pt x="931092" y="2326733"/>
-                  </a:lnTo>
-                  <a:lnTo>
-                    <a:pt x="859470" y="2315298"/>
-                  </a:lnTo>
-                  <a:lnTo>
-                    <a:pt x="787847" y="2303751"/>
-                  </a:lnTo>
-                  <a:lnTo>
-                    <a:pt x="716225" y="2292088"/>
-                  </a:lnTo>
-                  <a:lnTo>
-                    <a:pt x="644602" y="2280311"/>
-                  </a:lnTo>
-                  <a:lnTo>
-                    <a:pt x="572980" y="2268417"/>
-                  </a:lnTo>
-                  <a:lnTo>
-                    <a:pt x="501357" y="2256406"/>
-                  </a:lnTo>
-                  <a:lnTo>
-                    <a:pt x="429735" y="2244276"/>
-                  </a:lnTo>
-                  <a:lnTo>
-                    <a:pt x="358112" y="2232026"/>
-                  </a:lnTo>
-                  <a:lnTo>
-                    <a:pt x="286490" y="2219656"/>
-                  </a:lnTo>
-                  <a:lnTo>
-                    <a:pt x="214867" y="2207162"/>
-                  </a:lnTo>
-                  <a:lnTo>
-                    <a:pt x="143245" y="2194546"/>
-                  </a:lnTo>
-                  <a:lnTo>
-                    <a:pt x="71622" y="2181804"/>
-                  </a:lnTo>
-                  <a:lnTo>
-                    <a:pt x="0" y="2168937"/>
+                    <a:pt x="0" y="0"/>
+                  </a:lnTo>
+                  <a:lnTo>
+                    <a:pt x="0" y="0"/>
+                  </a:lnTo>
+                </a:path>
+              </a:pathLst>
+            </a:custGeom>
+            <a:ln w="13550" cap="flat">
+              <a:solidFill>
+                <a:srgbClr val="EBEBEB">
+                  <a:alpha val="100000"/>
+                </a:srgbClr>
+              </a:solidFill>
+              <a:prstDash val="solid"/>
+              <a:round/>
+            </a:ln>
+          </p:spPr>
+          <p:txBody>
+            <a:bodyPr/>
+            <a:lstStyle/>
+            <a:p/>
+          </p:txBody>
+        </p:sp>
+        <p:sp>
+          <p:nvSpPr>
+            <p:cNvPr id="21" name="pg21"/>
+            <p:cNvSpPr/>
+            <p:nvPr/>
+          </p:nvSpPr>
+          <p:spPr>
+            <a:xfrm>
+              <a:off x="1235312" y="2143092"/>
+              <a:ext cx="6964104" cy="1248183"/>
+            </a:xfrm>
+            <a:custGeom>
+              <a:avLst/>
+              <a:pathLst>
+                <a:path w="6964104" h="1248183">
+                  <a:moveTo>
+                    <a:pt x="1792190" y="0"/>
+                  </a:moveTo>
+                  <a:lnTo>
+                    <a:pt x="1828956" y="44037"/>
+                  </a:lnTo>
+                  <a:lnTo>
+                    <a:pt x="1899301" y="122822"/>
+                  </a:lnTo>
+                  <a:lnTo>
+                    <a:pt x="1969645" y="196490"/>
+                  </a:lnTo>
+                  <a:lnTo>
+                    <a:pt x="2039990" y="265374"/>
+                  </a:lnTo>
+                  <a:lnTo>
+                    <a:pt x="2110334" y="329785"/>
+                  </a:lnTo>
+                  <a:lnTo>
+                    <a:pt x="2180679" y="390013"/>
+                  </a:lnTo>
+                  <a:lnTo>
+                    <a:pt x="2251023" y="446330"/>
+                  </a:lnTo>
+                  <a:lnTo>
+                    <a:pt x="2321368" y="498989"/>
+                  </a:lnTo>
+                  <a:lnTo>
+                    <a:pt x="2391712" y="548228"/>
+                  </a:lnTo>
+                  <a:lnTo>
+                    <a:pt x="2462057" y="594270"/>
+                  </a:lnTo>
+                  <a:lnTo>
+                    <a:pt x="2532401" y="637322"/>
+                  </a:lnTo>
+                  <a:lnTo>
+                    <a:pt x="2602746" y="677578"/>
+                  </a:lnTo>
+                  <a:lnTo>
+                    <a:pt x="2673090" y="715220"/>
+                  </a:lnTo>
+                  <a:lnTo>
+                    <a:pt x="2743435" y="750417"/>
+                  </a:lnTo>
+                  <a:lnTo>
+                    <a:pt x="2813779" y="783328"/>
+                  </a:lnTo>
+                  <a:lnTo>
+                    <a:pt x="2884124" y="814102"/>
+                  </a:lnTo>
+                  <a:lnTo>
+                    <a:pt x="2954468" y="842878"/>
+                  </a:lnTo>
+                  <a:lnTo>
+                    <a:pt x="3024813" y="869785"/>
+                  </a:lnTo>
+                  <a:lnTo>
+                    <a:pt x="3095157" y="894944"/>
+                  </a:lnTo>
+                  <a:lnTo>
+                    <a:pt x="3165502" y="918470"/>
+                  </a:lnTo>
+                  <a:lnTo>
+                    <a:pt x="3235846" y="940468"/>
+                  </a:lnTo>
+                  <a:lnTo>
+                    <a:pt x="3306191" y="958334"/>
+                  </a:lnTo>
+                  <a:lnTo>
+                    <a:pt x="3376535" y="961259"/>
+                  </a:lnTo>
+                  <a:lnTo>
+                    <a:pt x="3446880" y="964155"/>
+                  </a:lnTo>
+                  <a:lnTo>
+                    <a:pt x="3517224" y="967023"/>
+                  </a:lnTo>
+                  <a:lnTo>
+                    <a:pt x="3587569" y="969863"/>
+                  </a:lnTo>
+                  <a:lnTo>
+                    <a:pt x="3657913" y="972675"/>
+                  </a:lnTo>
+                  <a:lnTo>
+                    <a:pt x="3728257" y="975459"/>
+                  </a:lnTo>
+                  <a:lnTo>
+                    <a:pt x="3798602" y="978217"/>
+                  </a:lnTo>
+                  <a:lnTo>
+                    <a:pt x="3868946" y="980947"/>
+                  </a:lnTo>
+                  <a:lnTo>
+                    <a:pt x="3939291" y="983650"/>
+                  </a:lnTo>
+                  <a:lnTo>
+                    <a:pt x="4009635" y="986328"/>
+                  </a:lnTo>
+                  <a:lnTo>
+                    <a:pt x="4079980" y="988978"/>
+                  </a:lnTo>
+                  <a:lnTo>
+                    <a:pt x="4150324" y="991603"/>
+                  </a:lnTo>
+                  <a:lnTo>
+                    <a:pt x="4220669" y="994203"/>
+                  </a:lnTo>
+                  <a:lnTo>
+                    <a:pt x="4291013" y="996776"/>
+                  </a:lnTo>
+                  <a:lnTo>
+                    <a:pt x="4361358" y="999325"/>
+                  </a:lnTo>
+                  <a:lnTo>
+                    <a:pt x="4431702" y="1001849"/>
+                  </a:lnTo>
+                  <a:lnTo>
+                    <a:pt x="4502047" y="1004348"/>
+                  </a:lnTo>
+                  <a:lnTo>
+                    <a:pt x="4572391" y="1006822"/>
+                  </a:lnTo>
+                  <a:lnTo>
+                    <a:pt x="4642736" y="1009273"/>
+                  </a:lnTo>
+                  <a:lnTo>
+                    <a:pt x="4713080" y="1011699"/>
+                  </a:lnTo>
+                  <a:lnTo>
+                    <a:pt x="4783425" y="1014102"/>
+                  </a:lnTo>
+                  <a:lnTo>
+                    <a:pt x="4853769" y="1016481"/>
+                  </a:lnTo>
+                  <a:lnTo>
+                    <a:pt x="4924114" y="1018836"/>
+                  </a:lnTo>
+                  <a:lnTo>
+                    <a:pt x="4994458" y="1021169"/>
+                  </a:lnTo>
+                  <a:lnTo>
+                    <a:pt x="5064803" y="1023479"/>
+                  </a:lnTo>
+                  <a:lnTo>
+                    <a:pt x="5135147" y="1025766"/>
+                  </a:lnTo>
+                  <a:lnTo>
+                    <a:pt x="5205492" y="1028031"/>
+                  </a:lnTo>
+                  <a:lnTo>
+                    <a:pt x="5275836" y="1030274"/>
+                  </a:lnTo>
+                  <a:lnTo>
+                    <a:pt x="5346181" y="1032495"/>
+                  </a:lnTo>
+                  <a:lnTo>
+                    <a:pt x="5416525" y="1034694"/>
+                  </a:lnTo>
+                  <a:lnTo>
+                    <a:pt x="5486870" y="1036871"/>
+                  </a:lnTo>
+                  <a:lnTo>
+                    <a:pt x="5557214" y="1039028"/>
+                  </a:lnTo>
+                  <a:lnTo>
+                    <a:pt x="5627559" y="1041163"/>
+                  </a:lnTo>
+                  <a:lnTo>
+                    <a:pt x="5697903" y="1043277"/>
+                  </a:lnTo>
+                  <a:lnTo>
+                    <a:pt x="5768248" y="1045371"/>
+                  </a:lnTo>
+                  <a:lnTo>
+                    <a:pt x="5838592" y="1047444"/>
+                  </a:lnTo>
+                  <a:lnTo>
+                    <a:pt x="5908937" y="1049496"/>
+                  </a:lnTo>
+                  <a:lnTo>
+                    <a:pt x="5979281" y="1051529"/>
+                  </a:lnTo>
+                  <a:lnTo>
+                    <a:pt x="6049626" y="1053542"/>
+                  </a:lnTo>
+                  <a:lnTo>
+                    <a:pt x="6119970" y="1055535"/>
+                  </a:lnTo>
+                  <a:lnTo>
+                    <a:pt x="6190315" y="1057509"/>
+                  </a:lnTo>
+                  <a:lnTo>
+                    <a:pt x="6260659" y="1059463"/>
+                  </a:lnTo>
+                  <a:lnTo>
+                    <a:pt x="6331004" y="1061398"/>
+                  </a:lnTo>
+                  <a:lnTo>
+                    <a:pt x="6401348" y="1063314"/>
+                  </a:lnTo>
+                  <a:lnTo>
+                    <a:pt x="6471693" y="1065212"/>
+                  </a:lnTo>
+                  <a:lnTo>
+                    <a:pt x="6542037" y="1067091"/>
+                  </a:lnTo>
+                  <a:lnTo>
+                    <a:pt x="6612382" y="1068951"/>
+                  </a:lnTo>
+                  <a:lnTo>
+                    <a:pt x="6682726" y="1070793"/>
+                  </a:lnTo>
+                  <a:lnTo>
+                    <a:pt x="6753071" y="1072618"/>
+                  </a:lnTo>
+                  <a:lnTo>
+                    <a:pt x="6823415" y="1074424"/>
+                  </a:lnTo>
+                  <a:lnTo>
+                    <a:pt x="6893760" y="1076213"/>
+                  </a:lnTo>
+                  <a:lnTo>
+                    <a:pt x="6964104" y="1077984"/>
+                  </a:lnTo>
+                  <a:lnTo>
+                    <a:pt x="6964104" y="1248183"/>
+                  </a:lnTo>
+                  <a:lnTo>
+                    <a:pt x="6893760" y="1247557"/>
+                  </a:lnTo>
+                  <a:lnTo>
+                    <a:pt x="6823415" y="1246887"/>
+                  </a:lnTo>
+                  <a:lnTo>
+                    <a:pt x="6753071" y="1246170"/>
+                  </a:lnTo>
+                  <a:lnTo>
+                    <a:pt x="6682726" y="1245404"/>
+                  </a:lnTo>
+                  <a:lnTo>
+                    <a:pt x="6612382" y="1244585"/>
+                  </a:lnTo>
+                  <a:lnTo>
+                    <a:pt x="6542037" y="1243709"/>
+                  </a:lnTo>
+                  <a:lnTo>
+                    <a:pt x="6471693" y="1242771"/>
+                  </a:lnTo>
+                  <a:lnTo>
+                    <a:pt x="6401348" y="1241769"/>
+                  </a:lnTo>
+                  <a:lnTo>
+                    <a:pt x="6331004" y="1240697"/>
+                  </a:lnTo>
+                  <a:lnTo>
+                    <a:pt x="6260659" y="1239551"/>
+                  </a:lnTo>
+                  <a:lnTo>
+                    <a:pt x="6190315" y="1238325"/>
+                  </a:lnTo>
+                  <a:lnTo>
+                    <a:pt x="6119970" y="1237014"/>
+                  </a:lnTo>
+                  <a:lnTo>
+                    <a:pt x="6049626" y="1235612"/>
+                  </a:lnTo>
+                  <a:lnTo>
+                    <a:pt x="5979281" y="1234113"/>
+                  </a:lnTo>
+                  <a:lnTo>
+                    <a:pt x="5908937" y="1232509"/>
+                  </a:lnTo>
+                  <a:lnTo>
+                    <a:pt x="5838592" y="1230794"/>
+                  </a:lnTo>
+                  <a:lnTo>
+                    <a:pt x="5768248" y="1228960"/>
+                  </a:lnTo>
+                  <a:lnTo>
+                    <a:pt x="5697903" y="1226999"/>
+                  </a:lnTo>
+                  <a:lnTo>
+                    <a:pt x="5627559" y="1224901"/>
+                  </a:lnTo>
+                  <a:lnTo>
+                    <a:pt x="5557214" y="1222658"/>
+                  </a:lnTo>
+                  <a:lnTo>
+                    <a:pt x="5486870" y="1220259"/>
+                  </a:lnTo>
+                  <a:lnTo>
+                    <a:pt x="5416525" y="1217693"/>
+                  </a:lnTo>
+                  <a:lnTo>
+                    <a:pt x="5346181" y="1214949"/>
+                  </a:lnTo>
+                  <a:lnTo>
+                    <a:pt x="5275836" y="1212014"/>
+                  </a:lnTo>
+                  <a:lnTo>
+                    <a:pt x="5205492" y="1208876"/>
+                  </a:lnTo>
+                  <a:lnTo>
+                    <a:pt x="5135147" y="1205520"/>
+                  </a:lnTo>
+                  <a:lnTo>
+                    <a:pt x="5064803" y="1201930"/>
+                  </a:lnTo>
+                  <a:lnTo>
+                    <a:pt x="4994458" y="1198091"/>
+                  </a:lnTo>
+                  <a:lnTo>
+                    <a:pt x="4924114" y="1193986"/>
+                  </a:lnTo>
+                  <a:lnTo>
+                    <a:pt x="4853769" y="1189596"/>
+                  </a:lnTo>
+                  <a:lnTo>
+                    <a:pt x="4783425" y="1184900"/>
+                  </a:lnTo>
+                  <a:lnTo>
+                    <a:pt x="4713080" y="1179879"/>
+                  </a:lnTo>
+                  <a:lnTo>
+                    <a:pt x="4642736" y="1174509"/>
+                  </a:lnTo>
+                  <a:lnTo>
+                    <a:pt x="4572391" y="1168765"/>
+                  </a:lnTo>
+                  <a:lnTo>
+                    <a:pt x="4502047" y="1162623"/>
+                  </a:lnTo>
+                  <a:lnTo>
+                    <a:pt x="4431702" y="1156055"/>
+                  </a:lnTo>
+                  <a:lnTo>
+                    <a:pt x="4361358" y="1149030"/>
+                  </a:lnTo>
+                  <a:lnTo>
+                    <a:pt x="4291013" y="1141517"/>
+                  </a:lnTo>
+                  <a:lnTo>
+                    <a:pt x="4220669" y="1133483"/>
+                  </a:lnTo>
+                  <a:lnTo>
+                    <a:pt x="4150324" y="1124890"/>
+                  </a:lnTo>
+                  <a:lnTo>
+                    <a:pt x="4079980" y="1115701"/>
+                  </a:lnTo>
+                  <a:lnTo>
+                    <a:pt x="4009635" y="1105873"/>
+                  </a:lnTo>
+                  <a:lnTo>
+                    <a:pt x="3939291" y="1095363"/>
+                  </a:lnTo>
+                  <a:lnTo>
+                    <a:pt x="3868946" y="1084123"/>
+                  </a:lnTo>
+                  <a:lnTo>
+                    <a:pt x="3798602" y="1072102"/>
+                  </a:lnTo>
+                  <a:lnTo>
+                    <a:pt x="3728257" y="1059247"/>
+                  </a:lnTo>
+                  <a:lnTo>
+                    <a:pt x="3657913" y="1045499"/>
+                  </a:lnTo>
+                  <a:lnTo>
+                    <a:pt x="3587569" y="1030795"/>
+                  </a:lnTo>
+                  <a:lnTo>
+                    <a:pt x="3517224" y="1015071"/>
+                  </a:lnTo>
+                  <a:lnTo>
+                    <a:pt x="3446880" y="998255"/>
+                  </a:lnTo>
+                  <a:lnTo>
+                    <a:pt x="3376535" y="980270"/>
+                  </a:lnTo>
+                  <a:lnTo>
+                    <a:pt x="3306191" y="961037"/>
+                  </a:lnTo>
+                  <a:lnTo>
+                    <a:pt x="3235846" y="955380"/>
+                  </a:lnTo>
+                  <a:lnTo>
+                    <a:pt x="3165502" y="952397"/>
+                  </a:lnTo>
+                  <a:lnTo>
+                    <a:pt x="3095157" y="949385"/>
+                  </a:lnTo>
+                  <a:lnTo>
+                    <a:pt x="3024813" y="946343"/>
+                  </a:lnTo>
+                  <a:lnTo>
+                    <a:pt x="2954468" y="943271"/>
+                  </a:lnTo>
+                  <a:lnTo>
+                    <a:pt x="2884124" y="940168"/>
+                  </a:lnTo>
+                  <a:lnTo>
+                    <a:pt x="2813779" y="937035"/>
+                  </a:lnTo>
+                  <a:lnTo>
+                    <a:pt x="2743435" y="933870"/>
+                  </a:lnTo>
+                  <a:lnTo>
+                    <a:pt x="2673090" y="930675"/>
+                  </a:lnTo>
+                  <a:lnTo>
+                    <a:pt x="2602746" y="927448"/>
+                  </a:lnTo>
+                  <a:lnTo>
+                    <a:pt x="2532401" y="924189"/>
+                  </a:lnTo>
+                  <a:lnTo>
+                    <a:pt x="2462057" y="920898"/>
+                  </a:lnTo>
+                  <a:lnTo>
+                    <a:pt x="2391712" y="917574"/>
+                  </a:lnTo>
+                  <a:lnTo>
+                    <a:pt x="2321368" y="914217"/>
+                  </a:lnTo>
+                  <a:lnTo>
+                    <a:pt x="2251023" y="910828"/>
+                  </a:lnTo>
+                  <a:lnTo>
+                    <a:pt x="2180679" y="907404"/>
+                  </a:lnTo>
+                  <a:lnTo>
+                    <a:pt x="2110334" y="903947"/>
+                  </a:lnTo>
+                  <a:lnTo>
+                    <a:pt x="2039990" y="900456"/>
+                  </a:lnTo>
+                  <a:lnTo>
+                    <a:pt x="1969645" y="896930"/>
+                  </a:lnTo>
+                  <a:lnTo>
+                    <a:pt x="1899301" y="893370"/>
+                  </a:lnTo>
+                  <a:lnTo>
+                    <a:pt x="1828956" y="889774"/>
+                  </a:lnTo>
+                  <a:lnTo>
+                    <a:pt x="1758612" y="886142"/>
+                  </a:lnTo>
+                  <a:lnTo>
+                    <a:pt x="1688267" y="882475"/>
+                  </a:lnTo>
+                  <a:lnTo>
+                    <a:pt x="1617923" y="878772"/>
+                  </a:lnTo>
+                  <a:lnTo>
+                    <a:pt x="1547578" y="875032"/>
+                  </a:lnTo>
+                  <a:lnTo>
+                    <a:pt x="1477234" y="871255"/>
+                  </a:lnTo>
+                  <a:lnTo>
+                    <a:pt x="1406889" y="867440"/>
+                  </a:lnTo>
+                  <a:lnTo>
+                    <a:pt x="1336545" y="863588"/>
+                  </a:lnTo>
+                  <a:lnTo>
+                    <a:pt x="1266200" y="859698"/>
+                  </a:lnTo>
+                  <a:lnTo>
+                    <a:pt x="1195856" y="855769"/>
+                  </a:lnTo>
+                  <a:lnTo>
+                    <a:pt x="1125511" y="851802"/>
+                  </a:lnTo>
+                  <a:lnTo>
+                    <a:pt x="1055167" y="847795"/>
+                  </a:lnTo>
+                  <a:lnTo>
+                    <a:pt x="984822" y="843749"/>
+                  </a:lnTo>
+                  <a:lnTo>
+                    <a:pt x="914478" y="839663"/>
+                  </a:lnTo>
+                  <a:lnTo>
+                    <a:pt x="844133" y="835536"/>
+                  </a:lnTo>
+                  <a:lnTo>
+                    <a:pt x="773789" y="831369"/>
+                  </a:lnTo>
+                  <a:lnTo>
+                    <a:pt x="703444" y="827160"/>
+                  </a:lnTo>
+                  <a:lnTo>
+                    <a:pt x="633100" y="822910"/>
+                  </a:lnTo>
+                  <a:lnTo>
+                    <a:pt x="562755" y="818618"/>
+                  </a:lnTo>
+                  <a:lnTo>
+                    <a:pt x="492411" y="814284"/>
+                  </a:lnTo>
+                  <a:lnTo>
+                    <a:pt x="422066" y="809906"/>
+                  </a:lnTo>
+                  <a:lnTo>
+                    <a:pt x="351722" y="805486"/>
+                  </a:lnTo>
+                  <a:lnTo>
+                    <a:pt x="281377" y="801021"/>
+                  </a:lnTo>
+                  <a:lnTo>
+                    <a:pt x="211033" y="796513"/>
+                  </a:lnTo>
+                  <a:lnTo>
+                    <a:pt x="140688" y="791960"/>
+                  </a:lnTo>
+                  <a:lnTo>
+                    <a:pt x="70344" y="787362"/>
+                  </a:lnTo>
+                  <a:lnTo>
+                    <a:pt x="0" y="782718"/>
                   </a:lnTo>
                   <a:close/>
                 </a:path>
@@ -3509,568 +3544,243 @@
         </p:sp>
         <p:sp>
           <p:nvSpPr>
-            <p:cNvPr id="21" name="pl21"/>
-            <p:cNvSpPr/>
-            <p:nvPr/>
-          </p:nvSpPr>
-          <p:spPr>
-            <a:xfrm>
-              <a:off x="2996801" y="2073503"/>
-              <a:ext cx="5265878" cy="2987129"/>
-            </a:xfrm>
-            <a:custGeom>
-              <a:avLst/>
-              <a:pathLst>
-                <a:path w="5265878" h="2987129">
-                  <a:moveTo>
-                    <a:pt x="0" y="0"/>
-                  </a:moveTo>
-                  <a:lnTo>
-                    <a:pt x="37433" y="122028"/>
-                  </a:lnTo>
-                  <a:lnTo>
-                    <a:pt x="109056" y="340343"/>
-                  </a:lnTo>
-                  <a:lnTo>
-                    <a:pt x="180678" y="544481"/>
-                  </a:lnTo>
-                  <a:lnTo>
-                    <a:pt x="252301" y="735361"/>
-                  </a:lnTo>
-                  <a:lnTo>
-                    <a:pt x="323924" y="913846"/>
-                  </a:lnTo>
-                  <a:lnTo>
-                    <a:pt x="395546" y="1080739"/>
-                  </a:lnTo>
-                  <a:lnTo>
-                    <a:pt x="467169" y="1236794"/>
-                  </a:lnTo>
-                  <a:lnTo>
-                    <a:pt x="538791" y="1382715"/>
-                  </a:lnTo>
-                  <a:lnTo>
-                    <a:pt x="610414" y="1519159"/>
-                  </a:lnTo>
-                  <a:lnTo>
-                    <a:pt x="682036" y="1646742"/>
-                  </a:lnTo>
-                  <a:lnTo>
-                    <a:pt x="753659" y="1766040"/>
-                  </a:lnTo>
-                  <a:lnTo>
-                    <a:pt x="825281" y="1877591"/>
-                  </a:lnTo>
-                  <a:lnTo>
-                    <a:pt x="896904" y="1981897"/>
-                  </a:lnTo>
-                  <a:lnTo>
-                    <a:pt x="968526" y="2079430"/>
-                  </a:lnTo>
-                  <a:lnTo>
-                    <a:pt x="1040149" y="2170628"/>
-                  </a:lnTo>
-                  <a:lnTo>
-                    <a:pt x="1111771" y="2255904"/>
-                  </a:lnTo>
-                  <a:lnTo>
-                    <a:pt x="1183394" y="2335642"/>
-                  </a:lnTo>
-                  <a:lnTo>
-                    <a:pt x="1255016" y="2410202"/>
-                  </a:lnTo>
-                  <a:lnTo>
-                    <a:pt x="1326639" y="2479920"/>
-                  </a:lnTo>
-                  <a:lnTo>
-                    <a:pt x="1398261" y="2545110"/>
-                  </a:lnTo>
-                  <a:lnTo>
-                    <a:pt x="1469884" y="2606066"/>
-                  </a:lnTo>
-                  <a:lnTo>
-                    <a:pt x="1541506" y="2655575"/>
-                  </a:lnTo>
-                  <a:lnTo>
-                    <a:pt x="1613129" y="2663680"/>
-                  </a:lnTo>
-                  <a:lnTo>
-                    <a:pt x="1684752" y="2671705"/>
-                  </a:lnTo>
-                  <a:lnTo>
-                    <a:pt x="1756374" y="2679652"/>
-                  </a:lnTo>
-                  <a:lnTo>
-                    <a:pt x="1827997" y="2687521"/>
-                  </a:lnTo>
-                  <a:lnTo>
-                    <a:pt x="1899619" y="2695314"/>
-                  </a:lnTo>
-                  <a:lnTo>
-                    <a:pt x="1971242" y="2703029"/>
-                  </a:lnTo>
-                  <a:lnTo>
-                    <a:pt x="2042864" y="2710670"/>
-                  </a:lnTo>
-                  <a:lnTo>
-                    <a:pt x="2114487" y="2718236"/>
-                  </a:lnTo>
-                  <a:lnTo>
-                    <a:pt x="2186109" y="2725727"/>
-                  </a:lnTo>
-                  <a:lnTo>
-                    <a:pt x="2257732" y="2733145"/>
-                  </a:lnTo>
-                  <a:lnTo>
-                    <a:pt x="2329354" y="2740491"/>
-                  </a:lnTo>
-                  <a:lnTo>
-                    <a:pt x="2400977" y="2747765"/>
-                  </a:lnTo>
-                  <a:lnTo>
-                    <a:pt x="2472599" y="2754967"/>
-                  </a:lnTo>
-                  <a:lnTo>
-                    <a:pt x="2544222" y="2762100"/>
-                  </a:lnTo>
-                  <a:lnTo>
-                    <a:pt x="2615844" y="2769162"/>
-                  </a:lnTo>
-                  <a:lnTo>
-                    <a:pt x="2687467" y="2776155"/>
-                  </a:lnTo>
-                  <a:lnTo>
-                    <a:pt x="2759089" y="2783080"/>
-                  </a:lnTo>
-                  <a:lnTo>
-                    <a:pt x="2830712" y="2789937"/>
-                  </a:lnTo>
-                  <a:lnTo>
-                    <a:pt x="2902334" y="2796727"/>
-                  </a:lnTo>
-                  <a:lnTo>
-                    <a:pt x="2973957" y="2803450"/>
-                  </a:lnTo>
-                  <a:lnTo>
-                    <a:pt x="3045580" y="2810108"/>
-                  </a:lnTo>
-                  <a:lnTo>
-                    <a:pt x="3117202" y="2816700"/>
-                  </a:lnTo>
-                  <a:lnTo>
-                    <a:pt x="3188825" y="2823228"/>
-                  </a:lnTo>
-                  <a:lnTo>
-                    <a:pt x="3260447" y="2829693"/>
-                  </a:lnTo>
-                  <a:lnTo>
-                    <a:pt x="3332070" y="2836093"/>
-                  </a:lnTo>
-                  <a:lnTo>
-                    <a:pt x="3403692" y="2842432"/>
-                  </a:lnTo>
-                  <a:lnTo>
-                    <a:pt x="3475315" y="2848708"/>
-                  </a:lnTo>
-                  <a:lnTo>
-                    <a:pt x="3546937" y="2854922"/>
-                  </a:lnTo>
-                  <a:lnTo>
-                    <a:pt x="3618560" y="2861076"/>
-                  </a:lnTo>
-                  <a:lnTo>
-                    <a:pt x="3690182" y="2867170"/>
-                  </a:lnTo>
-                  <a:lnTo>
-                    <a:pt x="3761805" y="2873204"/>
-                  </a:lnTo>
-                  <a:lnTo>
-                    <a:pt x="3833427" y="2879179"/>
-                  </a:lnTo>
-                  <a:lnTo>
-                    <a:pt x="3905050" y="2885096"/>
-                  </a:lnTo>
-                  <a:lnTo>
-                    <a:pt x="3976672" y="2890954"/>
-                  </a:lnTo>
-                  <a:lnTo>
-                    <a:pt x="4048295" y="2896756"/>
-                  </a:lnTo>
-                  <a:lnTo>
-                    <a:pt x="4119917" y="2902500"/>
-                  </a:lnTo>
-                  <a:lnTo>
-                    <a:pt x="4191540" y="2908189"/>
-                  </a:lnTo>
-                  <a:lnTo>
-                    <a:pt x="4263162" y="2913821"/>
-                  </a:lnTo>
-                  <a:lnTo>
-                    <a:pt x="4334785" y="2919399"/>
-                  </a:lnTo>
-                  <a:lnTo>
-                    <a:pt x="4406408" y="2924922"/>
-                  </a:lnTo>
-                  <a:lnTo>
-                    <a:pt x="4478030" y="2930391"/>
-                  </a:lnTo>
-                  <a:lnTo>
-                    <a:pt x="4549653" y="2935806"/>
-                  </a:lnTo>
-                  <a:lnTo>
-                    <a:pt x="4621275" y="2941168"/>
-                  </a:lnTo>
-                  <a:lnTo>
-                    <a:pt x="4692898" y="2946478"/>
-                  </a:lnTo>
-                  <a:lnTo>
-                    <a:pt x="4764520" y="2951736"/>
-                  </a:lnTo>
-                  <a:lnTo>
-                    <a:pt x="4836143" y="2956943"/>
-                  </a:lnTo>
-                  <a:lnTo>
-                    <a:pt x="4907765" y="2962098"/>
-                  </a:lnTo>
-                  <a:lnTo>
-                    <a:pt x="4979388" y="2967203"/>
-                  </a:lnTo>
-                  <a:lnTo>
-                    <a:pt x="5051010" y="2972258"/>
-                  </a:lnTo>
-                  <a:lnTo>
-                    <a:pt x="5122633" y="2977264"/>
-                  </a:lnTo>
-                  <a:lnTo>
-                    <a:pt x="5194255" y="2982220"/>
-                  </a:lnTo>
-                  <a:lnTo>
-                    <a:pt x="5265878" y="2987129"/>
-                  </a:lnTo>
-                </a:path>
-              </a:pathLst>
-            </a:custGeom>
-          </p:spPr>
-          <p:txBody>
-            <a:bodyPr/>
-            <a:lstStyle/>
-            <a:p/>
-          </p:txBody>
-        </p:sp>
-        <p:sp>
-          <p:nvSpPr>
             <p:cNvPr id="22" name="pl22"/>
             <p:cNvSpPr/>
             <p:nvPr/>
           </p:nvSpPr>
           <p:spPr>
             <a:xfrm>
-              <a:off x="1172049" y="4242440"/>
-              <a:ext cx="7090630" cy="1289817"/>
+              <a:off x="3027502" y="2143092"/>
+              <a:ext cx="5171913" cy="1077984"/>
             </a:xfrm>
             <a:custGeom>
               <a:avLst/>
               <a:pathLst>
-                <a:path w="7090630" h="1289817">
+                <a:path w="5171913" h="1077984">
                   <a:moveTo>
-                    <a:pt x="7090630" y="1289817"/>
+                    <a:pt x="0" y="0"/>
                   </a:moveTo>
                   <a:lnTo>
-                    <a:pt x="7019007" y="1288082"/>
-                  </a:lnTo>
-                  <a:lnTo>
-                    <a:pt x="6947385" y="1286225"/>
-                  </a:lnTo>
-                  <a:lnTo>
-                    <a:pt x="6875762" y="1284240"/>
-                  </a:lnTo>
-                  <a:lnTo>
-                    <a:pt x="6804139" y="1282117"/>
-                  </a:lnTo>
-                  <a:lnTo>
-                    <a:pt x="6732517" y="1279847"/>
-                  </a:lnTo>
-                  <a:lnTo>
-                    <a:pt x="6660894" y="1277419"/>
-                  </a:lnTo>
-                  <a:lnTo>
-                    <a:pt x="6589272" y="1274822"/>
-                  </a:lnTo>
-                  <a:lnTo>
-                    <a:pt x="6517649" y="1272045"/>
-                  </a:lnTo>
-                  <a:lnTo>
-                    <a:pt x="6446027" y="1269075"/>
-                  </a:lnTo>
-                  <a:lnTo>
-                    <a:pt x="6374404" y="1265898"/>
-                  </a:lnTo>
-                  <a:lnTo>
-                    <a:pt x="6302782" y="1262501"/>
-                  </a:lnTo>
-                  <a:lnTo>
-                    <a:pt x="6231159" y="1258868"/>
-                  </a:lnTo>
-                  <a:lnTo>
-                    <a:pt x="6159537" y="1254983"/>
-                  </a:lnTo>
-                  <a:lnTo>
-                    <a:pt x="6087914" y="1250828"/>
-                  </a:lnTo>
-                  <a:lnTo>
-                    <a:pt x="6016292" y="1246385"/>
-                  </a:lnTo>
-                  <a:lnTo>
-                    <a:pt x="5944669" y="1241633"/>
-                  </a:lnTo>
-                  <a:lnTo>
-                    <a:pt x="5873047" y="1236550"/>
-                  </a:lnTo>
-                  <a:lnTo>
-                    <a:pt x="5801424" y="1231115"/>
-                  </a:lnTo>
-                  <a:lnTo>
-                    <a:pt x="5729802" y="1225302"/>
-                  </a:lnTo>
-                  <a:lnTo>
-                    <a:pt x="5658179" y="1219086"/>
-                  </a:lnTo>
-                  <a:lnTo>
-                    <a:pt x="5586557" y="1212438"/>
-                  </a:lnTo>
-                  <a:lnTo>
-                    <a:pt x="5514934" y="1205328"/>
-                  </a:lnTo>
-                  <a:lnTo>
-                    <a:pt x="5443311" y="1197724"/>
-                  </a:lnTo>
-                  <a:lnTo>
-                    <a:pt x="5371689" y="1189593"/>
-                  </a:lnTo>
-                  <a:lnTo>
-                    <a:pt x="5300066" y="1180896"/>
-                  </a:lnTo>
-                  <a:lnTo>
-                    <a:pt x="5228444" y="1171596"/>
-                  </a:lnTo>
-                  <a:lnTo>
-                    <a:pt x="5156821" y="1161649"/>
-                  </a:lnTo>
-                  <a:lnTo>
-                    <a:pt x="5085199" y="1151012"/>
-                  </a:lnTo>
-                  <a:lnTo>
-                    <a:pt x="5013576" y="1139636"/>
-                  </a:lnTo>
-                  <a:lnTo>
-                    <a:pt x="4941954" y="1127470"/>
-                  </a:lnTo>
-                  <a:lnTo>
-                    <a:pt x="4870331" y="1114459"/>
-                  </a:lnTo>
-                  <a:lnTo>
-                    <a:pt x="4798709" y="1100544"/>
-                  </a:lnTo>
-                  <a:lnTo>
-                    <a:pt x="4727086" y="1085663"/>
-                  </a:lnTo>
-                  <a:lnTo>
-                    <a:pt x="4655464" y="1069749"/>
-                  </a:lnTo>
-                  <a:lnTo>
-                    <a:pt x="4583841" y="1052729"/>
-                  </a:lnTo>
-                  <a:lnTo>
-                    <a:pt x="4512219" y="1034527"/>
-                  </a:lnTo>
-                  <a:lnTo>
-                    <a:pt x="4440596" y="1015061"/>
-                  </a:lnTo>
-                  <a:lnTo>
-                    <a:pt x="4368974" y="994243"/>
-                  </a:lnTo>
-                  <a:lnTo>
-                    <a:pt x="4297351" y="971979"/>
-                  </a:lnTo>
-                  <a:lnTo>
-                    <a:pt x="4225729" y="948169"/>
-                  </a:lnTo>
-                  <a:lnTo>
-                    <a:pt x="4154106" y="922705"/>
-                  </a:lnTo>
-                  <a:lnTo>
-                    <a:pt x="4082483" y="895472"/>
-                  </a:lnTo>
-                  <a:lnTo>
-                    <a:pt x="4010861" y="866349"/>
-                  </a:lnTo>
-                  <a:lnTo>
-                    <a:pt x="3939238" y="835202"/>
-                  </a:lnTo>
-                  <a:lnTo>
-                    <a:pt x="3867616" y="801893"/>
-                  </a:lnTo>
-                  <a:lnTo>
-                    <a:pt x="3795993" y="766270"/>
-                  </a:lnTo>
-                  <a:lnTo>
-                    <a:pt x="3724371" y="728173"/>
-                  </a:lnTo>
-                  <a:lnTo>
-                    <a:pt x="3652748" y="687430"/>
-                  </a:lnTo>
-                  <a:lnTo>
-                    <a:pt x="3581126" y="643857"/>
-                  </a:lnTo>
-                  <a:lnTo>
-                    <a:pt x="3509503" y="597258"/>
-                  </a:lnTo>
-                  <a:lnTo>
-                    <a:pt x="3437881" y="547423"/>
-                  </a:lnTo>
-                  <a:lnTo>
-                    <a:pt x="3366258" y="494126"/>
-                  </a:lnTo>
-                  <a:lnTo>
-                    <a:pt x="3294636" y="478452"/>
-                  </a:lnTo>
-                  <a:lnTo>
-                    <a:pt x="3223013" y="470186"/>
-                  </a:lnTo>
-                  <a:lnTo>
-                    <a:pt x="3151391" y="461839"/>
-                  </a:lnTo>
-                  <a:lnTo>
-                    <a:pt x="3079768" y="453409"/>
-                  </a:lnTo>
-                  <a:lnTo>
-                    <a:pt x="3008146" y="444896"/>
-                  </a:lnTo>
-                  <a:lnTo>
-                    <a:pt x="2936523" y="436298"/>
-                  </a:lnTo>
-                  <a:lnTo>
-                    <a:pt x="2864901" y="427616"/>
-                  </a:lnTo>
-                  <a:lnTo>
-                    <a:pt x="2793278" y="418848"/>
-                  </a:lnTo>
-                  <a:lnTo>
-                    <a:pt x="2721655" y="409993"/>
-                  </a:lnTo>
-                  <a:lnTo>
-                    <a:pt x="2650033" y="401050"/>
-                  </a:lnTo>
-                  <a:lnTo>
-                    <a:pt x="2578410" y="392019"/>
-                  </a:lnTo>
-                  <a:lnTo>
-                    <a:pt x="2506788" y="382899"/>
-                  </a:lnTo>
-                  <a:lnTo>
-                    <a:pt x="2435165" y="373689"/>
-                  </a:lnTo>
-                  <a:lnTo>
-                    <a:pt x="2363543" y="364388"/>
-                  </a:lnTo>
-                  <a:lnTo>
-                    <a:pt x="2291920" y="354995"/>
-                  </a:lnTo>
-                  <a:lnTo>
-                    <a:pt x="2220298" y="345509"/>
-                  </a:lnTo>
-                  <a:lnTo>
-                    <a:pt x="2148675" y="335929"/>
-                  </a:lnTo>
-                  <a:lnTo>
-                    <a:pt x="2077053" y="326255"/>
-                  </a:lnTo>
-                  <a:lnTo>
-                    <a:pt x="2005430" y="316485"/>
-                  </a:lnTo>
-                  <a:lnTo>
-                    <a:pt x="1933808" y="306618"/>
-                  </a:lnTo>
-                  <a:lnTo>
-                    <a:pt x="1862185" y="296654"/>
-                  </a:lnTo>
-                  <a:lnTo>
-                    <a:pt x="1790563" y="286592"/>
-                  </a:lnTo>
-                  <a:lnTo>
-                    <a:pt x="1718940" y="276430"/>
-                  </a:lnTo>
-                  <a:lnTo>
-                    <a:pt x="1647318" y="266167"/>
-                  </a:lnTo>
-                  <a:lnTo>
-                    <a:pt x="1575695" y="255803"/>
-                  </a:lnTo>
-                  <a:lnTo>
-                    <a:pt x="1504073" y="245337"/>
-                  </a:lnTo>
-                  <a:lnTo>
-                    <a:pt x="1432450" y="234767"/>
-                  </a:lnTo>
-                  <a:lnTo>
-                    <a:pt x="1360827" y="224093"/>
-                  </a:lnTo>
-                  <a:lnTo>
-                    <a:pt x="1289205" y="213313"/>
-                  </a:lnTo>
-                  <a:lnTo>
-                    <a:pt x="1217582" y="202427"/>
-                  </a:lnTo>
-                  <a:lnTo>
-                    <a:pt x="1145960" y="191433"/>
-                  </a:lnTo>
-                  <a:lnTo>
-                    <a:pt x="1074337" y="180331"/>
-                  </a:lnTo>
-                  <a:lnTo>
-                    <a:pt x="1002715" y="169119"/>
-                  </a:lnTo>
-                  <a:lnTo>
-                    <a:pt x="931092" y="157796"/>
-                  </a:lnTo>
-                  <a:lnTo>
-                    <a:pt x="859470" y="146361"/>
-                  </a:lnTo>
-                  <a:lnTo>
-                    <a:pt x="787847" y="134813"/>
-                  </a:lnTo>
-                  <a:lnTo>
-                    <a:pt x="716225" y="123151"/>
-                  </a:lnTo>
-                  <a:lnTo>
-                    <a:pt x="644602" y="111374"/>
-                  </a:lnTo>
-                  <a:lnTo>
-                    <a:pt x="572980" y="99480"/>
-                  </a:lnTo>
-                  <a:lnTo>
-                    <a:pt x="501357" y="87469"/>
-                  </a:lnTo>
-                  <a:lnTo>
-                    <a:pt x="429735" y="75339"/>
-                  </a:lnTo>
-                  <a:lnTo>
-                    <a:pt x="358112" y="63089"/>
-                  </a:lnTo>
-                  <a:lnTo>
-                    <a:pt x="286490" y="50718"/>
-                  </a:lnTo>
-                  <a:lnTo>
-                    <a:pt x="214867" y="38225"/>
-                  </a:lnTo>
-                  <a:lnTo>
-                    <a:pt x="143245" y="25608"/>
-                  </a:lnTo>
-                  <a:lnTo>
-                    <a:pt x="71622" y="12867"/>
-                  </a:lnTo>
-                  <a:lnTo>
-                    <a:pt x="0" y="0"/>
+                    <a:pt x="36765" y="44037"/>
+                  </a:lnTo>
+                  <a:lnTo>
+                    <a:pt x="107110" y="122822"/>
+                  </a:lnTo>
+                  <a:lnTo>
+                    <a:pt x="177454" y="196490"/>
+                  </a:lnTo>
+                  <a:lnTo>
+                    <a:pt x="247799" y="265374"/>
+                  </a:lnTo>
+                  <a:lnTo>
+                    <a:pt x="318143" y="329785"/>
+                  </a:lnTo>
+                  <a:lnTo>
+                    <a:pt x="388488" y="390013"/>
+                  </a:lnTo>
+                  <a:lnTo>
+                    <a:pt x="458832" y="446330"/>
+                  </a:lnTo>
+                  <a:lnTo>
+                    <a:pt x="529177" y="498989"/>
+                  </a:lnTo>
+                  <a:lnTo>
+                    <a:pt x="599521" y="548228"/>
+                  </a:lnTo>
+                  <a:lnTo>
+                    <a:pt x="669866" y="594270"/>
+                  </a:lnTo>
+                  <a:lnTo>
+                    <a:pt x="740210" y="637322"/>
+                  </a:lnTo>
+                  <a:lnTo>
+                    <a:pt x="810555" y="677578"/>
+                  </a:lnTo>
+                  <a:lnTo>
+                    <a:pt x="880899" y="715220"/>
+                  </a:lnTo>
+                  <a:lnTo>
+                    <a:pt x="951244" y="750417"/>
+                  </a:lnTo>
+                  <a:lnTo>
+                    <a:pt x="1021588" y="783328"/>
+                  </a:lnTo>
+                  <a:lnTo>
+                    <a:pt x="1091933" y="814102"/>
+                  </a:lnTo>
+                  <a:lnTo>
+                    <a:pt x="1162277" y="842878"/>
+                  </a:lnTo>
+                  <a:lnTo>
+                    <a:pt x="1232622" y="869785"/>
+                  </a:lnTo>
+                  <a:lnTo>
+                    <a:pt x="1302966" y="894944"/>
+                  </a:lnTo>
+                  <a:lnTo>
+                    <a:pt x="1373311" y="918470"/>
+                  </a:lnTo>
+                  <a:lnTo>
+                    <a:pt x="1443655" y="940468"/>
+                  </a:lnTo>
+                  <a:lnTo>
+                    <a:pt x="1514000" y="958334"/>
+                  </a:lnTo>
+                  <a:lnTo>
+                    <a:pt x="1584344" y="961259"/>
+                  </a:lnTo>
+                  <a:lnTo>
+                    <a:pt x="1654689" y="964155"/>
+                  </a:lnTo>
+                  <a:lnTo>
+                    <a:pt x="1725033" y="967023"/>
+                  </a:lnTo>
+                  <a:lnTo>
+                    <a:pt x="1795378" y="969863"/>
+                  </a:lnTo>
+                  <a:lnTo>
+                    <a:pt x="1865722" y="972675"/>
+                  </a:lnTo>
+                  <a:lnTo>
+                    <a:pt x="1936067" y="975459"/>
+                  </a:lnTo>
+                  <a:lnTo>
+                    <a:pt x="2006411" y="978217"/>
+                  </a:lnTo>
+                  <a:lnTo>
+                    <a:pt x="2076756" y="980947"/>
+                  </a:lnTo>
+                  <a:lnTo>
+                    <a:pt x="2147100" y="983650"/>
+                  </a:lnTo>
+                  <a:lnTo>
+                    <a:pt x="2217445" y="986328"/>
+                  </a:lnTo>
+                  <a:lnTo>
+                    <a:pt x="2287789" y="988978"/>
+                  </a:lnTo>
+                  <a:lnTo>
+                    <a:pt x="2358134" y="991603"/>
+                  </a:lnTo>
+                  <a:lnTo>
+                    <a:pt x="2428478" y="994203"/>
+                  </a:lnTo>
+                  <a:lnTo>
+                    <a:pt x="2498823" y="996776"/>
+                  </a:lnTo>
+                  <a:lnTo>
+                    <a:pt x="2569167" y="999325"/>
+                  </a:lnTo>
+                  <a:lnTo>
+                    <a:pt x="2639512" y="1001849"/>
+                  </a:lnTo>
+                  <a:lnTo>
+                    <a:pt x="2709856" y="1004348"/>
+                  </a:lnTo>
+                  <a:lnTo>
+                    <a:pt x="2780201" y="1006822"/>
+                  </a:lnTo>
+                  <a:lnTo>
+                    <a:pt x="2850545" y="1009273"/>
+                  </a:lnTo>
+                  <a:lnTo>
+                    <a:pt x="2920890" y="1011699"/>
+                  </a:lnTo>
+                  <a:lnTo>
+                    <a:pt x="2991234" y="1014102"/>
+                  </a:lnTo>
+                  <a:lnTo>
+                    <a:pt x="3061579" y="1016481"/>
+                  </a:lnTo>
+                  <a:lnTo>
+                    <a:pt x="3131923" y="1018836"/>
+                  </a:lnTo>
+                  <a:lnTo>
+                    <a:pt x="3202268" y="1021169"/>
+                  </a:lnTo>
+                  <a:lnTo>
+                    <a:pt x="3272612" y="1023479"/>
+                  </a:lnTo>
+                  <a:lnTo>
+                    <a:pt x="3342957" y="1025766"/>
+                  </a:lnTo>
+                  <a:lnTo>
+                    <a:pt x="3413301" y="1028031"/>
+                  </a:lnTo>
+                  <a:lnTo>
+                    <a:pt x="3483645" y="1030274"/>
+                  </a:lnTo>
+                  <a:lnTo>
+                    <a:pt x="3553990" y="1032495"/>
+                  </a:lnTo>
+                  <a:lnTo>
+                    <a:pt x="3624334" y="1034694"/>
+                  </a:lnTo>
+                  <a:lnTo>
+                    <a:pt x="3694679" y="1036871"/>
+                  </a:lnTo>
+                  <a:lnTo>
+                    <a:pt x="3765023" y="1039028"/>
+                  </a:lnTo>
+                  <a:lnTo>
+                    <a:pt x="3835368" y="1041163"/>
+                  </a:lnTo>
+                  <a:lnTo>
+                    <a:pt x="3905712" y="1043277"/>
+                  </a:lnTo>
+                  <a:lnTo>
+                    <a:pt x="3976057" y="1045371"/>
+                  </a:lnTo>
+                  <a:lnTo>
+                    <a:pt x="4046401" y="1047444"/>
+                  </a:lnTo>
+                  <a:lnTo>
+                    <a:pt x="4116746" y="1049496"/>
+                  </a:lnTo>
+                  <a:lnTo>
+                    <a:pt x="4187090" y="1051529"/>
+                  </a:lnTo>
+                  <a:lnTo>
+                    <a:pt x="4257435" y="1053542"/>
+                  </a:lnTo>
+                  <a:lnTo>
+                    <a:pt x="4327779" y="1055535"/>
+                  </a:lnTo>
+                  <a:lnTo>
+                    <a:pt x="4398124" y="1057509"/>
+                  </a:lnTo>
+                  <a:lnTo>
+                    <a:pt x="4468468" y="1059463"/>
+                  </a:lnTo>
+                  <a:lnTo>
+                    <a:pt x="4538813" y="1061398"/>
+                  </a:lnTo>
+                  <a:lnTo>
+                    <a:pt x="4609157" y="1063314"/>
+                  </a:lnTo>
+                  <a:lnTo>
+                    <a:pt x="4679502" y="1065212"/>
+                  </a:lnTo>
+                  <a:lnTo>
+                    <a:pt x="4749846" y="1067091"/>
+                  </a:lnTo>
+                  <a:lnTo>
+                    <a:pt x="4820191" y="1068951"/>
+                  </a:lnTo>
+                  <a:lnTo>
+                    <a:pt x="4890535" y="1070793"/>
+                  </a:lnTo>
+                  <a:lnTo>
+                    <a:pt x="4960880" y="1072618"/>
+                  </a:lnTo>
+                  <a:lnTo>
+                    <a:pt x="5031224" y="1074424"/>
+                  </a:lnTo>
+                  <a:lnTo>
+                    <a:pt x="5101569" y="1076213"/>
+                  </a:lnTo>
+                  <a:lnTo>
+                    <a:pt x="5171913" y="1077984"/>
                   </a:lnTo>
                 </a:path>
               </a:pathLst>
@@ -4090,285 +3800,610 @@
           </p:nvSpPr>
           <p:spPr>
             <a:xfrm>
-              <a:off x="1856907" y="2073503"/>
-              <a:ext cx="6405771" cy="3372341"/>
+              <a:off x="1235312" y="2925810"/>
+              <a:ext cx="6964104" cy="465464"/>
             </a:xfrm>
             <a:custGeom>
               <a:avLst/>
               <a:pathLst>
-                <a:path w="6405771" h="3372341">
+                <a:path w="6964104" h="465464">
+                  <a:moveTo>
+                    <a:pt x="6964104" y="465464"/>
+                  </a:moveTo>
+                  <a:lnTo>
+                    <a:pt x="6893760" y="464838"/>
+                  </a:lnTo>
+                  <a:lnTo>
+                    <a:pt x="6823415" y="464168"/>
+                  </a:lnTo>
+                  <a:lnTo>
+                    <a:pt x="6753071" y="463452"/>
+                  </a:lnTo>
+                  <a:lnTo>
+                    <a:pt x="6682726" y="462686"/>
+                  </a:lnTo>
+                  <a:lnTo>
+                    <a:pt x="6612382" y="461866"/>
+                  </a:lnTo>
+                  <a:lnTo>
+                    <a:pt x="6542037" y="460990"/>
+                  </a:lnTo>
+                  <a:lnTo>
+                    <a:pt x="6471693" y="460053"/>
+                  </a:lnTo>
+                  <a:lnTo>
+                    <a:pt x="6401348" y="459051"/>
+                  </a:lnTo>
+                  <a:lnTo>
+                    <a:pt x="6331004" y="457979"/>
+                  </a:lnTo>
+                  <a:lnTo>
+                    <a:pt x="6260659" y="456833"/>
+                  </a:lnTo>
+                  <a:lnTo>
+                    <a:pt x="6190315" y="455607"/>
+                  </a:lnTo>
+                  <a:lnTo>
+                    <a:pt x="6119970" y="454296"/>
+                  </a:lnTo>
+                  <a:lnTo>
+                    <a:pt x="6049626" y="452894"/>
+                  </a:lnTo>
+                  <a:lnTo>
+                    <a:pt x="5979281" y="451394"/>
+                  </a:lnTo>
+                  <a:lnTo>
+                    <a:pt x="5908937" y="449791"/>
+                  </a:lnTo>
+                  <a:lnTo>
+                    <a:pt x="5838592" y="448076"/>
+                  </a:lnTo>
+                  <a:lnTo>
+                    <a:pt x="5768248" y="446242"/>
+                  </a:lnTo>
+                  <a:lnTo>
+                    <a:pt x="5697903" y="444280"/>
+                  </a:lnTo>
+                  <a:lnTo>
+                    <a:pt x="5627559" y="442183"/>
+                  </a:lnTo>
+                  <a:lnTo>
+                    <a:pt x="5557214" y="439939"/>
+                  </a:lnTo>
+                  <a:lnTo>
+                    <a:pt x="5486870" y="437540"/>
+                  </a:lnTo>
+                  <a:lnTo>
+                    <a:pt x="5416525" y="434974"/>
+                  </a:lnTo>
+                  <a:lnTo>
+                    <a:pt x="5346181" y="432230"/>
+                  </a:lnTo>
+                  <a:lnTo>
+                    <a:pt x="5275836" y="429296"/>
+                  </a:lnTo>
+                  <a:lnTo>
+                    <a:pt x="5205492" y="426157"/>
+                  </a:lnTo>
+                  <a:lnTo>
+                    <a:pt x="5135147" y="422801"/>
+                  </a:lnTo>
+                  <a:lnTo>
+                    <a:pt x="5064803" y="419212"/>
+                  </a:lnTo>
+                  <a:lnTo>
+                    <a:pt x="4994458" y="415373"/>
+                  </a:lnTo>
+                  <a:lnTo>
+                    <a:pt x="4924114" y="411268"/>
+                  </a:lnTo>
+                  <a:lnTo>
+                    <a:pt x="4853769" y="406877"/>
+                  </a:lnTo>
+                  <a:lnTo>
+                    <a:pt x="4783425" y="402182"/>
+                  </a:lnTo>
+                  <a:lnTo>
+                    <a:pt x="4713080" y="397160"/>
+                  </a:lnTo>
+                  <a:lnTo>
+                    <a:pt x="4642736" y="391790"/>
+                  </a:lnTo>
+                  <a:lnTo>
+                    <a:pt x="4572391" y="386047"/>
+                  </a:lnTo>
+                  <a:lnTo>
+                    <a:pt x="4502047" y="379905"/>
+                  </a:lnTo>
+                  <a:lnTo>
+                    <a:pt x="4431702" y="373336"/>
+                  </a:lnTo>
+                  <a:lnTo>
+                    <a:pt x="4361358" y="366311"/>
+                  </a:lnTo>
+                  <a:lnTo>
+                    <a:pt x="4291013" y="358798"/>
+                  </a:lnTo>
+                  <a:lnTo>
+                    <a:pt x="4220669" y="350764"/>
+                  </a:lnTo>
+                  <a:lnTo>
+                    <a:pt x="4150324" y="342171"/>
+                  </a:lnTo>
+                  <a:lnTo>
+                    <a:pt x="4079980" y="332982"/>
+                  </a:lnTo>
+                  <a:lnTo>
+                    <a:pt x="4009635" y="323155"/>
+                  </a:lnTo>
+                  <a:lnTo>
+                    <a:pt x="3939291" y="312645"/>
+                  </a:lnTo>
+                  <a:lnTo>
+                    <a:pt x="3868946" y="301405"/>
+                  </a:lnTo>
+                  <a:lnTo>
+                    <a:pt x="3798602" y="289384"/>
+                  </a:lnTo>
+                  <a:lnTo>
+                    <a:pt x="3728257" y="276528"/>
+                  </a:lnTo>
+                  <a:lnTo>
+                    <a:pt x="3657913" y="262780"/>
+                  </a:lnTo>
+                  <a:lnTo>
+                    <a:pt x="3587569" y="248077"/>
+                  </a:lnTo>
+                  <a:lnTo>
+                    <a:pt x="3517224" y="232353"/>
+                  </a:lnTo>
+                  <a:lnTo>
+                    <a:pt x="3446880" y="215536"/>
+                  </a:lnTo>
+                  <a:lnTo>
+                    <a:pt x="3376535" y="197552"/>
+                  </a:lnTo>
+                  <a:lnTo>
+                    <a:pt x="3306191" y="178318"/>
+                  </a:lnTo>
+                  <a:lnTo>
+                    <a:pt x="3235846" y="172662"/>
+                  </a:lnTo>
+                  <a:lnTo>
+                    <a:pt x="3165502" y="169679"/>
+                  </a:lnTo>
+                  <a:lnTo>
+                    <a:pt x="3095157" y="166667"/>
+                  </a:lnTo>
+                  <a:lnTo>
+                    <a:pt x="3024813" y="163624"/>
+                  </a:lnTo>
+                  <a:lnTo>
+                    <a:pt x="2954468" y="160552"/>
+                  </a:lnTo>
+                  <a:lnTo>
+                    <a:pt x="2884124" y="157449"/>
+                  </a:lnTo>
+                  <a:lnTo>
+                    <a:pt x="2813779" y="154316"/>
+                  </a:lnTo>
+                  <a:lnTo>
+                    <a:pt x="2743435" y="151152"/>
+                  </a:lnTo>
+                  <a:lnTo>
+                    <a:pt x="2673090" y="147956"/>
+                  </a:lnTo>
+                  <a:lnTo>
+                    <a:pt x="2602746" y="144729"/>
+                  </a:lnTo>
+                  <a:lnTo>
+                    <a:pt x="2532401" y="141470"/>
+                  </a:lnTo>
+                  <a:lnTo>
+                    <a:pt x="2462057" y="138179"/>
+                  </a:lnTo>
+                  <a:lnTo>
+                    <a:pt x="2391712" y="134855"/>
+                  </a:lnTo>
+                  <a:lnTo>
+                    <a:pt x="2321368" y="131499"/>
+                  </a:lnTo>
+                  <a:lnTo>
+                    <a:pt x="2251023" y="128109"/>
+                  </a:lnTo>
+                  <a:lnTo>
+                    <a:pt x="2180679" y="124686"/>
+                  </a:lnTo>
+                  <a:lnTo>
+                    <a:pt x="2110334" y="121229"/>
+                  </a:lnTo>
+                  <a:lnTo>
+                    <a:pt x="2039990" y="117737"/>
+                  </a:lnTo>
+                  <a:lnTo>
+                    <a:pt x="1969645" y="114212"/>
+                  </a:lnTo>
+                  <a:lnTo>
+                    <a:pt x="1899301" y="110651"/>
+                  </a:lnTo>
+                  <a:lnTo>
+                    <a:pt x="1828956" y="107055"/>
+                  </a:lnTo>
+                  <a:lnTo>
+                    <a:pt x="1758612" y="103424"/>
+                  </a:lnTo>
+                  <a:lnTo>
+                    <a:pt x="1688267" y="99757"/>
+                  </a:lnTo>
+                  <a:lnTo>
+                    <a:pt x="1617923" y="96053"/>
+                  </a:lnTo>
+                  <a:lnTo>
+                    <a:pt x="1547578" y="92313"/>
+                  </a:lnTo>
+                  <a:lnTo>
+                    <a:pt x="1477234" y="88536"/>
+                  </a:lnTo>
+                  <a:lnTo>
+                    <a:pt x="1406889" y="84722"/>
+                  </a:lnTo>
+                  <a:lnTo>
+                    <a:pt x="1336545" y="80870"/>
+                  </a:lnTo>
+                  <a:lnTo>
+                    <a:pt x="1266200" y="76979"/>
+                  </a:lnTo>
+                  <a:lnTo>
+                    <a:pt x="1195856" y="73051"/>
+                  </a:lnTo>
+                  <a:lnTo>
+                    <a:pt x="1125511" y="69083"/>
+                  </a:lnTo>
+                  <a:lnTo>
+                    <a:pt x="1055167" y="65077"/>
+                  </a:lnTo>
+                  <a:lnTo>
+                    <a:pt x="984822" y="61031"/>
+                  </a:lnTo>
+                  <a:lnTo>
+                    <a:pt x="914478" y="56944"/>
+                  </a:lnTo>
+                  <a:lnTo>
+                    <a:pt x="844133" y="52818"/>
+                  </a:lnTo>
+                  <a:lnTo>
+                    <a:pt x="773789" y="48650"/>
+                  </a:lnTo>
+                  <a:lnTo>
+                    <a:pt x="703444" y="44442"/>
+                  </a:lnTo>
+                  <a:lnTo>
+                    <a:pt x="633100" y="40192"/>
+                  </a:lnTo>
+                  <a:lnTo>
+                    <a:pt x="562755" y="35900"/>
+                  </a:lnTo>
+                  <a:lnTo>
+                    <a:pt x="492411" y="31565"/>
+                  </a:lnTo>
+                  <a:lnTo>
+                    <a:pt x="422066" y="27188"/>
+                  </a:lnTo>
+                  <a:lnTo>
+                    <a:pt x="351722" y="22767"/>
+                  </a:lnTo>
+                  <a:lnTo>
+                    <a:pt x="281377" y="18303"/>
+                  </a:lnTo>
+                  <a:lnTo>
+                    <a:pt x="211033" y="13794"/>
+                  </a:lnTo>
+                  <a:lnTo>
+                    <a:pt x="140688" y="9241"/>
+                  </a:lnTo>
+                  <a:lnTo>
+                    <a:pt x="70344" y="4643"/>
+                  </a:lnTo>
+                  <a:lnTo>
+                    <a:pt x="0" y="0"/>
+                  </a:lnTo>
+                </a:path>
+              </a:pathLst>
+            </a:custGeom>
+          </p:spPr>
+          <p:txBody>
+            <a:bodyPr/>
+            <a:lstStyle/>
+            <a:p/>
+          </p:txBody>
+        </p:sp>
+        <p:sp>
+          <p:nvSpPr>
+            <p:cNvPr id="24" name="pl24"/>
+            <p:cNvSpPr/>
+            <p:nvPr/>
+          </p:nvSpPr>
+          <p:spPr>
+            <a:xfrm>
+              <a:off x="1907949" y="2143092"/>
+              <a:ext cx="6291466" cy="1216998"/>
+            </a:xfrm>
+            <a:custGeom>
+              <a:avLst/>
+              <a:pathLst>
+                <a:path w="6291466" h="1216998">
                   <a:moveTo>
                     <a:pt x="0" y="0"/>
                   </a:moveTo>
                   <a:lnTo>
-                    <a:pt x="31366" y="58858"/>
-                  </a:lnTo>
-                  <a:lnTo>
-                    <a:pt x="102989" y="188178"/>
-                  </a:lnTo>
-                  <a:lnTo>
-                    <a:pt x="174611" y="312616"/>
-                  </a:lnTo>
-                  <a:lnTo>
-                    <a:pt x="246234" y="432355"/>
-                  </a:lnTo>
-                  <a:lnTo>
-                    <a:pt x="317857" y="547573"/>
-                  </a:lnTo>
-                  <a:lnTo>
-                    <a:pt x="389479" y="658440"/>
-                  </a:lnTo>
-                  <a:lnTo>
-                    <a:pt x="461102" y="765121"/>
-                  </a:lnTo>
-                  <a:lnTo>
-                    <a:pt x="532724" y="867774"/>
-                  </a:lnTo>
-                  <a:lnTo>
-                    <a:pt x="604347" y="966551"/>
-                  </a:lnTo>
-                  <a:lnTo>
-                    <a:pt x="675969" y="1061598"/>
-                  </a:lnTo>
-                  <a:lnTo>
-                    <a:pt x="747592" y="1153056"/>
-                  </a:lnTo>
-                  <a:lnTo>
-                    <a:pt x="819214" y="1241060"/>
-                  </a:lnTo>
-                  <a:lnTo>
-                    <a:pt x="890837" y="1325742"/>
-                  </a:lnTo>
-                  <a:lnTo>
-                    <a:pt x="962459" y="1407227"/>
-                  </a:lnTo>
-                  <a:lnTo>
-                    <a:pt x="1034082" y="1485634"/>
-                  </a:lnTo>
-                  <a:lnTo>
-                    <a:pt x="1105704" y="1561081"/>
-                  </a:lnTo>
-                  <a:lnTo>
-                    <a:pt x="1177327" y="1633679"/>
-                  </a:lnTo>
-                  <a:lnTo>
-                    <a:pt x="1248949" y="1703536"/>
-                  </a:lnTo>
-                  <a:lnTo>
-                    <a:pt x="1320572" y="1770755"/>
-                  </a:lnTo>
-                  <a:lnTo>
-                    <a:pt x="1392194" y="1835436"/>
-                  </a:lnTo>
-                  <a:lnTo>
-                    <a:pt x="1463817" y="1897675"/>
-                  </a:lnTo>
-                  <a:lnTo>
-                    <a:pt x="1535439" y="1957563"/>
-                  </a:lnTo>
-                  <a:lnTo>
-                    <a:pt x="1607062" y="2015191"/>
-                  </a:lnTo>
-                  <a:lnTo>
-                    <a:pt x="1678685" y="2070642"/>
-                  </a:lnTo>
-                  <a:lnTo>
-                    <a:pt x="1750307" y="2124000"/>
-                  </a:lnTo>
-                  <a:lnTo>
-                    <a:pt x="1821930" y="2175342"/>
-                  </a:lnTo>
-                  <a:lnTo>
-                    <a:pt x="1893552" y="2224746"/>
-                  </a:lnTo>
-                  <a:lnTo>
-                    <a:pt x="1965175" y="2272285"/>
-                  </a:lnTo>
-                  <a:lnTo>
-                    <a:pt x="2036797" y="2318029"/>
-                  </a:lnTo>
-                  <a:lnTo>
-                    <a:pt x="2108420" y="2362045"/>
-                  </a:lnTo>
-                  <a:lnTo>
-                    <a:pt x="2180042" y="2404400"/>
-                  </a:lnTo>
-                  <a:lnTo>
-                    <a:pt x="2251665" y="2445155"/>
-                  </a:lnTo>
-                  <a:lnTo>
-                    <a:pt x="2323287" y="2484371"/>
-                  </a:lnTo>
-                  <a:lnTo>
-                    <a:pt x="2394910" y="2522107"/>
-                  </a:lnTo>
-                  <a:lnTo>
-                    <a:pt x="2466532" y="2558417"/>
-                  </a:lnTo>
-                  <a:lnTo>
-                    <a:pt x="2538155" y="2593357"/>
-                  </a:lnTo>
-                  <a:lnTo>
-                    <a:pt x="2609777" y="2626977"/>
-                  </a:lnTo>
-                  <a:lnTo>
-                    <a:pt x="2681400" y="2659328"/>
-                  </a:lnTo>
-                  <a:lnTo>
-                    <a:pt x="2753022" y="2690457"/>
-                  </a:lnTo>
-                  <a:lnTo>
-                    <a:pt x="2824645" y="2720411"/>
-                  </a:lnTo>
-                  <a:lnTo>
-                    <a:pt x="2896267" y="2749234"/>
-                  </a:lnTo>
-                  <a:lnTo>
-                    <a:pt x="2967890" y="2776969"/>
-                  </a:lnTo>
-                  <a:lnTo>
-                    <a:pt x="3039513" y="2803656"/>
-                  </a:lnTo>
-                  <a:lnTo>
-                    <a:pt x="3111135" y="2829335"/>
-                  </a:lnTo>
-                  <a:lnTo>
-                    <a:pt x="3182758" y="2854045"/>
-                  </a:lnTo>
-                  <a:lnTo>
-                    <a:pt x="3254380" y="2877822"/>
-                  </a:lnTo>
-                  <a:lnTo>
-                    <a:pt x="3326003" y="2900701"/>
-                  </a:lnTo>
-                  <a:lnTo>
-                    <a:pt x="3397625" y="2922717"/>
-                  </a:lnTo>
-                  <a:lnTo>
-                    <a:pt x="3469248" y="2943901"/>
-                  </a:lnTo>
-                  <a:lnTo>
-                    <a:pt x="3540870" y="2964285"/>
-                  </a:lnTo>
-                  <a:lnTo>
-                    <a:pt x="3612493" y="2983899"/>
-                  </a:lnTo>
-                  <a:lnTo>
-                    <a:pt x="3684115" y="3002773"/>
-                  </a:lnTo>
-                  <a:lnTo>
-                    <a:pt x="3755738" y="3020934"/>
-                  </a:lnTo>
-                  <a:lnTo>
-                    <a:pt x="3827360" y="3038409"/>
-                  </a:lnTo>
-                  <a:lnTo>
-                    <a:pt x="3898983" y="3055225"/>
-                  </a:lnTo>
-                  <a:lnTo>
-                    <a:pt x="3970605" y="3071406"/>
-                  </a:lnTo>
-                  <a:lnTo>
-                    <a:pt x="4042228" y="3086975"/>
-                  </a:lnTo>
-                  <a:lnTo>
-                    <a:pt x="4113850" y="3101957"/>
-                  </a:lnTo>
-                  <a:lnTo>
-                    <a:pt x="4185473" y="3116373"/>
-                  </a:lnTo>
-                  <a:lnTo>
-                    <a:pt x="4257095" y="3130245"/>
-                  </a:lnTo>
-                  <a:lnTo>
-                    <a:pt x="4328718" y="3143592"/>
-                  </a:lnTo>
-                  <a:lnTo>
-                    <a:pt x="4400341" y="3156436"/>
-                  </a:lnTo>
-                  <a:lnTo>
-                    <a:pt x="4471963" y="3168795"/>
-                  </a:lnTo>
-                  <a:lnTo>
-                    <a:pt x="4543586" y="3180688"/>
-                  </a:lnTo>
-                  <a:lnTo>
-                    <a:pt x="4615208" y="3192131"/>
-                  </a:lnTo>
-                  <a:lnTo>
-                    <a:pt x="4686831" y="3203142"/>
-                  </a:lnTo>
-                  <a:lnTo>
-                    <a:pt x="4758453" y="3213737"/>
-                  </a:lnTo>
-                  <a:lnTo>
-                    <a:pt x="4830076" y="3223933"/>
-                  </a:lnTo>
-                  <a:lnTo>
-                    <a:pt x="4901698" y="3233743"/>
-                  </a:lnTo>
-                  <a:lnTo>
-                    <a:pt x="4973321" y="3243183"/>
-                  </a:lnTo>
-                  <a:lnTo>
-                    <a:pt x="5044943" y="3252266"/>
-                  </a:lnTo>
-                  <a:lnTo>
-                    <a:pt x="5116566" y="3261007"/>
-                  </a:lnTo>
-                  <a:lnTo>
-                    <a:pt x="5188188" y="3269417"/>
-                  </a:lnTo>
-                  <a:lnTo>
-                    <a:pt x="5259811" y="3277510"/>
-                  </a:lnTo>
-                  <a:lnTo>
-                    <a:pt x="5331433" y="3285297"/>
-                  </a:lnTo>
-                  <a:lnTo>
-                    <a:pt x="5403056" y="3292791"/>
-                  </a:lnTo>
-                  <a:lnTo>
-                    <a:pt x="5474678" y="3300001"/>
-                  </a:lnTo>
-                  <a:lnTo>
-                    <a:pt x="5546301" y="3306939"/>
-                  </a:lnTo>
-                  <a:lnTo>
-                    <a:pt x="5617923" y="3313615"/>
-                  </a:lnTo>
-                  <a:lnTo>
-                    <a:pt x="5689546" y="3320039"/>
-                  </a:lnTo>
-                  <a:lnTo>
-                    <a:pt x="5761168" y="3326221"/>
-                  </a:lnTo>
-                  <a:lnTo>
-                    <a:pt x="5832791" y="3332169"/>
-                  </a:lnTo>
-                  <a:lnTo>
-                    <a:pt x="5904414" y="3337892"/>
-                  </a:lnTo>
-                  <a:lnTo>
-                    <a:pt x="5976036" y="3343399"/>
-                  </a:lnTo>
-                  <a:lnTo>
-                    <a:pt x="6047659" y="3348699"/>
-                  </a:lnTo>
-                  <a:lnTo>
-                    <a:pt x="6119281" y="3353798"/>
-                  </a:lnTo>
-                  <a:lnTo>
-                    <a:pt x="6190904" y="3358705"/>
-                  </a:lnTo>
-                  <a:lnTo>
-                    <a:pt x="6262526" y="3363426"/>
-                  </a:lnTo>
-                  <a:lnTo>
-                    <a:pt x="6334149" y="3367969"/>
-                  </a:lnTo>
-                  <a:lnTo>
-                    <a:pt x="6405771" y="3372341"/>
+                    <a:pt x="30807" y="21240"/>
+                  </a:lnTo>
+                  <a:lnTo>
+                    <a:pt x="101151" y="67909"/>
+                  </a:lnTo>
+                  <a:lnTo>
+                    <a:pt x="171496" y="112815"/>
+                  </a:lnTo>
+                  <a:lnTo>
+                    <a:pt x="241840" y="156026"/>
+                  </a:lnTo>
+                  <a:lnTo>
+                    <a:pt x="312185" y="197606"/>
+                  </a:lnTo>
+                  <a:lnTo>
+                    <a:pt x="382529" y="237615"/>
+                  </a:lnTo>
+                  <a:lnTo>
+                    <a:pt x="452874" y="276114"/>
+                  </a:lnTo>
+                  <a:lnTo>
+                    <a:pt x="523218" y="313159"/>
+                  </a:lnTo>
+                  <a:lnTo>
+                    <a:pt x="593563" y="348805"/>
+                  </a:lnTo>
+                  <a:lnTo>
+                    <a:pt x="663907" y="383105"/>
+                  </a:lnTo>
+                  <a:lnTo>
+                    <a:pt x="734252" y="416110"/>
+                  </a:lnTo>
+                  <a:lnTo>
+                    <a:pt x="804596" y="447869"/>
+                  </a:lnTo>
+                  <a:lnTo>
+                    <a:pt x="874941" y="478429"/>
+                  </a:lnTo>
+                  <a:lnTo>
+                    <a:pt x="945285" y="507835"/>
+                  </a:lnTo>
+                  <a:lnTo>
+                    <a:pt x="1015630" y="536130"/>
+                  </a:lnTo>
+                  <a:lnTo>
+                    <a:pt x="1085974" y="563357"/>
+                  </a:lnTo>
+                  <a:lnTo>
+                    <a:pt x="1156319" y="589556"/>
+                  </a:lnTo>
+                  <a:lnTo>
+                    <a:pt x="1226663" y="614766"/>
+                  </a:lnTo>
+                  <a:lnTo>
+                    <a:pt x="1297008" y="639024"/>
+                  </a:lnTo>
+                  <a:lnTo>
+                    <a:pt x="1367352" y="662365"/>
+                  </a:lnTo>
+                  <a:lnTo>
+                    <a:pt x="1437697" y="684826"/>
+                  </a:lnTo>
+                  <a:lnTo>
+                    <a:pt x="1508041" y="706438"/>
+                  </a:lnTo>
+                  <a:lnTo>
+                    <a:pt x="1578385" y="727235"/>
+                  </a:lnTo>
+                  <a:lnTo>
+                    <a:pt x="1648730" y="747246"/>
+                  </a:lnTo>
+                  <a:lnTo>
+                    <a:pt x="1719074" y="766501"/>
+                  </a:lnTo>
+                  <a:lnTo>
+                    <a:pt x="1789419" y="785030"/>
+                  </a:lnTo>
+                  <a:lnTo>
+                    <a:pt x="1859763" y="802858"/>
+                  </a:lnTo>
+                  <a:lnTo>
+                    <a:pt x="1930108" y="820014"/>
+                  </a:lnTo>
+                  <a:lnTo>
+                    <a:pt x="2000452" y="836522"/>
+                  </a:lnTo>
+                  <a:lnTo>
+                    <a:pt x="2070797" y="852406"/>
+                  </a:lnTo>
+                  <a:lnTo>
+                    <a:pt x="2141141" y="867691"/>
+                  </a:lnTo>
+                  <a:lnTo>
+                    <a:pt x="2211486" y="882399"/>
+                  </a:lnTo>
+                  <a:lnTo>
+                    <a:pt x="2281830" y="896551"/>
+                  </a:lnTo>
+                  <a:lnTo>
+                    <a:pt x="2352175" y="910169"/>
+                  </a:lnTo>
+                  <a:lnTo>
+                    <a:pt x="2422519" y="923272"/>
+                  </a:lnTo>
+                  <a:lnTo>
+                    <a:pt x="2492864" y="935881"/>
+                  </a:lnTo>
+                  <a:lnTo>
+                    <a:pt x="2563208" y="948014"/>
+                  </a:lnTo>
+                  <a:lnTo>
+                    <a:pt x="2633553" y="959689"/>
+                  </a:lnTo>
+                  <a:lnTo>
+                    <a:pt x="2703897" y="970922"/>
+                  </a:lnTo>
+                  <a:lnTo>
+                    <a:pt x="2774242" y="981732"/>
+                  </a:lnTo>
+                  <a:lnTo>
+                    <a:pt x="2844586" y="992134"/>
+                  </a:lnTo>
+                  <a:lnTo>
+                    <a:pt x="2914931" y="1002142"/>
+                  </a:lnTo>
+                  <a:lnTo>
+                    <a:pt x="2985275" y="1011773"/>
+                  </a:lnTo>
+                  <a:lnTo>
+                    <a:pt x="3055620" y="1021040"/>
+                  </a:lnTo>
+                  <a:lnTo>
+                    <a:pt x="3125964" y="1029958"/>
+                  </a:lnTo>
+                  <a:lnTo>
+                    <a:pt x="3196309" y="1038538"/>
+                  </a:lnTo>
+                  <a:lnTo>
+                    <a:pt x="3266653" y="1046795"/>
+                  </a:lnTo>
+                  <a:lnTo>
+                    <a:pt x="3336998" y="1054739"/>
+                  </a:lnTo>
+                  <a:lnTo>
+                    <a:pt x="3407342" y="1062384"/>
+                  </a:lnTo>
+                  <a:lnTo>
+                    <a:pt x="3477687" y="1069740"/>
+                  </a:lnTo>
+                  <a:lnTo>
+                    <a:pt x="3548031" y="1076819"/>
+                  </a:lnTo>
+                  <a:lnTo>
+                    <a:pt x="3618376" y="1083630"/>
+                  </a:lnTo>
+                  <a:lnTo>
+                    <a:pt x="3688720" y="1090184"/>
+                  </a:lnTo>
+                  <a:lnTo>
+                    <a:pt x="3759065" y="1096490"/>
+                  </a:lnTo>
+                  <a:lnTo>
+                    <a:pt x="3829409" y="1102558"/>
+                  </a:lnTo>
+                  <a:lnTo>
+                    <a:pt x="3899754" y="1108398"/>
+                  </a:lnTo>
+                  <a:lnTo>
+                    <a:pt x="3970098" y="1114016"/>
+                  </a:lnTo>
+                  <a:lnTo>
+                    <a:pt x="4040443" y="1119423"/>
+                  </a:lnTo>
+                  <a:lnTo>
+                    <a:pt x="4110787" y="1124625"/>
+                  </a:lnTo>
+                  <a:lnTo>
+                    <a:pt x="4181132" y="1129631"/>
+                  </a:lnTo>
+                  <a:lnTo>
+                    <a:pt x="4251476" y="1134448"/>
+                  </a:lnTo>
+                  <a:lnTo>
+                    <a:pt x="4321821" y="1139083"/>
+                  </a:lnTo>
+                  <a:lnTo>
+                    <a:pt x="4392165" y="1143543"/>
+                  </a:lnTo>
+                  <a:lnTo>
+                    <a:pt x="4462510" y="1147835"/>
+                  </a:lnTo>
+                  <a:lnTo>
+                    <a:pt x="4532854" y="1151965"/>
+                  </a:lnTo>
+                  <a:lnTo>
+                    <a:pt x="4603199" y="1155938"/>
+                  </a:lnTo>
+                  <a:lnTo>
+                    <a:pt x="4673543" y="1159762"/>
+                  </a:lnTo>
+                  <a:lnTo>
+                    <a:pt x="4743888" y="1163441"/>
+                  </a:lnTo>
+                  <a:lnTo>
+                    <a:pt x="4814232" y="1166981"/>
+                  </a:lnTo>
+                  <a:lnTo>
+                    <a:pt x="4884577" y="1170388"/>
+                  </a:lnTo>
+                  <a:lnTo>
+                    <a:pt x="4954921" y="1173666"/>
+                  </a:lnTo>
+                  <a:lnTo>
+                    <a:pt x="5025266" y="1176820"/>
+                  </a:lnTo>
+                  <a:lnTo>
+                    <a:pt x="5095610" y="1179855"/>
+                  </a:lnTo>
+                  <a:lnTo>
+                    <a:pt x="5165955" y="1182776"/>
+                  </a:lnTo>
+                  <a:lnTo>
+                    <a:pt x="5236299" y="1185586"/>
+                  </a:lnTo>
+                  <a:lnTo>
+                    <a:pt x="5306643" y="1188290"/>
+                  </a:lnTo>
+                  <a:lnTo>
+                    <a:pt x="5376988" y="1190892"/>
+                  </a:lnTo>
+                  <a:lnTo>
+                    <a:pt x="5447332" y="1193396"/>
+                  </a:lnTo>
+                  <a:lnTo>
+                    <a:pt x="5517677" y="1195805"/>
+                  </a:lnTo>
+                  <a:lnTo>
+                    <a:pt x="5588021" y="1198124"/>
+                  </a:lnTo>
+                  <a:lnTo>
+                    <a:pt x="5658366" y="1200354"/>
+                  </a:lnTo>
+                  <a:lnTo>
+                    <a:pt x="5728710" y="1202501"/>
+                  </a:lnTo>
+                  <a:lnTo>
+                    <a:pt x="5799055" y="1204566"/>
+                  </a:lnTo>
+                  <a:lnTo>
+                    <a:pt x="5869399" y="1206554"/>
+                  </a:lnTo>
+                  <a:lnTo>
+                    <a:pt x="5939744" y="1208466"/>
+                  </a:lnTo>
+                  <a:lnTo>
+                    <a:pt x="6010088" y="1210306"/>
+                  </a:lnTo>
+                  <a:lnTo>
+                    <a:pt x="6080433" y="1212077"/>
+                  </a:lnTo>
+                  <a:lnTo>
+                    <a:pt x="6150777" y="1213781"/>
+                  </a:lnTo>
+                  <a:lnTo>
+                    <a:pt x="6221122" y="1215421"/>
+                  </a:lnTo>
+                  <a:lnTo>
+                    <a:pt x="6291466" y="1216998"/>
                   </a:lnTo>
                 </a:path>
               </a:pathLst>
@@ -4391,27 +4426,27 @@
         </p:sp>
         <p:sp>
           <p:nvSpPr>
-            <p:cNvPr id="24" name="pl24"/>
+            <p:cNvPr id="25" name="pl25"/>
             <p:cNvSpPr/>
             <p:nvPr/>
           </p:nvSpPr>
           <p:spPr>
             <a:xfrm>
-              <a:off x="817517" y="4727786"/>
-              <a:ext cx="7799693" cy="0"/>
+              <a:off x="887106" y="3100960"/>
+              <a:ext cx="7660515" cy="0"/>
             </a:xfrm>
             <a:custGeom>
               <a:avLst/>
               <a:pathLst>
-                <a:path w="7799693" h="0">
+                <a:path w="7660515" h="0">
                   <a:moveTo>
                     <a:pt x="0" y="0"/>
                   </a:moveTo>
                   <a:lnTo>
-                    <a:pt x="7799693" y="0"/>
-                  </a:lnTo>
-                  <a:lnTo>
-                    <a:pt x="7799693" y="0"/>
+                    <a:pt x="7660515" y="0"/>
+                  </a:lnTo>
+                  <a:lnTo>
+                    <a:pt x="7660515" y="0"/>
                   </a:lnTo>
                 </a:path>
               </a:pathLst>
@@ -4434,21 +4469,21 @@
         </p:sp>
         <p:sp>
           <p:nvSpPr>
-            <p:cNvPr id="25" name="pl25"/>
+            <p:cNvPr id="26" name="pl26"/>
             <p:cNvSpPr/>
             <p:nvPr/>
           </p:nvSpPr>
           <p:spPr>
             <a:xfrm>
-              <a:off x="4526955" y="2073503"/>
-              <a:ext cx="0" cy="3649639"/>
+              <a:off x="4530353" y="2143092"/>
+              <a:ext cx="0" cy="1317069"/>
             </a:xfrm>
             <a:custGeom>
               <a:avLst/>
               <a:pathLst>
-                <a:path w="0" h="3649639">
+                <a:path w="0" h="1317069">
                   <a:moveTo>
-                    <a:pt x="0" y="3649639"/>
+                    <a:pt x="0" y="1317069"/>
                   </a:moveTo>
                   <a:lnTo>
                     <a:pt x="0" y="0"/>
@@ -4477,13 +4512,13 @@
         </p:sp>
         <p:sp>
           <p:nvSpPr>
-            <p:cNvPr id="26" name="tx26"/>
+            <p:cNvPr id="27" name="tx27"/>
             <p:cNvSpPr/>
             <p:nvPr/>
           </p:nvSpPr>
           <p:spPr>
             <a:xfrm>
-              <a:off x="692708" y="5517199"/>
+              <a:off x="762297" y="3360243"/>
               <a:ext cx="62179" cy="80101"/>
             </a:xfrm>
             <a:prstGeom prst="rect">
@@ -4523,13 +4558,13 @@
         </p:sp>
         <p:sp>
           <p:nvSpPr>
-            <p:cNvPr id="27" name="tx27"/>
+            <p:cNvPr id="28" name="tx28"/>
             <p:cNvSpPr/>
             <p:nvPr/>
           </p:nvSpPr>
           <p:spPr>
             <a:xfrm>
-              <a:off x="692708" y="4687735"/>
+              <a:off x="762297" y="3060909"/>
               <a:ext cx="62179" cy="80101"/>
             </a:xfrm>
             <a:prstGeom prst="rect">
@@ -4569,13 +4604,13 @@
         </p:sp>
         <p:sp>
           <p:nvSpPr>
-            <p:cNvPr id="28" name="tx28"/>
+            <p:cNvPr id="29" name="tx29"/>
             <p:cNvSpPr/>
             <p:nvPr/>
           </p:nvSpPr>
           <p:spPr>
             <a:xfrm>
-              <a:off x="692708" y="3858272"/>
+              <a:off x="762297" y="2761575"/>
               <a:ext cx="62179" cy="80101"/>
             </a:xfrm>
             <a:prstGeom prst="rect">
@@ -4615,13 +4650,13 @@
         </p:sp>
         <p:sp>
           <p:nvSpPr>
-            <p:cNvPr id="29" name="tx29"/>
+            <p:cNvPr id="30" name="tx30"/>
             <p:cNvSpPr/>
             <p:nvPr/>
           </p:nvSpPr>
           <p:spPr>
             <a:xfrm>
-              <a:off x="692708" y="3028808"/>
+              <a:off x="762297" y="2462242"/>
               <a:ext cx="62179" cy="80101"/>
             </a:xfrm>
             <a:prstGeom prst="rect">
@@ -4661,13 +4696,13 @@
         </p:sp>
         <p:sp>
           <p:nvSpPr>
-            <p:cNvPr id="30" name="tx30"/>
+            <p:cNvPr id="31" name="tx31"/>
             <p:cNvSpPr/>
             <p:nvPr/>
           </p:nvSpPr>
           <p:spPr>
             <a:xfrm>
-              <a:off x="692708" y="2199345"/>
+              <a:off x="762297" y="2162908"/>
               <a:ext cx="62179" cy="80101"/>
             </a:xfrm>
             <a:prstGeom prst="rect">
@@ -4707,13 +4742,13 @@
         </p:sp>
         <p:sp>
           <p:nvSpPr>
-            <p:cNvPr id="31" name="tx31"/>
+            <p:cNvPr id="32" name="tx32"/>
             <p:cNvSpPr/>
             <p:nvPr/>
           </p:nvSpPr>
           <p:spPr>
             <a:xfrm>
-              <a:off x="2421884" y="5785772"/>
+              <a:off x="2461403" y="3522791"/>
               <a:ext cx="161574" cy="80101"/>
             </a:xfrm>
             <a:prstGeom prst="rect">
@@ -4753,13 +4788,13 @@
         </p:sp>
         <p:sp>
           <p:nvSpPr>
-            <p:cNvPr id="32" name="tx32"/>
+            <p:cNvPr id="33" name="tx33"/>
             <p:cNvSpPr/>
             <p:nvPr/>
           </p:nvSpPr>
           <p:spPr>
             <a:xfrm>
-              <a:off x="4542539" y="5785772"/>
+              <a:off x="4545104" y="3522791"/>
               <a:ext cx="62179" cy="80101"/>
             </a:xfrm>
             <a:prstGeom prst="rect">
@@ -4799,13 +4834,13 @@
         </p:sp>
         <p:sp>
           <p:nvSpPr>
-            <p:cNvPr id="33" name="tx33"/>
+            <p:cNvPr id="34" name="tx34"/>
             <p:cNvSpPr/>
             <p:nvPr/>
           </p:nvSpPr>
           <p:spPr>
             <a:xfrm>
-              <a:off x="6582407" y="5785772"/>
+              <a:off x="6548017" y="3522791"/>
               <a:ext cx="124358" cy="80101"/>
             </a:xfrm>
             <a:prstGeom prst="rect">
@@ -4845,13 +4880,13 @@
         </p:sp>
         <p:sp>
           <p:nvSpPr>
-            <p:cNvPr id="34" name="tx34"/>
+            <p:cNvPr id="35" name="tx35"/>
             <p:cNvSpPr/>
             <p:nvPr/>
           </p:nvSpPr>
           <p:spPr>
             <a:xfrm>
-              <a:off x="2928340" y="5925448"/>
+              <a:off x="2928340" y="3662467"/>
               <a:ext cx="3578047" cy="100218"/>
             </a:xfrm>
             <a:prstGeom prst="rect">
@@ -4891,13 +4926,13 @@
         </p:sp>
         <p:sp>
           <p:nvSpPr>
-            <p:cNvPr id="35" name="tx35"/>
+            <p:cNvPr id="36" name="tx36"/>
             <p:cNvSpPr/>
             <p:nvPr/>
           </p:nvSpPr>
           <p:spPr>
             <a:xfrm rot="-5400000">
-              <a:off x="68446" y="3848213"/>
+              <a:off x="138035" y="2751517"/>
               <a:ext cx="1016904" cy="100218"/>
             </a:xfrm>
             <a:prstGeom prst="rect">
@@ -4937,13 +4972,13 @@
         </p:sp>
         <p:sp>
           <p:nvSpPr>
-            <p:cNvPr id="36" name="tx36"/>
+            <p:cNvPr id="37" name="tx37"/>
             <p:cNvSpPr/>
             <p:nvPr/>
           </p:nvSpPr>
           <p:spPr>
             <a:xfrm>
-              <a:off x="817517" y="1896563"/>
+              <a:off x="887106" y="1966152"/>
               <a:ext cx="6385163" cy="82021"/>
             </a:xfrm>
             <a:prstGeom prst="rect">
@@ -4983,13 +5018,3569 @@
         </p:sp>
         <p:sp>
           <p:nvSpPr>
-            <p:cNvPr id="37" name="tx37"/>
+            <p:cNvPr id="38" name="tx38"/>
             <p:cNvSpPr/>
             <p:nvPr/>
           </p:nvSpPr>
           <p:spPr>
             <a:xfrm>
-              <a:off x="817517" y="1669789"/>
+              <a:off x="887106" y="1739378"/>
+              <a:ext cx="2514051" cy="120152"/>
+            </a:xfrm>
+            <a:prstGeom prst="rect">
+              <a:avLst/>
+            </a:prstGeom>
+            <a:noFill/>
+          </p:spPr>
+          <p:txBody>
+            <a:bodyPr lIns="0" rIns="0" tIns="0" bIns="0" anchorCtr="1" anchor="ctr" wrap="none"/>
+            <a:lstStyle/>
+            <a:p>
+              <a:pPr algn="l" marL="0" marR="0" indent="0">
+                <a:lnSpc>
+                  <a:spcPts val="1320"/>
+                </a:lnSpc>
+                <a:spcBef>
+                  <a:spcPts val="0"/>
+                </a:spcBef>
+                <a:spcAft>
+                  <a:spcPts val="0"/>
+                </a:spcAft>
+              </a:pPr>
+              <a:r>
+                <a:rPr sz="1320">
+                  <a:solidFill>
+                    <a:srgbClr val="000000">
+                      <a:alpha val="100000"/>
+                    </a:srgbClr>
+                  </a:solidFill>
+                  <a:latin typeface="Helvetica"/>
+                  <a:cs typeface="Helvetica"/>
+                </a:rPr>
+                <a:t>Nausea/Vomiting/GI (Carboplatin)</a:t>
+              </a:r>
+            </a:p>
+          </p:txBody>
+        </p:sp>
+        <p:sp>
+          <p:nvSpPr>
+            <p:cNvPr id="39" name="pl39"/>
+            <p:cNvSpPr/>
+            <p:nvPr/>
+          </p:nvSpPr>
+          <p:spPr>
+            <a:xfrm>
+              <a:off x="887106" y="5444019"/>
+              <a:ext cx="7660515" cy="0"/>
+            </a:xfrm>
+            <a:custGeom>
+              <a:avLst/>
+              <a:pathLst>
+                <a:path w="7660515" h="0">
+                  <a:moveTo>
+                    <a:pt x="0" y="0"/>
+                  </a:moveTo>
+                  <a:lnTo>
+                    <a:pt x="7660515" y="0"/>
+                  </a:lnTo>
+                  <a:lnTo>
+                    <a:pt x="7660515" y="0"/>
+                  </a:lnTo>
+                </a:path>
+              </a:pathLst>
+            </a:custGeom>
+            <a:ln w="6775" cap="flat">
+              <a:solidFill>
+                <a:srgbClr val="EBEBEB">
+                  <a:alpha val="100000"/>
+                </a:srgbClr>
+              </a:solidFill>
+              <a:prstDash val="solid"/>
+              <a:round/>
+            </a:ln>
+          </p:spPr>
+          <p:txBody>
+            <a:bodyPr/>
+            <a:lstStyle/>
+            <a:p/>
+          </p:txBody>
+        </p:sp>
+        <p:sp>
+          <p:nvSpPr>
+            <p:cNvPr id="40" name="pl40"/>
+            <p:cNvSpPr/>
+            <p:nvPr/>
+          </p:nvSpPr>
+          <p:spPr>
+            <a:xfrm>
+              <a:off x="887106" y="5144686"/>
+              <a:ext cx="7660515" cy="0"/>
+            </a:xfrm>
+            <a:custGeom>
+              <a:avLst/>
+              <a:pathLst>
+                <a:path w="7660515" h="0">
+                  <a:moveTo>
+                    <a:pt x="0" y="0"/>
+                  </a:moveTo>
+                  <a:lnTo>
+                    <a:pt x="7660515" y="0"/>
+                  </a:lnTo>
+                  <a:lnTo>
+                    <a:pt x="7660515" y="0"/>
+                  </a:lnTo>
+                </a:path>
+              </a:pathLst>
+            </a:custGeom>
+            <a:ln w="6775" cap="flat">
+              <a:solidFill>
+                <a:srgbClr val="EBEBEB">
+                  <a:alpha val="100000"/>
+                </a:srgbClr>
+              </a:solidFill>
+              <a:prstDash val="solid"/>
+              <a:round/>
+            </a:ln>
+          </p:spPr>
+          <p:txBody>
+            <a:bodyPr/>
+            <a:lstStyle/>
+            <a:p/>
+          </p:txBody>
+        </p:sp>
+        <p:sp>
+          <p:nvSpPr>
+            <p:cNvPr id="41" name="pl41"/>
+            <p:cNvSpPr/>
+            <p:nvPr/>
+          </p:nvSpPr>
+          <p:spPr>
+            <a:xfrm>
+              <a:off x="887106" y="4845352"/>
+              <a:ext cx="7660515" cy="0"/>
+            </a:xfrm>
+            <a:custGeom>
+              <a:avLst/>
+              <a:pathLst>
+                <a:path w="7660515" h="0">
+                  <a:moveTo>
+                    <a:pt x="0" y="0"/>
+                  </a:moveTo>
+                  <a:lnTo>
+                    <a:pt x="7660515" y="0"/>
+                  </a:lnTo>
+                  <a:lnTo>
+                    <a:pt x="7660515" y="0"/>
+                  </a:lnTo>
+                </a:path>
+              </a:pathLst>
+            </a:custGeom>
+            <a:ln w="6775" cap="flat">
+              <a:solidFill>
+                <a:srgbClr val="EBEBEB">
+                  <a:alpha val="100000"/>
+                </a:srgbClr>
+              </a:solidFill>
+              <a:prstDash val="solid"/>
+              <a:round/>
+            </a:ln>
+          </p:spPr>
+          <p:txBody>
+            <a:bodyPr/>
+            <a:lstStyle/>
+            <a:p/>
+          </p:txBody>
+        </p:sp>
+        <p:sp>
+          <p:nvSpPr>
+            <p:cNvPr id="42" name="pl42"/>
+            <p:cNvSpPr/>
+            <p:nvPr/>
+          </p:nvSpPr>
+          <p:spPr>
+            <a:xfrm>
+              <a:off x="887106" y="4546018"/>
+              <a:ext cx="7660515" cy="0"/>
+            </a:xfrm>
+            <a:custGeom>
+              <a:avLst/>
+              <a:pathLst>
+                <a:path w="7660515" h="0">
+                  <a:moveTo>
+                    <a:pt x="0" y="0"/>
+                  </a:moveTo>
+                  <a:lnTo>
+                    <a:pt x="7660515" y="0"/>
+                  </a:lnTo>
+                  <a:lnTo>
+                    <a:pt x="7660515" y="0"/>
+                  </a:lnTo>
+                </a:path>
+              </a:pathLst>
+            </a:custGeom>
+            <a:ln w="6775" cap="flat">
+              <a:solidFill>
+                <a:srgbClr val="EBEBEB">
+                  <a:alpha val="100000"/>
+                </a:srgbClr>
+              </a:solidFill>
+              <a:prstDash val="solid"/>
+              <a:round/>
+            </a:ln>
+          </p:spPr>
+          <p:txBody>
+            <a:bodyPr/>
+            <a:lstStyle/>
+            <a:p/>
+          </p:txBody>
+        </p:sp>
+        <p:sp>
+          <p:nvSpPr>
+            <p:cNvPr id="43" name="pl43"/>
+            <p:cNvSpPr/>
+            <p:nvPr/>
+          </p:nvSpPr>
+          <p:spPr>
+            <a:xfrm>
+              <a:off x="914987" y="4336484"/>
+              <a:ext cx="0" cy="1317069"/>
+            </a:xfrm>
+            <a:custGeom>
+              <a:avLst/>
+              <a:pathLst>
+                <a:path w="0" h="1317069">
+                  <a:moveTo>
+                    <a:pt x="0" y="1317069"/>
+                  </a:moveTo>
+                  <a:lnTo>
+                    <a:pt x="0" y="0"/>
+                  </a:lnTo>
+                  <a:lnTo>
+                    <a:pt x="0" y="0"/>
+                  </a:lnTo>
+                </a:path>
+              </a:pathLst>
+            </a:custGeom>
+            <a:ln w="6775" cap="flat">
+              <a:solidFill>
+                <a:srgbClr val="EBEBEB">
+                  <a:alpha val="100000"/>
+                </a:srgbClr>
+              </a:solidFill>
+              <a:prstDash val="solid"/>
+              <a:round/>
+            </a:ln>
+          </p:spPr>
+          <p:txBody>
+            <a:bodyPr/>
+            <a:lstStyle/>
+            <a:p/>
+          </p:txBody>
+        </p:sp>
+        <p:sp>
+          <p:nvSpPr>
+            <p:cNvPr id="44" name="pl44"/>
+            <p:cNvSpPr/>
+            <p:nvPr/>
+          </p:nvSpPr>
+          <p:spPr>
+            <a:xfrm>
+              <a:off x="1728588" y="4336484"/>
+              <a:ext cx="0" cy="1317069"/>
+            </a:xfrm>
+            <a:custGeom>
+              <a:avLst/>
+              <a:pathLst>
+                <a:path w="0" h="1317069">
+                  <a:moveTo>
+                    <a:pt x="0" y="1317069"/>
+                  </a:moveTo>
+                  <a:lnTo>
+                    <a:pt x="0" y="0"/>
+                  </a:lnTo>
+                  <a:lnTo>
+                    <a:pt x="0" y="0"/>
+                  </a:lnTo>
+                </a:path>
+              </a:pathLst>
+            </a:custGeom>
+            <a:ln w="6775" cap="flat">
+              <a:solidFill>
+                <a:srgbClr val="EBEBEB">
+                  <a:alpha val="100000"/>
+                </a:srgbClr>
+              </a:solidFill>
+              <a:prstDash val="solid"/>
+              <a:round/>
+            </a:ln>
+          </p:spPr>
+          <p:txBody>
+            <a:bodyPr/>
+            <a:lstStyle/>
+            <a:p/>
+          </p:txBody>
+        </p:sp>
+        <p:sp>
+          <p:nvSpPr>
+            <p:cNvPr id="45" name="pl45"/>
+            <p:cNvSpPr/>
+            <p:nvPr/>
+          </p:nvSpPr>
+          <p:spPr>
+            <a:xfrm>
+              <a:off x="2542190" y="4336484"/>
+              <a:ext cx="0" cy="1317069"/>
+            </a:xfrm>
+            <a:custGeom>
+              <a:avLst/>
+              <a:pathLst>
+                <a:path w="0" h="1317069">
+                  <a:moveTo>
+                    <a:pt x="0" y="1317069"/>
+                  </a:moveTo>
+                  <a:lnTo>
+                    <a:pt x="0" y="0"/>
+                  </a:lnTo>
+                  <a:lnTo>
+                    <a:pt x="0" y="0"/>
+                  </a:lnTo>
+                </a:path>
+              </a:pathLst>
+            </a:custGeom>
+            <a:ln w="6775" cap="flat">
+              <a:solidFill>
+                <a:srgbClr val="EBEBEB">
+                  <a:alpha val="100000"/>
+                </a:srgbClr>
+              </a:solidFill>
+              <a:prstDash val="solid"/>
+              <a:round/>
+            </a:ln>
+          </p:spPr>
+          <p:txBody>
+            <a:bodyPr/>
+            <a:lstStyle/>
+            <a:p/>
+          </p:txBody>
+        </p:sp>
+        <p:sp>
+          <p:nvSpPr>
+            <p:cNvPr id="46" name="pl46"/>
+            <p:cNvSpPr/>
+            <p:nvPr/>
+          </p:nvSpPr>
+          <p:spPr>
+            <a:xfrm>
+              <a:off x="3355791" y="4336484"/>
+              <a:ext cx="0" cy="1317069"/>
+            </a:xfrm>
+            <a:custGeom>
+              <a:avLst/>
+              <a:pathLst>
+                <a:path w="0" h="1317069">
+                  <a:moveTo>
+                    <a:pt x="0" y="1317069"/>
+                  </a:moveTo>
+                  <a:lnTo>
+                    <a:pt x="0" y="0"/>
+                  </a:lnTo>
+                  <a:lnTo>
+                    <a:pt x="0" y="0"/>
+                  </a:lnTo>
+                </a:path>
+              </a:pathLst>
+            </a:custGeom>
+            <a:ln w="6775" cap="flat">
+              <a:solidFill>
+                <a:srgbClr val="EBEBEB">
+                  <a:alpha val="100000"/>
+                </a:srgbClr>
+              </a:solidFill>
+              <a:prstDash val="solid"/>
+              <a:round/>
+            </a:ln>
+          </p:spPr>
+          <p:txBody>
+            <a:bodyPr/>
+            <a:lstStyle/>
+            <a:p/>
+          </p:txBody>
+        </p:sp>
+        <p:sp>
+          <p:nvSpPr>
+            <p:cNvPr id="47" name="pl47"/>
+            <p:cNvSpPr/>
+            <p:nvPr/>
+          </p:nvSpPr>
+          <p:spPr>
+            <a:xfrm>
+              <a:off x="4169393" y="4336484"/>
+              <a:ext cx="0" cy="1317069"/>
+            </a:xfrm>
+            <a:custGeom>
+              <a:avLst/>
+              <a:pathLst>
+                <a:path w="0" h="1317069">
+                  <a:moveTo>
+                    <a:pt x="0" y="1317069"/>
+                  </a:moveTo>
+                  <a:lnTo>
+                    <a:pt x="0" y="0"/>
+                  </a:lnTo>
+                  <a:lnTo>
+                    <a:pt x="0" y="0"/>
+                  </a:lnTo>
+                </a:path>
+              </a:pathLst>
+            </a:custGeom>
+            <a:ln w="6775" cap="flat">
+              <a:solidFill>
+                <a:srgbClr val="EBEBEB">
+                  <a:alpha val="100000"/>
+                </a:srgbClr>
+              </a:solidFill>
+              <a:prstDash val="solid"/>
+              <a:round/>
+            </a:ln>
+          </p:spPr>
+          <p:txBody>
+            <a:bodyPr/>
+            <a:lstStyle/>
+            <a:p/>
+          </p:txBody>
+        </p:sp>
+        <p:sp>
+          <p:nvSpPr>
+            <p:cNvPr id="48" name="pl48"/>
+            <p:cNvSpPr/>
+            <p:nvPr/>
+          </p:nvSpPr>
+          <p:spPr>
+            <a:xfrm>
+              <a:off x="4982994" y="4336484"/>
+              <a:ext cx="0" cy="1317069"/>
+            </a:xfrm>
+            <a:custGeom>
+              <a:avLst/>
+              <a:pathLst>
+                <a:path w="0" h="1317069">
+                  <a:moveTo>
+                    <a:pt x="0" y="1317069"/>
+                  </a:moveTo>
+                  <a:lnTo>
+                    <a:pt x="0" y="0"/>
+                  </a:lnTo>
+                  <a:lnTo>
+                    <a:pt x="0" y="0"/>
+                  </a:lnTo>
+                </a:path>
+              </a:pathLst>
+            </a:custGeom>
+            <a:ln w="6775" cap="flat">
+              <a:solidFill>
+                <a:srgbClr val="EBEBEB">
+                  <a:alpha val="100000"/>
+                </a:srgbClr>
+              </a:solidFill>
+              <a:prstDash val="solid"/>
+              <a:round/>
+            </a:ln>
+          </p:spPr>
+          <p:txBody>
+            <a:bodyPr/>
+            <a:lstStyle/>
+            <a:p/>
+          </p:txBody>
+        </p:sp>
+        <p:sp>
+          <p:nvSpPr>
+            <p:cNvPr id="49" name="pl49"/>
+            <p:cNvSpPr/>
+            <p:nvPr/>
+          </p:nvSpPr>
+          <p:spPr>
+            <a:xfrm>
+              <a:off x="5796595" y="4336484"/>
+              <a:ext cx="0" cy="1317069"/>
+            </a:xfrm>
+            <a:custGeom>
+              <a:avLst/>
+              <a:pathLst>
+                <a:path w="0" h="1317069">
+                  <a:moveTo>
+                    <a:pt x="0" y="1317069"/>
+                  </a:moveTo>
+                  <a:lnTo>
+                    <a:pt x="0" y="0"/>
+                  </a:lnTo>
+                  <a:lnTo>
+                    <a:pt x="0" y="0"/>
+                  </a:lnTo>
+                </a:path>
+              </a:pathLst>
+            </a:custGeom>
+            <a:ln w="6775" cap="flat">
+              <a:solidFill>
+                <a:srgbClr val="EBEBEB">
+                  <a:alpha val="100000"/>
+                </a:srgbClr>
+              </a:solidFill>
+              <a:prstDash val="solid"/>
+              <a:round/>
+            </a:ln>
+          </p:spPr>
+          <p:txBody>
+            <a:bodyPr/>
+            <a:lstStyle/>
+            <a:p/>
+          </p:txBody>
+        </p:sp>
+        <p:sp>
+          <p:nvSpPr>
+            <p:cNvPr id="50" name="pl50"/>
+            <p:cNvSpPr/>
+            <p:nvPr/>
+          </p:nvSpPr>
+          <p:spPr>
+            <a:xfrm>
+              <a:off x="6610197" y="4336484"/>
+              <a:ext cx="0" cy="1317069"/>
+            </a:xfrm>
+            <a:custGeom>
+              <a:avLst/>
+              <a:pathLst>
+                <a:path w="0" h="1317069">
+                  <a:moveTo>
+                    <a:pt x="0" y="1317069"/>
+                  </a:moveTo>
+                  <a:lnTo>
+                    <a:pt x="0" y="0"/>
+                  </a:lnTo>
+                  <a:lnTo>
+                    <a:pt x="0" y="0"/>
+                  </a:lnTo>
+                </a:path>
+              </a:pathLst>
+            </a:custGeom>
+            <a:ln w="6775" cap="flat">
+              <a:solidFill>
+                <a:srgbClr val="EBEBEB">
+                  <a:alpha val="100000"/>
+                </a:srgbClr>
+              </a:solidFill>
+              <a:prstDash val="solid"/>
+              <a:round/>
+            </a:ln>
+          </p:spPr>
+          <p:txBody>
+            <a:bodyPr/>
+            <a:lstStyle/>
+            <a:p/>
+          </p:txBody>
+        </p:sp>
+        <p:sp>
+          <p:nvSpPr>
+            <p:cNvPr id="51" name="pl51"/>
+            <p:cNvSpPr/>
+            <p:nvPr/>
+          </p:nvSpPr>
+          <p:spPr>
+            <a:xfrm>
+              <a:off x="7423798" y="4336484"/>
+              <a:ext cx="0" cy="1317069"/>
+            </a:xfrm>
+            <a:custGeom>
+              <a:avLst/>
+              <a:pathLst>
+                <a:path w="0" h="1317069">
+                  <a:moveTo>
+                    <a:pt x="0" y="1317069"/>
+                  </a:moveTo>
+                  <a:lnTo>
+                    <a:pt x="0" y="0"/>
+                  </a:lnTo>
+                  <a:lnTo>
+                    <a:pt x="0" y="0"/>
+                  </a:lnTo>
+                </a:path>
+              </a:pathLst>
+            </a:custGeom>
+            <a:ln w="6775" cap="flat">
+              <a:solidFill>
+                <a:srgbClr val="EBEBEB">
+                  <a:alpha val="100000"/>
+                </a:srgbClr>
+              </a:solidFill>
+              <a:prstDash val="solid"/>
+              <a:round/>
+            </a:ln>
+          </p:spPr>
+          <p:txBody>
+            <a:bodyPr/>
+            <a:lstStyle/>
+            <a:p/>
+          </p:txBody>
+        </p:sp>
+        <p:sp>
+          <p:nvSpPr>
+            <p:cNvPr id="52" name="pl52"/>
+            <p:cNvSpPr/>
+            <p:nvPr/>
+          </p:nvSpPr>
+          <p:spPr>
+            <a:xfrm>
+              <a:off x="8237399" y="4336484"/>
+              <a:ext cx="0" cy="1317069"/>
+            </a:xfrm>
+            <a:custGeom>
+              <a:avLst/>
+              <a:pathLst>
+                <a:path w="0" h="1317069">
+                  <a:moveTo>
+                    <a:pt x="0" y="1317069"/>
+                  </a:moveTo>
+                  <a:lnTo>
+                    <a:pt x="0" y="0"/>
+                  </a:lnTo>
+                  <a:lnTo>
+                    <a:pt x="0" y="0"/>
+                  </a:lnTo>
+                </a:path>
+              </a:pathLst>
+            </a:custGeom>
+            <a:ln w="6775" cap="flat">
+              <a:solidFill>
+                <a:srgbClr val="EBEBEB">
+                  <a:alpha val="100000"/>
+                </a:srgbClr>
+              </a:solidFill>
+              <a:prstDash val="solid"/>
+              <a:round/>
+            </a:ln>
+          </p:spPr>
+          <p:txBody>
+            <a:bodyPr/>
+            <a:lstStyle/>
+            <a:p/>
+          </p:txBody>
+        </p:sp>
+        <p:sp>
+          <p:nvSpPr>
+            <p:cNvPr id="53" name="pl53"/>
+            <p:cNvSpPr/>
+            <p:nvPr/>
+          </p:nvSpPr>
+          <p:spPr>
+            <a:xfrm>
+              <a:off x="887106" y="5593686"/>
+              <a:ext cx="7660515" cy="0"/>
+            </a:xfrm>
+            <a:custGeom>
+              <a:avLst/>
+              <a:pathLst>
+                <a:path w="7660515" h="0">
+                  <a:moveTo>
+                    <a:pt x="0" y="0"/>
+                  </a:moveTo>
+                  <a:lnTo>
+                    <a:pt x="7660515" y="0"/>
+                  </a:lnTo>
+                  <a:lnTo>
+                    <a:pt x="7660515" y="0"/>
+                  </a:lnTo>
+                </a:path>
+              </a:pathLst>
+            </a:custGeom>
+            <a:ln w="13550" cap="flat">
+              <a:solidFill>
+                <a:srgbClr val="EBEBEB">
+                  <a:alpha val="100000"/>
+                </a:srgbClr>
+              </a:solidFill>
+              <a:prstDash val="solid"/>
+              <a:round/>
+            </a:ln>
+          </p:spPr>
+          <p:txBody>
+            <a:bodyPr/>
+            <a:lstStyle/>
+            <a:p/>
+          </p:txBody>
+        </p:sp>
+        <p:sp>
+          <p:nvSpPr>
+            <p:cNvPr id="54" name="pl54"/>
+            <p:cNvSpPr/>
+            <p:nvPr/>
+          </p:nvSpPr>
+          <p:spPr>
+            <a:xfrm>
+              <a:off x="887106" y="5294352"/>
+              <a:ext cx="7660515" cy="0"/>
+            </a:xfrm>
+            <a:custGeom>
+              <a:avLst/>
+              <a:pathLst>
+                <a:path w="7660515" h="0">
+                  <a:moveTo>
+                    <a:pt x="0" y="0"/>
+                  </a:moveTo>
+                  <a:lnTo>
+                    <a:pt x="7660515" y="0"/>
+                  </a:lnTo>
+                  <a:lnTo>
+                    <a:pt x="7660515" y="0"/>
+                  </a:lnTo>
+                </a:path>
+              </a:pathLst>
+            </a:custGeom>
+            <a:ln w="13550" cap="flat">
+              <a:solidFill>
+                <a:srgbClr val="EBEBEB">
+                  <a:alpha val="100000"/>
+                </a:srgbClr>
+              </a:solidFill>
+              <a:prstDash val="solid"/>
+              <a:round/>
+            </a:ln>
+          </p:spPr>
+          <p:txBody>
+            <a:bodyPr/>
+            <a:lstStyle/>
+            <a:p/>
+          </p:txBody>
+        </p:sp>
+        <p:sp>
+          <p:nvSpPr>
+            <p:cNvPr id="55" name="pl55"/>
+            <p:cNvSpPr/>
+            <p:nvPr/>
+          </p:nvSpPr>
+          <p:spPr>
+            <a:xfrm>
+              <a:off x="887106" y="4995019"/>
+              <a:ext cx="7660515" cy="0"/>
+            </a:xfrm>
+            <a:custGeom>
+              <a:avLst/>
+              <a:pathLst>
+                <a:path w="7660515" h="0">
+                  <a:moveTo>
+                    <a:pt x="0" y="0"/>
+                  </a:moveTo>
+                  <a:lnTo>
+                    <a:pt x="7660515" y="0"/>
+                  </a:lnTo>
+                  <a:lnTo>
+                    <a:pt x="7660515" y="0"/>
+                  </a:lnTo>
+                </a:path>
+              </a:pathLst>
+            </a:custGeom>
+            <a:ln w="13550" cap="flat">
+              <a:solidFill>
+                <a:srgbClr val="EBEBEB">
+                  <a:alpha val="100000"/>
+                </a:srgbClr>
+              </a:solidFill>
+              <a:prstDash val="solid"/>
+              <a:round/>
+            </a:ln>
+          </p:spPr>
+          <p:txBody>
+            <a:bodyPr/>
+            <a:lstStyle/>
+            <a:p/>
+          </p:txBody>
+        </p:sp>
+        <p:sp>
+          <p:nvSpPr>
+            <p:cNvPr id="56" name="pl56"/>
+            <p:cNvSpPr/>
+            <p:nvPr/>
+          </p:nvSpPr>
+          <p:spPr>
+            <a:xfrm>
+              <a:off x="887106" y="4695685"/>
+              <a:ext cx="7660515" cy="0"/>
+            </a:xfrm>
+            <a:custGeom>
+              <a:avLst/>
+              <a:pathLst>
+                <a:path w="7660515" h="0">
+                  <a:moveTo>
+                    <a:pt x="0" y="0"/>
+                  </a:moveTo>
+                  <a:lnTo>
+                    <a:pt x="7660515" y="0"/>
+                  </a:lnTo>
+                  <a:lnTo>
+                    <a:pt x="7660515" y="0"/>
+                  </a:lnTo>
+                </a:path>
+              </a:pathLst>
+            </a:custGeom>
+            <a:ln w="13550" cap="flat">
+              <a:solidFill>
+                <a:srgbClr val="EBEBEB">
+                  <a:alpha val="100000"/>
+                </a:srgbClr>
+              </a:solidFill>
+              <a:prstDash val="solid"/>
+              <a:round/>
+            </a:ln>
+          </p:spPr>
+          <p:txBody>
+            <a:bodyPr/>
+            <a:lstStyle/>
+            <a:p/>
+          </p:txBody>
+        </p:sp>
+        <p:sp>
+          <p:nvSpPr>
+            <p:cNvPr id="57" name="pl57"/>
+            <p:cNvSpPr/>
+            <p:nvPr/>
+          </p:nvSpPr>
+          <p:spPr>
+            <a:xfrm>
+              <a:off x="887106" y="4396351"/>
+              <a:ext cx="7660515" cy="0"/>
+            </a:xfrm>
+            <a:custGeom>
+              <a:avLst/>
+              <a:pathLst>
+                <a:path w="7660515" h="0">
+                  <a:moveTo>
+                    <a:pt x="0" y="0"/>
+                  </a:moveTo>
+                  <a:lnTo>
+                    <a:pt x="7660515" y="0"/>
+                  </a:lnTo>
+                  <a:lnTo>
+                    <a:pt x="7660515" y="0"/>
+                  </a:lnTo>
+                </a:path>
+              </a:pathLst>
+            </a:custGeom>
+            <a:ln w="13550" cap="flat">
+              <a:solidFill>
+                <a:srgbClr val="EBEBEB">
+                  <a:alpha val="100000"/>
+                </a:srgbClr>
+              </a:solidFill>
+              <a:prstDash val="solid"/>
+              <a:round/>
+            </a:ln>
+          </p:spPr>
+          <p:txBody>
+            <a:bodyPr/>
+            <a:lstStyle/>
+            <a:p/>
+          </p:txBody>
+        </p:sp>
+        <p:sp>
+          <p:nvSpPr>
+            <p:cNvPr id="58" name="pl58"/>
+            <p:cNvSpPr/>
+            <p:nvPr/>
+          </p:nvSpPr>
+          <p:spPr>
+            <a:xfrm>
+              <a:off x="1321788" y="4336484"/>
+              <a:ext cx="0" cy="1317069"/>
+            </a:xfrm>
+            <a:custGeom>
+              <a:avLst/>
+              <a:pathLst>
+                <a:path w="0" h="1317069">
+                  <a:moveTo>
+                    <a:pt x="0" y="1317069"/>
+                  </a:moveTo>
+                  <a:lnTo>
+                    <a:pt x="0" y="0"/>
+                  </a:lnTo>
+                  <a:lnTo>
+                    <a:pt x="0" y="0"/>
+                  </a:lnTo>
+                </a:path>
+              </a:pathLst>
+            </a:custGeom>
+            <a:ln w="13550" cap="flat">
+              <a:solidFill>
+                <a:srgbClr val="EBEBEB">
+                  <a:alpha val="100000"/>
+                </a:srgbClr>
+              </a:solidFill>
+              <a:prstDash val="solid"/>
+              <a:round/>
+            </a:ln>
+          </p:spPr>
+          <p:txBody>
+            <a:bodyPr/>
+            <a:lstStyle/>
+            <a:p/>
+          </p:txBody>
+        </p:sp>
+        <p:sp>
+          <p:nvSpPr>
+            <p:cNvPr id="59" name="pl59"/>
+            <p:cNvSpPr/>
+            <p:nvPr/>
+          </p:nvSpPr>
+          <p:spPr>
+            <a:xfrm>
+              <a:off x="2135389" y="4336484"/>
+              <a:ext cx="0" cy="1317069"/>
+            </a:xfrm>
+            <a:custGeom>
+              <a:avLst/>
+              <a:pathLst>
+                <a:path w="0" h="1317069">
+                  <a:moveTo>
+                    <a:pt x="0" y="1317069"/>
+                  </a:moveTo>
+                  <a:lnTo>
+                    <a:pt x="0" y="0"/>
+                  </a:lnTo>
+                  <a:lnTo>
+                    <a:pt x="0" y="0"/>
+                  </a:lnTo>
+                </a:path>
+              </a:pathLst>
+            </a:custGeom>
+            <a:ln w="13550" cap="flat">
+              <a:solidFill>
+                <a:srgbClr val="EBEBEB">
+                  <a:alpha val="100000"/>
+                </a:srgbClr>
+              </a:solidFill>
+              <a:prstDash val="solid"/>
+              <a:round/>
+            </a:ln>
+          </p:spPr>
+          <p:txBody>
+            <a:bodyPr/>
+            <a:lstStyle/>
+            <a:p/>
+          </p:txBody>
+        </p:sp>
+        <p:sp>
+          <p:nvSpPr>
+            <p:cNvPr id="60" name="pl60"/>
+            <p:cNvSpPr/>
+            <p:nvPr/>
+          </p:nvSpPr>
+          <p:spPr>
+            <a:xfrm>
+              <a:off x="2948991" y="4336484"/>
+              <a:ext cx="0" cy="1317069"/>
+            </a:xfrm>
+            <a:custGeom>
+              <a:avLst/>
+              <a:pathLst>
+                <a:path w="0" h="1317069">
+                  <a:moveTo>
+                    <a:pt x="0" y="1317069"/>
+                  </a:moveTo>
+                  <a:lnTo>
+                    <a:pt x="0" y="0"/>
+                  </a:lnTo>
+                  <a:lnTo>
+                    <a:pt x="0" y="0"/>
+                  </a:lnTo>
+                </a:path>
+              </a:pathLst>
+            </a:custGeom>
+            <a:ln w="13550" cap="flat">
+              <a:solidFill>
+                <a:srgbClr val="EBEBEB">
+                  <a:alpha val="100000"/>
+                </a:srgbClr>
+              </a:solidFill>
+              <a:prstDash val="solid"/>
+              <a:round/>
+            </a:ln>
+          </p:spPr>
+          <p:txBody>
+            <a:bodyPr/>
+            <a:lstStyle/>
+            <a:p/>
+          </p:txBody>
+        </p:sp>
+        <p:sp>
+          <p:nvSpPr>
+            <p:cNvPr id="61" name="pl61"/>
+            <p:cNvSpPr/>
+            <p:nvPr/>
+          </p:nvSpPr>
+          <p:spPr>
+            <a:xfrm>
+              <a:off x="3762592" y="4336484"/>
+              <a:ext cx="0" cy="1317069"/>
+            </a:xfrm>
+            <a:custGeom>
+              <a:avLst/>
+              <a:pathLst>
+                <a:path w="0" h="1317069">
+                  <a:moveTo>
+                    <a:pt x="0" y="1317069"/>
+                  </a:moveTo>
+                  <a:lnTo>
+                    <a:pt x="0" y="0"/>
+                  </a:lnTo>
+                  <a:lnTo>
+                    <a:pt x="0" y="0"/>
+                  </a:lnTo>
+                </a:path>
+              </a:pathLst>
+            </a:custGeom>
+            <a:ln w="13550" cap="flat">
+              <a:solidFill>
+                <a:srgbClr val="EBEBEB">
+                  <a:alpha val="100000"/>
+                </a:srgbClr>
+              </a:solidFill>
+              <a:prstDash val="solid"/>
+              <a:round/>
+            </a:ln>
+          </p:spPr>
+          <p:txBody>
+            <a:bodyPr/>
+            <a:lstStyle/>
+            <a:p/>
+          </p:txBody>
+        </p:sp>
+        <p:sp>
+          <p:nvSpPr>
+            <p:cNvPr id="62" name="pl62"/>
+            <p:cNvSpPr/>
+            <p:nvPr/>
+          </p:nvSpPr>
+          <p:spPr>
+            <a:xfrm>
+              <a:off x="4576193" y="4336484"/>
+              <a:ext cx="0" cy="1317069"/>
+            </a:xfrm>
+            <a:custGeom>
+              <a:avLst/>
+              <a:pathLst>
+                <a:path w="0" h="1317069">
+                  <a:moveTo>
+                    <a:pt x="0" y="1317069"/>
+                  </a:moveTo>
+                  <a:lnTo>
+                    <a:pt x="0" y="0"/>
+                  </a:lnTo>
+                  <a:lnTo>
+                    <a:pt x="0" y="0"/>
+                  </a:lnTo>
+                </a:path>
+              </a:pathLst>
+            </a:custGeom>
+            <a:ln w="13550" cap="flat">
+              <a:solidFill>
+                <a:srgbClr val="EBEBEB">
+                  <a:alpha val="100000"/>
+                </a:srgbClr>
+              </a:solidFill>
+              <a:prstDash val="solid"/>
+              <a:round/>
+            </a:ln>
+          </p:spPr>
+          <p:txBody>
+            <a:bodyPr/>
+            <a:lstStyle/>
+            <a:p/>
+          </p:txBody>
+        </p:sp>
+        <p:sp>
+          <p:nvSpPr>
+            <p:cNvPr id="63" name="pl63"/>
+            <p:cNvSpPr/>
+            <p:nvPr/>
+          </p:nvSpPr>
+          <p:spPr>
+            <a:xfrm>
+              <a:off x="5389795" y="4336484"/>
+              <a:ext cx="0" cy="1317069"/>
+            </a:xfrm>
+            <a:custGeom>
+              <a:avLst/>
+              <a:pathLst>
+                <a:path w="0" h="1317069">
+                  <a:moveTo>
+                    <a:pt x="0" y="1317069"/>
+                  </a:moveTo>
+                  <a:lnTo>
+                    <a:pt x="0" y="0"/>
+                  </a:lnTo>
+                  <a:lnTo>
+                    <a:pt x="0" y="0"/>
+                  </a:lnTo>
+                </a:path>
+              </a:pathLst>
+            </a:custGeom>
+            <a:ln w="13550" cap="flat">
+              <a:solidFill>
+                <a:srgbClr val="EBEBEB">
+                  <a:alpha val="100000"/>
+                </a:srgbClr>
+              </a:solidFill>
+              <a:prstDash val="solid"/>
+              <a:round/>
+            </a:ln>
+          </p:spPr>
+          <p:txBody>
+            <a:bodyPr/>
+            <a:lstStyle/>
+            <a:p/>
+          </p:txBody>
+        </p:sp>
+        <p:sp>
+          <p:nvSpPr>
+            <p:cNvPr id="64" name="pl64"/>
+            <p:cNvSpPr/>
+            <p:nvPr/>
+          </p:nvSpPr>
+          <p:spPr>
+            <a:xfrm>
+              <a:off x="6203396" y="4336484"/>
+              <a:ext cx="0" cy="1317069"/>
+            </a:xfrm>
+            <a:custGeom>
+              <a:avLst/>
+              <a:pathLst>
+                <a:path w="0" h="1317069">
+                  <a:moveTo>
+                    <a:pt x="0" y="1317069"/>
+                  </a:moveTo>
+                  <a:lnTo>
+                    <a:pt x="0" y="0"/>
+                  </a:lnTo>
+                  <a:lnTo>
+                    <a:pt x="0" y="0"/>
+                  </a:lnTo>
+                </a:path>
+              </a:pathLst>
+            </a:custGeom>
+            <a:ln w="13550" cap="flat">
+              <a:solidFill>
+                <a:srgbClr val="EBEBEB">
+                  <a:alpha val="100000"/>
+                </a:srgbClr>
+              </a:solidFill>
+              <a:prstDash val="solid"/>
+              <a:round/>
+            </a:ln>
+          </p:spPr>
+          <p:txBody>
+            <a:bodyPr/>
+            <a:lstStyle/>
+            <a:p/>
+          </p:txBody>
+        </p:sp>
+        <p:sp>
+          <p:nvSpPr>
+            <p:cNvPr id="65" name="pl65"/>
+            <p:cNvSpPr/>
+            <p:nvPr/>
+          </p:nvSpPr>
+          <p:spPr>
+            <a:xfrm>
+              <a:off x="7016997" y="4336484"/>
+              <a:ext cx="0" cy="1317069"/>
+            </a:xfrm>
+            <a:custGeom>
+              <a:avLst/>
+              <a:pathLst>
+                <a:path w="0" h="1317069">
+                  <a:moveTo>
+                    <a:pt x="0" y="1317069"/>
+                  </a:moveTo>
+                  <a:lnTo>
+                    <a:pt x="0" y="0"/>
+                  </a:lnTo>
+                  <a:lnTo>
+                    <a:pt x="0" y="0"/>
+                  </a:lnTo>
+                </a:path>
+              </a:pathLst>
+            </a:custGeom>
+            <a:ln w="13550" cap="flat">
+              <a:solidFill>
+                <a:srgbClr val="EBEBEB">
+                  <a:alpha val="100000"/>
+                </a:srgbClr>
+              </a:solidFill>
+              <a:prstDash val="solid"/>
+              <a:round/>
+            </a:ln>
+          </p:spPr>
+          <p:txBody>
+            <a:bodyPr/>
+            <a:lstStyle/>
+            <a:p/>
+          </p:txBody>
+        </p:sp>
+        <p:sp>
+          <p:nvSpPr>
+            <p:cNvPr id="66" name="pl66"/>
+            <p:cNvSpPr/>
+            <p:nvPr/>
+          </p:nvSpPr>
+          <p:spPr>
+            <a:xfrm>
+              <a:off x="7830599" y="4336484"/>
+              <a:ext cx="0" cy="1317069"/>
+            </a:xfrm>
+            <a:custGeom>
+              <a:avLst/>
+              <a:pathLst>
+                <a:path w="0" h="1317069">
+                  <a:moveTo>
+                    <a:pt x="0" y="1317069"/>
+                  </a:moveTo>
+                  <a:lnTo>
+                    <a:pt x="0" y="0"/>
+                  </a:lnTo>
+                  <a:lnTo>
+                    <a:pt x="0" y="0"/>
+                  </a:lnTo>
+                </a:path>
+              </a:pathLst>
+            </a:custGeom>
+            <a:ln w="13550" cap="flat">
+              <a:solidFill>
+                <a:srgbClr val="EBEBEB">
+                  <a:alpha val="100000"/>
+                </a:srgbClr>
+              </a:solidFill>
+              <a:prstDash val="solid"/>
+              <a:round/>
+            </a:ln>
+          </p:spPr>
+          <p:txBody>
+            <a:bodyPr/>
+            <a:lstStyle/>
+            <a:p/>
+          </p:txBody>
+        </p:sp>
+        <p:sp>
+          <p:nvSpPr>
+            <p:cNvPr id="67" name="pg67"/>
+            <p:cNvSpPr/>
+            <p:nvPr/>
+          </p:nvSpPr>
+          <p:spPr>
+            <a:xfrm>
+              <a:off x="1235312" y="4336484"/>
+              <a:ext cx="6964104" cy="1248183"/>
+            </a:xfrm>
+            <a:custGeom>
+              <a:avLst/>
+              <a:pathLst>
+                <a:path w="6964104" h="1248183">
+                  <a:moveTo>
+                    <a:pt x="1792190" y="0"/>
+                  </a:moveTo>
+                  <a:lnTo>
+                    <a:pt x="1828956" y="44037"/>
+                  </a:lnTo>
+                  <a:lnTo>
+                    <a:pt x="1899301" y="122822"/>
+                  </a:lnTo>
+                  <a:lnTo>
+                    <a:pt x="1969645" y="196490"/>
+                  </a:lnTo>
+                  <a:lnTo>
+                    <a:pt x="2039990" y="265374"/>
+                  </a:lnTo>
+                  <a:lnTo>
+                    <a:pt x="2110334" y="329785"/>
+                  </a:lnTo>
+                  <a:lnTo>
+                    <a:pt x="2180679" y="390013"/>
+                  </a:lnTo>
+                  <a:lnTo>
+                    <a:pt x="2251023" y="446330"/>
+                  </a:lnTo>
+                  <a:lnTo>
+                    <a:pt x="2321368" y="498989"/>
+                  </a:lnTo>
+                  <a:lnTo>
+                    <a:pt x="2391712" y="548228"/>
+                  </a:lnTo>
+                  <a:lnTo>
+                    <a:pt x="2462057" y="594270"/>
+                  </a:lnTo>
+                  <a:lnTo>
+                    <a:pt x="2532401" y="637322"/>
+                  </a:lnTo>
+                  <a:lnTo>
+                    <a:pt x="2602746" y="677578"/>
+                  </a:lnTo>
+                  <a:lnTo>
+                    <a:pt x="2673090" y="715220"/>
+                  </a:lnTo>
+                  <a:lnTo>
+                    <a:pt x="2743435" y="750417"/>
+                  </a:lnTo>
+                  <a:lnTo>
+                    <a:pt x="2813779" y="783328"/>
+                  </a:lnTo>
+                  <a:lnTo>
+                    <a:pt x="2884124" y="814102"/>
+                  </a:lnTo>
+                  <a:lnTo>
+                    <a:pt x="2954468" y="842878"/>
+                  </a:lnTo>
+                  <a:lnTo>
+                    <a:pt x="3024813" y="869785"/>
+                  </a:lnTo>
+                  <a:lnTo>
+                    <a:pt x="3095157" y="894944"/>
+                  </a:lnTo>
+                  <a:lnTo>
+                    <a:pt x="3165502" y="918470"/>
+                  </a:lnTo>
+                  <a:lnTo>
+                    <a:pt x="3235846" y="940468"/>
+                  </a:lnTo>
+                  <a:lnTo>
+                    <a:pt x="3306191" y="958334"/>
+                  </a:lnTo>
+                  <a:lnTo>
+                    <a:pt x="3376535" y="961259"/>
+                  </a:lnTo>
+                  <a:lnTo>
+                    <a:pt x="3446880" y="964155"/>
+                  </a:lnTo>
+                  <a:lnTo>
+                    <a:pt x="3517224" y="967023"/>
+                  </a:lnTo>
+                  <a:lnTo>
+                    <a:pt x="3587569" y="969863"/>
+                  </a:lnTo>
+                  <a:lnTo>
+                    <a:pt x="3657913" y="972675"/>
+                  </a:lnTo>
+                  <a:lnTo>
+                    <a:pt x="3728257" y="975459"/>
+                  </a:lnTo>
+                  <a:lnTo>
+                    <a:pt x="3798602" y="978217"/>
+                  </a:lnTo>
+                  <a:lnTo>
+                    <a:pt x="3868946" y="980947"/>
+                  </a:lnTo>
+                  <a:lnTo>
+                    <a:pt x="3939291" y="983650"/>
+                  </a:lnTo>
+                  <a:lnTo>
+                    <a:pt x="4009635" y="986328"/>
+                  </a:lnTo>
+                  <a:lnTo>
+                    <a:pt x="4079980" y="988978"/>
+                  </a:lnTo>
+                  <a:lnTo>
+                    <a:pt x="4150324" y="991603"/>
+                  </a:lnTo>
+                  <a:lnTo>
+                    <a:pt x="4220669" y="994203"/>
+                  </a:lnTo>
+                  <a:lnTo>
+                    <a:pt x="4291013" y="996776"/>
+                  </a:lnTo>
+                  <a:lnTo>
+                    <a:pt x="4361358" y="999325"/>
+                  </a:lnTo>
+                  <a:lnTo>
+                    <a:pt x="4431702" y="1001849"/>
+                  </a:lnTo>
+                  <a:lnTo>
+                    <a:pt x="4502047" y="1004348"/>
+                  </a:lnTo>
+                  <a:lnTo>
+                    <a:pt x="4572391" y="1006822"/>
+                  </a:lnTo>
+                  <a:lnTo>
+                    <a:pt x="4642736" y="1009273"/>
+                  </a:lnTo>
+                  <a:lnTo>
+                    <a:pt x="4713080" y="1011699"/>
+                  </a:lnTo>
+                  <a:lnTo>
+                    <a:pt x="4783425" y="1014102"/>
+                  </a:lnTo>
+                  <a:lnTo>
+                    <a:pt x="4853769" y="1016481"/>
+                  </a:lnTo>
+                  <a:lnTo>
+                    <a:pt x="4924114" y="1018836"/>
+                  </a:lnTo>
+                  <a:lnTo>
+                    <a:pt x="4994458" y="1021169"/>
+                  </a:lnTo>
+                  <a:lnTo>
+                    <a:pt x="5064803" y="1023479"/>
+                  </a:lnTo>
+                  <a:lnTo>
+                    <a:pt x="5135147" y="1025766"/>
+                  </a:lnTo>
+                  <a:lnTo>
+                    <a:pt x="5205492" y="1028031"/>
+                  </a:lnTo>
+                  <a:lnTo>
+                    <a:pt x="5275836" y="1030274"/>
+                  </a:lnTo>
+                  <a:lnTo>
+                    <a:pt x="5346181" y="1032495"/>
+                  </a:lnTo>
+                  <a:lnTo>
+                    <a:pt x="5416525" y="1034694"/>
+                  </a:lnTo>
+                  <a:lnTo>
+                    <a:pt x="5486870" y="1036871"/>
+                  </a:lnTo>
+                  <a:lnTo>
+                    <a:pt x="5557214" y="1039028"/>
+                  </a:lnTo>
+                  <a:lnTo>
+                    <a:pt x="5627559" y="1041163"/>
+                  </a:lnTo>
+                  <a:lnTo>
+                    <a:pt x="5697903" y="1043277"/>
+                  </a:lnTo>
+                  <a:lnTo>
+                    <a:pt x="5768248" y="1045371"/>
+                  </a:lnTo>
+                  <a:lnTo>
+                    <a:pt x="5838592" y="1047444"/>
+                  </a:lnTo>
+                  <a:lnTo>
+                    <a:pt x="5908937" y="1049496"/>
+                  </a:lnTo>
+                  <a:lnTo>
+                    <a:pt x="5979281" y="1051529"/>
+                  </a:lnTo>
+                  <a:lnTo>
+                    <a:pt x="6049626" y="1053542"/>
+                  </a:lnTo>
+                  <a:lnTo>
+                    <a:pt x="6119970" y="1055535"/>
+                  </a:lnTo>
+                  <a:lnTo>
+                    <a:pt x="6190315" y="1057509"/>
+                  </a:lnTo>
+                  <a:lnTo>
+                    <a:pt x="6260659" y="1059463"/>
+                  </a:lnTo>
+                  <a:lnTo>
+                    <a:pt x="6331004" y="1061398"/>
+                  </a:lnTo>
+                  <a:lnTo>
+                    <a:pt x="6401348" y="1063314"/>
+                  </a:lnTo>
+                  <a:lnTo>
+                    <a:pt x="6471693" y="1065212"/>
+                  </a:lnTo>
+                  <a:lnTo>
+                    <a:pt x="6542037" y="1067091"/>
+                  </a:lnTo>
+                  <a:lnTo>
+                    <a:pt x="6612382" y="1068951"/>
+                  </a:lnTo>
+                  <a:lnTo>
+                    <a:pt x="6682726" y="1070793"/>
+                  </a:lnTo>
+                  <a:lnTo>
+                    <a:pt x="6753071" y="1072618"/>
+                  </a:lnTo>
+                  <a:lnTo>
+                    <a:pt x="6823415" y="1074424"/>
+                  </a:lnTo>
+                  <a:lnTo>
+                    <a:pt x="6893760" y="1076213"/>
+                  </a:lnTo>
+                  <a:lnTo>
+                    <a:pt x="6964104" y="1077984"/>
+                  </a:lnTo>
+                  <a:lnTo>
+                    <a:pt x="6964104" y="1248183"/>
+                  </a:lnTo>
+                  <a:lnTo>
+                    <a:pt x="6893760" y="1247557"/>
+                  </a:lnTo>
+                  <a:lnTo>
+                    <a:pt x="6823415" y="1246887"/>
+                  </a:lnTo>
+                  <a:lnTo>
+                    <a:pt x="6753071" y="1246170"/>
+                  </a:lnTo>
+                  <a:lnTo>
+                    <a:pt x="6682726" y="1245404"/>
+                  </a:lnTo>
+                  <a:lnTo>
+                    <a:pt x="6612382" y="1244585"/>
+                  </a:lnTo>
+                  <a:lnTo>
+                    <a:pt x="6542037" y="1243709"/>
+                  </a:lnTo>
+                  <a:lnTo>
+                    <a:pt x="6471693" y="1242771"/>
+                  </a:lnTo>
+                  <a:lnTo>
+                    <a:pt x="6401348" y="1241769"/>
+                  </a:lnTo>
+                  <a:lnTo>
+                    <a:pt x="6331004" y="1240697"/>
+                  </a:lnTo>
+                  <a:lnTo>
+                    <a:pt x="6260659" y="1239551"/>
+                  </a:lnTo>
+                  <a:lnTo>
+                    <a:pt x="6190315" y="1238325"/>
+                  </a:lnTo>
+                  <a:lnTo>
+                    <a:pt x="6119970" y="1237014"/>
+                  </a:lnTo>
+                  <a:lnTo>
+                    <a:pt x="6049626" y="1235612"/>
+                  </a:lnTo>
+                  <a:lnTo>
+                    <a:pt x="5979281" y="1234113"/>
+                  </a:lnTo>
+                  <a:lnTo>
+                    <a:pt x="5908937" y="1232509"/>
+                  </a:lnTo>
+                  <a:lnTo>
+                    <a:pt x="5838592" y="1230794"/>
+                  </a:lnTo>
+                  <a:lnTo>
+                    <a:pt x="5768248" y="1228960"/>
+                  </a:lnTo>
+                  <a:lnTo>
+                    <a:pt x="5697903" y="1226999"/>
+                  </a:lnTo>
+                  <a:lnTo>
+                    <a:pt x="5627559" y="1224901"/>
+                  </a:lnTo>
+                  <a:lnTo>
+                    <a:pt x="5557214" y="1222658"/>
+                  </a:lnTo>
+                  <a:lnTo>
+                    <a:pt x="5486870" y="1220259"/>
+                  </a:lnTo>
+                  <a:lnTo>
+                    <a:pt x="5416525" y="1217693"/>
+                  </a:lnTo>
+                  <a:lnTo>
+                    <a:pt x="5346181" y="1214949"/>
+                  </a:lnTo>
+                  <a:lnTo>
+                    <a:pt x="5275836" y="1212014"/>
+                  </a:lnTo>
+                  <a:lnTo>
+                    <a:pt x="5205492" y="1208876"/>
+                  </a:lnTo>
+                  <a:lnTo>
+                    <a:pt x="5135147" y="1205520"/>
+                  </a:lnTo>
+                  <a:lnTo>
+                    <a:pt x="5064803" y="1201930"/>
+                  </a:lnTo>
+                  <a:lnTo>
+                    <a:pt x="4994458" y="1198091"/>
+                  </a:lnTo>
+                  <a:lnTo>
+                    <a:pt x="4924114" y="1193986"/>
+                  </a:lnTo>
+                  <a:lnTo>
+                    <a:pt x="4853769" y="1189596"/>
+                  </a:lnTo>
+                  <a:lnTo>
+                    <a:pt x="4783425" y="1184900"/>
+                  </a:lnTo>
+                  <a:lnTo>
+                    <a:pt x="4713080" y="1179879"/>
+                  </a:lnTo>
+                  <a:lnTo>
+                    <a:pt x="4642736" y="1174509"/>
+                  </a:lnTo>
+                  <a:lnTo>
+                    <a:pt x="4572391" y="1168765"/>
+                  </a:lnTo>
+                  <a:lnTo>
+                    <a:pt x="4502047" y="1162623"/>
+                  </a:lnTo>
+                  <a:lnTo>
+                    <a:pt x="4431702" y="1156055"/>
+                  </a:lnTo>
+                  <a:lnTo>
+                    <a:pt x="4361358" y="1149030"/>
+                  </a:lnTo>
+                  <a:lnTo>
+                    <a:pt x="4291013" y="1141517"/>
+                  </a:lnTo>
+                  <a:lnTo>
+                    <a:pt x="4220669" y="1133483"/>
+                  </a:lnTo>
+                  <a:lnTo>
+                    <a:pt x="4150324" y="1124890"/>
+                  </a:lnTo>
+                  <a:lnTo>
+                    <a:pt x="4079980" y="1115701"/>
+                  </a:lnTo>
+                  <a:lnTo>
+                    <a:pt x="4009635" y="1105873"/>
+                  </a:lnTo>
+                  <a:lnTo>
+                    <a:pt x="3939291" y="1095363"/>
+                  </a:lnTo>
+                  <a:lnTo>
+                    <a:pt x="3868946" y="1084123"/>
+                  </a:lnTo>
+                  <a:lnTo>
+                    <a:pt x="3798602" y="1072102"/>
+                  </a:lnTo>
+                  <a:lnTo>
+                    <a:pt x="3728257" y="1059247"/>
+                  </a:lnTo>
+                  <a:lnTo>
+                    <a:pt x="3657913" y="1045499"/>
+                  </a:lnTo>
+                  <a:lnTo>
+                    <a:pt x="3587569" y="1030795"/>
+                  </a:lnTo>
+                  <a:lnTo>
+                    <a:pt x="3517224" y="1015071"/>
+                  </a:lnTo>
+                  <a:lnTo>
+                    <a:pt x="3446880" y="998255"/>
+                  </a:lnTo>
+                  <a:lnTo>
+                    <a:pt x="3376535" y="980270"/>
+                  </a:lnTo>
+                  <a:lnTo>
+                    <a:pt x="3306191" y="961037"/>
+                  </a:lnTo>
+                  <a:lnTo>
+                    <a:pt x="3235846" y="955380"/>
+                  </a:lnTo>
+                  <a:lnTo>
+                    <a:pt x="3165502" y="952397"/>
+                  </a:lnTo>
+                  <a:lnTo>
+                    <a:pt x="3095157" y="949385"/>
+                  </a:lnTo>
+                  <a:lnTo>
+                    <a:pt x="3024813" y="946343"/>
+                  </a:lnTo>
+                  <a:lnTo>
+                    <a:pt x="2954468" y="943271"/>
+                  </a:lnTo>
+                  <a:lnTo>
+                    <a:pt x="2884124" y="940168"/>
+                  </a:lnTo>
+                  <a:lnTo>
+                    <a:pt x="2813779" y="937035"/>
+                  </a:lnTo>
+                  <a:lnTo>
+                    <a:pt x="2743435" y="933870"/>
+                  </a:lnTo>
+                  <a:lnTo>
+                    <a:pt x="2673090" y="930675"/>
+                  </a:lnTo>
+                  <a:lnTo>
+                    <a:pt x="2602746" y="927448"/>
+                  </a:lnTo>
+                  <a:lnTo>
+                    <a:pt x="2532401" y="924189"/>
+                  </a:lnTo>
+                  <a:lnTo>
+                    <a:pt x="2462057" y="920898"/>
+                  </a:lnTo>
+                  <a:lnTo>
+                    <a:pt x="2391712" y="917574"/>
+                  </a:lnTo>
+                  <a:lnTo>
+                    <a:pt x="2321368" y="914217"/>
+                  </a:lnTo>
+                  <a:lnTo>
+                    <a:pt x="2251023" y="910828"/>
+                  </a:lnTo>
+                  <a:lnTo>
+                    <a:pt x="2180679" y="907404"/>
+                  </a:lnTo>
+                  <a:lnTo>
+                    <a:pt x="2110334" y="903947"/>
+                  </a:lnTo>
+                  <a:lnTo>
+                    <a:pt x="2039990" y="900456"/>
+                  </a:lnTo>
+                  <a:lnTo>
+                    <a:pt x="1969645" y="896930"/>
+                  </a:lnTo>
+                  <a:lnTo>
+                    <a:pt x="1899301" y="893370"/>
+                  </a:lnTo>
+                  <a:lnTo>
+                    <a:pt x="1828956" y="889774"/>
+                  </a:lnTo>
+                  <a:lnTo>
+                    <a:pt x="1758612" y="886142"/>
+                  </a:lnTo>
+                  <a:lnTo>
+                    <a:pt x="1688267" y="882475"/>
+                  </a:lnTo>
+                  <a:lnTo>
+                    <a:pt x="1617923" y="878772"/>
+                  </a:lnTo>
+                  <a:lnTo>
+                    <a:pt x="1547578" y="875032"/>
+                  </a:lnTo>
+                  <a:lnTo>
+                    <a:pt x="1477234" y="871255"/>
+                  </a:lnTo>
+                  <a:lnTo>
+                    <a:pt x="1406889" y="867440"/>
+                  </a:lnTo>
+                  <a:lnTo>
+                    <a:pt x="1336545" y="863588"/>
+                  </a:lnTo>
+                  <a:lnTo>
+                    <a:pt x="1266200" y="859698"/>
+                  </a:lnTo>
+                  <a:lnTo>
+                    <a:pt x="1195856" y="855769"/>
+                  </a:lnTo>
+                  <a:lnTo>
+                    <a:pt x="1125511" y="851802"/>
+                  </a:lnTo>
+                  <a:lnTo>
+                    <a:pt x="1055167" y="847795"/>
+                  </a:lnTo>
+                  <a:lnTo>
+                    <a:pt x="984822" y="843749"/>
+                  </a:lnTo>
+                  <a:lnTo>
+                    <a:pt x="914478" y="839663"/>
+                  </a:lnTo>
+                  <a:lnTo>
+                    <a:pt x="844133" y="835536"/>
+                  </a:lnTo>
+                  <a:lnTo>
+                    <a:pt x="773789" y="831369"/>
+                  </a:lnTo>
+                  <a:lnTo>
+                    <a:pt x="703444" y="827160"/>
+                  </a:lnTo>
+                  <a:lnTo>
+                    <a:pt x="633100" y="822910"/>
+                  </a:lnTo>
+                  <a:lnTo>
+                    <a:pt x="562755" y="818618"/>
+                  </a:lnTo>
+                  <a:lnTo>
+                    <a:pt x="492411" y="814284"/>
+                  </a:lnTo>
+                  <a:lnTo>
+                    <a:pt x="422066" y="809906"/>
+                  </a:lnTo>
+                  <a:lnTo>
+                    <a:pt x="351722" y="805486"/>
+                  </a:lnTo>
+                  <a:lnTo>
+                    <a:pt x="281377" y="801021"/>
+                  </a:lnTo>
+                  <a:lnTo>
+                    <a:pt x="211033" y="796513"/>
+                  </a:lnTo>
+                  <a:lnTo>
+                    <a:pt x="140688" y="791960"/>
+                  </a:lnTo>
+                  <a:lnTo>
+                    <a:pt x="70344" y="787362"/>
+                  </a:lnTo>
+                  <a:lnTo>
+                    <a:pt x="0" y="782718"/>
+                  </a:lnTo>
+                  <a:close/>
+                </a:path>
+              </a:pathLst>
+            </a:custGeom>
+            <a:solidFill>
+              <a:srgbClr val="FF8C00">
+                <a:alpha val="20000"/>
+              </a:srgbClr>
+            </a:solidFill>
+          </p:spPr>
+          <p:txBody>
+            <a:bodyPr/>
+            <a:lstStyle/>
+            <a:p/>
+          </p:txBody>
+        </p:sp>
+        <p:sp>
+          <p:nvSpPr>
+            <p:cNvPr id="68" name="pl68"/>
+            <p:cNvSpPr/>
+            <p:nvPr/>
+          </p:nvSpPr>
+          <p:spPr>
+            <a:xfrm>
+              <a:off x="3027502" y="4336484"/>
+              <a:ext cx="5171913" cy="1077984"/>
+            </a:xfrm>
+            <a:custGeom>
+              <a:avLst/>
+              <a:pathLst>
+                <a:path w="5171913" h="1077984">
+                  <a:moveTo>
+                    <a:pt x="0" y="0"/>
+                  </a:moveTo>
+                  <a:lnTo>
+                    <a:pt x="36765" y="44037"/>
+                  </a:lnTo>
+                  <a:lnTo>
+                    <a:pt x="107110" y="122822"/>
+                  </a:lnTo>
+                  <a:lnTo>
+                    <a:pt x="177454" y="196490"/>
+                  </a:lnTo>
+                  <a:lnTo>
+                    <a:pt x="247799" y="265374"/>
+                  </a:lnTo>
+                  <a:lnTo>
+                    <a:pt x="318143" y="329785"/>
+                  </a:lnTo>
+                  <a:lnTo>
+                    <a:pt x="388488" y="390013"/>
+                  </a:lnTo>
+                  <a:lnTo>
+                    <a:pt x="458832" y="446330"/>
+                  </a:lnTo>
+                  <a:lnTo>
+                    <a:pt x="529177" y="498989"/>
+                  </a:lnTo>
+                  <a:lnTo>
+                    <a:pt x="599521" y="548228"/>
+                  </a:lnTo>
+                  <a:lnTo>
+                    <a:pt x="669866" y="594270"/>
+                  </a:lnTo>
+                  <a:lnTo>
+                    <a:pt x="740210" y="637322"/>
+                  </a:lnTo>
+                  <a:lnTo>
+                    <a:pt x="810555" y="677578"/>
+                  </a:lnTo>
+                  <a:lnTo>
+                    <a:pt x="880899" y="715220"/>
+                  </a:lnTo>
+                  <a:lnTo>
+                    <a:pt x="951244" y="750417"/>
+                  </a:lnTo>
+                  <a:lnTo>
+                    <a:pt x="1021588" y="783328"/>
+                  </a:lnTo>
+                  <a:lnTo>
+                    <a:pt x="1091933" y="814102"/>
+                  </a:lnTo>
+                  <a:lnTo>
+                    <a:pt x="1162277" y="842878"/>
+                  </a:lnTo>
+                  <a:lnTo>
+                    <a:pt x="1232622" y="869785"/>
+                  </a:lnTo>
+                  <a:lnTo>
+                    <a:pt x="1302966" y="894944"/>
+                  </a:lnTo>
+                  <a:lnTo>
+                    <a:pt x="1373311" y="918470"/>
+                  </a:lnTo>
+                  <a:lnTo>
+                    <a:pt x="1443655" y="940468"/>
+                  </a:lnTo>
+                  <a:lnTo>
+                    <a:pt x="1514000" y="958334"/>
+                  </a:lnTo>
+                  <a:lnTo>
+                    <a:pt x="1584344" y="961259"/>
+                  </a:lnTo>
+                  <a:lnTo>
+                    <a:pt x="1654689" y="964155"/>
+                  </a:lnTo>
+                  <a:lnTo>
+                    <a:pt x="1725033" y="967023"/>
+                  </a:lnTo>
+                  <a:lnTo>
+                    <a:pt x="1795378" y="969863"/>
+                  </a:lnTo>
+                  <a:lnTo>
+                    <a:pt x="1865722" y="972675"/>
+                  </a:lnTo>
+                  <a:lnTo>
+                    <a:pt x="1936067" y="975459"/>
+                  </a:lnTo>
+                  <a:lnTo>
+                    <a:pt x="2006411" y="978217"/>
+                  </a:lnTo>
+                  <a:lnTo>
+                    <a:pt x="2076756" y="980947"/>
+                  </a:lnTo>
+                  <a:lnTo>
+                    <a:pt x="2147100" y="983650"/>
+                  </a:lnTo>
+                  <a:lnTo>
+                    <a:pt x="2217445" y="986328"/>
+                  </a:lnTo>
+                  <a:lnTo>
+                    <a:pt x="2287789" y="988978"/>
+                  </a:lnTo>
+                  <a:lnTo>
+                    <a:pt x="2358134" y="991603"/>
+                  </a:lnTo>
+                  <a:lnTo>
+                    <a:pt x="2428478" y="994203"/>
+                  </a:lnTo>
+                  <a:lnTo>
+                    <a:pt x="2498823" y="996776"/>
+                  </a:lnTo>
+                  <a:lnTo>
+                    <a:pt x="2569167" y="999325"/>
+                  </a:lnTo>
+                  <a:lnTo>
+                    <a:pt x="2639512" y="1001849"/>
+                  </a:lnTo>
+                  <a:lnTo>
+                    <a:pt x="2709856" y="1004348"/>
+                  </a:lnTo>
+                  <a:lnTo>
+                    <a:pt x="2780201" y="1006822"/>
+                  </a:lnTo>
+                  <a:lnTo>
+                    <a:pt x="2850545" y="1009273"/>
+                  </a:lnTo>
+                  <a:lnTo>
+                    <a:pt x="2920890" y="1011699"/>
+                  </a:lnTo>
+                  <a:lnTo>
+                    <a:pt x="2991234" y="1014102"/>
+                  </a:lnTo>
+                  <a:lnTo>
+                    <a:pt x="3061579" y="1016481"/>
+                  </a:lnTo>
+                  <a:lnTo>
+                    <a:pt x="3131923" y="1018836"/>
+                  </a:lnTo>
+                  <a:lnTo>
+                    <a:pt x="3202268" y="1021169"/>
+                  </a:lnTo>
+                  <a:lnTo>
+                    <a:pt x="3272612" y="1023479"/>
+                  </a:lnTo>
+                  <a:lnTo>
+                    <a:pt x="3342957" y="1025766"/>
+                  </a:lnTo>
+                  <a:lnTo>
+                    <a:pt x="3413301" y="1028031"/>
+                  </a:lnTo>
+                  <a:lnTo>
+                    <a:pt x="3483645" y="1030274"/>
+                  </a:lnTo>
+                  <a:lnTo>
+                    <a:pt x="3553990" y="1032495"/>
+                  </a:lnTo>
+                  <a:lnTo>
+                    <a:pt x="3624334" y="1034694"/>
+                  </a:lnTo>
+                  <a:lnTo>
+                    <a:pt x="3694679" y="1036871"/>
+                  </a:lnTo>
+                  <a:lnTo>
+                    <a:pt x="3765023" y="1039028"/>
+                  </a:lnTo>
+                  <a:lnTo>
+                    <a:pt x="3835368" y="1041163"/>
+                  </a:lnTo>
+                  <a:lnTo>
+                    <a:pt x="3905712" y="1043277"/>
+                  </a:lnTo>
+                  <a:lnTo>
+                    <a:pt x="3976057" y="1045371"/>
+                  </a:lnTo>
+                  <a:lnTo>
+                    <a:pt x="4046401" y="1047444"/>
+                  </a:lnTo>
+                  <a:lnTo>
+                    <a:pt x="4116746" y="1049496"/>
+                  </a:lnTo>
+                  <a:lnTo>
+                    <a:pt x="4187090" y="1051529"/>
+                  </a:lnTo>
+                  <a:lnTo>
+                    <a:pt x="4257435" y="1053542"/>
+                  </a:lnTo>
+                  <a:lnTo>
+                    <a:pt x="4327779" y="1055535"/>
+                  </a:lnTo>
+                  <a:lnTo>
+                    <a:pt x="4398124" y="1057509"/>
+                  </a:lnTo>
+                  <a:lnTo>
+                    <a:pt x="4468468" y="1059463"/>
+                  </a:lnTo>
+                  <a:lnTo>
+                    <a:pt x="4538813" y="1061398"/>
+                  </a:lnTo>
+                  <a:lnTo>
+                    <a:pt x="4609157" y="1063314"/>
+                  </a:lnTo>
+                  <a:lnTo>
+                    <a:pt x="4679502" y="1065212"/>
+                  </a:lnTo>
+                  <a:lnTo>
+                    <a:pt x="4749846" y="1067091"/>
+                  </a:lnTo>
+                  <a:lnTo>
+                    <a:pt x="4820191" y="1068951"/>
+                  </a:lnTo>
+                  <a:lnTo>
+                    <a:pt x="4890535" y="1070793"/>
+                  </a:lnTo>
+                  <a:lnTo>
+                    <a:pt x="4960880" y="1072618"/>
+                  </a:lnTo>
+                  <a:lnTo>
+                    <a:pt x="5031224" y="1074424"/>
+                  </a:lnTo>
+                  <a:lnTo>
+                    <a:pt x="5101569" y="1076213"/>
+                  </a:lnTo>
+                  <a:lnTo>
+                    <a:pt x="5171913" y="1077984"/>
+                  </a:lnTo>
+                </a:path>
+              </a:pathLst>
+            </a:custGeom>
+          </p:spPr>
+          <p:txBody>
+            <a:bodyPr/>
+            <a:lstStyle/>
+            <a:p/>
+          </p:txBody>
+        </p:sp>
+        <p:sp>
+          <p:nvSpPr>
+            <p:cNvPr id="69" name="pl69"/>
+            <p:cNvSpPr/>
+            <p:nvPr/>
+          </p:nvSpPr>
+          <p:spPr>
+            <a:xfrm>
+              <a:off x="1235312" y="5119203"/>
+              <a:ext cx="6964104" cy="465464"/>
+            </a:xfrm>
+            <a:custGeom>
+              <a:avLst/>
+              <a:pathLst>
+                <a:path w="6964104" h="465464">
+                  <a:moveTo>
+                    <a:pt x="6964104" y="465464"/>
+                  </a:moveTo>
+                  <a:lnTo>
+                    <a:pt x="6893760" y="464838"/>
+                  </a:lnTo>
+                  <a:lnTo>
+                    <a:pt x="6823415" y="464168"/>
+                  </a:lnTo>
+                  <a:lnTo>
+                    <a:pt x="6753071" y="463452"/>
+                  </a:lnTo>
+                  <a:lnTo>
+                    <a:pt x="6682726" y="462686"/>
+                  </a:lnTo>
+                  <a:lnTo>
+                    <a:pt x="6612382" y="461866"/>
+                  </a:lnTo>
+                  <a:lnTo>
+                    <a:pt x="6542037" y="460990"/>
+                  </a:lnTo>
+                  <a:lnTo>
+                    <a:pt x="6471693" y="460053"/>
+                  </a:lnTo>
+                  <a:lnTo>
+                    <a:pt x="6401348" y="459051"/>
+                  </a:lnTo>
+                  <a:lnTo>
+                    <a:pt x="6331004" y="457979"/>
+                  </a:lnTo>
+                  <a:lnTo>
+                    <a:pt x="6260659" y="456833"/>
+                  </a:lnTo>
+                  <a:lnTo>
+                    <a:pt x="6190315" y="455607"/>
+                  </a:lnTo>
+                  <a:lnTo>
+                    <a:pt x="6119970" y="454296"/>
+                  </a:lnTo>
+                  <a:lnTo>
+                    <a:pt x="6049626" y="452894"/>
+                  </a:lnTo>
+                  <a:lnTo>
+                    <a:pt x="5979281" y="451394"/>
+                  </a:lnTo>
+                  <a:lnTo>
+                    <a:pt x="5908937" y="449791"/>
+                  </a:lnTo>
+                  <a:lnTo>
+                    <a:pt x="5838592" y="448076"/>
+                  </a:lnTo>
+                  <a:lnTo>
+                    <a:pt x="5768248" y="446242"/>
+                  </a:lnTo>
+                  <a:lnTo>
+                    <a:pt x="5697903" y="444280"/>
+                  </a:lnTo>
+                  <a:lnTo>
+                    <a:pt x="5627559" y="442183"/>
+                  </a:lnTo>
+                  <a:lnTo>
+                    <a:pt x="5557214" y="439939"/>
+                  </a:lnTo>
+                  <a:lnTo>
+                    <a:pt x="5486870" y="437540"/>
+                  </a:lnTo>
+                  <a:lnTo>
+                    <a:pt x="5416525" y="434974"/>
+                  </a:lnTo>
+                  <a:lnTo>
+                    <a:pt x="5346181" y="432230"/>
+                  </a:lnTo>
+                  <a:lnTo>
+                    <a:pt x="5275836" y="429296"/>
+                  </a:lnTo>
+                  <a:lnTo>
+                    <a:pt x="5205492" y="426157"/>
+                  </a:lnTo>
+                  <a:lnTo>
+                    <a:pt x="5135147" y="422801"/>
+                  </a:lnTo>
+                  <a:lnTo>
+                    <a:pt x="5064803" y="419212"/>
+                  </a:lnTo>
+                  <a:lnTo>
+                    <a:pt x="4994458" y="415373"/>
+                  </a:lnTo>
+                  <a:lnTo>
+                    <a:pt x="4924114" y="411268"/>
+                  </a:lnTo>
+                  <a:lnTo>
+                    <a:pt x="4853769" y="406877"/>
+                  </a:lnTo>
+                  <a:lnTo>
+                    <a:pt x="4783425" y="402182"/>
+                  </a:lnTo>
+                  <a:lnTo>
+                    <a:pt x="4713080" y="397160"/>
+                  </a:lnTo>
+                  <a:lnTo>
+                    <a:pt x="4642736" y="391790"/>
+                  </a:lnTo>
+                  <a:lnTo>
+                    <a:pt x="4572391" y="386047"/>
+                  </a:lnTo>
+                  <a:lnTo>
+                    <a:pt x="4502047" y="379905"/>
+                  </a:lnTo>
+                  <a:lnTo>
+                    <a:pt x="4431702" y="373336"/>
+                  </a:lnTo>
+                  <a:lnTo>
+                    <a:pt x="4361358" y="366311"/>
+                  </a:lnTo>
+                  <a:lnTo>
+                    <a:pt x="4291013" y="358798"/>
+                  </a:lnTo>
+                  <a:lnTo>
+                    <a:pt x="4220669" y="350764"/>
+                  </a:lnTo>
+                  <a:lnTo>
+                    <a:pt x="4150324" y="342171"/>
+                  </a:lnTo>
+                  <a:lnTo>
+                    <a:pt x="4079980" y="332982"/>
+                  </a:lnTo>
+                  <a:lnTo>
+                    <a:pt x="4009635" y="323155"/>
+                  </a:lnTo>
+                  <a:lnTo>
+                    <a:pt x="3939291" y="312645"/>
+                  </a:lnTo>
+                  <a:lnTo>
+                    <a:pt x="3868946" y="301405"/>
+                  </a:lnTo>
+                  <a:lnTo>
+                    <a:pt x="3798602" y="289384"/>
+                  </a:lnTo>
+                  <a:lnTo>
+                    <a:pt x="3728257" y="276528"/>
+                  </a:lnTo>
+                  <a:lnTo>
+                    <a:pt x="3657913" y="262780"/>
+                  </a:lnTo>
+                  <a:lnTo>
+                    <a:pt x="3587569" y="248077"/>
+                  </a:lnTo>
+                  <a:lnTo>
+                    <a:pt x="3517224" y="232353"/>
+                  </a:lnTo>
+                  <a:lnTo>
+                    <a:pt x="3446880" y="215536"/>
+                  </a:lnTo>
+                  <a:lnTo>
+                    <a:pt x="3376535" y="197552"/>
+                  </a:lnTo>
+                  <a:lnTo>
+                    <a:pt x="3306191" y="178318"/>
+                  </a:lnTo>
+                  <a:lnTo>
+                    <a:pt x="3235846" y="172662"/>
+                  </a:lnTo>
+                  <a:lnTo>
+                    <a:pt x="3165502" y="169679"/>
+                  </a:lnTo>
+                  <a:lnTo>
+                    <a:pt x="3095157" y="166667"/>
+                  </a:lnTo>
+                  <a:lnTo>
+                    <a:pt x="3024813" y="163624"/>
+                  </a:lnTo>
+                  <a:lnTo>
+                    <a:pt x="2954468" y="160552"/>
+                  </a:lnTo>
+                  <a:lnTo>
+                    <a:pt x="2884124" y="157449"/>
+                  </a:lnTo>
+                  <a:lnTo>
+                    <a:pt x="2813779" y="154316"/>
+                  </a:lnTo>
+                  <a:lnTo>
+                    <a:pt x="2743435" y="151152"/>
+                  </a:lnTo>
+                  <a:lnTo>
+                    <a:pt x="2673090" y="147956"/>
+                  </a:lnTo>
+                  <a:lnTo>
+                    <a:pt x="2602746" y="144729"/>
+                  </a:lnTo>
+                  <a:lnTo>
+                    <a:pt x="2532401" y="141470"/>
+                  </a:lnTo>
+                  <a:lnTo>
+                    <a:pt x="2462057" y="138179"/>
+                  </a:lnTo>
+                  <a:lnTo>
+                    <a:pt x="2391712" y="134855"/>
+                  </a:lnTo>
+                  <a:lnTo>
+                    <a:pt x="2321368" y="131499"/>
+                  </a:lnTo>
+                  <a:lnTo>
+                    <a:pt x="2251023" y="128109"/>
+                  </a:lnTo>
+                  <a:lnTo>
+                    <a:pt x="2180679" y="124686"/>
+                  </a:lnTo>
+                  <a:lnTo>
+                    <a:pt x="2110334" y="121229"/>
+                  </a:lnTo>
+                  <a:lnTo>
+                    <a:pt x="2039990" y="117737"/>
+                  </a:lnTo>
+                  <a:lnTo>
+                    <a:pt x="1969645" y="114212"/>
+                  </a:lnTo>
+                  <a:lnTo>
+                    <a:pt x="1899301" y="110651"/>
+                  </a:lnTo>
+                  <a:lnTo>
+                    <a:pt x="1828956" y="107055"/>
+                  </a:lnTo>
+                  <a:lnTo>
+                    <a:pt x="1758612" y="103424"/>
+                  </a:lnTo>
+                  <a:lnTo>
+                    <a:pt x="1688267" y="99757"/>
+                  </a:lnTo>
+                  <a:lnTo>
+                    <a:pt x="1617923" y="96053"/>
+                  </a:lnTo>
+                  <a:lnTo>
+                    <a:pt x="1547578" y="92313"/>
+                  </a:lnTo>
+                  <a:lnTo>
+                    <a:pt x="1477234" y="88536"/>
+                  </a:lnTo>
+                  <a:lnTo>
+                    <a:pt x="1406889" y="84722"/>
+                  </a:lnTo>
+                  <a:lnTo>
+                    <a:pt x="1336545" y="80870"/>
+                  </a:lnTo>
+                  <a:lnTo>
+                    <a:pt x="1266200" y="76979"/>
+                  </a:lnTo>
+                  <a:lnTo>
+                    <a:pt x="1195856" y="73051"/>
+                  </a:lnTo>
+                  <a:lnTo>
+                    <a:pt x="1125511" y="69083"/>
+                  </a:lnTo>
+                  <a:lnTo>
+                    <a:pt x="1055167" y="65077"/>
+                  </a:lnTo>
+                  <a:lnTo>
+                    <a:pt x="984822" y="61031"/>
+                  </a:lnTo>
+                  <a:lnTo>
+                    <a:pt x="914478" y="56944"/>
+                  </a:lnTo>
+                  <a:lnTo>
+                    <a:pt x="844133" y="52818"/>
+                  </a:lnTo>
+                  <a:lnTo>
+                    <a:pt x="773789" y="48650"/>
+                  </a:lnTo>
+                  <a:lnTo>
+                    <a:pt x="703444" y="44442"/>
+                  </a:lnTo>
+                  <a:lnTo>
+                    <a:pt x="633100" y="40192"/>
+                  </a:lnTo>
+                  <a:lnTo>
+                    <a:pt x="562755" y="35900"/>
+                  </a:lnTo>
+                  <a:lnTo>
+                    <a:pt x="492411" y="31565"/>
+                  </a:lnTo>
+                  <a:lnTo>
+                    <a:pt x="422066" y="27188"/>
+                  </a:lnTo>
+                  <a:lnTo>
+                    <a:pt x="351722" y="22767"/>
+                  </a:lnTo>
+                  <a:lnTo>
+                    <a:pt x="281377" y="18303"/>
+                  </a:lnTo>
+                  <a:lnTo>
+                    <a:pt x="211033" y="13794"/>
+                  </a:lnTo>
+                  <a:lnTo>
+                    <a:pt x="140688" y="9241"/>
+                  </a:lnTo>
+                  <a:lnTo>
+                    <a:pt x="70344" y="4643"/>
+                  </a:lnTo>
+                  <a:lnTo>
+                    <a:pt x="0" y="0"/>
+                  </a:lnTo>
+                </a:path>
+              </a:pathLst>
+            </a:custGeom>
+          </p:spPr>
+          <p:txBody>
+            <a:bodyPr/>
+            <a:lstStyle/>
+            <a:p/>
+          </p:txBody>
+        </p:sp>
+        <p:sp>
+          <p:nvSpPr>
+            <p:cNvPr id="70" name="pl70"/>
+            <p:cNvSpPr/>
+            <p:nvPr/>
+          </p:nvSpPr>
+          <p:spPr>
+            <a:xfrm>
+              <a:off x="1907949" y="4336484"/>
+              <a:ext cx="6291466" cy="1216998"/>
+            </a:xfrm>
+            <a:custGeom>
+              <a:avLst/>
+              <a:pathLst>
+                <a:path w="6291466" h="1216998">
+                  <a:moveTo>
+                    <a:pt x="0" y="0"/>
+                  </a:moveTo>
+                  <a:lnTo>
+                    <a:pt x="30807" y="21240"/>
+                  </a:lnTo>
+                  <a:lnTo>
+                    <a:pt x="101151" y="67909"/>
+                  </a:lnTo>
+                  <a:lnTo>
+                    <a:pt x="171496" y="112815"/>
+                  </a:lnTo>
+                  <a:lnTo>
+                    <a:pt x="241840" y="156026"/>
+                  </a:lnTo>
+                  <a:lnTo>
+                    <a:pt x="312185" y="197606"/>
+                  </a:lnTo>
+                  <a:lnTo>
+                    <a:pt x="382529" y="237615"/>
+                  </a:lnTo>
+                  <a:lnTo>
+                    <a:pt x="452874" y="276114"/>
+                  </a:lnTo>
+                  <a:lnTo>
+                    <a:pt x="523218" y="313159"/>
+                  </a:lnTo>
+                  <a:lnTo>
+                    <a:pt x="593563" y="348805"/>
+                  </a:lnTo>
+                  <a:lnTo>
+                    <a:pt x="663907" y="383105"/>
+                  </a:lnTo>
+                  <a:lnTo>
+                    <a:pt x="734252" y="416110"/>
+                  </a:lnTo>
+                  <a:lnTo>
+                    <a:pt x="804596" y="447869"/>
+                  </a:lnTo>
+                  <a:lnTo>
+                    <a:pt x="874941" y="478429"/>
+                  </a:lnTo>
+                  <a:lnTo>
+                    <a:pt x="945285" y="507835"/>
+                  </a:lnTo>
+                  <a:lnTo>
+                    <a:pt x="1015630" y="536130"/>
+                  </a:lnTo>
+                  <a:lnTo>
+                    <a:pt x="1085974" y="563357"/>
+                  </a:lnTo>
+                  <a:lnTo>
+                    <a:pt x="1156319" y="589556"/>
+                  </a:lnTo>
+                  <a:lnTo>
+                    <a:pt x="1226663" y="614766"/>
+                  </a:lnTo>
+                  <a:lnTo>
+                    <a:pt x="1297008" y="639024"/>
+                  </a:lnTo>
+                  <a:lnTo>
+                    <a:pt x="1367352" y="662365"/>
+                  </a:lnTo>
+                  <a:lnTo>
+                    <a:pt x="1437697" y="684826"/>
+                  </a:lnTo>
+                  <a:lnTo>
+                    <a:pt x="1508041" y="706438"/>
+                  </a:lnTo>
+                  <a:lnTo>
+                    <a:pt x="1578385" y="727235"/>
+                  </a:lnTo>
+                  <a:lnTo>
+                    <a:pt x="1648730" y="747246"/>
+                  </a:lnTo>
+                  <a:lnTo>
+                    <a:pt x="1719074" y="766501"/>
+                  </a:lnTo>
+                  <a:lnTo>
+                    <a:pt x="1789419" y="785030"/>
+                  </a:lnTo>
+                  <a:lnTo>
+                    <a:pt x="1859763" y="802858"/>
+                  </a:lnTo>
+                  <a:lnTo>
+                    <a:pt x="1930108" y="820014"/>
+                  </a:lnTo>
+                  <a:lnTo>
+                    <a:pt x="2000452" y="836522"/>
+                  </a:lnTo>
+                  <a:lnTo>
+                    <a:pt x="2070797" y="852406"/>
+                  </a:lnTo>
+                  <a:lnTo>
+                    <a:pt x="2141141" y="867691"/>
+                  </a:lnTo>
+                  <a:lnTo>
+                    <a:pt x="2211486" y="882399"/>
+                  </a:lnTo>
+                  <a:lnTo>
+                    <a:pt x="2281830" y="896551"/>
+                  </a:lnTo>
+                  <a:lnTo>
+                    <a:pt x="2352175" y="910169"/>
+                  </a:lnTo>
+                  <a:lnTo>
+                    <a:pt x="2422519" y="923272"/>
+                  </a:lnTo>
+                  <a:lnTo>
+                    <a:pt x="2492864" y="935881"/>
+                  </a:lnTo>
+                  <a:lnTo>
+                    <a:pt x="2563208" y="948014"/>
+                  </a:lnTo>
+                  <a:lnTo>
+                    <a:pt x="2633553" y="959689"/>
+                  </a:lnTo>
+                  <a:lnTo>
+                    <a:pt x="2703897" y="970922"/>
+                  </a:lnTo>
+                  <a:lnTo>
+                    <a:pt x="2774242" y="981732"/>
+                  </a:lnTo>
+                  <a:lnTo>
+                    <a:pt x="2844586" y="992134"/>
+                  </a:lnTo>
+                  <a:lnTo>
+                    <a:pt x="2914931" y="1002142"/>
+                  </a:lnTo>
+                  <a:lnTo>
+                    <a:pt x="2985275" y="1011773"/>
+                  </a:lnTo>
+                  <a:lnTo>
+                    <a:pt x="3055620" y="1021040"/>
+                  </a:lnTo>
+                  <a:lnTo>
+                    <a:pt x="3125964" y="1029958"/>
+                  </a:lnTo>
+                  <a:lnTo>
+                    <a:pt x="3196309" y="1038538"/>
+                  </a:lnTo>
+                  <a:lnTo>
+                    <a:pt x="3266653" y="1046795"/>
+                  </a:lnTo>
+                  <a:lnTo>
+                    <a:pt x="3336998" y="1054739"/>
+                  </a:lnTo>
+                  <a:lnTo>
+                    <a:pt x="3407342" y="1062384"/>
+                  </a:lnTo>
+                  <a:lnTo>
+                    <a:pt x="3477687" y="1069740"/>
+                  </a:lnTo>
+                  <a:lnTo>
+                    <a:pt x="3548031" y="1076819"/>
+                  </a:lnTo>
+                  <a:lnTo>
+                    <a:pt x="3618376" y="1083630"/>
+                  </a:lnTo>
+                  <a:lnTo>
+                    <a:pt x="3688720" y="1090184"/>
+                  </a:lnTo>
+                  <a:lnTo>
+                    <a:pt x="3759065" y="1096490"/>
+                  </a:lnTo>
+                  <a:lnTo>
+                    <a:pt x="3829409" y="1102558"/>
+                  </a:lnTo>
+                  <a:lnTo>
+                    <a:pt x="3899754" y="1108398"/>
+                  </a:lnTo>
+                  <a:lnTo>
+                    <a:pt x="3970098" y="1114016"/>
+                  </a:lnTo>
+                  <a:lnTo>
+                    <a:pt x="4040443" y="1119423"/>
+                  </a:lnTo>
+                  <a:lnTo>
+                    <a:pt x="4110787" y="1124625"/>
+                  </a:lnTo>
+                  <a:lnTo>
+                    <a:pt x="4181132" y="1129631"/>
+                  </a:lnTo>
+                  <a:lnTo>
+                    <a:pt x="4251476" y="1134448"/>
+                  </a:lnTo>
+                  <a:lnTo>
+                    <a:pt x="4321821" y="1139083"/>
+                  </a:lnTo>
+                  <a:lnTo>
+                    <a:pt x="4392165" y="1143543"/>
+                  </a:lnTo>
+                  <a:lnTo>
+                    <a:pt x="4462510" y="1147835"/>
+                  </a:lnTo>
+                  <a:lnTo>
+                    <a:pt x="4532854" y="1151965"/>
+                  </a:lnTo>
+                  <a:lnTo>
+                    <a:pt x="4603199" y="1155938"/>
+                  </a:lnTo>
+                  <a:lnTo>
+                    <a:pt x="4673543" y="1159762"/>
+                  </a:lnTo>
+                  <a:lnTo>
+                    <a:pt x="4743888" y="1163441"/>
+                  </a:lnTo>
+                  <a:lnTo>
+                    <a:pt x="4814232" y="1166981"/>
+                  </a:lnTo>
+                  <a:lnTo>
+                    <a:pt x="4884577" y="1170388"/>
+                  </a:lnTo>
+                  <a:lnTo>
+                    <a:pt x="4954921" y="1173666"/>
+                  </a:lnTo>
+                  <a:lnTo>
+                    <a:pt x="5025266" y="1176820"/>
+                  </a:lnTo>
+                  <a:lnTo>
+                    <a:pt x="5095610" y="1179855"/>
+                  </a:lnTo>
+                  <a:lnTo>
+                    <a:pt x="5165955" y="1182776"/>
+                  </a:lnTo>
+                  <a:lnTo>
+                    <a:pt x="5236299" y="1185586"/>
+                  </a:lnTo>
+                  <a:lnTo>
+                    <a:pt x="5306643" y="1188290"/>
+                  </a:lnTo>
+                  <a:lnTo>
+                    <a:pt x="5376988" y="1190892"/>
+                  </a:lnTo>
+                  <a:lnTo>
+                    <a:pt x="5447332" y="1193396"/>
+                  </a:lnTo>
+                  <a:lnTo>
+                    <a:pt x="5517677" y="1195805"/>
+                  </a:lnTo>
+                  <a:lnTo>
+                    <a:pt x="5588021" y="1198124"/>
+                  </a:lnTo>
+                  <a:lnTo>
+                    <a:pt x="5658366" y="1200354"/>
+                  </a:lnTo>
+                  <a:lnTo>
+                    <a:pt x="5728710" y="1202501"/>
+                  </a:lnTo>
+                  <a:lnTo>
+                    <a:pt x="5799055" y="1204566"/>
+                  </a:lnTo>
+                  <a:lnTo>
+                    <a:pt x="5869399" y="1206554"/>
+                  </a:lnTo>
+                  <a:lnTo>
+                    <a:pt x="5939744" y="1208466"/>
+                  </a:lnTo>
+                  <a:lnTo>
+                    <a:pt x="6010088" y="1210306"/>
+                  </a:lnTo>
+                  <a:lnTo>
+                    <a:pt x="6080433" y="1212077"/>
+                  </a:lnTo>
+                  <a:lnTo>
+                    <a:pt x="6150777" y="1213781"/>
+                  </a:lnTo>
+                  <a:lnTo>
+                    <a:pt x="6221122" y="1215421"/>
+                  </a:lnTo>
+                  <a:lnTo>
+                    <a:pt x="6291466" y="1216998"/>
+                  </a:lnTo>
+                </a:path>
+              </a:pathLst>
+            </a:custGeom>
+            <a:ln w="27101" cap="flat">
+              <a:solidFill>
+                <a:srgbClr val="FF8C00">
+                  <a:alpha val="100000"/>
+                </a:srgbClr>
+              </a:solidFill>
+              <a:prstDash val="solid"/>
+              <a:round/>
+            </a:ln>
+          </p:spPr>
+          <p:txBody>
+            <a:bodyPr/>
+            <a:lstStyle/>
+            <a:p/>
+          </p:txBody>
+        </p:sp>
+        <p:sp>
+          <p:nvSpPr>
+            <p:cNvPr id="71" name="pl71"/>
+            <p:cNvSpPr/>
+            <p:nvPr/>
+          </p:nvSpPr>
+          <p:spPr>
+            <a:xfrm>
+              <a:off x="887106" y="5294352"/>
+              <a:ext cx="7660515" cy="0"/>
+            </a:xfrm>
+            <a:custGeom>
+              <a:avLst/>
+              <a:pathLst>
+                <a:path w="7660515" h="0">
+                  <a:moveTo>
+                    <a:pt x="0" y="0"/>
+                  </a:moveTo>
+                  <a:lnTo>
+                    <a:pt x="7660515" y="0"/>
+                  </a:lnTo>
+                  <a:lnTo>
+                    <a:pt x="7660515" y="0"/>
+                  </a:lnTo>
+                </a:path>
+              </a:pathLst>
+            </a:custGeom>
+            <a:ln w="13550" cap="flat">
+              <a:solidFill>
+                <a:srgbClr val="7F7F7F">
+                  <a:alpha val="100000"/>
+                </a:srgbClr>
+              </a:solidFill>
+              <a:prstDash val="dash"/>
+              <a:round/>
+            </a:ln>
+          </p:spPr>
+          <p:txBody>
+            <a:bodyPr/>
+            <a:lstStyle/>
+            <a:p/>
+          </p:txBody>
+        </p:sp>
+        <p:sp>
+          <p:nvSpPr>
+            <p:cNvPr id="72" name="pl72"/>
+            <p:cNvSpPr/>
+            <p:nvPr/>
+          </p:nvSpPr>
+          <p:spPr>
+            <a:xfrm>
+              <a:off x="4530353" y="4336484"/>
+              <a:ext cx="0" cy="1317069"/>
+            </a:xfrm>
+            <a:custGeom>
+              <a:avLst/>
+              <a:pathLst>
+                <a:path w="0" h="1317069">
+                  <a:moveTo>
+                    <a:pt x="0" y="1317069"/>
+                  </a:moveTo>
+                  <a:lnTo>
+                    <a:pt x="0" y="0"/>
+                  </a:lnTo>
+                  <a:lnTo>
+                    <a:pt x="0" y="0"/>
+                  </a:lnTo>
+                </a:path>
+              </a:pathLst>
+            </a:custGeom>
+            <a:ln w="13550" cap="flat">
+              <a:solidFill>
+                <a:srgbClr val="666666">
+                  <a:alpha val="100000"/>
+                </a:srgbClr>
+              </a:solidFill>
+              <a:prstDash val="dot"/>
+              <a:round/>
+            </a:ln>
+          </p:spPr>
+          <p:txBody>
+            <a:bodyPr/>
+            <a:lstStyle/>
+            <a:p/>
+          </p:txBody>
+        </p:sp>
+        <p:sp>
+          <p:nvSpPr>
+            <p:cNvPr id="73" name="tx73"/>
+            <p:cNvSpPr/>
+            <p:nvPr/>
+          </p:nvSpPr>
+          <p:spPr>
+            <a:xfrm>
+              <a:off x="762297" y="5553636"/>
+              <a:ext cx="62179" cy="80101"/>
+            </a:xfrm>
+            <a:prstGeom prst="rect">
+              <a:avLst/>
+            </a:prstGeom>
+            <a:noFill/>
+          </p:spPr>
+          <p:txBody>
+            <a:bodyPr lIns="0" rIns="0" tIns="0" bIns="0" anchorCtr="1" anchor="ctr" wrap="none"/>
+            <a:lstStyle/>
+            <a:p>
+              <a:pPr algn="l" marL="0" marR="0" indent="0">
+                <a:lnSpc>
+                  <a:spcPts val="880"/>
+                </a:lnSpc>
+                <a:spcBef>
+                  <a:spcPts val="0"/>
+                </a:spcBef>
+                <a:spcAft>
+                  <a:spcPts val="0"/>
+                </a:spcAft>
+              </a:pPr>
+              <a:r>
+                <a:rPr sz="880">
+                  <a:solidFill>
+                    <a:srgbClr val="4D4D4D">
+                      <a:alpha val="100000"/>
+                    </a:srgbClr>
+                  </a:solidFill>
+                  <a:latin typeface="Helvetica"/>
+                  <a:cs typeface="Helvetica"/>
+                </a:rPr>
+                <a:t>0</a:t>
+              </a:r>
+            </a:p>
+          </p:txBody>
+        </p:sp>
+        <p:sp>
+          <p:nvSpPr>
+            <p:cNvPr id="74" name="tx74"/>
+            <p:cNvSpPr/>
+            <p:nvPr/>
+          </p:nvSpPr>
+          <p:spPr>
+            <a:xfrm>
+              <a:off x="762297" y="5254302"/>
+              <a:ext cx="62179" cy="80101"/>
+            </a:xfrm>
+            <a:prstGeom prst="rect">
+              <a:avLst/>
+            </a:prstGeom>
+            <a:noFill/>
+          </p:spPr>
+          <p:txBody>
+            <a:bodyPr lIns="0" rIns="0" tIns="0" bIns="0" anchorCtr="1" anchor="ctr" wrap="none"/>
+            <a:lstStyle/>
+            <a:p>
+              <a:pPr algn="l" marL="0" marR="0" indent="0">
+                <a:lnSpc>
+                  <a:spcPts val="880"/>
+                </a:lnSpc>
+                <a:spcBef>
+                  <a:spcPts val="0"/>
+                </a:spcBef>
+                <a:spcAft>
+                  <a:spcPts val="0"/>
+                </a:spcAft>
+              </a:pPr>
+              <a:r>
+                <a:rPr sz="880">
+                  <a:solidFill>
+                    <a:srgbClr val="4D4D4D">
+                      <a:alpha val="100000"/>
+                    </a:srgbClr>
+                  </a:solidFill>
+                  <a:latin typeface="Helvetica"/>
+                  <a:cs typeface="Helvetica"/>
+                </a:rPr>
+                <a:t>1</a:t>
+              </a:r>
+            </a:p>
+          </p:txBody>
+        </p:sp>
+        <p:sp>
+          <p:nvSpPr>
+            <p:cNvPr id="75" name="tx75"/>
+            <p:cNvSpPr/>
+            <p:nvPr/>
+          </p:nvSpPr>
+          <p:spPr>
+            <a:xfrm>
+              <a:off x="762297" y="4954968"/>
+              <a:ext cx="62179" cy="80101"/>
+            </a:xfrm>
+            <a:prstGeom prst="rect">
+              <a:avLst/>
+            </a:prstGeom>
+            <a:noFill/>
+          </p:spPr>
+          <p:txBody>
+            <a:bodyPr lIns="0" rIns="0" tIns="0" bIns="0" anchorCtr="1" anchor="ctr" wrap="none"/>
+            <a:lstStyle/>
+            <a:p>
+              <a:pPr algn="l" marL="0" marR="0" indent="0">
+                <a:lnSpc>
+                  <a:spcPts val="880"/>
+                </a:lnSpc>
+                <a:spcBef>
+                  <a:spcPts val="0"/>
+                </a:spcBef>
+                <a:spcAft>
+                  <a:spcPts val="0"/>
+                </a:spcAft>
+              </a:pPr>
+              <a:r>
+                <a:rPr sz="880">
+                  <a:solidFill>
+                    <a:srgbClr val="4D4D4D">
+                      <a:alpha val="100000"/>
+                    </a:srgbClr>
+                  </a:solidFill>
+                  <a:latin typeface="Helvetica"/>
+                  <a:cs typeface="Helvetica"/>
+                </a:rPr>
+                <a:t>2</a:t>
+              </a:r>
+            </a:p>
+          </p:txBody>
+        </p:sp>
+        <p:sp>
+          <p:nvSpPr>
+            <p:cNvPr id="76" name="tx76"/>
+            <p:cNvSpPr/>
+            <p:nvPr/>
+          </p:nvSpPr>
+          <p:spPr>
+            <a:xfrm>
+              <a:off x="762297" y="4655634"/>
+              <a:ext cx="62179" cy="80101"/>
+            </a:xfrm>
+            <a:prstGeom prst="rect">
+              <a:avLst/>
+            </a:prstGeom>
+            <a:noFill/>
+          </p:spPr>
+          <p:txBody>
+            <a:bodyPr lIns="0" rIns="0" tIns="0" bIns="0" anchorCtr="1" anchor="ctr" wrap="none"/>
+            <a:lstStyle/>
+            <a:p>
+              <a:pPr algn="l" marL="0" marR="0" indent="0">
+                <a:lnSpc>
+                  <a:spcPts val="880"/>
+                </a:lnSpc>
+                <a:spcBef>
+                  <a:spcPts val="0"/>
+                </a:spcBef>
+                <a:spcAft>
+                  <a:spcPts val="0"/>
+                </a:spcAft>
+              </a:pPr>
+              <a:r>
+                <a:rPr sz="880">
+                  <a:solidFill>
+                    <a:srgbClr val="4D4D4D">
+                      <a:alpha val="100000"/>
+                    </a:srgbClr>
+                  </a:solidFill>
+                  <a:latin typeface="Helvetica"/>
+                  <a:cs typeface="Helvetica"/>
+                </a:rPr>
+                <a:t>3</a:t>
+              </a:r>
+            </a:p>
+          </p:txBody>
+        </p:sp>
+        <p:sp>
+          <p:nvSpPr>
+            <p:cNvPr id="77" name="tx77"/>
+            <p:cNvSpPr/>
+            <p:nvPr/>
+          </p:nvSpPr>
+          <p:spPr>
+            <a:xfrm>
+              <a:off x="762297" y="4356300"/>
+              <a:ext cx="62179" cy="80101"/>
+            </a:xfrm>
+            <a:prstGeom prst="rect">
+              <a:avLst/>
+            </a:prstGeom>
+            <a:noFill/>
+          </p:spPr>
+          <p:txBody>
+            <a:bodyPr lIns="0" rIns="0" tIns="0" bIns="0" anchorCtr="1" anchor="ctr" wrap="none"/>
+            <a:lstStyle/>
+            <a:p>
+              <a:pPr algn="l" marL="0" marR="0" indent="0">
+                <a:lnSpc>
+                  <a:spcPts val="880"/>
+                </a:lnSpc>
+                <a:spcBef>
+                  <a:spcPts val="0"/>
+                </a:spcBef>
+                <a:spcAft>
+                  <a:spcPts val="0"/>
+                </a:spcAft>
+              </a:pPr>
+              <a:r>
+                <a:rPr sz="880">
+                  <a:solidFill>
+                    <a:srgbClr val="4D4D4D">
+                      <a:alpha val="100000"/>
+                    </a:srgbClr>
+                  </a:solidFill>
+                  <a:latin typeface="Helvetica"/>
+                  <a:cs typeface="Helvetica"/>
+                </a:rPr>
+                <a:t>4</a:t>
+              </a:r>
+            </a:p>
+          </p:txBody>
+        </p:sp>
+        <p:sp>
+          <p:nvSpPr>
+            <p:cNvPr id="78" name="tx78"/>
+            <p:cNvSpPr/>
+            <p:nvPr/>
+          </p:nvSpPr>
+          <p:spPr>
+            <a:xfrm>
+              <a:off x="1241001" y="5716183"/>
+              <a:ext cx="161574" cy="80101"/>
+            </a:xfrm>
+            <a:prstGeom prst="rect">
+              <a:avLst/>
+            </a:prstGeom>
+            <a:noFill/>
+          </p:spPr>
+          <p:txBody>
+            <a:bodyPr lIns="0" rIns="0" tIns="0" bIns="0" anchorCtr="1" anchor="ctr" wrap="none"/>
+            <a:lstStyle/>
+            <a:p>
+              <a:pPr algn="l" marL="0" marR="0" indent="0">
+                <a:lnSpc>
+                  <a:spcPts val="880"/>
+                </a:lnSpc>
+                <a:spcBef>
+                  <a:spcPts val="0"/>
+                </a:spcBef>
+                <a:spcAft>
+                  <a:spcPts val="0"/>
+                </a:spcAft>
+              </a:pPr>
+              <a:r>
+                <a:rPr sz="880">
+                  <a:solidFill>
+                    <a:srgbClr val="4D4D4D">
+                      <a:alpha val="100000"/>
+                    </a:srgbClr>
+                  </a:solidFill>
+                  <a:latin typeface="Helvetica"/>
+                  <a:cs typeface="Helvetica"/>
+                </a:rPr>
+                <a:t>-40</a:t>
+              </a:r>
+            </a:p>
+          </p:txBody>
+        </p:sp>
+        <p:sp>
+          <p:nvSpPr>
+            <p:cNvPr id="79" name="tx79"/>
+            <p:cNvSpPr/>
+            <p:nvPr/>
+          </p:nvSpPr>
+          <p:spPr>
+            <a:xfrm>
+              <a:off x="2054602" y="5716183"/>
+              <a:ext cx="161574" cy="80101"/>
+            </a:xfrm>
+            <a:prstGeom prst="rect">
+              <a:avLst/>
+            </a:prstGeom>
+            <a:noFill/>
+          </p:spPr>
+          <p:txBody>
+            <a:bodyPr lIns="0" rIns="0" tIns="0" bIns="0" anchorCtr="1" anchor="ctr" wrap="none"/>
+            <a:lstStyle/>
+            <a:p>
+              <a:pPr algn="l" marL="0" marR="0" indent="0">
+                <a:lnSpc>
+                  <a:spcPts val="880"/>
+                </a:lnSpc>
+                <a:spcBef>
+                  <a:spcPts val="0"/>
+                </a:spcBef>
+                <a:spcAft>
+                  <a:spcPts val="0"/>
+                </a:spcAft>
+              </a:pPr>
+              <a:r>
+                <a:rPr sz="880">
+                  <a:solidFill>
+                    <a:srgbClr val="4D4D4D">
+                      <a:alpha val="100000"/>
+                    </a:srgbClr>
+                  </a:solidFill>
+                  <a:latin typeface="Helvetica"/>
+                  <a:cs typeface="Helvetica"/>
+                </a:rPr>
+                <a:t>-30</a:t>
+              </a:r>
+            </a:p>
+          </p:txBody>
+        </p:sp>
+        <p:sp>
+          <p:nvSpPr>
+            <p:cNvPr id="80" name="tx80"/>
+            <p:cNvSpPr/>
+            <p:nvPr/>
+          </p:nvSpPr>
+          <p:spPr>
+            <a:xfrm>
+              <a:off x="2868203" y="5716183"/>
+              <a:ext cx="161574" cy="80101"/>
+            </a:xfrm>
+            <a:prstGeom prst="rect">
+              <a:avLst/>
+            </a:prstGeom>
+            <a:noFill/>
+          </p:spPr>
+          <p:txBody>
+            <a:bodyPr lIns="0" rIns="0" tIns="0" bIns="0" anchorCtr="1" anchor="ctr" wrap="none"/>
+            <a:lstStyle/>
+            <a:p>
+              <a:pPr algn="l" marL="0" marR="0" indent="0">
+                <a:lnSpc>
+                  <a:spcPts val="880"/>
+                </a:lnSpc>
+                <a:spcBef>
+                  <a:spcPts val="0"/>
+                </a:spcBef>
+                <a:spcAft>
+                  <a:spcPts val="0"/>
+                </a:spcAft>
+              </a:pPr>
+              <a:r>
+                <a:rPr sz="880">
+                  <a:solidFill>
+                    <a:srgbClr val="4D4D4D">
+                      <a:alpha val="100000"/>
+                    </a:srgbClr>
+                  </a:solidFill>
+                  <a:latin typeface="Helvetica"/>
+                  <a:cs typeface="Helvetica"/>
+                </a:rPr>
+                <a:t>-20</a:t>
+              </a:r>
+            </a:p>
+          </p:txBody>
+        </p:sp>
+        <p:sp>
+          <p:nvSpPr>
+            <p:cNvPr id="81" name="tx81"/>
+            <p:cNvSpPr/>
+            <p:nvPr/>
+          </p:nvSpPr>
+          <p:spPr>
+            <a:xfrm>
+              <a:off x="3681805" y="5716183"/>
+              <a:ext cx="161574" cy="80101"/>
+            </a:xfrm>
+            <a:prstGeom prst="rect">
+              <a:avLst/>
+            </a:prstGeom>
+            <a:noFill/>
+          </p:spPr>
+          <p:txBody>
+            <a:bodyPr lIns="0" rIns="0" tIns="0" bIns="0" anchorCtr="1" anchor="ctr" wrap="none"/>
+            <a:lstStyle/>
+            <a:p>
+              <a:pPr algn="l" marL="0" marR="0" indent="0">
+                <a:lnSpc>
+                  <a:spcPts val="880"/>
+                </a:lnSpc>
+                <a:spcBef>
+                  <a:spcPts val="0"/>
+                </a:spcBef>
+                <a:spcAft>
+                  <a:spcPts val="0"/>
+                </a:spcAft>
+              </a:pPr>
+              <a:r>
+                <a:rPr sz="880">
+                  <a:solidFill>
+                    <a:srgbClr val="4D4D4D">
+                      <a:alpha val="100000"/>
+                    </a:srgbClr>
+                  </a:solidFill>
+                  <a:latin typeface="Helvetica"/>
+                  <a:cs typeface="Helvetica"/>
+                </a:rPr>
+                <a:t>-10</a:t>
+              </a:r>
+            </a:p>
+          </p:txBody>
+        </p:sp>
+        <p:sp>
+          <p:nvSpPr>
+            <p:cNvPr id="82" name="tx82"/>
+            <p:cNvSpPr/>
+            <p:nvPr/>
+          </p:nvSpPr>
+          <p:spPr>
+            <a:xfrm>
+              <a:off x="4545104" y="5716183"/>
+              <a:ext cx="62179" cy="80101"/>
+            </a:xfrm>
+            <a:prstGeom prst="rect">
+              <a:avLst/>
+            </a:prstGeom>
+            <a:noFill/>
+          </p:spPr>
+          <p:txBody>
+            <a:bodyPr lIns="0" rIns="0" tIns="0" bIns="0" anchorCtr="1" anchor="ctr" wrap="none"/>
+            <a:lstStyle/>
+            <a:p>
+              <a:pPr algn="l" marL="0" marR="0" indent="0">
+                <a:lnSpc>
+                  <a:spcPts val="880"/>
+                </a:lnSpc>
+                <a:spcBef>
+                  <a:spcPts val="0"/>
+                </a:spcBef>
+                <a:spcAft>
+                  <a:spcPts val="0"/>
+                </a:spcAft>
+              </a:pPr>
+              <a:r>
+                <a:rPr sz="880">
+                  <a:solidFill>
+                    <a:srgbClr val="4D4D4D">
+                      <a:alpha val="100000"/>
+                    </a:srgbClr>
+                  </a:solidFill>
+                  <a:latin typeface="Helvetica"/>
+                  <a:cs typeface="Helvetica"/>
+                </a:rPr>
+                <a:t>0</a:t>
+              </a:r>
+            </a:p>
+          </p:txBody>
+        </p:sp>
+        <p:sp>
+          <p:nvSpPr>
+            <p:cNvPr id="83" name="tx83"/>
+            <p:cNvSpPr/>
+            <p:nvPr/>
+          </p:nvSpPr>
+          <p:spPr>
+            <a:xfrm>
+              <a:off x="5327615" y="5716183"/>
+              <a:ext cx="124358" cy="80101"/>
+            </a:xfrm>
+            <a:prstGeom prst="rect">
+              <a:avLst/>
+            </a:prstGeom>
+            <a:noFill/>
+          </p:spPr>
+          <p:txBody>
+            <a:bodyPr lIns="0" rIns="0" tIns="0" bIns="0" anchorCtr="1" anchor="ctr" wrap="none"/>
+            <a:lstStyle/>
+            <a:p>
+              <a:pPr algn="l" marL="0" marR="0" indent="0">
+                <a:lnSpc>
+                  <a:spcPts val="880"/>
+                </a:lnSpc>
+                <a:spcBef>
+                  <a:spcPts val="0"/>
+                </a:spcBef>
+                <a:spcAft>
+                  <a:spcPts val="0"/>
+                </a:spcAft>
+              </a:pPr>
+              <a:r>
+                <a:rPr sz="880">
+                  <a:solidFill>
+                    <a:srgbClr val="4D4D4D">
+                      <a:alpha val="100000"/>
+                    </a:srgbClr>
+                  </a:solidFill>
+                  <a:latin typeface="Helvetica"/>
+                  <a:cs typeface="Helvetica"/>
+                </a:rPr>
+                <a:t>10</a:t>
+              </a:r>
+            </a:p>
+          </p:txBody>
+        </p:sp>
+        <p:sp>
+          <p:nvSpPr>
+            <p:cNvPr id="84" name="tx84"/>
+            <p:cNvSpPr/>
+            <p:nvPr/>
+          </p:nvSpPr>
+          <p:spPr>
+            <a:xfrm>
+              <a:off x="6141217" y="5716183"/>
+              <a:ext cx="124358" cy="80101"/>
+            </a:xfrm>
+            <a:prstGeom prst="rect">
+              <a:avLst/>
+            </a:prstGeom>
+            <a:noFill/>
+          </p:spPr>
+          <p:txBody>
+            <a:bodyPr lIns="0" rIns="0" tIns="0" bIns="0" anchorCtr="1" anchor="ctr" wrap="none"/>
+            <a:lstStyle/>
+            <a:p>
+              <a:pPr algn="l" marL="0" marR="0" indent="0">
+                <a:lnSpc>
+                  <a:spcPts val="880"/>
+                </a:lnSpc>
+                <a:spcBef>
+                  <a:spcPts val="0"/>
+                </a:spcBef>
+                <a:spcAft>
+                  <a:spcPts val="0"/>
+                </a:spcAft>
+              </a:pPr>
+              <a:r>
+                <a:rPr sz="880">
+                  <a:solidFill>
+                    <a:srgbClr val="4D4D4D">
+                      <a:alpha val="100000"/>
+                    </a:srgbClr>
+                  </a:solidFill>
+                  <a:latin typeface="Helvetica"/>
+                  <a:cs typeface="Helvetica"/>
+                </a:rPr>
+                <a:t>20</a:t>
+              </a:r>
+            </a:p>
+          </p:txBody>
+        </p:sp>
+        <p:sp>
+          <p:nvSpPr>
+            <p:cNvPr id="85" name="tx85"/>
+            <p:cNvSpPr/>
+            <p:nvPr/>
+          </p:nvSpPr>
+          <p:spPr>
+            <a:xfrm>
+              <a:off x="6954818" y="5716183"/>
+              <a:ext cx="124358" cy="80101"/>
+            </a:xfrm>
+            <a:prstGeom prst="rect">
+              <a:avLst/>
+            </a:prstGeom>
+            <a:noFill/>
+          </p:spPr>
+          <p:txBody>
+            <a:bodyPr lIns="0" rIns="0" tIns="0" bIns="0" anchorCtr="1" anchor="ctr" wrap="none"/>
+            <a:lstStyle/>
+            <a:p>
+              <a:pPr algn="l" marL="0" marR="0" indent="0">
+                <a:lnSpc>
+                  <a:spcPts val="880"/>
+                </a:lnSpc>
+                <a:spcBef>
+                  <a:spcPts val="0"/>
+                </a:spcBef>
+                <a:spcAft>
+                  <a:spcPts val="0"/>
+                </a:spcAft>
+              </a:pPr>
+              <a:r>
+                <a:rPr sz="880">
+                  <a:solidFill>
+                    <a:srgbClr val="4D4D4D">
+                      <a:alpha val="100000"/>
+                    </a:srgbClr>
+                  </a:solidFill>
+                  <a:latin typeface="Helvetica"/>
+                  <a:cs typeface="Helvetica"/>
+                </a:rPr>
+                <a:t>30</a:t>
+              </a:r>
+            </a:p>
+          </p:txBody>
+        </p:sp>
+        <p:sp>
+          <p:nvSpPr>
+            <p:cNvPr id="86" name="tx86"/>
+            <p:cNvSpPr/>
+            <p:nvPr/>
+          </p:nvSpPr>
+          <p:spPr>
+            <a:xfrm>
+              <a:off x="7768419" y="5716183"/>
+              <a:ext cx="124358" cy="80101"/>
+            </a:xfrm>
+            <a:prstGeom prst="rect">
+              <a:avLst/>
+            </a:prstGeom>
+            <a:noFill/>
+          </p:spPr>
+          <p:txBody>
+            <a:bodyPr lIns="0" rIns="0" tIns="0" bIns="0" anchorCtr="1" anchor="ctr" wrap="none"/>
+            <a:lstStyle/>
+            <a:p>
+              <a:pPr algn="l" marL="0" marR="0" indent="0">
+                <a:lnSpc>
+                  <a:spcPts val="880"/>
+                </a:lnSpc>
+                <a:spcBef>
+                  <a:spcPts val="0"/>
+                </a:spcBef>
+                <a:spcAft>
+                  <a:spcPts val="0"/>
+                </a:spcAft>
+              </a:pPr>
+              <a:r>
+                <a:rPr sz="880">
+                  <a:solidFill>
+                    <a:srgbClr val="4D4D4D">
+                      <a:alpha val="100000"/>
+                    </a:srgbClr>
+                  </a:solidFill>
+                  <a:latin typeface="Helvetica"/>
+                  <a:cs typeface="Helvetica"/>
+                </a:rPr>
+                <a:t>40</a:t>
+              </a:r>
+            </a:p>
+          </p:txBody>
+        </p:sp>
+        <p:sp>
+          <p:nvSpPr>
+            <p:cNvPr id="87" name="tx87"/>
+            <p:cNvSpPr/>
+            <p:nvPr/>
+          </p:nvSpPr>
+          <p:spPr>
+            <a:xfrm>
+              <a:off x="2928340" y="5855859"/>
+              <a:ext cx="3578047" cy="100218"/>
+            </a:xfrm>
+            <a:prstGeom prst="rect">
+              <a:avLst/>
+            </a:prstGeom>
+            <a:noFill/>
+          </p:spPr>
+          <p:txBody>
+            <a:bodyPr lIns="0" rIns="0" tIns="0" bIns="0" anchorCtr="1" anchor="ctr" wrap="none"/>
+            <a:lstStyle/>
+            <a:p>
+              <a:pPr algn="l" marL="0" marR="0" indent="0">
+                <a:lnSpc>
+                  <a:spcPts val="1100"/>
+                </a:lnSpc>
+                <a:spcBef>
+                  <a:spcPts val="0"/>
+                </a:spcBef>
+                <a:spcAft>
+                  <a:spcPts val="0"/>
+                </a:spcAft>
+              </a:pPr>
+              <a:r>
+                <a:rPr sz="1100">
+                  <a:solidFill>
+                    <a:srgbClr val="000000">
+                      <a:alpha val="100000"/>
+                    </a:srgbClr>
+                  </a:solidFill>
+                  <a:latin typeface="Helvetica"/>
+                  <a:cs typeface="Helvetica"/>
+                </a:rPr>
+                <a:t>eGFR difference (%): 100 × (CKD-EPI Cr-Cys − CG) / CG</a:t>
+              </a:r>
+            </a:p>
+          </p:txBody>
+        </p:sp>
+        <p:sp>
+          <p:nvSpPr>
+            <p:cNvPr id="88" name="tx88"/>
+            <p:cNvSpPr/>
+            <p:nvPr/>
+          </p:nvSpPr>
+          <p:spPr>
+            <a:xfrm rot="-5400000">
+              <a:off x="138035" y="4944909"/>
+              <a:ext cx="1016904" cy="100218"/>
+            </a:xfrm>
+            <a:prstGeom prst="rect">
+              <a:avLst/>
+            </a:prstGeom>
+            <a:noFill/>
+          </p:spPr>
+          <p:txBody>
+            <a:bodyPr lIns="0" rIns="0" tIns="0" bIns="0" anchorCtr="1" anchor="ctr" wrap="none"/>
+            <a:lstStyle/>
+            <a:p>
+              <a:pPr algn="l" marL="0" marR="0" indent="0">
+                <a:lnSpc>
+                  <a:spcPts val="1100"/>
+                </a:lnSpc>
+                <a:spcBef>
+                  <a:spcPts val="0"/>
+                </a:spcBef>
+                <a:spcAft>
+                  <a:spcPts val="0"/>
+                </a:spcAft>
+              </a:pPr>
+              <a:r>
+                <a:rPr sz="1100">
+                  <a:solidFill>
+                    <a:srgbClr val="000000">
+                      <a:alpha val="100000"/>
+                    </a:srgbClr>
+                  </a:solidFill>
+                  <a:latin typeface="Helvetica"/>
+                  <a:cs typeface="Helvetica"/>
+                </a:rPr>
+                <a:t>subHR (95% CI)</a:t>
+              </a:r>
+            </a:p>
+          </p:txBody>
+        </p:sp>
+        <p:sp>
+          <p:nvSpPr>
+            <p:cNvPr id="89" name="tx89"/>
+            <p:cNvSpPr/>
+            <p:nvPr/>
+          </p:nvSpPr>
+          <p:spPr>
+            <a:xfrm>
+              <a:off x="887106" y="4159544"/>
+              <a:ext cx="6385163" cy="82021"/>
+            </a:xfrm>
+            <a:prstGeom prst="rect">
+              <a:avLst/>
+            </a:prstGeom>
+            <a:noFill/>
+          </p:spPr>
+          <p:txBody>
+            <a:bodyPr lIns="0" rIns="0" tIns="0" bIns="0" anchorCtr="1" anchor="ctr" wrap="none"/>
+            <a:lstStyle/>
+            <a:p>
+              <a:pPr algn="l" marL="0" marR="0" indent="0">
+                <a:lnSpc>
+                  <a:spcPts val="900"/>
+                </a:lnSpc>
+                <a:spcBef>
+                  <a:spcPts val="0"/>
+                </a:spcBef>
+                <a:spcAft>
+                  <a:spcPts val="0"/>
+                </a:spcAft>
+              </a:pPr>
+              <a:r>
+                <a:rPr sz="900">
+                  <a:solidFill>
+                    <a:srgbClr val="404040">
+                      <a:alpha val="100000"/>
+                    </a:srgbClr>
+                  </a:solidFill>
+                  <a:latin typeface="Helvetica"/>
+                  <a:cs typeface="Helvetica"/>
+                </a:rPr>
+                <a:t>subHR per 10 % decline: 1.56 (1.12-2.17), p = 0.008  |  per IQR decline (Δ = 29.9 %): 3.79 (1.41-10.21)  |  IQR: [-15.0, 14.9] %</a:t>
+              </a:r>
+            </a:p>
+          </p:txBody>
+        </p:sp>
+        <p:sp>
+          <p:nvSpPr>
+            <p:cNvPr id="90" name="tx90"/>
+            <p:cNvSpPr/>
+            <p:nvPr/>
+          </p:nvSpPr>
+          <p:spPr>
+            <a:xfrm>
+              <a:off x="887106" y="3932770"/>
               <a:ext cx="2514051" cy="120152"/>
             </a:xfrm>
             <a:prstGeom prst="rect">
